--- a/docs/OCC-CDP-Gioi-thieu-day-du.pptx
+++ b/docs/OCC-CDP-Gioi-thieu-day-du.pptx
@@ -33,6 +33,12 @@
     <p:sldId id="281" r:id="rId32"/>
     <p:sldId id="282" r:id="rId33"/>
     <p:sldId id="283" r:id="rId34"/>
+    <p:sldId id="284" r:id="rId35"/>
+    <p:sldId id="285" r:id="rId36"/>
+    <p:sldId id="286" r:id="rId37"/>
+    <p:sldId id="287" r:id="rId38"/>
+    <p:sldId id="288" r:id="rId39"/>
+    <p:sldId id="289" r:id="rId40"/>
   </p:sldIdLst>
   <p:sldSz cx="12191695" cy="6858000" type="screen4x3"/>
   <p:notesSz cx="6858000" cy="9144000"/>
@@ -26050,7 +26056,7 @@
             <a:avLst/>
           </a:prstGeom>
           <a:solidFill>
-            <a:srgbClr val="FFFFFF"/>
+            <a:srgbClr val="F4F8FD"/>
           </a:solidFill>
           <a:ln>
             <a:noFill/>
@@ -26079,9 +26085,522 @@
           </a:p>
         </p:txBody>
       </p:sp>
+      <p:sp>
+        <p:nvSpPr>
+          <p:cNvPr id="3" name="Rectangle 2"/>
+          <p:cNvSpPr/>
+          <p:nvPr/>
+        </p:nvSpPr>
+        <p:spPr>
+          <a:xfrm>
+            <a:off x="0" y="0"/>
+            <a:ext cx="11148085908000" cy="6270955200000"/>
+          </a:xfrm>
+          <a:prstGeom prst="rect">
+            <a:avLst/>
+          </a:prstGeom>
+          <a:solidFill>
+            <a:srgbClr val="F4F8FD"/>
+          </a:solidFill>
+          <a:ln>
+            <a:noFill/>
+          </a:ln>
+          <a:effectLst/>
+        </p:spPr>
+        <p:style>
+          <a:lnRef idx="1">
+            <a:schemeClr val="accent1"/>
+          </a:lnRef>
+          <a:fillRef idx="3">
+            <a:schemeClr val="accent1"/>
+          </a:fillRef>
+          <a:effectRef idx="2">
+            <a:schemeClr val="accent1"/>
+          </a:effectRef>
+          <a:fontRef idx="minor">
+            <a:schemeClr val="lt1"/>
+          </a:fontRef>
+        </p:style>
+        <p:txBody>
+          <a:bodyPr rtlCol="0" anchor="ctr"/>
+          <a:lstStyle/>
+          <a:p>
+            <a:pPr algn="ctr"/>
+          </a:p>
+        </p:txBody>
+      </p:sp>
+      <p:sp>
+        <p:nvSpPr>
+          <p:cNvPr id="4" name="Rectangle 3"/>
+          <p:cNvSpPr/>
+          <p:nvPr/>
+        </p:nvSpPr>
+        <p:spPr>
+          <a:xfrm>
+            <a:off x="0" y="0"/>
+            <a:ext cx="219456" cy="6858000"/>
+          </a:xfrm>
+          <a:prstGeom prst="rect">
+            <a:avLst/>
+          </a:prstGeom>
+          <a:solidFill>
+            <a:srgbClr val="2563EB"/>
+          </a:solidFill>
+          <a:ln>
+            <a:noFill/>
+          </a:ln>
+          <a:effectLst/>
+        </p:spPr>
+        <p:style>
+          <a:lnRef idx="1">
+            <a:schemeClr val="accent1"/>
+          </a:lnRef>
+          <a:fillRef idx="3">
+            <a:schemeClr val="accent1"/>
+          </a:fillRef>
+          <a:effectRef idx="2">
+            <a:schemeClr val="accent1"/>
+          </a:effectRef>
+          <a:fontRef idx="minor">
+            <a:schemeClr val="lt1"/>
+          </a:fontRef>
+        </p:style>
+        <p:txBody>
+          <a:bodyPr rtlCol="0" anchor="ctr"/>
+          <a:lstStyle/>
+          <a:p>
+            <a:pPr algn="ctr"/>
+          </a:p>
+        </p:txBody>
+      </p:sp>
+      <p:sp>
+        <p:nvSpPr>
+          <p:cNvPr id="5" name="Rounded Rectangle 4"/>
+          <p:cNvSpPr/>
+          <p:nvPr/>
+        </p:nvSpPr>
+        <p:spPr>
+          <a:xfrm>
+            <a:off x="822960" y="2286000"/>
+            <a:ext cx="1828800" cy="1828800"/>
+          </a:xfrm>
+          <a:prstGeom prst="roundRect">
+            <a:avLst>
+              <a:gd name="adj" fmla="val 6000"/>
+            </a:avLst>
+          </a:prstGeom>
+          <a:solidFill>
+            <a:srgbClr val="EEF4FF"/>
+          </a:solidFill>
+          <a:ln>
+            <a:noFill/>
+          </a:ln>
+          <a:effectLst/>
+        </p:spPr>
+        <p:style>
+          <a:lnRef idx="1">
+            <a:schemeClr val="accent1"/>
+          </a:lnRef>
+          <a:fillRef idx="3">
+            <a:schemeClr val="accent1"/>
+          </a:fillRef>
+          <a:effectRef idx="2">
+            <a:schemeClr val="accent1"/>
+          </a:effectRef>
+          <a:fontRef idx="minor">
+            <a:schemeClr val="lt1"/>
+          </a:fontRef>
+        </p:style>
+        <p:txBody>
+          <a:bodyPr rtlCol="0" anchor="ctr"/>
+          <a:lstStyle/>
+          <a:p>
+            <a:pPr algn="ctr"/>
+          </a:p>
+        </p:txBody>
+      </p:sp>
+      <p:sp>
+        <p:nvSpPr>
+          <p:cNvPr id="6" name="TextBox 5"/>
+          <p:cNvSpPr txBox="1"/>
+          <p:nvPr/>
+        </p:nvSpPr>
+        <p:spPr>
+          <a:xfrm>
+            <a:off x="822960" y="2286000"/>
+            <a:ext cx="1828800" cy="1828800"/>
+          </a:xfrm>
+          <a:prstGeom prst="rect">
+            <a:avLst/>
+          </a:prstGeom>
+          <a:noFill/>
+        </p:spPr>
+        <p:txBody>
+          <a:bodyPr wrap="square" anchor="ctr" lIns="0" rIns="0" tIns="0" bIns="0">
+            <a:spAutoFit/>
+          </a:bodyPr>
+          <a:lstStyle/>
+          <a:p>
+            <a:pPr algn="ctr">
+              <a:lnSpc>
+                <a:spcPct val="100000"/>
+              </a:lnSpc>
+              <a:spcBef>
+                <a:spcPts val="0"/>
+              </a:spcBef>
+              <a:spcAft>
+                <a:spcPts val="500"/>
+              </a:spcAft>
+            </a:pPr>
+            <a:r>
+              <a:rPr sz="6600" b="1">
+                <a:solidFill>
+                  <a:srgbClr val="2563EB"/>
+                </a:solidFill>
+                <a:latin typeface="Segoe UI"/>
+              </a:rPr>
+              <a:t>★</a:t>
+            </a:r>
+          </a:p>
+        </p:txBody>
+      </p:sp>
+      <p:sp>
+        <p:nvSpPr>
+          <p:cNvPr id="7" name="TextBox 6"/>
+          <p:cNvSpPr txBox="1"/>
+          <p:nvPr/>
+        </p:nvSpPr>
+        <p:spPr>
+          <a:xfrm>
+            <a:off x="2926080" y="2514600"/>
+            <a:ext cx="8412480" cy="1097280"/>
+          </a:xfrm>
+          <a:prstGeom prst="rect">
+            <a:avLst/>
+          </a:prstGeom>
+          <a:noFill/>
+        </p:spPr>
+        <p:txBody>
+          <a:bodyPr wrap="square" anchor="t" lIns="0" rIns="0" tIns="0" bIns="0">
+            <a:spAutoFit/>
+          </a:bodyPr>
+          <a:lstStyle/>
+          <a:p>
+            <a:pPr algn="l">
+              <a:lnSpc>
+                <a:spcPct val="100000"/>
+              </a:lnSpc>
+              <a:spcBef>
+                <a:spcPts val="0"/>
+              </a:spcBef>
+              <a:spcAft>
+                <a:spcPts val="500"/>
+              </a:spcAft>
+            </a:pPr>
+            <a:r>
+              <a:rPr sz="3400" b="1">
+                <a:solidFill>
+                  <a:srgbClr val="0F172A"/>
+                </a:solidFill>
+                <a:latin typeface="Segoe UI"/>
+              </a:rPr>
+              <a:t>Ảnh màn hình thực tế</a:t>
+            </a:r>
+          </a:p>
+        </p:txBody>
+      </p:sp>
+      <p:sp>
+        <p:nvSpPr>
+          <p:cNvPr id="8" name="TextBox 7"/>
+          <p:cNvSpPr txBox="1"/>
+          <p:nvPr/>
+        </p:nvSpPr>
+        <p:spPr>
+          <a:xfrm>
+            <a:off x="2926080" y="3611880"/>
+            <a:ext cx="8229600" cy="731520"/>
+          </a:xfrm>
+          <a:prstGeom prst="rect">
+            <a:avLst/>
+          </a:prstGeom>
+          <a:noFill/>
+        </p:spPr>
+        <p:txBody>
+          <a:bodyPr wrap="square" anchor="t" lIns="0" rIns="0" tIns="0" bIns="0">
+            <a:spAutoFit/>
+          </a:bodyPr>
+          <a:lstStyle/>
+          <a:p>
+            <a:pPr algn="l">
+              <a:lnSpc>
+                <a:spcPct val="120000"/>
+              </a:lnSpc>
+              <a:spcBef>
+                <a:spcPts val="0"/>
+              </a:spcBef>
+              <a:spcAft>
+                <a:spcPts val="500"/>
+              </a:spcAft>
+            </a:pPr>
+            <a:r>
+              <a:rPr sz="1500" b="0">
+                <a:solidFill>
+                  <a:srgbClr val="475569"/>
+                </a:solidFill>
+                <a:latin typeface="Segoe UI"/>
+              </a:rPr>
+              <a:t>Giao diện thật của admin-console (dữ liệu demo) — để đánh giá trực quan.</a:t>
+            </a:r>
+          </a:p>
+        </p:txBody>
+      </p:sp>
+    </p:spTree>
+  </p:cSld>
+  <p:clrMapOvr>
+    <a:masterClrMapping/>
+  </p:clrMapOvr>
+</p:sld>
+</file>
+
+<file path=ppt/slides/slide29.xml><?xml version="1.0" encoding="utf-8"?>
+<p:sld xmlns:a="http://schemas.openxmlformats.org/drawingml/2006/main" xmlns:p="http://schemas.openxmlformats.org/presentationml/2006/main" xmlns:r="http://schemas.openxmlformats.org/officeDocument/2006/relationships">
+  <p:cSld>
+    <p:spTree>
+      <p:nvGrpSpPr>
+        <p:cNvPr id="1" name=""/>
+        <p:cNvGrpSpPr/>
+        <p:nvPr/>
+      </p:nvGrpSpPr>
+      <p:grpSpPr/>
+      <p:sp>
+        <p:nvSpPr>
+          <p:cNvPr id="2" name="Rectangle 1"/>
+          <p:cNvSpPr/>
+          <p:nvPr/>
+        </p:nvSpPr>
+        <p:spPr>
+          <a:xfrm>
+            <a:off x="0" y="0"/>
+            <a:ext cx="12191695" cy="6858000"/>
+          </a:xfrm>
+          <a:prstGeom prst="rect">
+            <a:avLst/>
+          </a:prstGeom>
+          <a:solidFill>
+            <a:srgbClr val="F4F8FD"/>
+          </a:solidFill>
+          <a:ln>
+            <a:noFill/>
+          </a:ln>
+          <a:effectLst/>
+        </p:spPr>
+        <p:style>
+          <a:lnRef idx="1">
+            <a:schemeClr val="accent1"/>
+          </a:lnRef>
+          <a:fillRef idx="3">
+            <a:schemeClr val="accent1"/>
+          </a:fillRef>
+          <a:effectRef idx="2">
+            <a:schemeClr val="accent1"/>
+          </a:effectRef>
+          <a:fontRef idx="minor">
+            <a:schemeClr val="lt1"/>
+          </a:fontRef>
+        </p:style>
+        <p:txBody>
+          <a:bodyPr rtlCol="0" anchor="ctr"/>
+          <a:lstStyle/>
+          <a:p>
+            <a:pPr algn="ctr"/>
+          </a:p>
+        </p:txBody>
+      </p:sp>
+      <p:sp>
+        <p:nvSpPr>
+          <p:cNvPr id="3" name="Rectangle 2"/>
+          <p:cNvSpPr/>
+          <p:nvPr/>
+        </p:nvSpPr>
+        <p:spPr>
+          <a:xfrm>
+            <a:off x="822960" y="557784"/>
+            <a:ext cx="237744" cy="237744"/>
+          </a:xfrm>
+          <a:prstGeom prst="rect">
+            <a:avLst/>
+          </a:prstGeom>
+          <a:solidFill>
+            <a:srgbClr val="2563EB"/>
+          </a:solidFill>
+          <a:ln>
+            <a:noFill/>
+          </a:ln>
+          <a:effectLst/>
+        </p:spPr>
+        <p:style>
+          <a:lnRef idx="1">
+            <a:schemeClr val="accent1"/>
+          </a:lnRef>
+          <a:fillRef idx="3">
+            <a:schemeClr val="accent1"/>
+          </a:fillRef>
+          <a:effectRef idx="2">
+            <a:schemeClr val="accent1"/>
+          </a:effectRef>
+          <a:fontRef idx="minor">
+            <a:schemeClr val="lt1"/>
+          </a:fontRef>
+        </p:style>
+        <p:txBody>
+          <a:bodyPr rtlCol="0" anchor="ctr"/>
+          <a:lstStyle/>
+          <a:p>
+            <a:pPr algn="ctr"/>
+          </a:p>
+        </p:txBody>
+      </p:sp>
+      <p:sp>
+        <p:nvSpPr>
+          <p:cNvPr id="4" name="TextBox 3"/>
+          <p:cNvSpPr txBox="1"/>
+          <p:nvPr/>
+        </p:nvSpPr>
+        <p:spPr>
+          <a:xfrm>
+            <a:off x="1188720" y="530352"/>
+            <a:ext cx="9144000" cy="365760"/>
+          </a:xfrm>
+          <a:prstGeom prst="rect">
+            <a:avLst/>
+          </a:prstGeom>
+          <a:noFill/>
+        </p:spPr>
+        <p:txBody>
+          <a:bodyPr wrap="square" anchor="t" lIns="0" rIns="0" tIns="0" bIns="0">
+            <a:spAutoFit/>
+          </a:bodyPr>
+          <a:lstStyle/>
+          <a:p>
+            <a:pPr algn="l">
+              <a:lnSpc>
+                <a:spcPct val="100000"/>
+              </a:lnSpc>
+              <a:spcBef>
+                <a:spcPts val="0"/>
+              </a:spcBef>
+              <a:spcAft>
+                <a:spcPts val="500"/>
+              </a:spcAft>
+            </a:pPr>
+            <a:r>
+              <a:rPr sz="1150" b="1">
+                <a:solidFill>
+                  <a:srgbClr val="2563EB"/>
+                </a:solidFill>
+                <a:latin typeface="Segoe UI"/>
+              </a:rPr>
+              <a:t>ẢNH THẬT</a:t>
+            </a:r>
+          </a:p>
+        </p:txBody>
+      </p:sp>
+      <p:sp>
+        <p:nvSpPr>
+          <p:cNvPr id="5" name="TextBox 4"/>
+          <p:cNvSpPr txBox="1"/>
+          <p:nvPr/>
+        </p:nvSpPr>
+        <p:spPr>
+          <a:xfrm>
+            <a:off x="822960" y="841248"/>
+            <a:ext cx="10607040" cy="822960"/>
+          </a:xfrm>
+          <a:prstGeom prst="rect">
+            <a:avLst/>
+          </a:prstGeom>
+          <a:noFill/>
+        </p:spPr>
+        <p:txBody>
+          <a:bodyPr wrap="square" anchor="t" lIns="0" rIns="0" tIns="0" bIns="0">
+            <a:spAutoFit/>
+          </a:bodyPr>
+          <a:lstStyle/>
+          <a:p>
+            <a:pPr algn="l">
+              <a:lnSpc>
+                <a:spcPct val="100000"/>
+              </a:lnSpc>
+              <a:spcBef>
+                <a:spcPts val="0"/>
+              </a:spcBef>
+              <a:spcAft>
+                <a:spcPts val="500"/>
+              </a:spcAft>
+            </a:pPr>
+            <a:r>
+              <a:rPr sz="2700" b="1">
+                <a:solidFill>
+                  <a:srgbClr val="0F172A"/>
+                </a:solidFill>
+                <a:latin typeface="Segoe UI"/>
+              </a:rPr>
+              <a:t>Control Tower — KPI realtime</a:t>
+            </a:r>
+          </a:p>
+        </p:txBody>
+      </p:sp>
+      <p:sp>
+        <p:nvSpPr>
+          <p:cNvPr id="6" name="Rounded Rectangle 5"/>
+          <p:cNvSpPr/>
+          <p:nvPr/>
+        </p:nvSpPr>
+        <p:spPr>
+          <a:xfrm>
+            <a:off x="2835440" y="1527048"/>
+            <a:ext cx="6520815" cy="4663440"/>
+          </a:xfrm>
+          <a:prstGeom prst="roundRect">
+            <a:avLst>
+              <a:gd name="adj" fmla="val 6000"/>
+            </a:avLst>
+          </a:prstGeom>
+          <a:solidFill>
+            <a:srgbClr val="FFFFFF"/>
+          </a:solidFill>
+          <a:ln w="12700">
+            <a:solidFill>
+              <a:srgbClr val="E2E8F0"/>
+            </a:solidFill>
+          </a:ln>
+          <a:effectLst/>
+        </p:spPr>
+        <p:style>
+          <a:lnRef idx="1">
+            <a:schemeClr val="accent1"/>
+          </a:lnRef>
+          <a:fillRef idx="3">
+            <a:schemeClr val="accent1"/>
+          </a:fillRef>
+          <a:effectRef idx="2">
+            <a:schemeClr val="accent1"/>
+          </a:effectRef>
+          <a:fontRef idx="minor">
+            <a:schemeClr val="lt1"/>
+          </a:fontRef>
+        </p:style>
+        <p:txBody>
+          <a:bodyPr rtlCol="0" anchor="ctr"/>
+          <a:lstStyle/>
+          <a:p>
+            <a:pPr algn="ctr"/>
+          </a:p>
+        </p:txBody>
+      </p:sp>
       <p:pic>
         <p:nvPicPr>
-          <p:cNvPr id="3" name="Picture 2" descr="hero.png"/>
+          <p:cNvPr id="7" name="Picture 6" descr="control-tower.png"/>
           <p:cNvPicPr>
             <a:picLocks noChangeAspect="1"/>
           </p:cNvPicPr>
@@ -26095,8 +26614,8 @@
         </p:blipFill>
         <p:spPr>
           <a:xfrm>
-            <a:off x="0" y="0"/>
-            <a:ext cx="12191695" cy="4220202"/>
+            <a:off x="2881160" y="1572768"/>
+            <a:ext cx="6429375" cy="4572000"/>
           </a:xfrm>
           <a:prstGeom prst="rect">
             <a:avLst/>
@@ -26105,58 +26624,14 @@
       </p:pic>
       <p:sp>
         <p:nvSpPr>
-          <p:cNvPr id="4" name="Rectangle 3"/>
-          <p:cNvSpPr/>
-          <p:nvPr/>
-        </p:nvSpPr>
-        <p:spPr>
-          <a:xfrm>
-            <a:off x="0" y="4211058"/>
-            <a:ext cx="12191695" cy="2646941"/>
-          </a:xfrm>
-          <a:prstGeom prst="rect">
-            <a:avLst/>
-          </a:prstGeom>
-          <a:solidFill>
-            <a:srgbClr val="FFFFFF"/>
-          </a:solidFill>
-          <a:ln>
-            <a:noFill/>
-          </a:ln>
-          <a:effectLst/>
-        </p:spPr>
-        <p:style>
-          <a:lnRef idx="1">
-            <a:schemeClr val="accent1"/>
-          </a:lnRef>
-          <a:fillRef idx="3">
-            <a:schemeClr val="accent1"/>
-          </a:fillRef>
-          <a:effectRef idx="2">
-            <a:schemeClr val="accent1"/>
-          </a:effectRef>
-          <a:fontRef idx="minor">
-            <a:schemeClr val="lt1"/>
-          </a:fontRef>
-        </p:style>
-        <p:txBody>
-          <a:bodyPr rtlCol="0" anchor="ctr"/>
-          <a:lstStyle/>
-          <a:p>
-            <a:pPr algn="ctr"/>
-          </a:p>
-        </p:txBody>
-      </p:sp>
-      <p:sp>
-        <p:nvSpPr>
-          <p:cNvPr id="5" name="TextBox 4"/>
-          <p:cNvSpPr txBox="1"/>
-          <p:nvPr/>
-        </p:nvSpPr>
-        <p:spPr>
-          <a:xfrm>
-            <a:off x="822960" y="868680"/>
-            <a:ext cx="10058400" cy="457200"/>
+          <p:cNvPr id="8" name="TextBox 7"/>
+          <p:cNvSpPr txBox="1"/>
+          <p:nvPr/>
+        </p:nvSpPr>
+        <p:spPr>
+          <a:xfrm>
+            <a:off x="822960" y="6272783"/>
+            <a:ext cx="10607040" cy="320040"/>
           </a:xfrm>
           <a:prstGeom prst="rect">
             <a:avLst/>
@@ -26169,7 +26644,7 @@
           </a:bodyPr>
           <a:lstStyle/>
           <a:p>
-            <a:pPr algn="l">
+            <a:pPr algn="ctr">
               <a:lnSpc>
                 <a:spcPct val="100000"/>
               </a:lnSpc>
@@ -26181,27 +26656,27 @@
               </a:spcAft>
             </a:pPr>
             <a:r>
-              <a:rPr sz="1500" b="1">
-                <a:solidFill>
-                  <a:srgbClr val="FFFFFF"/>
-                </a:solidFill>
-                <a:latin typeface="Segoe UI"/>
-              </a:rPr>
-              <a:t>OCC-CDP</a:t>
-            </a:r>
-          </a:p>
-        </p:txBody>
-      </p:sp>
-      <p:sp>
-        <p:nvSpPr>
-          <p:cNvPr id="6" name="TextBox 5"/>
-          <p:cNvSpPr txBox="1"/>
-          <p:nvPr/>
-        </p:nvSpPr>
-        <p:spPr>
-          <a:xfrm>
-            <a:off x="822960" y="1554480"/>
-            <a:ext cx="10607040" cy="1463040"/>
+              <a:rPr sz="1100" b="0">
+                <a:solidFill>
+                  <a:srgbClr val="475569"/>
+                </a:solidFill>
+                <a:latin typeface="Segoe UI"/>
+              </a:rPr>
+              <a:t>KPI tổng hợp 5 thương hiệu, làm mới định kỳ.</a:t>
+            </a:r>
+          </a:p>
+        </p:txBody>
+      </p:sp>
+      <p:sp>
+        <p:nvSpPr>
+          <p:cNvPr id="9" name="TextBox 8"/>
+          <p:cNvSpPr txBox="1"/>
+          <p:nvPr/>
+        </p:nvSpPr>
+        <p:spPr>
+          <a:xfrm>
+            <a:off x="822960" y="6455664"/>
+            <a:ext cx="7315200" cy="274320"/>
           </a:xfrm>
           <a:prstGeom prst="rect">
             <a:avLst/>
@@ -26216,7 +26691,7 @@
           <a:p>
             <a:pPr algn="l">
               <a:lnSpc>
-                <a:spcPct val="105000"/>
+                <a:spcPct val="100000"/>
               </a:lnSpc>
               <a:spcBef>
                 <a:spcPts val="0"/>
@@ -26226,19 +26701,42 @@
               </a:spcAft>
             </a:pPr>
             <a:r>
-              <a:rPr sz="3400" b="1">
-                <a:solidFill>
-                  <a:srgbClr val="FFFFFF"/>
-                </a:solidFill>
-                <a:latin typeface="Segoe UI"/>
-              </a:rPr>
-              <a:t>Một nền dữ liệu.</a:t>
-            </a:r>
-          </a:p>
-          <a:p>
-            <a:pPr algn="l">
-              <a:lnSpc>
-                <a:spcPct val="105000"/>
+              <a:rPr sz="900" b="0">
+                <a:solidFill>
+                  <a:srgbClr val="94A3B8"/>
+                </a:solidFill>
+                <a:latin typeface="Segoe UI"/>
+              </a:rPr>
+              <a:t>OCC-CDP · Tài liệu giới thiệu đầy đủ</a:t>
+            </a:r>
+          </a:p>
+        </p:txBody>
+      </p:sp>
+      <p:sp>
+        <p:nvSpPr>
+          <p:cNvPr id="10" name="TextBox 9"/>
+          <p:cNvSpPr txBox="1"/>
+          <p:nvPr/>
+        </p:nvSpPr>
+        <p:spPr>
+          <a:xfrm>
+            <a:off x="10515600" y="6455664"/>
+            <a:ext cx="822960" cy="274320"/>
+          </a:xfrm>
+          <a:prstGeom prst="rect">
+            <a:avLst/>
+          </a:prstGeom>
+          <a:noFill/>
+        </p:spPr>
+        <p:txBody>
+          <a:bodyPr wrap="square" anchor="t" lIns="0" rIns="0" tIns="0" bIns="0">
+            <a:spAutoFit/>
+          </a:bodyPr>
+          <a:lstStyle/>
+          <a:p>
+            <a:pPr algn="r">
+              <a:lnSpc>
+                <a:spcPct val="100000"/>
               </a:lnSpc>
               <a:spcBef>
                 <a:spcPts val="0"/>
@@ -26248,352 +26746,13 @@
               </a:spcAft>
             </a:pPr>
             <a:r>
-              <a:rPr sz="3400" b="1">
-                <a:solidFill>
-                  <a:srgbClr val="DCEBFF"/>
-                </a:solidFill>
-                <a:latin typeface="Segoe UI"/>
-              </a:rPr>
-              <a:t>Toàn bộ giá trị khách hàng.</a:t>
-            </a:r>
-          </a:p>
-        </p:txBody>
-      </p:sp>
-      <p:sp>
-        <p:nvSpPr>
-          <p:cNvPr id="7" name="Rectangle 6"/>
-          <p:cNvSpPr/>
-          <p:nvPr/>
-        </p:nvSpPr>
-        <p:spPr>
-          <a:xfrm>
-            <a:off x="822960" y="4549386"/>
-            <a:ext cx="137160" cy="137160"/>
-          </a:xfrm>
-          <a:prstGeom prst="rect">
-            <a:avLst/>
-          </a:prstGeom>
-          <a:solidFill>
-            <a:srgbClr val="2563EB"/>
-          </a:solidFill>
-          <a:ln>
-            <a:noFill/>
-          </a:ln>
-          <a:effectLst/>
-        </p:spPr>
-        <p:style>
-          <a:lnRef idx="1">
-            <a:schemeClr val="accent1"/>
-          </a:lnRef>
-          <a:fillRef idx="3">
-            <a:schemeClr val="accent1"/>
-          </a:fillRef>
-          <a:effectRef idx="2">
-            <a:schemeClr val="accent1"/>
-          </a:effectRef>
-          <a:fontRef idx="minor">
-            <a:schemeClr val="lt1"/>
-          </a:fontRef>
-        </p:style>
-        <p:txBody>
-          <a:bodyPr rtlCol="0" anchor="ctr"/>
-          <a:lstStyle/>
-          <a:p>
-            <a:pPr algn="ctr"/>
-          </a:p>
-        </p:txBody>
-      </p:sp>
-      <p:sp>
-        <p:nvSpPr>
-          <p:cNvPr id="8" name="TextBox 7"/>
-          <p:cNvSpPr txBox="1"/>
-          <p:nvPr/>
-        </p:nvSpPr>
-        <p:spPr>
-          <a:xfrm>
-            <a:off x="1097280" y="4494522"/>
-            <a:ext cx="10332720" cy="457200"/>
-          </a:xfrm>
-          <a:prstGeom prst="rect">
-            <a:avLst/>
-          </a:prstGeom>
-          <a:noFill/>
-        </p:spPr>
-        <p:txBody>
-          <a:bodyPr wrap="square" anchor="t" lIns="0" rIns="0" tIns="0" bIns="0">
-            <a:spAutoFit/>
-          </a:bodyPr>
-          <a:lstStyle/>
-          <a:p>
-            <a:pPr algn="l">
-              <a:lnSpc>
-                <a:spcPct val="100000"/>
-              </a:lnSpc>
-              <a:spcBef>
-                <a:spcPts val="0"/>
-              </a:spcBef>
-              <a:spcAft>
-                <a:spcPts val="500"/>
-              </a:spcAft>
-            </a:pPr>
-            <a:r>
-              <a:rPr sz="1400" b="1">
-                <a:solidFill>
-                  <a:srgbClr val="0F172A"/>
-                </a:solidFill>
-                <a:latin typeface="Segoe UI"/>
-              </a:rPr>
-              <a:t>Nền tảng self-host, audit-grade  </a:t>
-            </a:r>
-            <a:r>
-              <a:rPr sz="1250" b="0">
-                <a:solidFill>
-                  <a:srgbClr val="475569"/>
-                </a:solidFill>
-                <a:latin typeface="Segoe UI"/>
-              </a:rPr>
-              <a:t>hợp nhất danh tính · loyalty · consent trong 1 transaction ACID.</a:t>
-            </a:r>
-          </a:p>
-        </p:txBody>
-      </p:sp>
-      <p:sp>
-        <p:nvSpPr>
-          <p:cNvPr id="9" name="Rectangle 8"/>
-          <p:cNvSpPr/>
-          <p:nvPr/>
-        </p:nvSpPr>
-        <p:spPr>
-          <a:xfrm>
-            <a:off x="822960" y="5116314"/>
-            <a:ext cx="137160" cy="137160"/>
-          </a:xfrm>
-          <a:prstGeom prst="rect">
-            <a:avLst/>
-          </a:prstGeom>
-          <a:solidFill>
-            <a:srgbClr val="2563EB"/>
-          </a:solidFill>
-          <a:ln>
-            <a:noFill/>
-          </a:ln>
-          <a:effectLst/>
-        </p:spPr>
-        <p:style>
-          <a:lnRef idx="1">
-            <a:schemeClr val="accent1"/>
-          </a:lnRef>
-          <a:fillRef idx="3">
-            <a:schemeClr val="accent1"/>
-          </a:fillRef>
-          <a:effectRef idx="2">
-            <a:schemeClr val="accent1"/>
-          </a:effectRef>
-          <a:fontRef idx="minor">
-            <a:schemeClr val="lt1"/>
-          </a:fontRef>
-        </p:style>
-        <p:txBody>
-          <a:bodyPr rtlCol="0" anchor="ctr"/>
-          <a:lstStyle/>
-          <a:p>
-            <a:pPr algn="ctr"/>
-          </a:p>
-        </p:txBody>
-      </p:sp>
-      <p:sp>
-        <p:nvSpPr>
-          <p:cNvPr id="10" name="TextBox 9"/>
-          <p:cNvSpPr txBox="1"/>
-          <p:nvPr/>
-        </p:nvSpPr>
-        <p:spPr>
-          <a:xfrm>
-            <a:off x="1097280" y="5061450"/>
-            <a:ext cx="10332720" cy="457200"/>
-          </a:xfrm>
-          <a:prstGeom prst="rect">
-            <a:avLst/>
-          </a:prstGeom>
-          <a:noFill/>
-        </p:spPr>
-        <p:txBody>
-          <a:bodyPr wrap="square" anchor="t" lIns="0" rIns="0" tIns="0" bIns="0">
-            <a:spAutoFit/>
-          </a:bodyPr>
-          <a:lstStyle/>
-          <a:p>
-            <a:pPr algn="l">
-              <a:lnSpc>
-                <a:spcPct val="100000"/>
-              </a:lnSpc>
-              <a:spcBef>
-                <a:spcPts val="0"/>
-              </a:spcBef>
-              <a:spcAft>
-                <a:spcPts val="500"/>
-              </a:spcAft>
-            </a:pPr>
-            <a:r>
-              <a:rPr sz="1400" b="1">
-                <a:solidFill>
-                  <a:srgbClr val="0F172A"/>
-                </a:solidFill>
-                <a:latin typeface="Segoe UI"/>
-              </a:rPr>
-              <a:t>AI biến dữ liệu thành quyết định  </a:t>
-            </a:r>
-            <a:r>
-              <a:rPr sz="1250" b="0">
-                <a:solidFill>
-                  <a:srgbClr val="475569"/>
-                </a:solidFill>
-                <a:latin typeface="Segoe UI"/>
-              </a:rPr>
-              <a:t>phân tích hành vi, dự đoán sản phẩm, forecast, decisioning, copilot.</a:t>
-            </a:r>
-          </a:p>
-        </p:txBody>
-      </p:sp>
-      <p:sp>
-        <p:nvSpPr>
-          <p:cNvPr id="11" name="Rectangle 10"/>
-          <p:cNvSpPr/>
-          <p:nvPr/>
-        </p:nvSpPr>
-        <p:spPr>
-          <a:xfrm>
-            <a:off x="822960" y="5683242"/>
-            <a:ext cx="137160" cy="137160"/>
-          </a:xfrm>
-          <a:prstGeom prst="rect">
-            <a:avLst/>
-          </a:prstGeom>
-          <a:solidFill>
-            <a:srgbClr val="2563EB"/>
-          </a:solidFill>
-          <a:ln>
-            <a:noFill/>
-          </a:ln>
-          <a:effectLst/>
-        </p:spPr>
-        <p:style>
-          <a:lnRef idx="1">
-            <a:schemeClr val="accent1"/>
-          </a:lnRef>
-          <a:fillRef idx="3">
-            <a:schemeClr val="accent1"/>
-          </a:fillRef>
-          <a:effectRef idx="2">
-            <a:schemeClr val="accent1"/>
-          </a:effectRef>
-          <a:fontRef idx="minor">
-            <a:schemeClr val="lt1"/>
-          </a:fontRef>
-        </p:style>
-        <p:txBody>
-          <a:bodyPr rtlCol="0" anchor="ctr"/>
-          <a:lstStyle/>
-          <a:p>
-            <a:pPr algn="ctr"/>
-          </a:p>
-        </p:txBody>
-      </p:sp>
-      <p:sp>
-        <p:nvSpPr>
-          <p:cNvPr id="12" name="TextBox 11"/>
-          <p:cNvSpPr txBox="1"/>
-          <p:nvPr/>
-        </p:nvSpPr>
-        <p:spPr>
-          <a:xfrm>
-            <a:off x="1097280" y="5628378"/>
-            <a:ext cx="10332720" cy="457200"/>
-          </a:xfrm>
-          <a:prstGeom prst="rect">
-            <a:avLst/>
-          </a:prstGeom>
-          <a:noFill/>
-        </p:spPr>
-        <p:txBody>
-          <a:bodyPr wrap="square" anchor="t" lIns="0" rIns="0" tIns="0" bIns="0">
-            <a:spAutoFit/>
-          </a:bodyPr>
-          <a:lstStyle/>
-          <a:p>
-            <a:pPr algn="l">
-              <a:lnSpc>
-                <a:spcPct val="100000"/>
-              </a:lnSpc>
-              <a:spcBef>
-                <a:spcPts val="0"/>
-              </a:spcBef>
-              <a:spcAft>
-                <a:spcPts val="500"/>
-              </a:spcAft>
-            </a:pPr>
-            <a:r>
-              <a:rPr sz="1400" b="1">
-                <a:solidFill>
-                  <a:srgbClr val="0F172A"/>
-                </a:solidFill>
-                <a:latin typeface="Segoe UI"/>
-              </a:rPr>
-              <a:t>Chất lượng chứng minh được  </a:t>
-            </a:r>
-            <a:r>
-              <a:rPr sz="1250" b="0">
-                <a:solidFill>
-                  <a:srgbClr val="475569"/>
-                </a:solidFill>
-                <a:latin typeface="Segoe UI"/>
-              </a:rPr>
-              <a:t>UAT 78/78, expert 33/33, mutation 5/5, TDD toàn diện.</a:t>
-            </a:r>
-          </a:p>
-        </p:txBody>
-      </p:sp>
-      <p:sp>
-        <p:nvSpPr>
-          <p:cNvPr id="13" name="TextBox 12"/>
-          <p:cNvSpPr txBox="1"/>
-          <p:nvPr/>
-        </p:nvSpPr>
-        <p:spPr>
-          <a:xfrm>
-            <a:off x="822960" y="6419088"/>
-            <a:ext cx="10515600" cy="365760"/>
-          </a:xfrm>
-          <a:prstGeom prst="rect">
-            <a:avLst/>
-          </a:prstGeom>
-          <a:noFill/>
-        </p:spPr>
-        <p:txBody>
-          <a:bodyPr wrap="square" anchor="t" lIns="0" rIns="0" tIns="0" bIns="0">
-            <a:spAutoFit/>
-          </a:bodyPr>
-          <a:lstStyle/>
-          <a:p>
-            <a:pPr algn="l">
-              <a:lnSpc>
-                <a:spcPct val="100000"/>
-              </a:lnSpc>
-              <a:spcBef>
-                <a:spcPts val="0"/>
-              </a:spcBef>
-              <a:spcAft>
-                <a:spcPts val="500"/>
-              </a:spcAft>
-            </a:pPr>
-            <a:r>
-              <a:rPr sz="1050" b="0">
+              <a:rPr sz="900" b="0">
                 <a:solidFill>
                   <a:srgbClr val="94A3B8"/>
                 </a:solidFill>
-                <a:latin typeface="Segoe UI"/>
-              </a:rPr>
-              <a:t>Tài liệu chi tiết (markdown): C:\AICDP\docs   ·   github.com/trungtm78/AICDP</a:t>
+                <a:latin typeface="Consolas"/>
+              </a:rPr>
+              <a:t>29</a:t>
             </a:r>
           </a:p>
         </p:txBody>
@@ -27715,6 +27874,2316 @@
                 <a:latin typeface="Consolas"/>
               </a:rPr>
               <a:t>03</a:t>
+            </a:r>
+          </a:p>
+        </p:txBody>
+      </p:sp>
+    </p:spTree>
+  </p:cSld>
+  <p:clrMapOvr>
+    <a:masterClrMapping/>
+  </p:clrMapOvr>
+</p:sld>
+</file>
+
+<file path=ppt/slides/slide30.xml><?xml version="1.0" encoding="utf-8"?>
+<p:sld xmlns:a="http://schemas.openxmlformats.org/drawingml/2006/main" xmlns:p="http://schemas.openxmlformats.org/presentationml/2006/main" xmlns:r="http://schemas.openxmlformats.org/officeDocument/2006/relationships">
+  <p:cSld>
+    <p:spTree>
+      <p:nvGrpSpPr>
+        <p:cNvPr id="1" name=""/>
+        <p:cNvGrpSpPr/>
+        <p:nvPr/>
+      </p:nvGrpSpPr>
+      <p:grpSpPr/>
+      <p:sp>
+        <p:nvSpPr>
+          <p:cNvPr id="2" name="Rectangle 1"/>
+          <p:cNvSpPr/>
+          <p:nvPr/>
+        </p:nvSpPr>
+        <p:spPr>
+          <a:xfrm>
+            <a:off x="0" y="0"/>
+            <a:ext cx="12191695" cy="6858000"/>
+          </a:xfrm>
+          <a:prstGeom prst="rect">
+            <a:avLst/>
+          </a:prstGeom>
+          <a:solidFill>
+            <a:srgbClr val="F4F8FD"/>
+          </a:solidFill>
+          <a:ln>
+            <a:noFill/>
+          </a:ln>
+          <a:effectLst/>
+        </p:spPr>
+        <p:style>
+          <a:lnRef idx="1">
+            <a:schemeClr val="accent1"/>
+          </a:lnRef>
+          <a:fillRef idx="3">
+            <a:schemeClr val="accent1"/>
+          </a:fillRef>
+          <a:effectRef idx="2">
+            <a:schemeClr val="accent1"/>
+          </a:effectRef>
+          <a:fontRef idx="minor">
+            <a:schemeClr val="lt1"/>
+          </a:fontRef>
+        </p:style>
+        <p:txBody>
+          <a:bodyPr rtlCol="0" anchor="ctr"/>
+          <a:lstStyle/>
+          <a:p>
+            <a:pPr algn="ctr"/>
+          </a:p>
+        </p:txBody>
+      </p:sp>
+      <p:sp>
+        <p:nvSpPr>
+          <p:cNvPr id="3" name="Rectangle 2"/>
+          <p:cNvSpPr/>
+          <p:nvPr/>
+        </p:nvSpPr>
+        <p:spPr>
+          <a:xfrm>
+            <a:off x="822960" y="557784"/>
+            <a:ext cx="237744" cy="237744"/>
+          </a:xfrm>
+          <a:prstGeom prst="rect">
+            <a:avLst/>
+          </a:prstGeom>
+          <a:solidFill>
+            <a:srgbClr val="2563EB"/>
+          </a:solidFill>
+          <a:ln>
+            <a:noFill/>
+          </a:ln>
+          <a:effectLst/>
+        </p:spPr>
+        <p:style>
+          <a:lnRef idx="1">
+            <a:schemeClr val="accent1"/>
+          </a:lnRef>
+          <a:fillRef idx="3">
+            <a:schemeClr val="accent1"/>
+          </a:fillRef>
+          <a:effectRef idx="2">
+            <a:schemeClr val="accent1"/>
+          </a:effectRef>
+          <a:fontRef idx="minor">
+            <a:schemeClr val="lt1"/>
+          </a:fontRef>
+        </p:style>
+        <p:txBody>
+          <a:bodyPr rtlCol="0" anchor="ctr"/>
+          <a:lstStyle/>
+          <a:p>
+            <a:pPr algn="ctr"/>
+          </a:p>
+        </p:txBody>
+      </p:sp>
+      <p:sp>
+        <p:nvSpPr>
+          <p:cNvPr id="4" name="TextBox 3"/>
+          <p:cNvSpPr txBox="1"/>
+          <p:nvPr/>
+        </p:nvSpPr>
+        <p:spPr>
+          <a:xfrm>
+            <a:off x="1188720" y="530352"/>
+            <a:ext cx="9144000" cy="365760"/>
+          </a:xfrm>
+          <a:prstGeom prst="rect">
+            <a:avLst/>
+          </a:prstGeom>
+          <a:noFill/>
+        </p:spPr>
+        <p:txBody>
+          <a:bodyPr wrap="square" anchor="t" lIns="0" rIns="0" tIns="0" bIns="0">
+            <a:spAutoFit/>
+          </a:bodyPr>
+          <a:lstStyle/>
+          <a:p>
+            <a:pPr algn="l">
+              <a:lnSpc>
+                <a:spcPct val="100000"/>
+              </a:lnSpc>
+              <a:spcBef>
+                <a:spcPts val="0"/>
+              </a:spcBef>
+              <a:spcAft>
+                <a:spcPts val="500"/>
+              </a:spcAft>
+            </a:pPr>
+            <a:r>
+              <a:rPr sz="1150" b="1">
+                <a:solidFill>
+                  <a:srgbClr val="2563EB"/>
+                </a:solidFill>
+                <a:latin typeface="Segoe UI"/>
+              </a:rPr>
+              <a:t>ẢNH THẬT</a:t>
+            </a:r>
+          </a:p>
+        </p:txBody>
+      </p:sp>
+      <p:sp>
+        <p:nvSpPr>
+          <p:cNvPr id="5" name="TextBox 4"/>
+          <p:cNvSpPr txBox="1"/>
+          <p:nvPr/>
+        </p:nvSpPr>
+        <p:spPr>
+          <a:xfrm>
+            <a:off x="822960" y="841248"/>
+            <a:ext cx="10607040" cy="822960"/>
+          </a:xfrm>
+          <a:prstGeom prst="rect">
+            <a:avLst/>
+          </a:prstGeom>
+          <a:noFill/>
+        </p:spPr>
+        <p:txBody>
+          <a:bodyPr wrap="square" anchor="t" lIns="0" rIns="0" tIns="0" bIns="0">
+            <a:spAutoFit/>
+          </a:bodyPr>
+          <a:lstStyle/>
+          <a:p>
+            <a:pPr algn="l">
+              <a:lnSpc>
+                <a:spcPct val="100000"/>
+              </a:lnSpc>
+              <a:spcBef>
+                <a:spcPts val="0"/>
+              </a:spcBef>
+              <a:spcAft>
+                <a:spcPts val="500"/>
+              </a:spcAft>
+            </a:pPr>
+            <a:r>
+              <a:rPr sz="2700" b="1">
+                <a:solidFill>
+                  <a:srgbClr val="0F172A"/>
+                </a:solidFill>
+                <a:latin typeface="Segoe UI"/>
+              </a:rPr>
+              <a:t>Phân tích chuyên sâu</a:t>
+            </a:r>
+          </a:p>
+        </p:txBody>
+      </p:sp>
+      <p:sp>
+        <p:nvSpPr>
+          <p:cNvPr id="6" name="Rounded Rectangle 5"/>
+          <p:cNvSpPr/>
+          <p:nvPr/>
+        </p:nvSpPr>
+        <p:spPr>
+          <a:xfrm>
+            <a:off x="2835440" y="1527048"/>
+            <a:ext cx="6520815" cy="4663440"/>
+          </a:xfrm>
+          <a:prstGeom prst="roundRect">
+            <a:avLst>
+              <a:gd name="adj" fmla="val 6000"/>
+            </a:avLst>
+          </a:prstGeom>
+          <a:solidFill>
+            <a:srgbClr val="FFFFFF"/>
+          </a:solidFill>
+          <a:ln w="12700">
+            <a:solidFill>
+              <a:srgbClr val="E2E8F0"/>
+            </a:solidFill>
+          </a:ln>
+          <a:effectLst/>
+        </p:spPr>
+        <p:style>
+          <a:lnRef idx="1">
+            <a:schemeClr val="accent1"/>
+          </a:lnRef>
+          <a:fillRef idx="3">
+            <a:schemeClr val="accent1"/>
+          </a:fillRef>
+          <a:effectRef idx="2">
+            <a:schemeClr val="accent1"/>
+          </a:effectRef>
+          <a:fontRef idx="minor">
+            <a:schemeClr val="lt1"/>
+          </a:fontRef>
+        </p:style>
+        <p:txBody>
+          <a:bodyPr rtlCol="0" anchor="ctr"/>
+          <a:lstStyle/>
+          <a:p>
+            <a:pPr algn="ctr"/>
+          </a:p>
+        </p:txBody>
+      </p:sp>
+      <p:pic>
+        <p:nvPicPr>
+          <p:cNvPr id="7" name="Picture 6" descr="insights.png"/>
+          <p:cNvPicPr>
+            <a:picLocks noChangeAspect="1"/>
+          </p:cNvPicPr>
+          <p:nvPr/>
+        </p:nvPicPr>
+        <p:blipFill>
+          <a:blip r:embed="rId2"/>
+          <a:stretch>
+            <a:fillRect/>
+          </a:stretch>
+        </p:blipFill>
+        <p:spPr>
+          <a:xfrm>
+            <a:off x="2881160" y="1572768"/>
+            <a:ext cx="6429375" cy="4572000"/>
+          </a:xfrm>
+          <a:prstGeom prst="rect">
+            <a:avLst/>
+          </a:prstGeom>
+        </p:spPr>
+      </p:pic>
+      <p:sp>
+        <p:nvSpPr>
+          <p:cNvPr id="8" name="TextBox 7"/>
+          <p:cNvSpPr txBox="1"/>
+          <p:nvPr/>
+        </p:nvSpPr>
+        <p:spPr>
+          <a:xfrm>
+            <a:off x="822960" y="6272783"/>
+            <a:ext cx="10607040" cy="320040"/>
+          </a:xfrm>
+          <a:prstGeom prst="rect">
+            <a:avLst/>
+          </a:prstGeom>
+          <a:noFill/>
+        </p:spPr>
+        <p:txBody>
+          <a:bodyPr wrap="square" anchor="t" lIns="0" rIns="0" tIns="0" bIns="0">
+            <a:spAutoFit/>
+          </a:bodyPr>
+          <a:lstStyle/>
+          <a:p>
+            <a:pPr algn="ctr">
+              <a:lnSpc>
+                <a:spcPct val="100000"/>
+              </a:lnSpc>
+              <a:spcBef>
+                <a:spcPts val="0"/>
+              </a:spcBef>
+              <a:spcAft>
+                <a:spcPts val="500"/>
+              </a:spcAft>
+            </a:pPr>
+            <a:r>
+              <a:rPr sz="1100" b="0">
+                <a:solidFill>
+                  <a:srgbClr val="475569"/>
+                </a:solidFill>
+                <a:latin typeface="Segoe UI"/>
+              </a:rPr>
+              <a:t>Vòng đời khách · doanh thu theo brand · synergy cross-brand · nhóm hàng · dự báo doanh thu.</a:t>
+            </a:r>
+          </a:p>
+        </p:txBody>
+      </p:sp>
+      <p:sp>
+        <p:nvSpPr>
+          <p:cNvPr id="9" name="TextBox 8"/>
+          <p:cNvSpPr txBox="1"/>
+          <p:nvPr/>
+        </p:nvSpPr>
+        <p:spPr>
+          <a:xfrm>
+            <a:off x="822960" y="6455664"/>
+            <a:ext cx="7315200" cy="274320"/>
+          </a:xfrm>
+          <a:prstGeom prst="rect">
+            <a:avLst/>
+          </a:prstGeom>
+          <a:noFill/>
+        </p:spPr>
+        <p:txBody>
+          <a:bodyPr wrap="square" anchor="t" lIns="0" rIns="0" tIns="0" bIns="0">
+            <a:spAutoFit/>
+          </a:bodyPr>
+          <a:lstStyle/>
+          <a:p>
+            <a:pPr algn="l">
+              <a:lnSpc>
+                <a:spcPct val="100000"/>
+              </a:lnSpc>
+              <a:spcBef>
+                <a:spcPts val="0"/>
+              </a:spcBef>
+              <a:spcAft>
+                <a:spcPts val="500"/>
+              </a:spcAft>
+            </a:pPr>
+            <a:r>
+              <a:rPr sz="900" b="0">
+                <a:solidFill>
+                  <a:srgbClr val="94A3B8"/>
+                </a:solidFill>
+                <a:latin typeface="Segoe UI"/>
+              </a:rPr>
+              <a:t>OCC-CDP · Tài liệu giới thiệu đầy đủ</a:t>
+            </a:r>
+          </a:p>
+        </p:txBody>
+      </p:sp>
+      <p:sp>
+        <p:nvSpPr>
+          <p:cNvPr id="10" name="TextBox 9"/>
+          <p:cNvSpPr txBox="1"/>
+          <p:nvPr/>
+        </p:nvSpPr>
+        <p:spPr>
+          <a:xfrm>
+            <a:off x="10515600" y="6455664"/>
+            <a:ext cx="822960" cy="274320"/>
+          </a:xfrm>
+          <a:prstGeom prst="rect">
+            <a:avLst/>
+          </a:prstGeom>
+          <a:noFill/>
+        </p:spPr>
+        <p:txBody>
+          <a:bodyPr wrap="square" anchor="t" lIns="0" rIns="0" tIns="0" bIns="0">
+            <a:spAutoFit/>
+          </a:bodyPr>
+          <a:lstStyle/>
+          <a:p>
+            <a:pPr algn="r">
+              <a:lnSpc>
+                <a:spcPct val="100000"/>
+              </a:lnSpc>
+              <a:spcBef>
+                <a:spcPts val="0"/>
+              </a:spcBef>
+              <a:spcAft>
+                <a:spcPts val="500"/>
+              </a:spcAft>
+            </a:pPr>
+            <a:r>
+              <a:rPr sz="900" b="0">
+                <a:solidFill>
+                  <a:srgbClr val="94A3B8"/>
+                </a:solidFill>
+                <a:latin typeface="Consolas"/>
+              </a:rPr>
+              <a:t>30</a:t>
+            </a:r>
+          </a:p>
+        </p:txBody>
+      </p:sp>
+    </p:spTree>
+  </p:cSld>
+  <p:clrMapOvr>
+    <a:masterClrMapping/>
+  </p:clrMapOvr>
+</p:sld>
+</file>
+
+<file path=ppt/slides/slide31.xml><?xml version="1.0" encoding="utf-8"?>
+<p:sld xmlns:a="http://schemas.openxmlformats.org/drawingml/2006/main" xmlns:p="http://schemas.openxmlformats.org/presentationml/2006/main" xmlns:r="http://schemas.openxmlformats.org/officeDocument/2006/relationships">
+  <p:cSld>
+    <p:spTree>
+      <p:nvGrpSpPr>
+        <p:cNvPr id="1" name=""/>
+        <p:cNvGrpSpPr/>
+        <p:nvPr/>
+      </p:nvGrpSpPr>
+      <p:grpSpPr/>
+      <p:sp>
+        <p:nvSpPr>
+          <p:cNvPr id="2" name="Rectangle 1"/>
+          <p:cNvSpPr/>
+          <p:nvPr/>
+        </p:nvSpPr>
+        <p:spPr>
+          <a:xfrm>
+            <a:off x="0" y="0"/>
+            <a:ext cx="12191695" cy="6858000"/>
+          </a:xfrm>
+          <a:prstGeom prst="rect">
+            <a:avLst/>
+          </a:prstGeom>
+          <a:solidFill>
+            <a:srgbClr val="F4F8FD"/>
+          </a:solidFill>
+          <a:ln>
+            <a:noFill/>
+          </a:ln>
+          <a:effectLst/>
+        </p:spPr>
+        <p:style>
+          <a:lnRef idx="1">
+            <a:schemeClr val="accent1"/>
+          </a:lnRef>
+          <a:fillRef idx="3">
+            <a:schemeClr val="accent1"/>
+          </a:fillRef>
+          <a:effectRef idx="2">
+            <a:schemeClr val="accent1"/>
+          </a:effectRef>
+          <a:fontRef idx="minor">
+            <a:schemeClr val="lt1"/>
+          </a:fontRef>
+        </p:style>
+        <p:txBody>
+          <a:bodyPr rtlCol="0" anchor="ctr"/>
+          <a:lstStyle/>
+          <a:p>
+            <a:pPr algn="ctr"/>
+          </a:p>
+        </p:txBody>
+      </p:sp>
+      <p:sp>
+        <p:nvSpPr>
+          <p:cNvPr id="3" name="Rectangle 2"/>
+          <p:cNvSpPr/>
+          <p:nvPr/>
+        </p:nvSpPr>
+        <p:spPr>
+          <a:xfrm>
+            <a:off x="822960" y="557784"/>
+            <a:ext cx="237744" cy="237744"/>
+          </a:xfrm>
+          <a:prstGeom prst="rect">
+            <a:avLst/>
+          </a:prstGeom>
+          <a:solidFill>
+            <a:srgbClr val="2563EB"/>
+          </a:solidFill>
+          <a:ln>
+            <a:noFill/>
+          </a:ln>
+          <a:effectLst/>
+        </p:spPr>
+        <p:style>
+          <a:lnRef idx="1">
+            <a:schemeClr val="accent1"/>
+          </a:lnRef>
+          <a:fillRef idx="3">
+            <a:schemeClr val="accent1"/>
+          </a:fillRef>
+          <a:effectRef idx="2">
+            <a:schemeClr val="accent1"/>
+          </a:effectRef>
+          <a:fontRef idx="minor">
+            <a:schemeClr val="lt1"/>
+          </a:fontRef>
+        </p:style>
+        <p:txBody>
+          <a:bodyPr rtlCol="0" anchor="ctr"/>
+          <a:lstStyle/>
+          <a:p>
+            <a:pPr algn="ctr"/>
+          </a:p>
+        </p:txBody>
+      </p:sp>
+      <p:sp>
+        <p:nvSpPr>
+          <p:cNvPr id="4" name="TextBox 3"/>
+          <p:cNvSpPr txBox="1"/>
+          <p:nvPr/>
+        </p:nvSpPr>
+        <p:spPr>
+          <a:xfrm>
+            <a:off x="1188720" y="530352"/>
+            <a:ext cx="9144000" cy="365760"/>
+          </a:xfrm>
+          <a:prstGeom prst="rect">
+            <a:avLst/>
+          </a:prstGeom>
+          <a:noFill/>
+        </p:spPr>
+        <p:txBody>
+          <a:bodyPr wrap="square" anchor="t" lIns="0" rIns="0" tIns="0" bIns="0">
+            <a:spAutoFit/>
+          </a:bodyPr>
+          <a:lstStyle/>
+          <a:p>
+            <a:pPr algn="l">
+              <a:lnSpc>
+                <a:spcPct val="100000"/>
+              </a:lnSpc>
+              <a:spcBef>
+                <a:spcPts val="0"/>
+              </a:spcBef>
+              <a:spcAft>
+                <a:spcPts val="500"/>
+              </a:spcAft>
+            </a:pPr>
+            <a:r>
+              <a:rPr sz="1150" b="1">
+                <a:solidFill>
+                  <a:srgbClr val="2563EB"/>
+                </a:solidFill>
+                <a:latin typeface="Segoe UI"/>
+              </a:rPr>
+              <a:t>ẢNH THẬT</a:t>
+            </a:r>
+          </a:p>
+        </p:txBody>
+      </p:sp>
+      <p:sp>
+        <p:nvSpPr>
+          <p:cNvPr id="5" name="TextBox 4"/>
+          <p:cNvSpPr txBox="1"/>
+          <p:nvPr/>
+        </p:nvSpPr>
+        <p:spPr>
+          <a:xfrm>
+            <a:off x="822960" y="841248"/>
+            <a:ext cx="10607040" cy="822960"/>
+          </a:xfrm>
+          <a:prstGeom prst="rect">
+            <a:avLst/>
+          </a:prstGeom>
+          <a:noFill/>
+        </p:spPr>
+        <p:txBody>
+          <a:bodyPr wrap="square" anchor="t" lIns="0" rIns="0" tIns="0" bIns="0">
+            <a:spAutoFit/>
+          </a:bodyPr>
+          <a:lstStyle/>
+          <a:p>
+            <a:pPr algn="l">
+              <a:lnSpc>
+                <a:spcPct val="100000"/>
+              </a:lnSpc>
+              <a:spcBef>
+                <a:spcPts val="0"/>
+              </a:spcBef>
+              <a:spcAft>
+                <a:spcPts val="500"/>
+              </a:spcAft>
+            </a:pPr>
+            <a:r>
+              <a:rPr sz="2700" b="1">
+                <a:solidFill>
+                  <a:srgbClr val="0F172A"/>
+                </a:solidFill>
+                <a:latin typeface="Segoe UI"/>
+              </a:rPr>
+              <a:t>Customer 360 + phân tích hành vi AI</a:t>
+            </a:r>
+          </a:p>
+        </p:txBody>
+      </p:sp>
+      <p:sp>
+        <p:nvSpPr>
+          <p:cNvPr id="6" name="Rounded Rectangle 5"/>
+          <p:cNvSpPr/>
+          <p:nvPr/>
+        </p:nvSpPr>
+        <p:spPr>
+          <a:xfrm>
+            <a:off x="2835440" y="1527048"/>
+            <a:ext cx="6520815" cy="4663440"/>
+          </a:xfrm>
+          <a:prstGeom prst="roundRect">
+            <a:avLst>
+              <a:gd name="adj" fmla="val 6000"/>
+            </a:avLst>
+          </a:prstGeom>
+          <a:solidFill>
+            <a:srgbClr val="FFFFFF"/>
+          </a:solidFill>
+          <a:ln w="12700">
+            <a:solidFill>
+              <a:srgbClr val="E2E8F0"/>
+            </a:solidFill>
+          </a:ln>
+          <a:effectLst/>
+        </p:spPr>
+        <p:style>
+          <a:lnRef idx="1">
+            <a:schemeClr val="accent1"/>
+          </a:lnRef>
+          <a:fillRef idx="3">
+            <a:schemeClr val="accent1"/>
+          </a:fillRef>
+          <a:effectRef idx="2">
+            <a:schemeClr val="accent1"/>
+          </a:effectRef>
+          <a:fontRef idx="minor">
+            <a:schemeClr val="lt1"/>
+          </a:fontRef>
+        </p:style>
+        <p:txBody>
+          <a:bodyPr rtlCol="0" anchor="ctr"/>
+          <a:lstStyle/>
+          <a:p>
+            <a:pPr algn="ctr"/>
+          </a:p>
+        </p:txBody>
+      </p:sp>
+      <p:pic>
+        <p:nvPicPr>
+          <p:cNvPr id="7" name="Picture 6" descr="customer360.png"/>
+          <p:cNvPicPr>
+            <a:picLocks noChangeAspect="1"/>
+          </p:cNvPicPr>
+          <p:nvPr/>
+        </p:nvPicPr>
+        <p:blipFill>
+          <a:blip r:embed="rId2"/>
+          <a:stretch>
+            <a:fillRect/>
+          </a:stretch>
+        </p:blipFill>
+        <p:spPr>
+          <a:xfrm>
+            <a:off x="2881160" y="1572768"/>
+            <a:ext cx="6429375" cy="4572000"/>
+          </a:xfrm>
+          <a:prstGeom prst="rect">
+            <a:avLst/>
+          </a:prstGeom>
+        </p:spPr>
+      </p:pic>
+      <p:sp>
+        <p:nvSpPr>
+          <p:cNvPr id="8" name="TextBox 7"/>
+          <p:cNvSpPr txBox="1"/>
+          <p:nvPr/>
+        </p:nvSpPr>
+        <p:spPr>
+          <a:xfrm>
+            <a:off x="822960" y="6272783"/>
+            <a:ext cx="10607040" cy="320040"/>
+          </a:xfrm>
+          <a:prstGeom prst="rect">
+            <a:avLst/>
+          </a:prstGeom>
+          <a:noFill/>
+        </p:spPr>
+        <p:txBody>
+          <a:bodyPr wrap="square" anchor="t" lIns="0" rIns="0" tIns="0" bIns="0">
+            <a:spAutoFit/>
+          </a:bodyPr>
+          <a:lstStyle/>
+          <a:p>
+            <a:pPr algn="ctr">
+              <a:lnSpc>
+                <a:spcPct val="100000"/>
+              </a:lnSpc>
+              <a:spcBef>
+                <a:spcPts val="0"/>
+              </a:spcBef>
+              <a:spcAft>
+                <a:spcPts val="500"/>
+              </a:spcAft>
+            </a:pPr>
+            <a:r>
+              <a:rPr sz="1100" b="0">
+                <a:solidFill>
+                  <a:srgbClr val="475569"/>
+                </a:solidFill>
+                <a:latin typeface="Segoe UI"/>
+              </a:rPr>
+              <a:t>Hồ sơ hợp nhất · lifecycle/churn/propensity · Next-Best-Action · gợi ý cross-sell (AI).</a:t>
+            </a:r>
+          </a:p>
+        </p:txBody>
+      </p:sp>
+      <p:sp>
+        <p:nvSpPr>
+          <p:cNvPr id="9" name="TextBox 8"/>
+          <p:cNvSpPr txBox="1"/>
+          <p:nvPr/>
+        </p:nvSpPr>
+        <p:spPr>
+          <a:xfrm>
+            <a:off x="822960" y="6455664"/>
+            <a:ext cx="7315200" cy="274320"/>
+          </a:xfrm>
+          <a:prstGeom prst="rect">
+            <a:avLst/>
+          </a:prstGeom>
+          <a:noFill/>
+        </p:spPr>
+        <p:txBody>
+          <a:bodyPr wrap="square" anchor="t" lIns="0" rIns="0" tIns="0" bIns="0">
+            <a:spAutoFit/>
+          </a:bodyPr>
+          <a:lstStyle/>
+          <a:p>
+            <a:pPr algn="l">
+              <a:lnSpc>
+                <a:spcPct val="100000"/>
+              </a:lnSpc>
+              <a:spcBef>
+                <a:spcPts val="0"/>
+              </a:spcBef>
+              <a:spcAft>
+                <a:spcPts val="500"/>
+              </a:spcAft>
+            </a:pPr>
+            <a:r>
+              <a:rPr sz="900" b="0">
+                <a:solidFill>
+                  <a:srgbClr val="94A3B8"/>
+                </a:solidFill>
+                <a:latin typeface="Segoe UI"/>
+              </a:rPr>
+              <a:t>OCC-CDP · Tài liệu giới thiệu đầy đủ</a:t>
+            </a:r>
+          </a:p>
+        </p:txBody>
+      </p:sp>
+      <p:sp>
+        <p:nvSpPr>
+          <p:cNvPr id="10" name="TextBox 9"/>
+          <p:cNvSpPr txBox="1"/>
+          <p:nvPr/>
+        </p:nvSpPr>
+        <p:spPr>
+          <a:xfrm>
+            <a:off x="10515600" y="6455664"/>
+            <a:ext cx="822960" cy="274320"/>
+          </a:xfrm>
+          <a:prstGeom prst="rect">
+            <a:avLst/>
+          </a:prstGeom>
+          <a:noFill/>
+        </p:spPr>
+        <p:txBody>
+          <a:bodyPr wrap="square" anchor="t" lIns="0" rIns="0" tIns="0" bIns="0">
+            <a:spAutoFit/>
+          </a:bodyPr>
+          <a:lstStyle/>
+          <a:p>
+            <a:pPr algn="r">
+              <a:lnSpc>
+                <a:spcPct val="100000"/>
+              </a:lnSpc>
+              <a:spcBef>
+                <a:spcPts val="0"/>
+              </a:spcBef>
+              <a:spcAft>
+                <a:spcPts val="500"/>
+              </a:spcAft>
+            </a:pPr>
+            <a:r>
+              <a:rPr sz="900" b="0">
+                <a:solidFill>
+                  <a:srgbClr val="94A3B8"/>
+                </a:solidFill>
+                <a:latin typeface="Consolas"/>
+              </a:rPr>
+              <a:t>31</a:t>
+            </a:r>
+          </a:p>
+        </p:txBody>
+      </p:sp>
+    </p:spTree>
+  </p:cSld>
+  <p:clrMapOvr>
+    <a:masterClrMapping/>
+  </p:clrMapOvr>
+</p:sld>
+</file>
+
+<file path=ppt/slides/slide32.xml><?xml version="1.0" encoding="utf-8"?>
+<p:sld xmlns:a="http://schemas.openxmlformats.org/drawingml/2006/main" xmlns:p="http://schemas.openxmlformats.org/presentationml/2006/main" xmlns:r="http://schemas.openxmlformats.org/officeDocument/2006/relationships">
+  <p:cSld>
+    <p:spTree>
+      <p:nvGrpSpPr>
+        <p:cNvPr id="1" name=""/>
+        <p:cNvGrpSpPr/>
+        <p:nvPr/>
+      </p:nvGrpSpPr>
+      <p:grpSpPr/>
+      <p:sp>
+        <p:nvSpPr>
+          <p:cNvPr id="2" name="Rectangle 1"/>
+          <p:cNvSpPr/>
+          <p:nvPr/>
+        </p:nvSpPr>
+        <p:spPr>
+          <a:xfrm>
+            <a:off x="0" y="0"/>
+            <a:ext cx="12191695" cy="6858000"/>
+          </a:xfrm>
+          <a:prstGeom prst="rect">
+            <a:avLst/>
+          </a:prstGeom>
+          <a:solidFill>
+            <a:srgbClr val="F4F8FD"/>
+          </a:solidFill>
+          <a:ln>
+            <a:noFill/>
+          </a:ln>
+          <a:effectLst/>
+        </p:spPr>
+        <p:style>
+          <a:lnRef idx="1">
+            <a:schemeClr val="accent1"/>
+          </a:lnRef>
+          <a:fillRef idx="3">
+            <a:schemeClr val="accent1"/>
+          </a:fillRef>
+          <a:effectRef idx="2">
+            <a:schemeClr val="accent1"/>
+          </a:effectRef>
+          <a:fontRef idx="minor">
+            <a:schemeClr val="lt1"/>
+          </a:fontRef>
+        </p:style>
+        <p:txBody>
+          <a:bodyPr rtlCol="0" anchor="ctr"/>
+          <a:lstStyle/>
+          <a:p>
+            <a:pPr algn="ctr"/>
+          </a:p>
+        </p:txBody>
+      </p:sp>
+      <p:sp>
+        <p:nvSpPr>
+          <p:cNvPr id="3" name="Rectangle 2"/>
+          <p:cNvSpPr/>
+          <p:nvPr/>
+        </p:nvSpPr>
+        <p:spPr>
+          <a:xfrm>
+            <a:off x="822960" y="557784"/>
+            <a:ext cx="237744" cy="237744"/>
+          </a:xfrm>
+          <a:prstGeom prst="rect">
+            <a:avLst/>
+          </a:prstGeom>
+          <a:solidFill>
+            <a:srgbClr val="2563EB"/>
+          </a:solidFill>
+          <a:ln>
+            <a:noFill/>
+          </a:ln>
+          <a:effectLst/>
+        </p:spPr>
+        <p:style>
+          <a:lnRef idx="1">
+            <a:schemeClr val="accent1"/>
+          </a:lnRef>
+          <a:fillRef idx="3">
+            <a:schemeClr val="accent1"/>
+          </a:fillRef>
+          <a:effectRef idx="2">
+            <a:schemeClr val="accent1"/>
+          </a:effectRef>
+          <a:fontRef idx="minor">
+            <a:schemeClr val="lt1"/>
+          </a:fontRef>
+        </p:style>
+        <p:txBody>
+          <a:bodyPr rtlCol="0" anchor="ctr"/>
+          <a:lstStyle/>
+          <a:p>
+            <a:pPr algn="ctr"/>
+          </a:p>
+        </p:txBody>
+      </p:sp>
+      <p:sp>
+        <p:nvSpPr>
+          <p:cNvPr id="4" name="TextBox 3"/>
+          <p:cNvSpPr txBox="1"/>
+          <p:nvPr/>
+        </p:nvSpPr>
+        <p:spPr>
+          <a:xfrm>
+            <a:off x="1188720" y="530352"/>
+            <a:ext cx="9144000" cy="365760"/>
+          </a:xfrm>
+          <a:prstGeom prst="rect">
+            <a:avLst/>
+          </a:prstGeom>
+          <a:noFill/>
+        </p:spPr>
+        <p:txBody>
+          <a:bodyPr wrap="square" anchor="t" lIns="0" rIns="0" tIns="0" bIns="0">
+            <a:spAutoFit/>
+          </a:bodyPr>
+          <a:lstStyle/>
+          <a:p>
+            <a:pPr algn="l">
+              <a:lnSpc>
+                <a:spcPct val="100000"/>
+              </a:lnSpc>
+              <a:spcBef>
+                <a:spcPts val="0"/>
+              </a:spcBef>
+              <a:spcAft>
+                <a:spcPts val="500"/>
+              </a:spcAft>
+            </a:pPr>
+            <a:r>
+              <a:rPr sz="1150" b="1">
+                <a:solidFill>
+                  <a:srgbClr val="2563EB"/>
+                </a:solidFill>
+                <a:latin typeface="Segoe UI"/>
+              </a:rPr>
+              <a:t>ẢNH THẬT</a:t>
+            </a:r>
+          </a:p>
+        </p:txBody>
+      </p:sp>
+      <p:sp>
+        <p:nvSpPr>
+          <p:cNvPr id="5" name="TextBox 4"/>
+          <p:cNvSpPr txBox="1"/>
+          <p:nvPr/>
+        </p:nvSpPr>
+        <p:spPr>
+          <a:xfrm>
+            <a:off x="822960" y="841248"/>
+            <a:ext cx="10607040" cy="822960"/>
+          </a:xfrm>
+          <a:prstGeom prst="rect">
+            <a:avLst/>
+          </a:prstGeom>
+          <a:noFill/>
+        </p:spPr>
+        <p:txBody>
+          <a:bodyPr wrap="square" anchor="t" lIns="0" rIns="0" tIns="0" bIns="0">
+            <a:spAutoFit/>
+          </a:bodyPr>
+          <a:lstStyle/>
+          <a:p>
+            <a:pPr algn="l">
+              <a:lnSpc>
+                <a:spcPct val="100000"/>
+              </a:lnSpc>
+              <a:spcBef>
+                <a:spcPts val="0"/>
+              </a:spcBef>
+              <a:spcAft>
+                <a:spcPts val="500"/>
+              </a:spcAft>
+            </a:pPr>
+            <a:r>
+              <a:rPr sz="2700" b="1">
+                <a:solidFill>
+                  <a:srgbClr val="0F172A"/>
+                </a:solidFill>
+                <a:latin typeface="Segoe UI"/>
+              </a:rPr>
+              <a:t>AI &amp; Governance — cấu hình LLM</a:t>
+            </a:r>
+          </a:p>
+        </p:txBody>
+      </p:sp>
+      <p:sp>
+        <p:nvSpPr>
+          <p:cNvPr id="6" name="Rounded Rectangle 5"/>
+          <p:cNvSpPr/>
+          <p:nvPr/>
+        </p:nvSpPr>
+        <p:spPr>
+          <a:xfrm>
+            <a:off x="2835440" y="1527048"/>
+            <a:ext cx="6520815" cy="4663440"/>
+          </a:xfrm>
+          <a:prstGeom prst="roundRect">
+            <a:avLst>
+              <a:gd name="adj" fmla="val 6000"/>
+            </a:avLst>
+          </a:prstGeom>
+          <a:solidFill>
+            <a:srgbClr val="FFFFFF"/>
+          </a:solidFill>
+          <a:ln w="12700">
+            <a:solidFill>
+              <a:srgbClr val="E2E8F0"/>
+            </a:solidFill>
+          </a:ln>
+          <a:effectLst/>
+        </p:spPr>
+        <p:style>
+          <a:lnRef idx="1">
+            <a:schemeClr val="accent1"/>
+          </a:lnRef>
+          <a:fillRef idx="3">
+            <a:schemeClr val="accent1"/>
+          </a:fillRef>
+          <a:effectRef idx="2">
+            <a:schemeClr val="accent1"/>
+          </a:effectRef>
+          <a:fontRef idx="minor">
+            <a:schemeClr val="lt1"/>
+          </a:fontRef>
+        </p:style>
+        <p:txBody>
+          <a:bodyPr rtlCol="0" anchor="ctr"/>
+          <a:lstStyle/>
+          <a:p>
+            <a:pPr algn="ctr"/>
+          </a:p>
+        </p:txBody>
+      </p:sp>
+      <p:pic>
+        <p:nvPicPr>
+          <p:cNvPr id="7" name="Picture 6" descr="ai-governance.png"/>
+          <p:cNvPicPr>
+            <a:picLocks noChangeAspect="1"/>
+          </p:cNvPicPr>
+          <p:nvPr/>
+        </p:nvPicPr>
+        <p:blipFill>
+          <a:blip r:embed="rId2"/>
+          <a:stretch>
+            <a:fillRect/>
+          </a:stretch>
+        </p:blipFill>
+        <p:spPr>
+          <a:xfrm>
+            <a:off x="2881160" y="1572768"/>
+            <a:ext cx="6429375" cy="4572000"/>
+          </a:xfrm>
+          <a:prstGeom prst="rect">
+            <a:avLst/>
+          </a:prstGeom>
+        </p:spPr>
+      </p:pic>
+      <p:sp>
+        <p:nvSpPr>
+          <p:cNvPr id="8" name="TextBox 7"/>
+          <p:cNvSpPr txBox="1"/>
+          <p:nvPr/>
+        </p:nvSpPr>
+        <p:spPr>
+          <a:xfrm>
+            <a:off x="822960" y="6272783"/>
+            <a:ext cx="10607040" cy="320040"/>
+          </a:xfrm>
+          <a:prstGeom prst="rect">
+            <a:avLst/>
+          </a:prstGeom>
+          <a:noFill/>
+        </p:spPr>
+        <p:txBody>
+          <a:bodyPr wrap="square" anchor="t" lIns="0" rIns="0" tIns="0" bIns="0">
+            <a:spAutoFit/>
+          </a:bodyPr>
+          <a:lstStyle/>
+          <a:p>
+            <a:pPr algn="ctr">
+              <a:lnSpc>
+                <a:spcPct val="100000"/>
+              </a:lnSpc>
+              <a:spcBef>
+                <a:spcPts val="0"/>
+              </a:spcBef>
+              <a:spcAft>
+                <a:spcPts val="500"/>
+              </a:spcAft>
+            </a:pPr>
+            <a:r>
+              <a:rPr sz="1100" b="0">
+                <a:solidFill>
+                  <a:srgbClr val="475569"/>
+                </a:solidFill>
+                <a:latin typeface="Segoe UI"/>
+              </a:rPr>
+              <a:t>Chọn provider/model per tác vụ · bật/tắt tính năng · tham số · audit · usage.</a:t>
+            </a:r>
+          </a:p>
+        </p:txBody>
+      </p:sp>
+      <p:sp>
+        <p:nvSpPr>
+          <p:cNvPr id="9" name="TextBox 8"/>
+          <p:cNvSpPr txBox="1"/>
+          <p:nvPr/>
+        </p:nvSpPr>
+        <p:spPr>
+          <a:xfrm>
+            <a:off x="822960" y="6455664"/>
+            <a:ext cx="7315200" cy="274320"/>
+          </a:xfrm>
+          <a:prstGeom prst="rect">
+            <a:avLst/>
+          </a:prstGeom>
+          <a:noFill/>
+        </p:spPr>
+        <p:txBody>
+          <a:bodyPr wrap="square" anchor="t" lIns="0" rIns="0" tIns="0" bIns="0">
+            <a:spAutoFit/>
+          </a:bodyPr>
+          <a:lstStyle/>
+          <a:p>
+            <a:pPr algn="l">
+              <a:lnSpc>
+                <a:spcPct val="100000"/>
+              </a:lnSpc>
+              <a:spcBef>
+                <a:spcPts val="0"/>
+              </a:spcBef>
+              <a:spcAft>
+                <a:spcPts val="500"/>
+              </a:spcAft>
+            </a:pPr>
+            <a:r>
+              <a:rPr sz="900" b="0">
+                <a:solidFill>
+                  <a:srgbClr val="94A3B8"/>
+                </a:solidFill>
+                <a:latin typeface="Segoe UI"/>
+              </a:rPr>
+              <a:t>OCC-CDP · Tài liệu giới thiệu đầy đủ</a:t>
+            </a:r>
+          </a:p>
+        </p:txBody>
+      </p:sp>
+      <p:sp>
+        <p:nvSpPr>
+          <p:cNvPr id="10" name="TextBox 9"/>
+          <p:cNvSpPr txBox="1"/>
+          <p:nvPr/>
+        </p:nvSpPr>
+        <p:spPr>
+          <a:xfrm>
+            <a:off x="10515600" y="6455664"/>
+            <a:ext cx="822960" cy="274320"/>
+          </a:xfrm>
+          <a:prstGeom prst="rect">
+            <a:avLst/>
+          </a:prstGeom>
+          <a:noFill/>
+        </p:spPr>
+        <p:txBody>
+          <a:bodyPr wrap="square" anchor="t" lIns="0" rIns="0" tIns="0" bIns="0">
+            <a:spAutoFit/>
+          </a:bodyPr>
+          <a:lstStyle/>
+          <a:p>
+            <a:pPr algn="r">
+              <a:lnSpc>
+                <a:spcPct val="100000"/>
+              </a:lnSpc>
+              <a:spcBef>
+                <a:spcPts val="0"/>
+              </a:spcBef>
+              <a:spcAft>
+                <a:spcPts val="500"/>
+              </a:spcAft>
+            </a:pPr>
+            <a:r>
+              <a:rPr sz="900" b="0">
+                <a:solidFill>
+                  <a:srgbClr val="94A3B8"/>
+                </a:solidFill>
+                <a:latin typeface="Consolas"/>
+              </a:rPr>
+              <a:t>32</a:t>
+            </a:r>
+          </a:p>
+        </p:txBody>
+      </p:sp>
+    </p:spTree>
+  </p:cSld>
+  <p:clrMapOvr>
+    <a:masterClrMapping/>
+  </p:clrMapOvr>
+</p:sld>
+</file>
+
+<file path=ppt/slides/slide33.xml><?xml version="1.0" encoding="utf-8"?>
+<p:sld xmlns:a="http://schemas.openxmlformats.org/drawingml/2006/main" xmlns:p="http://schemas.openxmlformats.org/presentationml/2006/main" xmlns:r="http://schemas.openxmlformats.org/officeDocument/2006/relationships">
+  <p:cSld>
+    <p:spTree>
+      <p:nvGrpSpPr>
+        <p:cNvPr id="1" name=""/>
+        <p:cNvGrpSpPr/>
+        <p:nvPr/>
+      </p:nvGrpSpPr>
+      <p:grpSpPr/>
+      <p:sp>
+        <p:nvSpPr>
+          <p:cNvPr id="2" name="Rectangle 1"/>
+          <p:cNvSpPr/>
+          <p:nvPr/>
+        </p:nvSpPr>
+        <p:spPr>
+          <a:xfrm>
+            <a:off x="0" y="0"/>
+            <a:ext cx="12191695" cy="6858000"/>
+          </a:xfrm>
+          <a:prstGeom prst="rect">
+            <a:avLst/>
+          </a:prstGeom>
+          <a:solidFill>
+            <a:srgbClr val="F4F8FD"/>
+          </a:solidFill>
+          <a:ln>
+            <a:noFill/>
+          </a:ln>
+          <a:effectLst/>
+        </p:spPr>
+        <p:style>
+          <a:lnRef idx="1">
+            <a:schemeClr val="accent1"/>
+          </a:lnRef>
+          <a:fillRef idx="3">
+            <a:schemeClr val="accent1"/>
+          </a:fillRef>
+          <a:effectRef idx="2">
+            <a:schemeClr val="accent1"/>
+          </a:effectRef>
+          <a:fontRef idx="minor">
+            <a:schemeClr val="lt1"/>
+          </a:fontRef>
+        </p:style>
+        <p:txBody>
+          <a:bodyPr rtlCol="0" anchor="ctr"/>
+          <a:lstStyle/>
+          <a:p>
+            <a:pPr algn="ctr"/>
+          </a:p>
+        </p:txBody>
+      </p:sp>
+      <p:sp>
+        <p:nvSpPr>
+          <p:cNvPr id="3" name="Rectangle 2"/>
+          <p:cNvSpPr/>
+          <p:nvPr/>
+        </p:nvSpPr>
+        <p:spPr>
+          <a:xfrm>
+            <a:off x="822960" y="557784"/>
+            <a:ext cx="237744" cy="237744"/>
+          </a:xfrm>
+          <a:prstGeom prst="rect">
+            <a:avLst/>
+          </a:prstGeom>
+          <a:solidFill>
+            <a:srgbClr val="2563EB"/>
+          </a:solidFill>
+          <a:ln>
+            <a:noFill/>
+          </a:ln>
+          <a:effectLst/>
+        </p:spPr>
+        <p:style>
+          <a:lnRef idx="1">
+            <a:schemeClr val="accent1"/>
+          </a:lnRef>
+          <a:fillRef idx="3">
+            <a:schemeClr val="accent1"/>
+          </a:fillRef>
+          <a:effectRef idx="2">
+            <a:schemeClr val="accent1"/>
+          </a:effectRef>
+          <a:fontRef idx="minor">
+            <a:schemeClr val="lt1"/>
+          </a:fontRef>
+        </p:style>
+        <p:txBody>
+          <a:bodyPr rtlCol="0" anchor="ctr"/>
+          <a:lstStyle/>
+          <a:p>
+            <a:pPr algn="ctr"/>
+          </a:p>
+        </p:txBody>
+      </p:sp>
+      <p:sp>
+        <p:nvSpPr>
+          <p:cNvPr id="4" name="TextBox 3"/>
+          <p:cNvSpPr txBox="1"/>
+          <p:nvPr/>
+        </p:nvSpPr>
+        <p:spPr>
+          <a:xfrm>
+            <a:off x="1188720" y="530352"/>
+            <a:ext cx="9144000" cy="365760"/>
+          </a:xfrm>
+          <a:prstGeom prst="rect">
+            <a:avLst/>
+          </a:prstGeom>
+          <a:noFill/>
+        </p:spPr>
+        <p:txBody>
+          <a:bodyPr wrap="square" anchor="t" lIns="0" rIns="0" tIns="0" bIns="0">
+            <a:spAutoFit/>
+          </a:bodyPr>
+          <a:lstStyle/>
+          <a:p>
+            <a:pPr algn="l">
+              <a:lnSpc>
+                <a:spcPct val="100000"/>
+              </a:lnSpc>
+              <a:spcBef>
+                <a:spcPts val="0"/>
+              </a:spcBef>
+              <a:spcAft>
+                <a:spcPts val="500"/>
+              </a:spcAft>
+            </a:pPr>
+            <a:r>
+              <a:rPr sz="1150" b="1">
+                <a:solidFill>
+                  <a:srgbClr val="2563EB"/>
+                </a:solidFill>
+                <a:latin typeface="Segoe UI"/>
+              </a:rPr>
+              <a:t>ẢNH THẬT</a:t>
+            </a:r>
+          </a:p>
+        </p:txBody>
+      </p:sp>
+      <p:sp>
+        <p:nvSpPr>
+          <p:cNvPr id="5" name="TextBox 4"/>
+          <p:cNvSpPr txBox="1"/>
+          <p:nvPr/>
+        </p:nvSpPr>
+        <p:spPr>
+          <a:xfrm>
+            <a:off x="822960" y="841248"/>
+            <a:ext cx="10607040" cy="822960"/>
+          </a:xfrm>
+          <a:prstGeom prst="rect">
+            <a:avLst/>
+          </a:prstGeom>
+          <a:noFill/>
+        </p:spPr>
+        <p:txBody>
+          <a:bodyPr wrap="square" anchor="t" lIns="0" rIns="0" tIns="0" bIns="0">
+            <a:spAutoFit/>
+          </a:bodyPr>
+          <a:lstStyle/>
+          <a:p>
+            <a:pPr algn="l">
+              <a:lnSpc>
+                <a:spcPct val="100000"/>
+              </a:lnSpc>
+              <a:spcBef>
+                <a:spcPts val="0"/>
+              </a:spcBef>
+              <a:spcAft>
+                <a:spcPts val="500"/>
+              </a:spcAft>
+            </a:pPr>
+            <a:r>
+              <a:rPr sz="2700" b="1">
+                <a:solidFill>
+                  <a:srgbClr val="0F172A"/>
+                </a:solidFill>
+                <a:latin typeface="Segoe UI"/>
+              </a:rPr>
+              <a:t>Trợ lý AI &amp; Data Ops</a:t>
+            </a:r>
+          </a:p>
+        </p:txBody>
+      </p:sp>
+      <p:sp>
+        <p:nvSpPr>
+          <p:cNvPr id="6" name="Rounded Rectangle 5"/>
+          <p:cNvSpPr/>
+          <p:nvPr/>
+        </p:nvSpPr>
+        <p:spPr>
+          <a:xfrm>
+            <a:off x="649224" y="1655064"/>
+            <a:ext cx="5422392" cy="3877056"/>
+          </a:xfrm>
+          <a:prstGeom prst="roundRect">
+            <a:avLst>
+              <a:gd name="adj" fmla="val 6000"/>
+            </a:avLst>
+          </a:prstGeom>
+          <a:solidFill>
+            <a:srgbClr val="FFFFFF"/>
+          </a:solidFill>
+          <a:ln w="12700">
+            <a:solidFill>
+              <a:srgbClr val="E2E8F0"/>
+            </a:solidFill>
+          </a:ln>
+          <a:effectLst/>
+        </p:spPr>
+        <p:style>
+          <a:lnRef idx="1">
+            <a:schemeClr val="accent1"/>
+          </a:lnRef>
+          <a:fillRef idx="3">
+            <a:schemeClr val="accent1"/>
+          </a:fillRef>
+          <a:effectRef idx="2">
+            <a:schemeClr val="accent1"/>
+          </a:effectRef>
+          <a:fontRef idx="minor">
+            <a:schemeClr val="lt1"/>
+          </a:fontRef>
+        </p:style>
+        <p:txBody>
+          <a:bodyPr rtlCol="0" anchor="ctr"/>
+          <a:lstStyle/>
+          <a:p>
+            <a:pPr algn="ctr"/>
+          </a:p>
+        </p:txBody>
+      </p:sp>
+      <p:pic>
+        <p:nvPicPr>
+          <p:cNvPr id="7" name="Picture 6" descr="assistant.png"/>
+          <p:cNvPicPr>
+            <a:picLocks noChangeAspect="1"/>
+          </p:cNvPicPr>
+          <p:nvPr/>
+        </p:nvPicPr>
+        <p:blipFill>
+          <a:blip r:embed="rId2"/>
+          <a:stretch>
+            <a:fillRect/>
+          </a:stretch>
+        </p:blipFill>
+        <p:spPr>
+          <a:xfrm>
+            <a:off x="685800" y="1691640"/>
+            <a:ext cx="5349240" cy="3803904"/>
+          </a:xfrm>
+          <a:prstGeom prst="rect">
+            <a:avLst/>
+          </a:prstGeom>
+        </p:spPr>
+      </p:pic>
+      <p:sp>
+        <p:nvSpPr>
+          <p:cNvPr id="8" name="TextBox 7"/>
+          <p:cNvSpPr txBox="1"/>
+          <p:nvPr/>
+        </p:nvSpPr>
+        <p:spPr>
+          <a:xfrm>
+            <a:off x="685800" y="5605272"/>
+            <a:ext cx="5349240" cy="320040"/>
+          </a:xfrm>
+          <a:prstGeom prst="rect">
+            <a:avLst/>
+          </a:prstGeom>
+          <a:noFill/>
+        </p:spPr>
+        <p:txBody>
+          <a:bodyPr wrap="square" anchor="t" lIns="0" rIns="0" tIns="0" bIns="0">
+            <a:spAutoFit/>
+          </a:bodyPr>
+          <a:lstStyle/>
+          <a:p>
+            <a:pPr algn="ctr">
+              <a:lnSpc>
+                <a:spcPct val="100000"/>
+              </a:lnSpc>
+              <a:spcBef>
+                <a:spcPts val="0"/>
+              </a:spcBef>
+              <a:spcAft>
+                <a:spcPts val="500"/>
+              </a:spcAft>
+            </a:pPr>
+            <a:r>
+              <a:rPr sz="1050" b="1">
+                <a:solidFill>
+                  <a:srgbClr val="475569"/>
+                </a:solidFill>
+                <a:latin typeface="Segoe UI"/>
+              </a:rPr>
+              <a:t>Trợ lý AI (generative)</a:t>
+            </a:r>
+          </a:p>
+        </p:txBody>
+      </p:sp>
+      <p:sp>
+        <p:nvSpPr>
+          <p:cNvPr id="9" name="Rounded Rectangle 8"/>
+          <p:cNvSpPr/>
+          <p:nvPr/>
+        </p:nvSpPr>
+        <p:spPr>
+          <a:xfrm>
+            <a:off x="6181344" y="1655064"/>
+            <a:ext cx="5422392" cy="3877056"/>
+          </a:xfrm>
+          <a:prstGeom prst="roundRect">
+            <a:avLst>
+              <a:gd name="adj" fmla="val 6000"/>
+            </a:avLst>
+          </a:prstGeom>
+          <a:solidFill>
+            <a:srgbClr val="FFFFFF"/>
+          </a:solidFill>
+          <a:ln w="12700">
+            <a:solidFill>
+              <a:srgbClr val="E2E8F0"/>
+            </a:solidFill>
+          </a:ln>
+          <a:effectLst/>
+        </p:spPr>
+        <p:style>
+          <a:lnRef idx="1">
+            <a:schemeClr val="accent1"/>
+          </a:lnRef>
+          <a:fillRef idx="3">
+            <a:schemeClr val="accent1"/>
+          </a:fillRef>
+          <a:effectRef idx="2">
+            <a:schemeClr val="accent1"/>
+          </a:effectRef>
+          <a:fontRef idx="minor">
+            <a:schemeClr val="lt1"/>
+          </a:fontRef>
+        </p:style>
+        <p:txBody>
+          <a:bodyPr rtlCol="0" anchor="ctr"/>
+          <a:lstStyle/>
+          <a:p>
+            <a:pPr algn="ctr"/>
+          </a:p>
+        </p:txBody>
+      </p:sp>
+      <p:pic>
+        <p:nvPicPr>
+          <p:cNvPr id="10" name="Picture 9" descr="data-ops.png"/>
+          <p:cNvPicPr>
+            <a:picLocks noChangeAspect="1"/>
+          </p:cNvPicPr>
+          <p:nvPr/>
+        </p:nvPicPr>
+        <p:blipFill>
+          <a:blip r:embed="rId3"/>
+          <a:stretch>
+            <a:fillRect/>
+          </a:stretch>
+        </p:blipFill>
+        <p:spPr>
+          <a:xfrm>
+            <a:off x="6217920" y="1691640"/>
+            <a:ext cx="5349240" cy="3803904"/>
+          </a:xfrm>
+          <a:prstGeom prst="rect">
+            <a:avLst/>
+          </a:prstGeom>
+        </p:spPr>
+      </p:pic>
+      <p:sp>
+        <p:nvSpPr>
+          <p:cNvPr id="11" name="TextBox 10"/>
+          <p:cNvSpPr txBox="1"/>
+          <p:nvPr/>
+        </p:nvSpPr>
+        <p:spPr>
+          <a:xfrm>
+            <a:off x="6217920" y="5605272"/>
+            <a:ext cx="5349240" cy="320040"/>
+          </a:xfrm>
+          <a:prstGeom prst="rect">
+            <a:avLst/>
+          </a:prstGeom>
+          <a:noFill/>
+        </p:spPr>
+        <p:txBody>
+          <a:bodyPr wrap="square" anchor="t" lIns="0" rIns="0" tIns="0" bIns="0">
+            <a:spAutoFit/>
+          </a:bodyPr>
+          <a:lstStyle/>
+          <a:p>
+            <a:pPr algn="ctr">
+              <a:lnSpc>
+                <a:spcPct val="100000"/>
+              </a:lnSpc>
+              <a:spcBef>
+                <a:spcPts val="0"/>
+              </a:spcBef>
+              <a:spcAft>
+                <a:spcPts val="500"/>
+              </a:spcAft>
+            </a:pPr>
+            <a:r>
+              <a:rPr sz="1050" b="1">
+                <a:solidFill>
+                  <a:srgbClr val="475569"/>
+                </a:solidFill>
+                <a:latin typeface="Segoe UI"/>
+              </a:rPr>
+              <a:t>Data Ops (master data)</a:t>
+            </a:r>
+          </a:p>
+        </p:txBody>
+      </p:sp>
+      <p:sp>
+        <p:nvSpPr>
+          <p:cNvPr id="12" name="TextBox 11"/>
+          <p:cNvSpPr txBox="1"/>
+          <p:nvPr/>
+        </p:nvSpPr>
+        <p:spPr>
+          <a:xfrm>
+            <a:off x="822960" y="6455664"/>
+            <a:ext cx="7315200" cy="274320"/>
+          </a:xfrm>
+          <a:prstGeom prst="rect">
+            <a:avLst/>
+          </a:prstGeom>
+          <a:noFill/>
+        </p:spPr>
+        <p:txBody>
+          <a:bodyPr wrap="square" anchor="t" lIns="0" rIns="0" tIns="0" bIns="0">
+            <a:spAutoFit/>
+          </a:bodyPr>
+          <a:lstStyle/>
+          <a:p>
+            <a:pPr algn="l">
+              <a:lnSpc>
+                <a:spcPct val="100000"/>
+              </a:lnSpc>
+              <a:spcBef>
+                <a:spcPts val="0"/>
+              </a:spcBef>
+              <a:spcAft>
+                <a:spcPts val="500"/>
+              </a:spcAft>
+            </a:pPr>
+            <a:r>
+              <a:rPr sz="900" b="0">
+                <a:solidFill>
+                  <a:srgbClr val="94A3B8"/>
+                </a:solidFill>
+                <a:latin typeface="Segoe UI"/>
+              </a:rPr>
+              <a:t>OCC-CDP · Tài liệu giới thiệu đầy đủ</a:t>
+            </a:r>
+          </a:p>
+        </p:txBody>
+      </p:sp>
+      <p:sp>
+        <p:nvSpPr>
+          <p:cNvPr id="13" name="TextBox 12"/>
+          <p:cNvSpPr txBox="1"/>
+          <p:nvPr/>
+        </p:nvSpPr>
+        <p:spPr>
+          <a:xfrm>
+            <a:off x="10515600" y="6455664"/>
+            <a:ext cx="822960" cy="274320"/>
+          </a:xfrm>
+          <a:prstGeom prst="rect">
+            <a:avLst/>
+          </a:prstGeom>
+          <a:noFill/>
+        </p:spPr>
+        <p:txBody>
+          <a:bodyPr wrap="square" anchor="t" lIns="0" rIns="0" tIns="0" bIns="0">
+            <a:spAutoFit/>
+          </a:bodyPr>
+          <a:lstStyle/>
+          <a:p>
+            <a:pPr algn="r">
+              <a:lnSpc>
+                <a:spcPct val="100000"/>
+              </a:lnSpc>
+              <a:spcBef>
+                <a:spcPts val="0"/>
+              </a:spcBef>
+              <a:spcAft>
+                <a:spcPts val="500"/>
+              </a:spcAft>
+            </a:pPr>
+            <a:r>
+              <a:rPr sz="900" b="0">
+                <a:solidFill>
+                  <a:srgbClr val="94A3B8"/>
+                </a:solidFill>
+                <a:latin typeface="Consolas"/>
+              </a:rPr>
+              <a:t>33</a:t>
+            </a:r>
+          </a:p>
+        </p:txBody>
+      </p:sp>
+    </p:spTree>
+  </p:cSld>
+  <p:clrMapOvr>
+    <a:masterClrMapping/>
+  </p:clrMapOvr>
+</p:sld>
+</file>
+
+<file path=ppt/slides/slide34.xml><?xml version="1.0" encoding="utf-8"?>
+<p:sld xmlns:a="http://schemas.openxmlformats.org/drawingml/2006/main" xmlns:p="http://schemas.openxmlformats.org/presentationml/2006/main" xmlns:r="http://schemas.openxmlformats.org/officeDocument/2006/relationships">
+  <p:cSld>
+    <p:spTree>
+      <p:nvGrpSpPr>
+        <p:cNvPr id="1" name=""/>
+        <p:cNvGrpSpPr/>
+        <p:nvPr/>
+      </p:nvGrpSpPr>
+      <p:grpSpPr/>
+      <p:sp>
+        <p:nvSpPr>
+          <p:cNvPr id="2" name="Rectangle 1"/>
+          <p:cNvSpPr/>
+          <p:nvPr/>
+        </p:nvSpPr>
+        <p:spPr>
+          <a:xfrm>
+            <a:off x="0" y="0"/>
+            <a:ext cx="12191695" cy="6858000"/>
+          </a:xfrm>
+          <a:prstGeom prst="rect">
+            <a:avLst/>
+          </a:prstGeom>
+          <a:solidFill>
+            <a:srgbClr val="FFFFFF"/>
+          </a:solidFill>
+          <a:ln>
+            <a:noFill/>
+          </a:ln>
+          <a:effectLst/>
+        </p:spPr>
+        <p:style>
+          <a:lnRef idx="1">
+            <a:schemeClr val="accent1"/>
+          </a:lnRef>
+          <a:fillRef idx="3">
+            <a:schemeClr val="accent1"/>
+          </a:fillRef>
+          <a:effectRef idx="2">
+            <a:schemeClr val="accent1"/>
+          </a:effectRef>
+          <a:fontRef idx="minor">
+            <a:schemeClr val="lt1"/>
+          </a:fontRef>
+        </p:style>
+        <p:txBody>
+          <a:bodyPr rtlCol="0" anchor="ctr"/>
+          <a:lstStyle/>
+          <a:p>
+            <a:pPr algn="ctr"/>
+          </a:p>
+        </p:txBody>
+      </p:sp>
+      <p:pic>
+        <p:nvPicPr>
+          <p:cNvPr id="3" name="Picture 2" descr="hero.png"/>
+          <p:cNvPicPr>
+            <a:picLocks noChangeAspect="1"/>
+          </p:cNvPicPr>
+          <p:nvPr/>
+        </p:nvPicPr>
+        <p:blipFill>
+          <a:blip r:embed="rId2"/>
+          <a:stretch>
+            <a:fillRect/>
+          </a:stretch>
+        </p:blipFill>
+        <p:spPr>
+          <a:xfrm>
+            <a:off x="0" y="0"/>
+            <a:ext cx="12191695" cy="4220202"/>
+          </a:xfrm>
+          <a:prstGeom prst="rect">
+            <a:avLst/>
+          </a:prstGeom>
+        </p:spPr>
+      </p:pic>
+      <p:sp>
+        <p:nvSpPr>
+          <p:cNvPr id="4" name="Rectangle 3"/>
+          <p:cNvSpPr/>
+          <p:nvPr/>
+        </p:nvSpPr>
+        <p:spPr>
+          <a:xfrm>
+            <a:off x="0" y="4211058"/>
+            <a:ext cx="12191695" cy="2646941"/>
+          </a:xfrm>
+          <a:prstGeom prst="rect">
+            <a:avLst/>
+          </a:prstGeom>
+          <a:solidFill>
+            <a:srgbClr val="FFFFFF"/>
+          </a:solidFill>
+          <a:ln>
+            <a:noFill/>
+          </a:ln>
+          <a:effectLst/>
+        </p:spPr>
+        <p:style>
+          <a:lnRef idx="1">
+            <a:schemeClr val="accent1"/>
+          </a:lnRef>
+          <a:fillRef idx="3">
+            <a:schemeClr val="accent1"/>
+          </a:fillRef>
+          <a:effectRef idx="2">
+            <a:schemeClr val="accent1"/>
+          </a:effectRef>
+          <a:fontRef idx="minor">
+            <a:schemeClr val="lt1"/>
+          </a:fontRef>
+        </p:style>
+        <p:txBody>
+          <a:bodyPr rtlCol="0" anchor="ctr"/>
+          <a:lstStyle/>
+          <a:p>
+            <a:pPr algn="ctr"/>
+          </a:p>
+        </p:txBody>
+      </p:sp>
+      <p:sp>
+        <p:nvSpPr>
+          <p:cNvPr id="5" name="TextBox 4"/>
+          <p:cNvSpPr txBox="1"/>
+          <p:nvPr/>
+        </p:nvSpPr>
+        <p:spPr>
+          <a:xfrm>
+            <a:off x="822960" y="868680"/>
+            <a:ext cx="10058400" cy="457200"/>
+          </a:xfrm>
+          <a:prstGeom prst="rect">
+            <a:avLst/>
+          </a:prstGeom>
+          <a:noFill/>
+        </p:spPr>
+        <p:txBody>
+          <a:bodyPr wrap="square" anchor="t" lIns="0" rIns="0" tIns="0" bIns="0">
+            <a:spAutoFit/>
+          </a:bodyPr>
+          <a:lstStyle/>
+          <a:p>
+            <a:pPr algn="l">
+              <a:lnSpc>
+                <a:spcPct val="100000"/>
+              </a:lnSpc>
+              <a:spcBef>
+                <a:spcPts val="0"/>
+              </a:spcBef>
+              <a:spcAft>
+                <a:spcPts val="500"/>
+              </a:spcAft>
+            </a:pPr>
+            <a:r>
+              <a:rPr sz="1500" b="1">
+                <a:solidFill>
+                  <a:srgbClr val="FFFFFF"/>
+                </a:solidFill>
+                <a:latin typeface="Segoe UI"/>
+              </a:rPr>
+              <a:t>OCC-CDP</a:t>
+            </a:r>
+          </a:p>
+        </p:txBody>
+      </p:sp>
+      <p:sp>
+        <p:nvSpPr>
+          <p:cNvPr id="6" name="TextBox 5"/>
+          <p:cNvSpPr txBox="1"/>
+          <p:nvPr/>
+        </p:nvSpPr>
+        <p:spPr>
+          <a:xfrm>
+            <a:off x="822960" y="1554480"/>
+            <a:ext cx="10607040" cy="1463040"/>
+          </a:xfrm>
+          <a:prstGeom prst="rect">
+            <a:avLst/>
+          </a:prstGeom>
+          <a:noFill/>
+        </p:spPr>
+        <p:txBody>
+          <a:bodyPr wrap="square" anchor="t" lIns="0" rIns="0" tIns="0" bIns="0">
+            <a:spAutoFit/>
+          </a:bodyPr>
+          <a:lstStyle/>
+          <a:p>
+            <a:pPr algn="l">
+              <a:lnSpc>
+                <a:spcPct val="105000"/>
+              </a:lnSpc>
+              <a:spcBef>
+                <a:spcPts val="0"/>
+              </a:spcBef>
+              <a:spcAft>
+                <a:spcPts val="500"/>
+              </a:spcAft>
+            </a:pPr>
+            <a:r>
+              <a:rPr sz="3400" b="1">
+                <a:solidFill>
+                  <a:srgbClr val="FFFFFF"/>
+                </a:solidFill>
+                <a:latin typeface="Segoe UI"/>
+              </a:rPr>
+              <a:t>Một nền dữ liệu.</a:t>
+            </a:r>
+          </a:p>
+          <a:p>
+            <a:pPr algn="l">
+              <a:lnSpc>
+                <a:spcPct val="105000"/>
+              </a:lnSpc>
+              <a:spcBef>
+                <a:spcPts val="0"/>
+              </a:spcBef>
+              <a:spcAft>
+                <a:spcPts val="500"/>
+              </a:spcAft>
+            </a:pPr>
+            <a:r>
+              <a:rPr sz="3400" b="1">
+                <a:solidFill>
+                  <a:srgbClr val="DCEBFF"/>
+                </a:solidFill>
+                <a:latin typeface="Segoe UI"/>
+              </a:rPr>
+              <a:t>Toàn bộ giá trị khách hàng.</a:t>
+            </a:r>
+          </a:p>
+        </p:txBody>
+      </p:sp>
+      <p:sp>
+        <p:nvSpPr>
+          <p:cNvPr id="7" name="Rectangle 6"/>
+          <p:cNvSpPr/>
+          <p:nvPr/>
+        </p:nvSpPr>
+        <p:spPr>
+          <a:xfrm>
+            <a:off x="822960" y="4549386"/>
+            <a:ext cx="137160" cy="137160"/>
+          </a:xfrm>
+          <a:prstGeom prst="rect">
+            <a:avLst/>
+          </a:prstGeom>
+          <a:solidFill>
+            <a:srgbClr val="2563EB"/>
+          </a:solidFill>
+          <a:ln>
+            <a:noFill/>
+          </a:ln>
+          <a:effectLst/>
+        </p:spPr>
+        <p:style>
+          <a:lnRef idx="1">
+            <a:schemeClr val="accent1"/>
+          </a:lnRef>
+          <a:fillRef idx="3">
+            <a:schemeClr val="accent1"/>
+          </a:fillRef>
+          <a:effectRef idx="2">
+            <a:schemeClr val="accent1"/>
+          </a:effectRef>
+          <a:fontRef idx="minor">
+            <a:schemeClr val="lt1"/>
+          </a:fontRef>
+        </p:style>
+        <p:txBody>
+          <a:bodyPr rtlCol="0" anchor="ctr"/>
+          <a:lstStyle/>
+          <a:p>
+            <a:pPr algn="ctr"/>
+          </a:p>
+        </p:txBody>
+      </p:sp>
+      <p:sp>
+        <p:nvSpPr>
+          <p:cNvPr id="8" name="TextBox 7"/>
+          <p:cNvSpPr txBox="1"/>
+          <p:nvPr/>
+        </p:nvSpPr>
+        <p:spPr>
+          <a:xfrm>
+            <a:off x="1097280" y="4494522"/>
+            <a:ext cx="10332720" cy="457200"/>
+          </a:xfrm>
+          <a:prstGeom prst="rect">
+            <a:avLst/>
+          </a:prstGeom>
+          <a:noFill/>
+        </p:spPr>
+        <p:txBody>
+          <a:bodyPr wrap="square" anchor="t" lIns="0" rIns="0" tIns="0" bIns="0">
+            <a:spAutoFit/>
+          </a:bodyPr>
+          <a:lstStyle/>
+          <a:p>
+            <a:pPr algn="l">
+              <a:lnSpc>
+                <a:spcPct val="100000"/>
+              </a:lnSpc>
+              <a:spcBef>
+                <a:spcPts val="0"/>
+              </a:spcBef>
+              <a:spcAft>
+                <a:spcPts val="500"/>
+              </a:spcAft>
+            </a:pPr>
+            <a:r>
+              <a:rPr sz="1400" b="1">
+                <a:solidFill>
+                  <a:srgbClr val="0F172A"/>
+                </a:solidFill>
+                <a:latin typeface="Segoe UI"/>
+              </a:rPr>
+              <a:t>Nền tảng self-host, audit-grade  </a:t>
+            </a:r>
+            <a:r>
+              <a:rPr sz="1250" b="0">
+                <a:solidFill>
+                  <a:srgbClr val="475569"/>
+                </a:solidFill>
+                <a:latin typeface="Segoe UI"/>
+              </a:rPr>
+              <a:t>hợp nhất danh tính · loyalty · consent trong 1 transaction ACID.</a:t>
+            </a:r>
+          </a:p>
+        </p:txBody>
+      </p:sp>
+      <p:sp>
+        <p:nvSpPr>
+          <p:cNvPr id="9" name="Rectangle 8"/>
+          <p:cNvSpPr/>
+          <p:nvPr/>
+        </p:nvSpPr>
+        <p:spPr>
+          <a:xfrm>
+            <a:off x="822960" y="5116314"/>
+            <a:ext cx="137160" cy="137160"/>
+          </a:xfrm>
+          <a:prstGeom prst="rect">
+            <a:avLst/>
+          </a:prstGeom>
+          <a:solidFill>
+            <a:srgbClr val="2563EB"/>
+          </a:solidFill>
+          <a:ln>
+            <a:noFill/>
+          </a:ln>
+          <a:effectLst/>
+        </p:spPr>
+        <p:style>
+          <a:lnRef idx="1">
+            <a:schemeClr val="accent1"/>
+          </a:lnRef>
+          <a:fillRef idx="3">
+            <a:schemeClr val="accent1"/>
+          </a:fillRef>
+          <a:effectRef idx="2">
+            <a:schemeClr val="accent1"/>
+          </a:effectRef>
+          <a:fontRef idx="minor">
+            <a:schemeClr val="lt1"/>
+          </a:fontRef>
+        </p:style>
+        <p:txBody>
+          <a:bodyPr rtlCol="0" anchor="ctr"/>
+          <a:lstStyle/>
+          <a:p>
+            <a:pPr algn="ctr"/>
+          </a:p>
+        </p:txBody>
+      </p:sp>
+      <p:sp>
+        <p:nvSpPr>
+          <p:cNvPr id="10" name="TextBox 9"/>
+          <p:cNvSpPr txBox="1"/>
+          <p:nvPr/>
+        </p:nvSpPr>
+        <p:spPr>
+          <a:xfrm>
+            <a:off x="1097280" y="5061450"/>
+            <a:ext cx="10332720" cy="457200"/>
+          </a:xfrm>
+          <a:prstGeom prst="rect">
+            <a:avLst/>
+          </a:prstGeom>
+          <a:noFill/>
+        </p:spPr>
+        <p:txBody>
+          <a:bodyPr wrap="square" anchor="t" lIns="0" rIns="0" tIns="0" bIns="0">
+            <a:spAutoFit/>
+          </a:bodyPr>
+          <a:lstStyle/>
+          <a:p>
+            <a:pPr algn="l">
+              <a:lnSpc>
+                <a:spcPct val="100000"/>
+              </a:lnSpc>
+              <a:spcBef>
+                <a:spcPts val="0"/>
+              </a:spcBef>
+              <a:spcAft>
+                <a:spcPts val="500"/>
+              </a:spcAft>
+            </a:pPr>
+            <a:r>
+              <a:rPr sz="1400" b="1">
+                <a:solidFill>
+                  <a:srgbClr val="0F172A"/>
+                </a:solidFill>
+                <a:latin typeface="Segoe UI"/>
+              </a:rPr>
+              <a:t>AI biến dữ liệu thành quyết định  </a:t>
+            </a:r>
+            <a:r>
+              <a:rPr sz="1250" b="0">
+                <a:solidFill>
+                  <a:srgbClr val="475569"/>
+                </a:solidFill>
+                <a:latin typeface="Segoe UI"/>
+              </a:rPr>
+              <a:t>phân tích hành vi, dự đoán sản phẩm, forecast, decisioning, copilot.</a:t>
+            </a:r>
+          </a:p>
+        </p:txBody>
+      </p:sp>
+      <p:sp>
+        <p:nvSpPr>
+          <p:cNvPr id="11" name="Rectangle 10"/>
+          <p:cNvSpPr/>
+          <p:nvPr/>
+        </p:nvSpPr>
+        <p:spPr>
+          <a:xfrm>
+            <a:off x="822960" y="5683242"/>
+            <a:ext cx="137160" cy="137160"/>
+          </a:xfrm>
+          <a:prstGeom prst="rect">
+            <a:avLst/>
+          </a:prstGeom>
+          <a:solidFill>
+            <a:srgbClr val="2563EB"/>
+          </a:solidFill>
+          <a:ln>
+            <a:noFill/>
+          </a:ln>
+          <a:effectLst/>
+        </p:spPr>
+        <p:style>
+          <a:lnRef idx="1">
+            <a:schemeClr val="accent1"/>
+          </a:lnRef>
+          <a:fillRef idx="3">
+            <a:schemeClr val="accent1"/>
+          </a:fillRef>
+          <a:effectRef idx="2">
+            <a:schemeClr val="accent1"/>
+          </a:effectRef>
+          <a:fontRef idx="minor">
+            <a:schemeClr val="lt1"/>
+          </a:fontRef>
+        </p:style>
+        <p:txBody>
+          <a:bodyPr rtlCol="0" anchor="ctr"/>
+          <a:lstStyle/>
+          <a:p>
+            <a:pPr algn="ctr"/>
+          </a:p>
+        </p:txBody>
+      </p:sp>
+      <p:sp>
+        <p:nvSpPr>
+          <p:cNvPr id="12" name="TextBox 11"/>
+          <p:cNvSpPr txBox="1"/>
+          <p:nvPr/>
+        </p:nvSpPr>
+        <p:spPr>
+          <a:xfrm>
+            <a:off x="1097280" y="5628378"/>
+            <a:ext cx="10332720" cy="457200"/>
+          </a:xfrm>
+          <a:prstGeom prst="rect">
+            <a:avLst/>
+          </a:prstGeom>
+          <a:noFill/>
+        </p:spPr>
+        <p:txBody>
+          <a:bodyPr wrap="square" anchor="t" lIns="0" rIns="0" tIns="0" bIns="0">
+            <a:spAutoFit/>
+          </a:bodyPr>
+          <a:lstStyle/>
+          <a:p>
+            <a:pPr algn="l">
+              <a:lnSpc>
+                <a:spcPct val="100000"/>
+              </a:lnSpc>
+              <a:spcBef>
+                <a:spcPts val="0"/>
+              </a:spcBef>
+              <a:spcAft>
+                <a:spcPts val="500"/>
+              </a:spcAft>
+            </a:pPr>
+            <a:r>
+              <a:rPr sz="1400" b="1">
+                <a:solidFill>
+                  <a:srgbClr val="0F172A"/>
+                </a:solidFill>
+                <a:latin typeface="Segoe UI"/>
+              </a:rPr>
+              <a:t>Chất lượng chứng minh được  </a:t>
+            </a:r>
+            <a:r>
+              <a:rPr sz="1250" b="0">
+                <a:solidFill>
+                  <a:srgbClr val="475569"/>
+                </a:solidFill>
+                <a:latin typeface="Segoe UI"/>
+              </a:rPr>
+              <a:t>UAT 78/78, expert 33/33, mutation 5/5, TDD toàn diện.</a:t>
+            </a:r>
+          </a:p>
+        </p:txBody>
+      </p:sp>
+      <p:sp>
+        <p:nvSpPr>
+          <p:cNvPr id="13" name="TextBox 12"/>
+          <p:cNvSpPr txBox="1"/>
+          <p:nvPr/>
+        </p:nvSpPr>
+        <p:spPr>
+          <a:xfrm>
+            <a:off x="822960" y="6419088"/>
+            <a:ext cx="10515600" cy="365760"/>
+          </a:xfrm>
+          <a:prstGeom prst="rect">
+            <a:avLst/>
+          </a:prstGeom>
+          <a:noFill/>
+        </p:spPr>
+        <p:txBody>
+          <a:bodyPr wrap="square" anchor="t" lIns="0" rIns="0" tIns="0" bIns="0">
+            <a:spAutoFit/>
+          </a:bodyPr>
+          <a:lstStyle/>
+          <a:p>
+            <a:pPr algn="l">
+              <a:lnSpc>
+                <a:spcPct val="100000"/>
+              </a:lnSpc>
+              <a:spcBef>
+                <a:spcPts val="0"/>
+              </a:spcBef>
+              <a:spcAft>
+                <a:spcPts val="500"/>
+              </a:spcAft>
+            </a:pPr>
+            <a:r>
+              <a:rPr sz="1050" b="0">
+                <a:solidFill>
+                  <a:srgbClr val="94A3B8"/>
+                </a:solidFill>
+                <a:latin typeface="Segoe UI"/>
+              </a:rPr>
+              <a:t>Tài liệu chi tiết (markdown): C:\AICDP\docs   ·   github.com/trungtm78/AICDP</a:t>
             </a:r>
           </a:p>
         </p:txBody>

--- a/docs/OCC-CDP-Gioi-thieu-day-du.pptx
+++ b/docs/OCC-CDP-Gioi-thieu-day-du.pptx
@@ -5,42 +5,42 @@
     <p:sldMasterId id="2147483648" r:id="rId1"/>
   </p:sldMasterIdLst>
   <p:sldIdLst>
-    <p:sldId id="256" r:id="rId7"/>
-    <p:sldId id="257" r:id="rId8"/>
-    <p:sldId id="258" r:id="rId9"/>
-    <p:sldId id="259" r:id="rId10"/>
-    <p:sldId id="260" r:id="rId11"/>
-    <p:sldId id="261" r:id="rId12"/>
-    <p:sldId id="262" r:id="rId13"/>
-    <p:sldId id="263" r:id="rId14"/>
-    <p:sldId id="264" r:id="rId15"/>
-    <p:sldId id="265" r:id="rId16"/>
-    <p:sldId id="266" r:id="rId17"/>
-    <p:sldId id="267" r:id="rId18"/>
-    <p:sldId id="268" r:id="rId19"/>
-    <p:sldId id="269" r:id="rId20"/>
-    <p:sldId id="270" r:id="rId21"/>
-    <p:sldId id="271" r:id="rId22"/>
-    <p:sldId id="272" r:id="rId23"/>
-    <p:sldId id="273" r:id="rId24"/>
-    <p:sldId id="274" r:id="rId25"/>
-    <p:sldId id="275" r:id="rId26"/>
-    <p:sldId id="276" r:id="rId27"/>
-    <p:sldId id="277" r:id="rId28"/>
-    <p:sldId id="278" r:id="rId29"/>
-    <p:sldId id="279" r:id="rId30"/>
-    <p:sldId id="280" r:id="rId31"/>
-    <p:sldId id="281" r:id="rId32"/>
-    <p:sldId id="282" r:id="rId33"/>
-    <p:sldId id="283" r:id="rId34"/>
-    <p:sldId id="284" r:id="rId35"/>
-    <p:sldId id="285" r:id="rId36"/>
-    <p:sldId id="286" r:id="rId37"/>
-    <p:sldId id="287" r:id="rId38"/>
-    <p:sldId id="288" r:id="rId39"/>
-    <p:sldId id="289" r:id="rId40"/>
+    <p:sldId id="256" r:id="rId2"/>
+    <p:sldId id="257" r:id="rId3"/>
+    <p:sldId id="258" r:id="rId4"/>
+    <p:sldId id="259" r:id="rId5"/>
+    <p:sldId id="260" r:id="rId6"/>
+    <p:sldId id="261" r:id="rId7"/>
+    <p:sldId id="262" r:id="rId8"/>
+    <p:sldId id="263" r:id="rId9"/>
+    <p:sldId id="264" r:id="rId10"/>
+    <p:sldId id="265" r:id="rId11"/>
+    <p:sldId id="266" r:id="rId12"/>
+    <p:sldId id="267" r:id="rId13"/>
+    <p:sldId id="268" r:id="rId14"/>
+    <p:sldId id="269" r:id="rId15"/>
+    <p:sldId id="270" r:id="rId16"/>
+    <p:sldId id="271" r:id="rId17"/>
+    <p:sldId id="272" r:id="rId18"/>
+    <p:sldId id="273" r:id="rId19"/>
+    <p:sldId id="274" r:id="rId20"/>
+    <p:sldId id="275" r:id="rId21"/>
+    <p:sldId id="276" r:id="rId22"/>
+    <p:sldId id="277" r:id="rId23"/>
+    <p:sldId id="278" r:id="rId24"/>
+    <p:sldId id="279" r:id="rId25"/>
+    <p:sldId id="280" r:id="rId26"/>
+    <p:sldId id="281" r:id="rId27"/>
+    <p:sldId id="282" r:id="rId28"/>
+    <p:sldId id="283" r:id="rId29"/>
+    <p:sldId id="284" r:id="rId30"/>
+    <p:sldId id="285" r:id="rId31"/>
+    <p:sldId id="286" r:id="rId32"/>
+    <p:sldId id="287" r:id="rId33"/>
+    <p:sldId id="288" r:id="rId34"/>
+    <p:sldId id="289" r:id="rId35"/>
   </p:sldIdLst>
-  <p:sldSz cx="12191695" cy="6858000" type="screen4x3"/>
+  <p:sldSz cx="12192000" cy="6858000"/>
   <p:notesSz cx="6858000" cy="9144000"/>
   <p:defaultTextStyle>
     <a:defPPr>
@@ -137,6 +137,22 @@
       </a:defRPr>
     </a:lvl9pPr>
   </p:defaultTextStyle>
+  <p:extLst>
+    <p:ext uri="{EFAFB233-063F-42B5-8137-9DF3F51BA10A}">
+      <p15:sldGuideLst xmlns:p15="http://schemas.microsoft.com/office/powerpoint/2012/main">
+        <p15:guide id="1" orient="horz" pos="2160">
+          <p15:clr>
+            <a:srgbClr val="A4A3A4"/>
+          </p15:clr>
+        </p15:guide>
+        <p15:guide id="2" pos="2880">
+          <p15:clr>
+            <a:srgbClr val="A4A3A4"/>
+          </p15:clr>
+        </p15:guide>
+      </p15:sldGuideLst>
+    </p:ext>
+  </p:extLst>
 </p:presentation>
 </file>
 
@@ -178,10 +194,9 @@
           <a:lstStyle/>
           <a:p>
             <a:r>
-              <a:rPr lang="en-US" smtClean="0"/>
+              <a:rPr lang="en-US"/>
               <a:t>Click to edit Master title style</a:t>
             </a:r>
-            <a:endParaRPr lang="en-US"/>
           </a:p>
         </p:txBody>
       </p:sp>
@@ -297,10 +312,9 @@
           </a:lstStyle>
           <a:p>
             <a:r>
-              <a:rPr lang="en-US" smtClean="0"/>
+              <a:rPr lang="en-US"/>
               <a:t>Click to edit Master subtitle style</a:t>
             </a:r>
-            <a:endParaRPr lang="en-US"/>
           </a:p>
         </p:txBody>
       </p:sp>
@@ -321,7 +335,7 @@
           <a:p>
             <a:fld id="{5BCAD085-E8A6-8845-BD4E-CB4CCA059FC4}" type="datetimeFigureOut">
               <a:rPr lang="en-US" smtClean="0"/>
-              <a:t>1/27/13</a:t>
+              <a:t>7/9/2026</a:t>
             </a:fld>
             <a:endParaRPr lang="en-US"/>
           </a:p>
@@ -415,10 +429,9 @@
           <a:lstStyle/>
           <a:p>
             <a:r>
-              <a:rPr lang="en-US" smtClean="0"/>
+              <a:rPr lang="en-US"/>
               <a:t>Click to edit Master title style</a:t>
             </a:r>
-            <a:endParaRPr lang="en-US"/>
           </a:p>
         </p:txBody>
       </p:sp>
@@ -439,38 +452,37 @@
           <a:p>
             <a:pPr lvl="0"/>
             <a:r>
-              <a:rPr lang="en-US" smtClean="0"/>
+              <a:rPr lang="en-US"/>
               <a:t>Click to edit Master text styles</a:t>
             </a:r>
           </a:p>
           <a:p>
             <a:pPr lvl="1"/>
             <a:r>
-              <a:rPr lang="en-US" smtClean="0"/>
+              <a:rPr lang="en-US"/>
               <a:t>Second level</a:t>
             </a:r>
           </a:p>
           <a:p>
             <a:pPr lvl="2"/>
             <a:r>
-              <a:rPr lang="en-US" smtClean="0"/>
+              <a:rPr lang="en-US"/>
               <a:t>Third level</a:t>
             </a:r>
           </a:p>
           <a:p>
             <a:pPr lvl="3"/>
             <a:r>
-              <a:rPr lang="en-US" smtClean="0"/>
+              <a:rPr lang="en-US"/>
               <a:t>Fourth level</a:t>
             </a:r>
           </a:p>
           <a:p>
             <a:pPr lvl="4"/>
             <a:r>
-              <a:rPr lang="en-US" smtClean="0"/>
+              <a:rPr lang="en-US"/>
               <a:t>Fifth level</a:t>
             </a:r>
-            <a:endParaRPr lang="en-US"/>
           </a:p>
         </p:txBody>
       </p:sp>
@@ -491,7 +503,7 @@
           <a:p>
             <a:fld id="{5BCAD085-E8A6-8845-BD4E-CB4CCA059FC4}" type="datetimeFigureOut">
               <a:rPr lang="en-US" smtClean="0"/>
-              <a:t>1/27/13</a:t>
+              <a:t>7/9/2026</a:t>
             </a:fld>
             <a:endParaRPr lang="en-US"/>
           </a:p>
@@ -590,10 +602,9 @@
           <a:lstStyle/>
           <a:p>
             <a:r>
-              <a:rPr lang="en-US" smtClean="0"/>
+              <a:rPr lang="en-US"/>
               <a:t>Click to edit Master title style</a:t>
             </a:r>
-            <a:endParaRPr lang="en-US"/>
           </a:p>
         </p:txBody>
       </p:sp>
@@ -619,38 +630,37 @@
           <a:p>
             <a:pPr lvl="0"/>
             <a:r>
-              <a:rPr lang="en-US" smtClean="0"/>
+              <a:rPr lang="en-US"/>
               <a:t>Click to edit Master text styles</a:t>
             </a:r>
           </a:p>
           <a:p>
             <a:pPr lvl="1"/>
             <a:r>
-              <a:rPr lang="en-US" smtClean="0"/>
+              <a:rPr lang="en-US"/>
               <a:t>Second level</a:t>
             </a:r>
           </a:p>
           <a:p>
             <a:pPr lvl="2"/>
             <a:r>
-              <a:rPr lang="en-US" smtClean="0"/>
+              <a:rPr lang="en-US"/>
               <a:t>Third level</a:t>
             </a:r>
           </a:p>
           <a:p>
             <a:pPr lvl="3"/>
             <a:r>
-              <a:rPr lang="en-US" smtClean="0"/>
+              <a:rPr lang="en-US"/>
               <a:t>Fourth level</a:t>
             </a:r>
           </a:p>
           <a:p>
             <a:pPr lvl="4"/>
             <a:r>
-              <a:rPr lang="en-US" smtClean="0"/>
+              <a:rPr lang="en-US"/>
               <a:t>Fifth level</a:t>
             </a:r>
-            <a:endParaRPr lang="en-US"/>
           </a:p>
         </p:txBody>
       </p:sp>
@@ -671,7 +681,7 @@
           <a:p>
             <a:fld id="{5BCAD085-E8A6-8845-BD4E-CB4CCA059FC4}" type="datetimeFigureOut">
               <a:rPr lang="en-US" smtClean="0"/>
-              <a:t>1/27/13</a:t>
+              <a:t>7/9/2026</a:t>
             </a:fld>
             <a:endParaRPr lang="en-US"/>
           </a:p>
@@ -765,10 +775,9 @@
           <a:lstStyle/>
           <a:p>
             <a:r>
-              <a:rPr lang="en-US" smtClean="0"/>
+              <a:rPr lang="en-US"/>
               <a:t>Click to edit Master title style</a:t>
             </a:r>
-            <a:endParaRPr lang="en-US"/>
           </a:p>
         </p:txBody>
       </p:sp>
@@ -789,38 +798,37 @@
           <a:p>
             <a:pPr lvl="0"/>
             <a:r>
-              <a:rPr lang="en-US" smtClean="0"/>
+              <a:rPr lang="en-US"/>
               <a:t>Click to edit Master text styles</a:t>
             </a:r>
           </a:p>
           <a:p>
             <a:pPr lvl="1"/>
             <a:r>
-              <a:rPr lang="en-US" smtClean="0"/>
+              <a:rPr lang="en-US"/>
               <a:t>Second level</a:t>
             </a:r>
           </a:p>
           <a:p>
             <a:pPr lvl="2"/>
             <a:r>
-              <a:rPr lang="en-US" smtClean="0"/>
+              <a:rPr lang="en-US"/>
               <a:t>Third level</a:t>
             </a:r>
           </a:p>
           <a:p>
             <a:pPr lvl="3"/>
             <a:r>
-              <a:rPr lang="en-US" smtClean="0"/>
+              <a:rPr lang="en-US"/>
               <a:t>Fourth level</a:t>
             </a:r>
           </a:p>
           <a:p>
             <a:pPr lvl="4"/>
             <a:r>
-              <a:rPr lang="en-US" smtClean="0"/>
+              <a:rPr lang="en-US"/>
               <a:t>Fifth level</a:t>
             </a:r>
-            <a:endParaRPr lang="en-US"/>
           </a:p>
         </p:txBody>
       </p:sp>
@@ -841,7 +849,7 @@
           <a:p>
             <a:fld id="{5BCAD085-E8A6-8845-BD4E-CB4CCA059FC4}" type="datetimeFigureOut">
               <a:rPr lang="en-US" smtClean="0"/>
-              <a:t>1/27/13</a:t>
+              <a:t>7/9/2026</a:t>
             </a:fld>
             <a:endParaRPr lang="en-US"/>
           </a:p>
@@ -944,10 +952,9 @@
           </a:lstStyle>
           <a:p>
             <a:r>
-              <a:rPr lang="en-US" smtClean="0"/>
+              <a:rPr lang="en-US"/>
               <a:t>Click to edit Master title style</a:t>
             </a:r>
-            <a:endParaRPr lang="en-US"/>
           </a:p>
         </p:txBody>
       </p:sp>
@@ -1064,7 +1071,7 @@
           <a:p>
             <a:pPr lvl="0"/>
             <a:r>
-              <a:rPr lang="en-US" smtClean="0"/>
+              <a:rPr lang="en-US"/>
               <a:t>Click to edit Master text styles</a:t>
             </a:r>
           </a:p>
@@ -1087,7 +1094,7 @@
           <a:p>
             <a:fld id="{5BCAD085-E8A6-8845-BD4E-CB4CCA059FC4}" type="datetimeFigureOut">
               <a:rPr lang="en-US" smtClean="0"/>
-              <a:t>1/27/13</a:t>
+              <a:t>7/9/2026</a:t>
             </a:fld>
             <a:endParaRPr lang="en-US"/>
           </a:p>
@@ -1181,10 +1188,9 @@
           <a:lstStyle/>
           <a:p>
             <a:r>
-              <a:rPr lang="en-US" smtClean="0"/>
+              <a:rPr lang="en-US"/>
               <a:t>Click to edit Master title style</a:t>
             </a:r>
-            <a:endParaRPr lang="en-US"/>
           </a:p>
         </p:txBody>
       </p:sp>
@@ -1238,38 +1244,37 @@
           <a:p>
             <a:pPr lvl="0"/>
             <a:r>
-              <a:rPr lang="en-US" smtClean="0"/>
+              <a:rPr lang="en-US"/>
               <a:t>Click to edit Master text styles</a:t>
             </a:r>
           </a:p>
           <a:p>
             <a:pPr lvl="1"/>
             <a:r>
-              <a:rPr lang="en-US" smtClean="0"/>
+              <a:rPr lang="en-US"/>
               <a:t>Second level</a:t>
             </a:r>
           </a:p>
           <a:p>
             <a:pPr lvl="2"/>
             <a:r>
-              <a:rPr lang="en-US" smtClean="0"/>
+              <a:rPr lang="en-US"/>
               <a:t>Third level</a:t>
             </a:r>
           </a:p>
           <a:p>
             <a:pPr lvl="3"/>
             <a:r>
-              <a:rPr lang="en-US" smtClean="0"/>
+              <a:rPr lang="en-US"/>
               <a:t>Fourth level</a:t>
             </a:r>
           </a:p>
           <a:p>
             <a:pPr lvl="4"/>
             <a:r>
-              <a:rPr lang="en-US" smtClean="0"/>
+              <a:rPr lang="en-US"/>
               <a:t>Fifth level</a:t>
             </a:r>
-            <a:endParaRPr lang="en-US"/>
           </a:p>
         </p:txBody>
       </p:sp>
@@ -1323,38 +1328,37 @@
           <a:p>
             <a:pPr lvl="0"/>
             <a:r>
-              <a:rPr lang="en-US" smtClean="0"/>
+              <a:rPr lang="en-US"/>
               <a:t>Click to edit Master text styles</a:t>
             </a:r>
           </a:p>
           <a:p>
             <a:pPr lvl="1"/>
             <a:r>
-              <a:rPr lang="en-US" smtClean="0"/>
+              <a:rPr lang="en-US"/>
               <a:t>Second level</a:t>
             </a:r>
           </a:p>
           <a:p>
             <a:pPr lvl="2"/>
             <a:r>
-              <a:rPr lang="en-US" smtClean="0"/>
+              <a:rPr lang="en-US"/>
               <a:t>Third level</a:t>
             </a:r>
           </a:p>
           <a:p>
             <a:pPr lvl="3"/>
             <a:r>
-              <a:rPr lang="en-US" smtClean="0"/>
+              <a:rPr lang="en-US"/>
               <a:t>Fourth level</a:t>
             </a:r>
           </a:p>
           <a:p>
             <a:pPr lvl="4"/>
             <a:r>
-              <a:rPr lang="en-US" smtClean="0"/>
+              <a:rPr lang="en-US"/>
               <a:t>Fifth level</a:t>
             </a:r>
-            <a:endParaRPr lang="en-US"/>
           </a:p>
         </p:txBody>
       </p:sp>
@@ -1375,7 +1379,7 @@
           <a:p>
             <a:fld id="{5BCAD085-E8A6-8845-BD4E-CB4CCA059FC4}" type="datetimeFigureOut">
               <a:rPr lang="en-US" smtClean="0"/>
-              <a:t>1/27/13</a:t>
+              <a:t>7/9/2026</a:t>
             </a:fld>
             <a:endParaRPr lang="en-US"/>
           </a:p>
@@ -1473,10 +1477,9 @@
           </a:lstStyle>
           <a:p>
             <a:r>
-              <a:rPr lang="en-US" smtClean="0"/>
+              <a:rPr lang="en-US"/>
               <a:t>Click to edit Master title style</a:t>
             </a:r>
-            <a:endParaRPr lang="en-US"/>
           </a:p>
         </p:txBody>
       </p:sp>
@@ -1539,7 +1542,7 @@
           <a:p>
             <a:pPr lvl="0"/>
             <a:r>
-              <a:rPr lang="en-US" smtClean="0"/>
+              <a:rPr lang="en-US"/>
               <a:t>Click to edit Master text styles</a:t>
             </a:r>
           </a:p>
@@ -1595,38 +1598,37 @@
           <a:p>
             <a:pPr lvl="0"/>
             <a:r>
-              <a:rPr lang="en-US" smtClean="0"/>
+              <a:rPr lang="en-US"/>
               <a:t>Click to edit Master text styles</a:t>
             </a:r>
           </a:p>
           <a:p>
             <a:pPr lvl="1"/>
             <a:r>
-              <a:rPr lang="en-US" smtClean="0"/>
+              <a:rPr lang="en-US"/>
               <a:t>Second level</a:t>
             </a:r>
           </a:p>
           <a:p>
             <a:pPr lvl="2"/>
             <a:r>
-              <a:rPr lang="en-US" smtClean="0"/>
+              <a:rPr lang="en-US"/>
               <a:t>Third level</a:t>
             </a:r>
           </a:p>
           <a:p>
             <a:pPr lvl="3"/>
             <a:r>
-              <a:rPr lang="en-US" smtClean="0"/>
+              <a:rPr lang="en-US"/>
               <a:t>Fourth level</a:t>
             </a:r>
           </a:p>
           <a:p>
             <a:pPr lvl="4"/>
             <a:r>
-              <a:rPr lang="en-US" smtClean="0"/>
+              <a:rPr lang="en-US"/>
               <a:t>Fifth level</a:t>
             </a:r>
-            <a:endParaRPr lang="en-US"/>
           </a:p>
         </p:txBody>
       </p:sp>
@@ -1689,7 +1691,7 @@
           <a:p>
             <a:pPr lvl="0"/>
             <a:r>
-              <a:rPr lang="en-US" smtClean="0"/>
+              <a:rPr lang="en-US"/>
               <a:t>Click to edit Master text styles</a:t>
             </a:r>
           </a:p>
@@ -1745,38 +1747,37 @@
           <a:p>
             <a:pPr lvl="0"/>
             <a:r>
-              <a:rPr lang="en-US" smtClean="0"/>
+              <a:rPr lang="en-US"/>
               <a:t>Click to edit Master text styles</a:t>
             </a:r>
           </a:p>
           <a:p>
             <a:pPr lvl="1"/>
             <a:r>
-              <a:rPr lang="en-US" smtClean="0"/>
+              <a:rPr lang="en-US"/>
               <a:t>Second level</a:t>
             </a:r>
           </a:p>
           <a:p>
             <a:pPr lvl="2"/>
             <a:r>
-              <a:rPr lang="en-US" smtClean="0"/>
+              <a:rPr lang="en-US"/>
               <a:t>Third level</a:t>
             </a:r>
           </a:p>
           <a:p>
             <a:pPr lvl="3"/>
             <a:r>
-              <a:rPr lang="en-US" smtClean="0"/>
+              <a:rPr lang="en-US"/>
               <a:t>Fourth level</a:t>
             </a:r>
           </a:p>
           <a:p>
             <a:pPr lvl="4"/>
             <a:r>
-              <a:rPr lang="en-US" smtClean="0"/>
+              <a:rPr lang="en-US"/>
               <a:t>Fifth level</a:t>
             </a:r>
-            <a:endParaRPr lang="en-US"/>
           </a:p>
         </p:txBody>
       </p:sp>
@@ -1797,7 +1798,7 @@
           <a:p>
             <a:fld id="{5BCAD085-E8A6-8845-BD4E-CB4CCA059FC4}" type="datetimeFigureOut">
               <a:rPr lang="en-US" smtClean="0"/>
-              <a:t>1/27/13</a:t>
+              <a:t>7/9/2026</a:t>
             </a:fld>
             <a:endParaRPr lang="en-US"/>
           </a:p>
@@ -1891,10 +1892,9 @@
           <a:lstStyle/>
           <a:p>
             <a:r>
-              <a:rPr lang="en-US" smtClean="0"/>
+              <a:rPr lang="en-US"/>
               <a:t>Click to edit Master title style</a:t>
             </a:r>
-            <a:endParaRPr lang="en-US"/>
           </a:p>
         </p:txBody>
       </p:sp>
@@ -1915,7 +1915,7 @@
           <a:p>
             <a:fld id="{5BCAD085-E8A6-8845-BD4E-CB4CCA059FC4}" type="datetimeFigureOut">
               <a:rPr lang="en-US" smtClean="0"/>
-              <a:t>1/27/13</a:t>
+              <a:t>7/9/2026</a:t>
             </a:fld>
             <a:endParaRPr lang="en-US"/>
           </a:p>
@@ -2010,7 +2010,7 @@
           <a:p>
             <a:fld id="{5BCAD085-E8A6-8845-BD4E-CB4CCA059FC4}" type="datetimeFigureOut">
               <a:rPr lang="en-US" smtClean="0"/>
-              <a:t>1/27/13</a:t>
+              <a:t>7/9/2026</a:t>
             </a:fld>
             <a:endParaRPr lang="en-US"/>
           </a:p>
@@ -2113,10 +2113,9 @@
           </a:lstStyle>
           <a:p>
             <a:r>
-              <a:rPr lang="en-US" smtClean="0"/>
+              <a:rPr lang="en-US"/>
               <a:t>Click to edit Master title style</a:t>
             </a:r>
-            <a:endParaRPr lang="en-US"/>
           </a:p>
         </p:txBody>
       </p:sp>
@@ -2170,38 +2169,37 @@
           <a:p>
             <a:pPr lvl="0"/>
             <a:r>
-              <a:rPr lang="en-US" smtClean="0"/>
+              <a:rPr lang="en-US"/>
               <a:t>Click to edit Master text styles</a:t>
             </a:r>
           </a:p>
           <a:p>
             <a:pPr lvl="1"/>
             <a:r>
-              <a:rPr lang="en-US" smtClean="0"/>
+              <a:rPr lang="en-US"/>
               <a:t>Second level</a:t>
             </a:r>
           </a:p>
           <a:p>
             <a:pPr lvl="2"/>
             <a:r>
-              <a:rPr lang="en-US" smtClean="0"/>
+              <a:rPr lang="en-US"/>
               <a:t>Third level</a:t>
             </a:r>
           </a:p>
           <a:p>
             <a:pPr lvl="3"/>
             <a:r>
-              <a:rPr lang="en-US" smtClean="0"/>
+              <a:rPr lang="en-US"/>
               <a:t>Fourth level</a:t>
             </a:r>
           </a:p>
           <a:p>
             <a:pPr lvl="4"/>
             <a:r>
-              <a:rPr lang="en-US" smtClean="0"/>
+              <a:rPr lang="en-US"/>
               <a:t>Fifth level</a:t>
             </a:r>
-            <a:endParaRPr lang="en-US"/>
           </a:p>
         </p:txBody>
       </p:sp>
@@ -2264,7 +2262,7 @@
           <a:p>
             <a:pPr lvl="0"/>
             <a:r>
-              <a:rPr lang="en-US" smtClean="0"/>
+              <a:rPr lang="en-US"/>
               <a:t>Click to edit Master text styles</a:t>
             </a:r>
           </a:p>
@@ -2287,7 +2285,7 @@
           <a:p>
             <a:fld id="{5BCAD085-E8A6-8845-BD4E-CB4CCA059FC4}" type="datetimeFigureOut">
               <a:rPr lang="en-US" smtClean="0"/>
-              <a:t>1/27/13</a:t>
+              <a:t>7/9/2026</a:t>
             </a:fld>
             <a:endParaRPr lang="en-US"/>
           </a:p>
@@ -2390,10 +2388,9 @@
           </a:lstStyle>
           <a:p>
             <a:r>
-              <a:rPr lang="en-US" smtClean="0"/>
+              <a:rPr lang="en-US"/>
               <a:t>Click to edit Master title style</a:t>
             </a:r>
-            <a:endParaRPr lang="en-US"/>
           </a:p>
         </p:txBody>
       </p:sp>
@@ -2517,7 +2514,7 @@
           <a:p>
             <a:pPr lvl="0"/>
             <a:r>
-              <a:rPr lang="en-US" smtClean="0"/>
+              <a:rPr lang="en-US"/>
               <a:t>Click to edit Master text styles</a:t>
             </a:r>
           </a:p>
@@ -2540,7 +2537,7 @@
           <a:p>
             <a:fld id="{5BCAD085-E8A6-8845-BD4E-CB4CCA059FC4}" type="datetimeFigureOut">
               <a:rPr lang="en-US" smtClean="0"/>
-              <a:t>1/27/13</a:t>
+              <a:t>7/9/2026</a:t>
             </a:fld>
             <a:endParaRPr lang="en-US"/>
           </a:p>
@@ -2649,10 +2646,9 @@
           <a:lstStyle/>
           <a:p>
             <a:r>
-              <a:rPr lang="en-US" smtClean="0"/>
+              <a:rPr lang="en-US"/>
               <a:t>Click to edit Master title style</a:t>
             </a:r>
-            <a:endParaRPr lang="en-US"/>
           </a:p>
         </p:txBody>
       </p:sp>
@@ -2683,38 +2679,37 @@
           <a:p>
             <a:pPr lvl="0"/>
             <a:r>
-              <a:rPr lang="en-US" smtClean="0"/>
+              <a:rPr lang="en-US"/>
               <a:t>Click to edit Master text styles</a:t>
             </a:r>
           </a:p>
           <a:p>
             <a:pPr lvl="1"/>
             <a:r>
-              <a:rPr lang="en-US" smtClean="0"/>
+              <a:rPr lang="en-US"/>
               <a:t>Second level</a:t>
             </a:r>
           </a:p>
           <a:p>
             <a:pPr lvl="2"/>
             <a:r>
-              <a:rPr lang="en-US" smtClean="0"/>
+              <a:rPr lang="en-US"/>
               <a:t>Third level</a:t>
             </a:r>
           </a:p>
           <a:p>
             <a:pPr lvl="3"/>
             <a:r>
-              <a:rPr lang="en-US" smtClean="0"/>
+              <a:rPr lang="en-US"/>
               <a:t>Fourth level</a:t>
             </a:r>
           </a:p>
           <a:p>
             <a:pPr lvl="4"/>
             <a:r>
-              <a:rPr lang="en-US" smtClean="0"/>
+              <a:rPr lang="en-US"/>
               <a:t>Fifth level</a:t>
             </a:r>
-            <a:endParaRPr lang="en-US"/>
           </a:p>
         </p:txBody>
       </p:sp>
@@ -2753,7 +2748,7 @@
           <a:p>
             <a:fld id="{5BCAD085-E8A6-8845-BD4E-CB4CCA059FC4}" type="datetimeFigureOut">
               <a:rPr lang="en-US" smtClean="0"/>
-              <a:t>1/27/13</a:t>
+              <a:t>7/9/2026</a:t>
             </a:fld>
             <a:endParaRPr lang="en-US"/>
           </a:p>
@@ -3112,7 +3107,7 @@
 </file>
 
 <file path=ppt/slides/slide1.xml><?xml version="1.0" encoding="utf-8"?>
-<p:sld xmlns:a="http://schemas.openxmlformats.org/drawingml/2006/main" xmlns:p="http://schemas.openxmlformats.org/presentationml/2006/main" xmlns:r="http://schemas.openxmlformats.org/officeDocument/2006/relationships">
+<p:sld xmlns:a="http://schemas.openxmlformats.org/drawingml/2006/main" xmlns:r="http://schemas.openxmlformats.org/officeDocument/2006/relationships" xmlns:p="http://schemas.openxmlformats.org/presentationml/2006/main">
   <p:cSld>
     <p:spTree>
       <p:nvGrpSpPr>
@@ -3120,7 +3115,14 @@
         <p:cNvGrpSpPr/>
         <p:nvPr/>
       </p:nvGrpSpPr>
-      <p:grpSpPr/>
+      <p:grpSpPr>
+        <a:xfrm>
+          <a:off x="0" y="0"/>
+          <a:ext cx="0" cy="0"/>
+          <a:chOff x="0" y="0"/>
+          <a:chExt cx="0" cy="0"/>
+        </a:xfrm>
+      </p:grpSpPr>
       <p:sp>
         <p:nvSpPr>
           <p:cNvPr id="2" name="Rectangle 1"/>
@@ -3162,6 +3164,7 @@
           <a:lstStyle/>
           <a:p>
             <a:pPr algn="ctr"/>
+            <a:endParaRPr/>
           </a:p>
         </p:txBody>
       </p:sp>
@@ -3230,6 +3233,7 @@
           <a:lstStyle/>
           <a:p>
             <a:pPr algn="ctr"/>
+            <a:endParaRPr/>
           </a:p>
         </p:txBody>
       </p:sp>
@@ -3250,7 +3254,7 @@
           <a:noFill/>
         </p:spPr>
         <p:txBody>
-          <a:bodyPr wrap="square" anchor="t" lIns="0" rIns="0" tIns="0" bIns="0">
+          <a:bodyPr wrap="square" lIns="0" tIns="0" rIns="0" bIns="0" anchor="t">
             <a:spAutoFit/>
           </a:bodyPr>
           <a:lstStyle/>
@@ -3295,7 +3299,7 @@
           <a:noFill/>
         </p:spPr>
         <p:txBody>
-          <a:bodyPr wrap="square" anchor="t" lIns="0" rIns="0" tIns="0" bIns="0">
+          <a:bodyPr wrap="square" lIns="0" tIns="0" rIns="0" bIns="0" anchor="t">
             <a:spAutoFit/>
           </a:bodyPr>
           <a:lstStyle/>
@@ -3362,7 +3366,7 @@
           <a:noFill/>
         </p:spPr>
         <p:txBody>
-          <a:bodyPr wrap="square" anchor="t" lIns="0" rIns="0" tIns="0" bIns="0">
+          <a:bodyPr wrap="square" lIns="0" tIns="0" rIns="0" bIns="0" anchor="t">
             <a:spAutoFit/>
           </a:bodyPr>
           <a:lstStyle/>
@@ -3407,7 +3411,7 @@
           <a:noFill/>
         </p:spPr>
         <p:txBody>
-          <a:bodyPr wrap="square" anchor="t" lIns="0" rIns="0" tIns="0" bIns="0">
+          <a:bodyPr wrap="square" lIns="0" tIns="0" rIns="0" bIns="0" anchor="t">
             <a:spAutoFit/>
           </a:bodyPr>
           <a:lstStyle/>
@@ -3452,7 +3456,7 @@
           <a:noFill/>
         </p:spPr>
         <p:txBody>
-          <a:bodyPr wrap="square" anchor="t" lIns="0" rIns="0" tIns="0" bIns="0">
+          <a:bodyPr wrap="square" lIns="0" tIns="0" rIns="0" bIns="0" anchor="t">
             <a:spAutoFit/>
           </a:bodyPr>
           <a:lstStyle/>
@@ -3489,7 +3493,7 @@
 </file>
 
 <file path=ppt/slides/slide10.xml><?xml version="1.0" encoding="utf-8"?>
-<p:sld xmlns:a="http://schemas.openxmlformats.org/drawingml/2006/main" xmlns:p="http://schemas.openxmlformats.org/presentationml/2006/main" xmlns:r="http://schemas.openxmlformats.org/officeDocument/2006/relationships">
+<p:sld xmlns:a="http://schemas.openxmlformats.org/drawingml/2006/main" xmlns:r="http://schemas.openxmlformats.org/officeDocument/2006/relationships" xmlns:p="http://schemas.openxmlformats.org/presentationml/2006/main">
   <p:cSld>
     <p:spTree>
       <p:nvGrpSpPr>
@@ -3497,7 +3501,14 @@
         <p:cNvGrpSpPr/>
         <p:nvPr/>
       </p:nvGrpSpPr>
-      <p:grpSpPr/>
+      <p:grpSpPr>
+        <a:xfrm>
+          <a:off x="0" y="0"/>
+          <a:ext cx="0" cy="0"/>
+          <a:chOff x="0" y="0"/>
+          <a:chExt cx="0" cy="0"/>
+        </a:xfrm>
+      </p:grpSpPr>
       <p:sp>
         <p:nvSpPr>
           <p:cNvPr id="2" name="Rectangle 1"/>
@@ -3539,6 +3550,7 @@
           <a:lstStyle/>
           <a:p>
             <a:pPr algn="ctr"/>
+            <a:endParaRPr/>
           </a:p>
         </p:txBody>
       </p:sp>
@@ -3583,6 +3595,7 @@
           <a:lstStyle/>
           <a:p>
             <a:pPr algn="ctr"/>
+            <a:endParaRPr/>
           </a:p>
         </p:txBody>
       </p:sp>
@@ -3603,7 +3616,7 @@
           <a:noFill/>
         </p:spPr>
         <p:txBody>
-          <a:bodyPr wrap="square" anchor="t" lIns="0" rIns="0" tIns="0" bIns="0">
+          <a:bodyPr wrap="square" lIns="0" tIns="0" rIns="0" bIns="0" anchor="t">
             <a:spAutoFit/>
           </a:bodyPr>
           <a:lstStyle/>
@@ -3648,7 +3661,7 @@
           <a:noFill/>
         </p:spPr>
         <p:txBody>
-          <a:bodyPr wrap="square" anchor="t" lIns="0" rIns="0" tIns="0" bIns="0">
+          <a:bodyPr wrap="square" lIns="0" tIns="0" rIns="0" bIns="0" anchor="t">
             <a:spAutoFit/>
           </a:bodyPr>
           <a:lstStyle/>
@@ -3717,6 +3730,7 @@
           <a:lstStyle/>
           <a:p>
             <a:pPr algn="ctr"/>
+            <a:endParaRPr/>
           </a:p>
         </p:txBody>
       </p:sp>
@@ -3737,7 +3751,7 @@
           <a:noFill/>
         </p:spPr>
         <p:txBody>
-          <a:bodyPr wrap="square" anchor="t" lIns="0" rIns="0" tIns="0" bIns="0">
+          <a:bodyPr wrap="square" lIns="0" tIns="0" rIns="0" bIns="0" anchor="t">
             <a:spAutoFit/>
           </a:bodyPr>
           <a:lstStyle/>
@@ -3782,7 +3796,7 @@
           <a:noFill/>
         </p:spPr>
         <p:txBody>
-          <a:bodyPr wrap="square" anchor="t" lIns="0" rIns="0" tIns="0" bIns="0">
+          <a:bodyPr wrap="square" lIns="0" tIns="0" rIns="0" bIns="0" anchor="t">
             <a:spAutoFit/>
           </a:bodyPr>
           <a:lstStyle/>
@@ -3827,7 +3841,7 @@
           <a:noFill/>
         </p:spPr>
         <p:txBody>
-          <a:bodyPr wrap="square" anchor="t" lIns="0" rIns="0" tIns="0" bIns="0">
+          <a:bodyPr wrap="square" lIns="0" tIns="0" rIns="0" bIns="0" anchor="t">
             <a:spAutoFit/>
           </a:bodyPr>
           <a:lstStyle/>
@@ -3896,6 +3910,7 @@
           <a:lstStyle/>
           <a:p>
             <a:pPr algn="ctr"/>
+            <a:endParaRPr/>
           </a:p>
         </p:txBody>
       </p:sp>
@@ -3916,7 +3931,7 @@
           <a:noFill/>
         </p:spPr>
         <p:txBody>
-          <a:bodyPr wrap="square" anchor="t" lIns="0" rIns="0" tIns="0" bIns="0">
+          <a:bodyPr wrap="square" lIns="0" tIns="0" rIns="0" bIns="0" anchor="t">
             <a:spAutoFit/>
           </a:bodyPr>
           <a:lstStyle/>
@@ -3961,7 +3976,7 @@
           <a:noFill/>
         </p:spPr>
         <p:txBody>
-          <a:bodyPr wrap="square" anchor="t" lIns="0" rIns="0" tIns="0" bIns="0">
+          <a:bodyPr wrap="square" lIns="0" tIns="0" rIns="0" bIns="0" anchor="t">
             <a:spAutoFit/>
           </a:bodyPr>
           <a:lstStyle/>
@@ -4006,7 +4021,7 @@
           <a:noFill/>
         </p:spPr>
         <p:txBody>
-          <a:bodyPr wrap="square" anchor="t" lIns="0" rIns="0" tIns="0" bIns="0">
+          <a:bodyPr wrap="square" lIns="0" tIns="0" rIns="0" bIns="0" anchor="t">
             <a:spAutoFit/>
           </a:bodyPr>
           <a:lstStyle/>
@@ -4075,6 +4090,7 @@
           <a:lstStyle/>
           <a:p>
             <a:pPr algn="ctr"/>
+            <a:endParaRPr/>
           </a:p>
         </p:txBody>
       </p:sp>
@@ -4095,7 +4111,7 @@
           <a:noFill/>
         </p:spPr>
         <p:txBody>
-          <a:bodyPr wrap="square" anchor="t" lIns="0" rIns="0" tIns="0" bIns="0">
+          <a:bodyPr wrap="square" lIns="0" tIns="0" rIns="0" bIns="0" anchor="t">
             <a:spAutoFit/>
           </a:bodyPr>
           <a:lstStyle/>
@@ -4140,7 +4156,7 @@
           <a:noFill/>
         </p:spPr>
         <p:txBody>
-          <a:bodyPr wrap="square" anchor="t" lIns="0" rIns="0" tIns="0" bIns="0">
+          <a:bodyPr wrap="square" lIns="0" tIns="0" rIns="0" bIns="0" anchor="t">
             <a:spAutoFit/>
           </a:bodyPr>
           <a:lstStyle/>
@@ -4185,7 +4201,7 @@
           <a:noFill/>
         </p:spPr>
         <p:txBody>
-          <a:bodyPr wrap="square" anchor="t" lIns="0" rIns="0" tIns="0" bIns="0">
+          <a:bodyPr wrap="square" lIns="0" tIns="0" rIns="0" bIns="0" anchor="t">
             <a:spAutoFit/>
           </a:bodyPr>
           <a:lstStyle/>
@@ -4254,6 +4270,7 @@
           <a:lstStyle/>
           <a:p>
             <a:pPr algn="ctr"/>
+            <a:endParaRPr/>
           </a:p>
         </p:txBody>
       </p:sp>
@@ -4274,7 +4291,7 @@
           <a:noFill/>
         </p:spPr>
         <p:txBody>
-          <a:bodyPr wrap="square" anchor="t" lIns="0" rIns="0" tIns="0" bIns="0">
+          <a:bodyPr wrap="square" lIns="0" tIns="0" rIns="0" bIns="0" anchor="t">
             <a:spAutoFit/>
           </a:bodyPr>
           <a:lstStyle/>
@@ -4319,7 +4336,7 @@
           <a:noFill/>
         </p:spPr>
         <p:txBody>
-          <a:bodyPr wrap="square" anchor="t" lIns="0" rIns="0" tIns="0" bIns="0">
+          <a:bodyPr wrap="square" lIns="0" tIns="0" rIns="0" bIns="0" anchor="t">
             <a:spAutoFit/>
           </a:bodyPr>
           <a:lstStyle/>
@@ -4364,7 +4381,7 @@
           <a:noFill/>
         </p:spPr>
         <p:txBody>
-          <a:bodyPr wrap="square" anchor="t" lIns="0" rIns="0" tIns="0" bIns="0">
+          <a:bodyPr wrap="square" lIns="0" tIns="0" rIns="0" bIns="0" anchor="t">
             <a:spAutoFit/>
           </a:bodyPr>
           <a:lstStyle/>
@@ -4433,6 +4450,7 @@
           <a:lstStyle/>
           <a:p>
             <a:pPr algn="ctr"/>
+            <a:endParaRPr/>
           </a:p>
         </p:txBody>
       </p:sp>
@@ -4453,7 +4471,7 @@
           <a:noFill/>
         </p:spPr>
         <p:txBody>
-          <a:bodyPr wrap="square" anchor="t" lIns="0" rIns="0" tIns="0" bIns="0">
+          <a:bodyPr wrap="square" lIns="0" tIns="0" rIns="0" bIns="0" anchor="t">
             <a:spAutoFit/>
           </a:bodyPr>
           <a:lstStyle/>
@@ -4498,7 +4516,7 @@
           <a:noFill/>
         </p:spPr>
         <p:txBody>
-          <a:bodyPr wrap="square" anchor="t" lIns="0" rIns="0" tIns="0" bIns="0">
+          <a:bodyPr wrap="square" lIns="0" tIns="0" rIns="0" bIns="0" anchor="t">
             <a:spAutoFit/>
           </a:bodyPr>
           <a:lstStyle/>
@@ -4543,7 +4561,7 @@
           <a:noFill/>
         </p:spPr>
         <p:txBody>
-          <a:bodyPr wrap="square" anchor="t" lIns="0" rIns="0" tIns="0" bIns="0">
+          <a:bodyPr wrap="square" lIns="0" tIns="0" rIns="0" bIns="0" anchor="t">
             <a:spAutoFit/>
           </a:bodyPr>
           <a:lstStyle/>
@@ -4612,6 +4630,7 @@
           <a:lstStyle/>
           <a:p>
             <a:pPr algn="ctr"/>
+            <a:endParaRPr/>
           </a:p>
         </p:txBody>
       </p:sp>
@@ -4632,7 +4651,7 @@
           <a:noFill/>
         </p:spPr>
         <p:txBody>
-          <a:bodyPr wrap="square" anchor="t" lIns="0" rIns="0" tIns="0" bIns="0">
+          <a:bodyPr wrap="square" lIns="0" tIns="0" rIns="0" bIns="0" anchor="t">
             <a:spAutoFit/>
           </a:bodyPr>
           <a:lstStyle/>
@@ -4677,7 +4696,7 @@
           <a:noFill/>
         </p:spPr>
         <p:txBody>
-          <a:bodyPr wrap="square" anchor="t" lIns="0" rIns="0" tIns="0" bIns="0">
+          <a:bodyPr wrap="square" lIns="0" tIns="0" rIns="0" bIns="0" anchor="t">
             <a:spAutoFit/>
           </a:bodyPr>
           <a:lstStyle/>
@@ -4722,7 +4741,7 @@
           <a:noFill/>
         </p:spPr>
         <p:txBody>
-          <a:bodyPr wrap="square" anchor="t" lIns="0" rIns="0" tIns="0" bIns="0">
+          <a:bodyPr wrap="square" lIns="0" tIns="0" rIns="0" bIns="0" anchor="t">
             <a:spAutoFit/>
           </a:bodyPr>
           <a:lstStyle/>
@@ -4791,6 +4810,7 @@
           <a:lstStyle/>
           <a:p>
             <a:pPr algn="ctr"/>
+            <a:endParaRPr/>
           </a:p>
         </p:txBody>
       </p:sp>
@@ -4811,7 +4831,7 @@
           <a:noFill/>
         </p:spPr>
         <p:txBody>
-          <a:bodyPr wrap="square" anchor="t" lIns="0" rIns="0" tIns="0" bIns="0">
+          <a:bodyPr wrap="square" lIns="0" tIns="0" rIns="0" bIns="0" anchor="t">
             <a:spAutoFit/>
           </a:bodyPr>
           <a:lstStyle/>
@@ -4856,7 +4876,7 @@
           <a:noFill/>
         </p:spPr>
         <p:txBody>
-          <a:bodyPr wrap="square" anchor="t" lIns="0" rIns="0" tIns="0" bIns="0">
+          <a:bodyPr wrap="square" lIns="0" tIns="0" rIns="0" bIns="0" anchor="t">
             <a:spAutoFit/>
           </a:bodyPr>
           <a:lstStyle/>
@@ -4901,7 +4921,7 @@
           <a:noFill/>
         </p:spPr>
         <p:txBody>
-          <a:bodyPr wrap="square" anchor="t" lIns="0" rIns="0" tIns="0" bIns="0">
+          <a:bodyPr wrap="square" lIns="0" tIns="0" rIns="0" bIns="0" anchor="t">
             <a:spAutoFit/>
           </a:bodyPr>
           <a:lstStyle/>
@@ -4970,6 +4990,7 @@
           <a:lstStyle/>
           <a:p>
             <a:pPr algn="ctr"/>
+            <a:endParaRPr/>
           </a:p>
         </p:txBody>
       </p:sp>
@@ -4990,7 +5011,7 @@
           <a:noFill/>
         </p:spPr>
         <p:txBody>
-          <a:bodyPr wrap="square" anchor="t" lIns="0" rIns="0" tIns="0" bIns="0">
+          <a:bodyPr wrap="square" lIns="0" tIns="0" rIns="0" bIns="0" anchor="t">
             <a:spAutoFit/>
           </a:bodyPr>
           <a:lstStyle/>
@@ -5035,7 +5056,7 @@
           <a:noFill/>
         </p:spPr>
         <p:txBody>
-          <a:bodyPr wrap="square" anchor="t" lIns="0" rIns="0" tIns="0" bIns="0">
+          <a:bodyPr wrap="square" lIns="0" tIns="0" rIns="0" bIns="0" anchor="t">
             <a:spAutoFit/>
           </a:bodyPr>
           <a:lstStyle/>
@@ -5080,7 +5101,7 @@
           <a:noFill/>
         </p:spPr>
         <p:txBody>
-          <a:bodyPr wrap="square" anchor="t" lIns="0" rIns="0" tIns="0" bIns="0">
+          <a:bodyPr wrap="square" lIns="0" tIns="0" rIns="0" bIns="0" anchor="t">
             <a:spAutoFit/>
           </a:bodyPr>
           <a:lstStyle/>
@@ -5149,6 +5170,7 @@
           <a:lstStyle/>
           <a:p>
             <a:pPr algn="ctr"/>
+            <a:endParaRPr/>
           </a:p>
         </p:txBody>
       </p:sp>
@@ -5169,7 +5191,7 @@
           <a:noFill/>
         </p:spPr>
         <p:txBody>
-          <a:bodyPr wrap="square" anchor="t" lIns="0" rIns="0" tIns="0" bIns="0">
+          <a:bodyPr wrap="square" lIns="0" tIns="0" rIns="0" bIns="0" anchor="t">
             <a:spAutoFit/>
           </a:bodyPr>
           <a:lstStyle/>
@@ -5214,7 +5236,7 @@
           <a:noFill/>
         </p:spPr>
         <p:txBody>
-          <a:bodyPr wrap="square" anchor="t" lIns="0" rIns="0" tIns="0" bIns="0">
+          <a:bodyPr wrap="square" lIns="0" tIns="0" rIns="0" bIns="0" anchor="t">
             <a:spAutoFit/>
           </a:bodyPr>
           <a:lstStyle/>
@@ -5259,7 +5281,7 @@
           <a:noFill/>
         </p:spPr>
         <p:txBody>
-          <a:bodyPr wrap="square" anchor="t" lIns="0" rIns="0" tIns="0" bIns="0">
+          <a:bodyPr wrap="square" lIns="0" tIns="0" rIns="0" bIns="0" anchor="t">
             <a:spAutoFit/>
           </a:bodyPr>
           <a:lstStyle/>
@@ -5328,6 +5350,7 @@
           <a:lstStyle/>
           <a:p>
             <a:pPr algn="ctr"/>
+            <a:endParaRPr/>
           </a:p>
         </p:txBody>
       </p:sp>
@@ -5348,7 +5371,7 @@
           <a:noFill/>
         </p:spPr>
         <p:txBody>
-          <a:bodyPr wrap="square" anchor="t" lIns="0" rIns="0" tIns="0" bIns="0">
+          <a:bodyPr wrap="square" lIns="0" tIns="0" rIns="0" bIns="0" anchor="t">
             <a:spAutoFit/>
           </a:bodyPr>
           <a:lstStyle/>
@@ -5393,7 +5416,7 @@
           <a:noFill/>
         </p:spPr>
         <p:txBody>
-          <a:bodyPr wrap="square" anchor="t" lIns="0" rIns="0" tIns="0" bIns="0">
+          <a:bodyPr wrap="square" lIns="0" tIns="0" rIns="0" bIns="0" anchor="t">
             <a:spAutoFit/>
           </a:bodyPr>
           <a:lstStyle/>
@@ -5438,7 +5461,7 @@
           <a:noFill/>
         </p:spPr>
         <p:txBody>
-          <a:bodyPr wrap="square" anchor="t" lIns="0" rIns="0" tIns="0" bIns="0">
+          <a:bodyPr wrap="square" lIns="0" tIns="0" rIns="0" bIns="0" anchor="t">
             <a:spAutoFit/>
           </a:bodyPr>
           <a:lstStyle/>
@@ -5507,6 +5530,7 @@
           <a:lstStyle/>
           <a:p>
             <a:pPr algn="ctr"/>
+            <a:endParaRPr/>
           </a:p>
         </p:txBody>
       </p:sp>
@@ -5527,7 +5551,7 @@
           <a:noFill/>
         </p:spPr>
         <p:txBody>
-          <a:bodyPr wrap="square" anchor="t" lIns="0" rIns="0" tIns="0" bIns="0">
+          <a:bodyPr wrap="square" lIns="0" tIns="0" rIns="0" bIns="0" anchor="t">
             <a:spAutoFit/>
           </a:bodyPr>
           <a:lstStyle/>
@@ -5572,7 +5596,7 @@
           <a:noFill/>
         </p:spPr>
         <p:txBody>
-          <a:bodyPr wrap="square" anchor="t" lIns="0" rIns="0" tIns="0" bIns="0">
+          <a:bodyPr wrap="square" lIns="0" tIns="0" rIns="0" bIns="0" anchor="t">
             <a:spAutoFit/>
           </a:bodyPr>
           <a:lstStyle/>
@@ -5617,7 +5641,7 @@
           <a:noFill/>
         </p:spPr>
         <p:txBody>
-          <a:bodyPr wrap="square" anchor="t" lIns="0" rIns="0" tIns="0" bIns="0">
+          <a:bodyPr wrap="square" lIns="0" tIns="0" rIns="0" bIns="0" anchor="t">
             <a:spAutoFit/>
           </a:bodyPr>
           <a:lstStyle/>
@@ -5686,6 +5710,7 @@
           <a:lstStyle/>
           <a:p>
             <a:pPr algn="ctr"/>
+            <a:endParaRPr/>
           </a:p>
         </p:txBody>
       </p:sp>
@@ -5706,7 +5731,7 @@
           <a:noFill/>
         </p:spPr>
         <p:txBody>
-          <a:bodyPr wrap="square" anchor="t" lIns="0" rIns="0" tIns="0" bIns="0">
+          <a:bodyPr wrap="square" lIns="0" tIns="0" rIns="0" bIns="0" anchor="t">
             <a:spAutoFit/>
           </a:bodyPr>
           <a:lstStyle/>
@@ -5751,7 +5776,7 @@
           <a:noFill/>
         </p:spPr>
         <p:txBody>
-          <a:bodyPr wrap="square" anchor="t" lIns="0" rIns="0" tIns="0" bIns="0">
+          <a:bodyPr wrap="square" lIns="0" tIns="0" rIns="0" bIns="0" anchor="t">
             <a:spAutoFit/>
           </a:bodyPr>
           <a:lstStyle/>
@@ -5788,7 +5813,7 @@
 </file>
 
 <file path=ppt/slides/slide11.xml><?xml version="1.0" encoding="utf-8"?>
-<p:sld xmlns:a="http://schemas.openxmlformats.org/drawingml/2006/main" xmlns:p="http://schemas.openxmlformats.org/presentationml/2006/main" xmlns:r="http://schemas.openxmlformats.org/officeDocument/2006/relationships">
+<p:sld xmlns:a="http://schemas.openxmlformats.org/drawingml/2006/main" xmlns:r="http://schemas.openxmlformats.org/officeDocument/2006/relationships" xmlns:p="http://schemas.openxmlformats.org/presentationml/2006/main">
   <p:cSld>
     <p:spTree>
       <p:nvGrpSpPr>
@@ -5796,7 +5821,14 @@
         <p:cNvGrpSpPr/>
         <p:nvPr/>
       </p:nvGrpSpPr>
-      <p:grpSpPr/>
+      <p:grpSpPr>
+        <a:xfrm>
+          <a:off x="0" y="0"/>
+          <a:ext cx="0" cy="0"/>
+          <a:chOff x="0" y="0"/>
+          <a:chExt cx="0" cy="0"/>
+        </a:xfrm>
+      </p:grpSpPr>
       <p:sp>
         <p:nvSpPr>
           <p:cNvPr id="2" name="Rectangle 1"/>
@@ -5838,6 +5870,7 @@
           <a:lstStyle/>
           <a:p>
             <a:pPr algn="ctr"/>
+            <a:endParaRPr/>
           </a:p>
         </p:txBody>
       </p:sp>
@@ -5850,7 +5883,7 @@
         <p:spPr>
           <a:xfrm>
             <a:off x="0" y="0"/>
-            <a:ext cx="11148085908000" cy="6270955200000"/>
+            <a:ext cx="0" cy="0"/>
           </a:xfrm>
           <a:prstGeom prst="rect">
             <a:avLst/>
@@ -5882,6 +5915,7 @@
           <a:lstStyle/>
           <a:p>
             <a:pPr algn="ctr"/>
+            <a:endParaRPr/>
           </a:p>
         </p:txBody>
       </p:sp>
@@ -5926,6 +5960,7 @@
           <a:lstStyle/>
           <a:p>
             <a:pPr algn="ctr"/>
+            <a:endParaRPr/>
           </a:p>
         </p:txBody>
       </p:sp>
@@ -5972,6 +6007,7 @@
           <a:lstStyle/>
           <a:p>
             <a:pPr algn="ctr"/>
+            <a:endParaRPr/>
           </a:p>
         </p:txBody>
       </p:sp>
@@ -5992,7 +6028,7 @@
           <a:noFill/>
         </p:spPr>
         <p:txBody>
-          <a:bodyPr wrap="square" anchor="ctr" lIns="0" rIns="0" tIns="0" bIns="0">
+          <a:bodyPr wrap="square" lIns="0" tIns="0" rIns="0" bIns="0" anchor="ctr">
             <a:spAutoFit/>
           </a:bodyPr>
           <a:lstStyle/>
@@ -6037,7 +6073,7 @@
           <a:noFill/>
         </p:spPr>
         <p:txBody>
-          <a:bodyPr wrap="square" anchor="t" lIns="0" rIns="0" tIns="0" bIns="0">
+          <a:bodyPr wrap="square" lIns="0" tIns="0" rIns="0" bIns="0" anchor="t">
             <a:spAutoFit/>
           </a:bodyPr>
           <a:lstStyle/>
@@ -6082,7 +6118,7 @@
           <a:noFill/>
         </p:spPr>
         <p:txBody>
-          <a:bodyPr wrap="square" anchor="t" lIns="0" rIns="0" tIns="0" bIns="0">
+          <a:bodyPr wrap="square" lIns="0" tIns="0" rIns="0" bIns="0" anchor="t">
             <a:spAutoFit/>
           </a:bodyPr>
           <a:lstStyle/>
@@ -6119,7 +6155,7 @@
 </file>
 
 <file path=ppt/slides/slide12.xml><?xml version="1.0" encoding="utf-8"?>
-<p:sld xmlns:a="http://schemas.openxmlformats.org/drawingml/2006/main" xmlns:p="http://schemas.openxmlformats.org/presentationml/2006/main" xmlns:r="http://schemas.openxmlformats.org/officeDocument/2006/relationships">
+<p:sld xmlns:a="http://schemas.openxmlformats.org/drawingml/2006/main" xmlns:r="http://schemas.openxmlformats.org/officeDocument/2006/relationships" xmlns:p="http://schemas.openxmlformats.org/presentationml/2006/main">
   <p:cSld>
     <p:spTree>
       <p:nvGrpSpPr>
@@ -6127,7 +6163,14 @@
         <p:cNvGrpSpPr/>
         <p:nvPr/>
       </p:nvGrpSpPr>
-      <p:grpSpPr/>
+      <p:grpSpPr>
+        <a:xfrm>
+          <a:off x="0" y="0"/>
+          <a:ext cx="0" cy="0"/>
+          <a:chOff x="0" y="0"/>
+          <a:chExt cx="0" cy="0"/>
+        </a:xfrm>
+      </p:grpSpPr>
       <p:sp>
         <p:nvSpPr>
           <p:cNvPr id="2" name="Rectangle 1"/>
@@ -6169,6 +6212,7 @@
           <a:lstStyle/>
           <a:p>
             <a:pPr algn="ctr"/>
+            <a:endParaRPr/>
           </a:p>
         </p:txBody>
       </p:sp>
@@ -6213,6 +6257,7 @@
           <a:lstStyle/>
           <a:p>
             <a:pPr algn="ctr"/>
+            <a:endParaRPr/>
           </a:p>
         </p:txBody>
       </p:sp>
@@ -6233,7 +6278,7 @@
           <a:noFill/>
         </p:spPr>
         <p:txBody>
-          <a:bodyPr wrap="square" anchor="t" lIns="0" rIns="0" tIns="0" bIns="0">
+          <a:bodyPr wrap="square" lIns="0" tIns="0" rIns="0" bIns="0" anchor="t">
             <a:spAutoFit/>
           </a:bodyPr>
           <a:lstStyle/>
@@ -6278,7 +6323,7 @@
           <a:noFill/>
         </p:spPr>
         <p:txBody>
-          <a:bodyPr wrap="square" anchor="t" lIns="0" rIns="0" tIns="0" bIns="0">
+          <a:bodyPr wrap="square" lIns="0" tIns="0" rIns="0" bIns="0" anchor="t">
             <a:spAutoFit/>
           </a:bodyPr>
           <a:lstStyle/>
@@ -6347,6 +6392,7 @@
           <a:lstStyle/>
           <a:p>
             <a:pPr algn="ctr"/>
+            <a:endParaRPr/>
           </a:p>
         </p:txBody>
       </p:sp>
@@ -6367,7 +6413,7 @@
           <a:noFill/>
         </p:spPr>
         <p:txBody>
-          <a:bodyPr wrap="square" anchor="t" lIns="0" rIns="0" tIns="0" bIns="0">
+          <a:bodyPr wrap="square" lIns="0" tIns="0" rIns="0" bIns="0" anchor="t">
             <a:spAutoFit/>
           </a:bodyPr>
           <a:lstStyle/>
@@ -6412,7 +6458,7 @@
           <a:noFill/>
         </p:spPr>
         <p:txBody>
-          <a:bodyPr wrap="square" anchor="t" lIns="0" rIns="0" tIns="0" bIns="0">
+          <a:bodyPr wrap="square" lIns="0" tIns="0" rIns="0" bIns="0" anchor="t">
             <a:spAutoFit/>
           </a:bodyPr>
           <a:lstStyle/>
@@ -6457,7 +6503,7 @@
           <a:noFill/>
         </p:spPr>
         <p:txBody>
-          <a:bodyPr wrap="square" anchor="t" lIns="0" rIns="0" tIns="0" bIns="0">
+          <a:bodyPr wrap="square" lIns="0" tIns="0" rIns="0" bIns="0" anchor="t">
             <a:spAutoFit/>
           </a:bodyPr>
           <a:lstStyle/>
@@ -6526,6 +6572,7 @@
           <a:lstStyle/>
           <a:p>
             <a:pPr algn="ctr"/>
+            <a:endParaRPr/>
           </a:p>
         </p:txBody>
       </p:sp>
@@ -6546,7 +6593,7 @@
           <a:noFill/>
         </p:spPr>
         <p:txBody>
-          <a:bodyPr wrap="square" anchor="t" lIns="0" rIns="0" tIns="0" bIns="0">
+          <a:bodyPr wrap="square" lIns="0" tIns="0" rIns="0" bIns="0" anchor="t">
             <a:spAutoFit/>
           </a:bodyPr>
           <a:lstStyle/>
@@ -6591,7 +6638,7 @@
           <a:noFill/>
         </p:spPr>
         <p:txBody>
-          <a:bodyPr wrap="square" anchor="t" lIns="0" rIns="0" tIns="0" bIns="0">
+          <a:bodyPr wrap="square" lIns="0" tIns="0" rIns="0" bIns="0" anchor="t">
             <a:spAutoFit/>
           </a:bodyPr>
           <a:lstStyle/>
@@ -6636,7 +6683,7 @@
           <a:noFill/>
         </p:spPr>
         <p:txBody>
-          <a:bodyPr wrap="square" anchor="t" lIns="0" rIns="0" tIns="0" bIns="0">
+          <a:bodyPr wrap="square" lIns="0" tIns="0" rIns="0" bIns="0" anchor="t">
             <a:spAutoFit/>
           </a:bodyPr>
           <a:lstStyle/>
@@ -6705,6 +6752,7 @@
           <a:lstStyle/>
           <a:p>
             <a:pPr algn="ctr"/>
+            <a:endParaRPr/>
           </a:p>
         </p:txBody>
       </p:sp>
@@ -6725,7 +6773,7 @@
           <a:noFill/>
         </p:spPr>
         <p:txBody>
-          <a:bodyPr wrap="square" anchor="t" lIns="0" rIns="0" tIns="0" bIns="0">
+          <a:bodyPr wrap="square" lIns="0" tIns="0" rIns="0" bIns="0" anchor="t">
             <a:spAutoFit/>
           </a:bodyPr>
           <a:lstStyle/>
@@ -6770,7 +6818,7 @@
           <a:noFill/>
         </p:spPr>
         <p:txBody>
-          <a:bodyPr wrap="square" anchor="t" lIns="0" rIns="0" tIns="0" bIns="0">
+          <a:bodyPr wrap="square" lIns="0" tIns="0" rIns="0" bIns="0" anchor="t">
             <a:spAutoFit/>
           </a:bodyPr>
           <a:lstStyle/>
@@ -6815,7 +6863,7 @@
           <a:noFill/>
         </p:spPr>
         <p:txBody>
-          <a:bodyPr wrap="square" anchor="t" lIns="0" rIns="0" tIns="0" bIns="0">
+          <a:bodyPr wrap="square" lIns="0" tIns="0" rIns="0" bIns="0" anchor="t">
             <a:spAutoFit/>
           </a:bodyPr>
           <a:lstStyle/>
@@ -6884,6 +6932,7 @@
           <a:lstStyle/>
           <a:p>
             <a:pPr algn="ctr"/>
+            <a:endParaRPr/>
           </a:p>
         </p:txBody>
       </p:sp>
@@ -6904,7 +6953,7 @@
           <a:noFill/>
         </p:spPr>
         <p:txBody>
-          <a:bodyPr wrap="square" anchor="t" lIns="0" rIns="0" tIns="0" bIns="0">
+          <a:bodyPr wrap="square" lIns="0" tIns="0" rIns="0" bIns="0" anchor="t">
             <a:spAutoFit/>
           </a:bodyPr>
           <a:lstStyle/>
@@ -6949,7 +6998,7 @@
           <a:noFill/>
         </p:spPr>
         <p:txBody>
-          <a:bodyPr wrap="square" anchor="t" lIns="0" rIns="0" tIns="0" bIns="0">
+          <a:bodyPr wrap="square" lIns="0" tIns="0" rIns="0" bIns="0" anchor="t">
             <a:spAutoFit/>
           </a:bodyPr>
           <a:lstStyle/>
@@ -6994,7 +7043,7 @@
           <a:noFill/>
         </p:spPr>
         <p:txBody>
-          <a:bodyPr wrap="square" anchor="t" lIns="0" rIns="0" tIns="0" bIns="0">
+          <a:bodyPr wrap="square" lIns="0" tIns="0" rIns="0" bIns="0" anchor="t">
             <a:spAutoFit/>
           </a:bodyPr>
           <a:lstStyle/>
@@ -7063,6 +7112,7 @@
           <a:lstStyle/>
           <a:p>
             <a:pPr algn="ctr"/>
+            <a:endParaRPr/>
           </a:p>
         </p:txBody>
       </p:sp>
@@ -7083,7 +7133,7 @@
           <a:noFill/>
         </p:spPr>
         <p:txBody>
-          <a:bodyPr wrap="square" anchor="t" lIns="0" rIns="0" tIns="0" bIns="0">
+          <a:bodyPr wrap="square" lIns="0" tIns="0" rIns="0" bIns="0" anchor="t">
             <a:spAutoFit/>
           </a:bodyPr>
           <a:lstStyle/>
@@ -7128,7 +7178,7 @@
           <a:noFill/>
         </p:spPr>
         <p:txBody>
-          <a:bodyPr wrap="square" anchor="t" lIns="0" rIns="0" tIns="0" bIns="0">
+          <a:bodyPr wrap="square" lIns="0" tIns="0" rIns="0" bIns="0" anchor="t">
             <a:spAutoFit/>
           </a:bodyPr>
           <a:lstStyle/>
@@ -7173,7 +7223,7 @@
           <a:noFill/>
         </p:spPr>
         <p:txBody>
-          <a:bodyPr wrap="square" anchor="t" lIns="0" rIns="0" tIns="0" bIns="0">
+          <a:bodyPr wrap="square" lIns="0" tIns="0" rIns="0" bIns="0" anchor="t">
             <a:spAutoFit/>
           </a:bodyPr>
           <a:lstStyle/>
@@ -7242,6 +7292,7 @@
           <a:lstStyle/>
           <a:p>
             <a:pPr algn="ctr"/>
+            <a:endParaRPr/>
           </a:p>
         </p:txBody>
       </p:sp>
@@ -7262,7 +7313,7 @@
           <a:noFill/>
         </p:spPr>
         <p:txBody>
-          <a:bodyPr wrap="square" anchor="t" lIns="0" rIns="0" tIns="0" bIns="0">
+          <a:bodyPr wrap="square" lIns="0" tIns="0" rIns="0" bIns="0" anchor="t">
             <a:spAutoFit/>
           </a:bodyPr>
           <a:lstStyle/>
@@ -7307,7 +7358,7 @@
           <a:noFill/>
         </p:spPr>
         <p:txBody>
-          <a:bodyPr wrap="square" anchor="t" lIns="0" rIns="0" tIns="0" bIns="0">
+          <a:bodyPr wrap="square" lIns="0" tIns="0" rIns="0" bIns="0" anchor="t">
             <a:spAutoFit/>
           </a:bodyPr>
           <a:lstStyle/>
@@ -7352,7 +7403,7 @@
           <a:noFill/>
         </p:spPr>
         <p:txBody>
-          <a:bodyPr wrap="square" anchor="t" lIns="0" rIns="0" tIns="0" bIns="0">
+          <a:bodyPr wrap="square" lIns="0" tIns="0" rIns="0" bIns="0" anchor="t">
             <a:spAutoFit/>
           </a:bodyPr>
           <a:lstStyle/>
@@ -7421,6 +7472,7 @@
           <a:lstStyle/>
           <a:p>
             <a:pPr algn="ctr"/>
+            <a:endParaRPr/>
           </a:p>
         </p:txBody>
       </p:sp>
@@ -7441,7 +7493,7 @@
           <a:noFill/>
         </p:spPr>
         <p:txBody>
-          <a:bodyPr wrap="square" anchor="t" lIns="0" rIns="0" tIns="0" bIns="0">
+          <a:bodyPr wrap="square" lIns="0" tIns="0" rIns="0" bIns="0" anchor="t">
             <a:spAutoFit/>
           </a:bodyPr>
           <a:lstStyle/>
@@ -7486,7 +7538,7 @@
           <a:noFill/>
         </p:spPr>
         <p:txBody>
-          <a:bodyPr wrap="square" anchor="t" lIns="0" rIns="0" tIns="0" bIns="0">
+          <a:bodyPr wrap="square" lIns="0" tIns="0" rIns="0" bIns="0" anchor="t">
             <a:spAutoFit/>
           </a:bodyPr>
           <a:lstStyle/>
@@ -7531,7 +7583,7 @@
           <a:noFill/>
         </p:spPr>
         <p:txBody>
-          <a:bodyPr wrap="square" anchor="t" lIns="0" rIns="0" tIns="0" bIns="0">
+          <a:bodyPr wrap="square" lIns="0" tIns="0" rIns="0" bIns="0" anchor="t">
             <a:spAutoFit/>
           </a:bodyPr>
           <a:lstStyle/>
@@ -7600,6 +7652,7 @@
           <a:lstStyle/>
           <a:p>
             <a:pPr algn="ctr"/>
+            <a:endParaRPr/>
           </a:p>
         </p:txBody>
       </p:sp>
@@ -7620,7 +7673,7 @@
           <a:noFill/>
         </p:spPr>
         <p:txBody>
-          <a:bodyPr wrap="square" anchor="t" lIns="0" rIns="0" tIns="0" bIns="0">
+          <a:bodyPr wrap="square" lIns="0" tIns="0" rIns="0" bIns="0" anchor="t">
             <a:spAutoFit/>
           </a:bodyPr>
           <a:lstStyle/>
@@ -7665,7 +7718,7 @@
           <a:noFill/>
         </p:spPr>
         <p:txBody>
-          <a:bodyPr wrap="square" anchor="t" lIns="0" rIns="0" tIns="0" bIns="0">
+          <a:bodyPr wrap="square" lIns="0" tIns="0" rIns="0" bIns="0" anchor="t">
             <a:spAutoFit/>
           </a:bodyPr>
           <a:lstStyle/>
@@ -7710,7 +7763,7 @@
           <a:noFill/>
         </p:spPr>
         <p:txBody>
-          <a:bodyPr wrap="square" anchor="t" lIns="0" rIns="0" tIns="0" bIns="0">
+          <a:bodyPr wrap="square" lIns="0" tIns="0" rIns="0" bIns="0" anchor="t">
             <a:spAutoFit/>
           </a:bodyPr>
           <a:lstStyle/>
@@ -7779,6 +7832,7 @@
           <a:lstStyle/>
           <a:p>
             <a:pPr algn="ctr"/>
+            <a:endParaRPr/>
           </a:p>
         </p:txBody>
       </p:sp>
@@ -7799,7 +7853,7 @@
           <a:noFill/>
         </p:spPr>
         <p:txBody>
-          <a:bodyPr wrap="square" anchor="t" lIns="0" rIns="0" tIns="0" bIns="0">
+          <a:bodyPr wrap="square" lIns="0" tIns="0" rIns="0" bIns="0" anchor="t">
             <a:spAutoFit/>
           </a:bodyPr>
           <a:lstStyle/>
@@ -7844,7 +7898,7 @@
           <a:noFill/>
         </p:spPr>
         <p:txBody>
-          <a:bodyPr wrap="square" anchor="t" lIns="0" rIns="0" tIns="0" bIns="0">
+          <a:bodyPr wrap="square" lIns="0" tIns="0" rIns="0" bIns="0" anchor="t">
             <a:spAutoFit/>
           </a:bodyPr>
           <a:lstStyle/>
@@ -7889,7 +7943,7 @@
           <a:noFill/>
         </p:spPr>
         <p:txBody>
-          <a:bodyPr wrap="square" anchor="t" lIns="0" rIns="0" tIns="0" bIns="0">
+          <a:bodyPr wrap="square" lIns="0" tIns="0" rIns="0" bIns="0" anchor="t">
             <a:spAutoFit/>
           </a:bodyPr>
           <a:lstStyle/>
@@ -7958,6 +8012,7 @@
           <a:lstStyle/>
           <a:p>
             <a:pPr algn="ctr"/>
+            <a:endParaRPr/>
           </a:p>
         </p:txBody>
       </p:sp>
@@ -7978,7 +8033,7 @@
           <a:noFill/>
         </p:spPr>
         <p:txBody>
-          <a:bodyPr wrap="square" anchor="t" lIns="0" rIns="0" tIns="0" bIns="0">
+          <a:bodyPr wrap="square" lIns="0" tIns="0" rIns="0" bIns="0" anchor="t">
             <a:spAutoFit/>
           </a:bodyPr>
           <a:lstStyle/>
@@ -8023,7 +8078,7 @@
           <a:noFill/>
         </p:spPr>
         <p:txBody>
-          <a:bodyPr wrap="square" anchor="t" lIns="0" rIns="0" tIns="0" bIns="0">
+          <a:bodyPr wrap="square" lIns="0" tIns="0" rIns="0" bIns="0" anchor="t">
             <a:spAutoFit/>
           </a:bodyPr>
           <a:lstStyle/>
@@ -8068,7 +8123,7 @@
           <a:noFill/>
         </p:spPr>
         <p:txBody>
-          <a:bodyPr wrap="square" anchor="t" lIns="0" rIns="0" tIns="0" bIns="0">
+          <a:bodyPr wrap="square" lIns="0" tIns="0" rIns="0" bIns="0" anchor="t">
             <a:spAutoFit/>
           </a:bodyPr>
           <a:lstStyle/>
@@ -8137,6 +8192,7 @@
           <a:lstStyle/>
           <a:p>
             <a:pPr algn="ctr"/>
+            <a:endParaRPr/>
           </a:p>
         </p:txBody>
       </p:sp>
@@ -8157,7 +8213,7 @@
           <a:noFill/>
         </p:spPr>
         <p:txBody>
-          <a:bodyPr wrap="square" anchor="t" lIns="0" rIns="0" tIns="0" bIns="0">
+          <a:bodyPr wrap="square" lIns="0" tIns="0" rIns="0" bIns="0" anchor="t">
             <a:spAutoFit/>
           </a:bodyPr>
           <a:lstStyle/>
@@ -8202,7 +8258,7 @@
           <a:noFill/>
         </p:spPr>
         <p:txBody>
-          <a:bodyPr wrap="square" anchor="t" lIns="0" rIns="0" tIns="0" bIns="0">
+          <a:bodyPr wrap="square" lIns="0" tIns="0" rIns="0" bIns="0" anchor="t">
             <a:spAutoFit/>
           </a:bodyPr>
           <a:lstStyle/>
@@ -8247,7 +8303,7 @@
           <a:noFill/>
         </p:spPr>
         <p:txBody>
-          <a:bodyPr wrap="square" anchor="t" lIns="0" rIns="0" tIns="0" bIns="0">
+          <a:bodyPr wrap="square" lIns="0" tIns="0" rIns="0" bIns="0" anchor="t">
             <a:spAutoFit/>
           </a:bodyPr>
           <a:lstStyle/>
@@ -8316,6 +8372,7 @@
           <a:lstStyle/>
           <a:p>
             <a:pPr algn="ctr"/>
+            <a:endParaRPr/>
           </a:p>
         </p:txBody>
       </p:sp>
@@ -8336,7 +8393,7 @@
           <a:noFill/>
         </p:spPr>
         <p:txBody>
-          <a:bodyPr wrap="square" anchor="t" lIns="0" rIns="0" tIns="0" bIns="0">
+          <a:bodyPr wrap="square" lIns="0" tIns="0" rIns="0" bIns="0" anchor="t">
             <a:spAutoFit/>
           </a:bodyPr>
           <a:lstStyle/>
@@ -8381,7 +8438,7 @@
           <a:noFill/>
         </p:spPr>
         <p:txBody>
-          <a:bodyPr wrap="square" anchor="t" lIns="0" rIns="0" tIns="0" bIns="0">
+          <a:bodyPr wrap="square" lIns="0" tIns="0" rIns="0" bIns="0" anchor="t">
             <a:spAutoFit/>
           </a:bodyPr>
           <a:lstStyle/>
@@ -8426,7 +8483,7 @@
           <a:noFill/>
         </p:spPr>
         <p:txBody>
-          <a:bodyPr wrap="square" anchor="t" lIns="0" rIns="0" tIns="0" bIns="0">
+          <a:bodyPr wrap="square" lIns="0" tIns="0" rIns="0" bIns="0" anchor="t">
             <a:spAutoFit/>
           </a:bodyPr>
           <a:lstStyle/>
@@ -8495,6 +8552,7 @@
           <a:lstStyle/>
           <a:p>
             <a:pPr algn="ctr"/>
+            <a:endParaRPr/>
           </a:p>
         </p:txBody>
       </p:sp>
@@ -8515,7 +8573,7 @@
           <a:noFill/>
         </p:spPr>
         <p:txBody>
-          <a:bodyPr wrap="square" anchor="t" lIns="0" rIns="0" tIns="0" bIns="0">
+          <a:bodyPr wrap="square" lIns="0" tIns="0" rIns="0" bIns="0" anchor="t">
             <a:spAutoFit/>
           </a:bodyPr>
           <a:lstStyle/>
@@ -8560,7 +8618,7 @@
           <a:noFill/>
         </p:spPr>
         <p:txBody>
-          <a:bodyPr wrap="square" anchor="t" lIns="0" rIns="0" tIns="0" bIns="0">
+          <a:bodyPr wrap="square" lIns="0" tIns="0" rIns="0" bIns="0" anchor="t">
             <a:spAutoFit/>
           </a:bodyPr>
           <a:lstStyle/>
@@ -8597,7 +8655,7 @@
 </file>
 
 <file path=ppt/slides/slide13.xml><?xml version="1.0" encoding="utf-8"?>
-<p:sld xmlns:a="http://schemas.openxmlformats.org/drawingml/2006/main" xmlns:p="http://schemas.openxmlformats.org/presentationml/2006/main" xmlns:r="http://schemas.openxmlformats.org/officeDocument/2006/relationships">
+<p:sld xmlns:a="http://schemas.openxmlformats.org/drawingml/2006/main" xmlns:r="http://schemas.openxmlformats.org/officeDocument/2006/relationships" xmlns:p="http://schemas.openxmlformats.org/presentationml/2006/main">
   <p:cSld>
     <p:spTree>
       <p:nvGrpSpPr>
@@ -8605,7 +8663,14 @@
         <p:cNvGrpSpPr/>
         <p:nvPr/>
       </p:nvGrpSpPr>
-      <p:grpSpPr/>
+      <p:grpSpPr>
+        <a:xfrm>
+          <a:off x="0" y="0"/>
+          <a:ext cx="0" cy="0"/>
+          <a:chOff x="0" y="0"/>
+          <a:chExt cx="0" cy="0"/>
+        </a:xfrm>
+      </p:grpSpPr>
       <p:sp>
         <p:nvSpPr>
           <p:cNvPr id="2" name="Rectangle 1"/>
@@ -8647,6 +8712,7 @@
           <a:lstStyle/>
           <a:p>
             <a:pPr algn="ctr"/>
+            <a:endParaRPr/>
           </a:p>
         </p:txBody>
       </p:sp>
@@ -8691,6 +8757,7 @@
           <a:lstStyle/>
           <a:p>
             <a:pPr algn="ctr"/>
+            <a:endParaRPr/>
           </a:p>
         </p:txBody>
       </p:sp>
@@ -8711,7 +8778,7 @@
           <a:noFill/>
         </p:spPr>
         <p:txBody>
-          <a:bodyPr wrap="square" anchor="t" lIns="0" rIns="0" tIns="0" bIns="0">
+          <a:bodyPr wrap="square" lIns="0" tIns="0" rIns="0" bIns="0" anchor="t">
             <a:spAutoFit/>
           </a:bodyPr>
           <a:lstStyle/>
@@ -8756,7 +8823,7 @@
           <a:noFill/>
         </p:spPr>
         <p:txBody>
-          <a:bodyPr wrap="square" anchor="t" lIns="0" rIns="0" tIns="0" bIns="0">
+          <a:bodyPr wrap="square" lIns="0" tIns="0" rIns="0" bIns="0" anchor="t">
             <a:spAutoFit/>
           </a:bodyPr>
           <a:lstStyle/>
@@ -8825,6 +8892,7 @@
           <a:lstStyle/>
           <a:p>
             <a:pPr algn="ctr"/>
+            <a:endParaRPr/>
           </a:p>
         </p:txBody>
       </p:sp>
@@ -8845,7 +8913,7 @@
           <a:noFill/>
         </p:spPr>
         <p:txBody>
-          <a:bodyPr wrap="square" anchor="t" lIns="0" rIns="0" tIns="0" bIns="0">
+          <a:bodyPr wrap="square" lIns="0" tIns="0" rIns="0" bIns="0" anchor="t">
             <a:spAutoFit/>
           </a:bodyPr>
           <a:lstStyle/>
@@ -8890,7 +8958,7 @@
           <a:noFill/>
         </p:spPr>
         <p:txBody>
-          <a:bodyPr wrap="square" anchor="t" lIns="0" rIns="0" tIns="0" bIns="0">
+          <a:bodyPr wrap="square" lIns="0" tIns="0" rIns="0" bIns="0" anchor="t">
             <a:spAutoFit/>
           </a:bodyPr>
           <a:lstStyle/>
@@ -8959,6 +9027,7 @@
           <a:lstStyle/>
           <a:p>
             <a:pPr algn="ctr"/>
+            <a:endParaRPr/>
           </a:p>
         </p:txBody>
       </p:sp>
@@ -8979,7 +9048,7 @@
           <a:noFill/>
         </p:spPr>
         <p:txBody>
-          <a:bodyPr wrap="square" anchor="t" lIns="0" rIns="0" tIns="0" bIns="0">
+          <a:bodyPr wrap="square" lIns="0" tIns="0" rIns="0" bIns="0" anchor="t">
             <a:spAutoFit/>
           </a:bodyPr>
           <a:lstStyle/>
@@ -9024,7 +9093,7 @@
           <a:noFill/>
         </p:spPr>
         <p:txBody>
-          <a:bodyPr wrap="square" anchor="t" lIns="0" rIns="0" tIns="0" bIns="0">
+          <a:bodyPr wrap="square" lIns="0" tIns="0" rIns="0" bIns="0" anchor="t">
             <a:spAutoFit/>
           </a:bodyPr>
           <a:lstStyle/>
@@ -9093,6 +9162,7 @@
           <a:lstStyle/>
           <a:p>
             <a:pPr algn="ctr"/>
+            <a:endParaRPr/>
           </a:p>
         </p:txBody>
       </p:sp>
@@ -9113,7 +9183,7 @@
           <a:noFill/>
         </p:spPr>
         <p:txBody>
-          <a:bodyPr wrap="square" anchor="t" lIns="0" rIns="0" tIns="0" bIns="0">
+          <a:bodyPr wrap="square" lIns="0" tIns="0" rIns="0" bIns="0" anchor="t">
             <a:spAutoFit/>
           </a:bodyPr>
           <a:lstStyle/>
@@ -9158,7 +9228,7 @@
           <a:noFill/>
         </p:spPr>
         <p:txBody>
-          <a:bodyPr wrap="square" anchor="t" lIns="0" rIns="0" tIns="0" bIns="0">
+          <a:bodyPr wrap="square" lIns="0" tIns="0" rIns="0" bIns="0" anchor="t">
             <a:spAutoFit/>
           </a:bodyPr>
           <a:lstStyle/>
@@ -9227,6 +9297,7 @@
           <a:lstStyle/>
           <a:p>
             <a:pPr algn="ctr"/>
+            <a:endParaRPr/>
           </a:p>
         </p:txBody>
       </p:sp>
@@ -9247,7 +9318,7 @@
           <a:noFill/>
         </p:spPr>
         <p:txBody>
-          <a:bodyPr wrap="square" anchor="t" lIns="0" rIns="0" tIns="0" bIns="0">
+          <a:bodyPr wrap="square" lIns="0" tIns="0" rIns="0" bIns="0" anchor="t">
             <a:spAutoFit/>
           </a:bodyPr>
           <a:lstStyle/>
@@ -9292,7 +9363,7 @@
           <a:noFill/>
         </p:spPr>
         <p:txBody>
-          <a:bodyPr wrap="square" anchor="t" lIns="0" rIns="0" tIns="0" bIns="0">
+          <a:bodyPr wrap="square" lIns="0" tIns="0" rIns="0" bIns="0" anchor="t">
             <a:spAutoFit/>
           </a:bodyPr>
           <a:lstStyle/>
@@ -9361,6 +9432,7 @@
           <a:lstStyle/>
           <a:p>
             <a:pPr algn="ctr"/>
+            <a:endParaRPr/>
           </a:p>
         </p:txBody>
       </p:sp>
@@ -9381,7 +9453,7 @@
           <a:noFill/>
         </p:spPr>
         <p:txBody>
-          <a:bodyPr wrap="square" anchor="t" lIns="0" rIns="0" tIns="0" bIns="0">
+          <a:bodyPr wrap="square" lIns="0" tIns="0" rIns="0" bIns="0" anchor="t">
             <a:spAutoFit/>
           </a:bodyPr>
           <a:lstStyle/>
@@ -9426,7 +9498,7 @@
           <a:noFill/>
         </p:spPr>
         <p:txBody>
-          <a:bodyPr wrap="square" anchor="t" lIns="0" rIns="0" tIns="0" bIns="0">
+          <a:bodyPr wrap="square" lIns="0" tIns="0" rIns="0" bIns="0" anchor="t">
             <a:spAutoFit/>
           </a:bodyPr>
           <a:lstStyle/>
@@ -9495,6 +9567,7 @@
           <a:lstStyle/>
           <a:p>
             <a:pPr algn="ctr"/>
+            <a:endParaRPr/>
           </a:p>
         </p:txBody>
       </p:sp>
@@ -9515,7 +9588,7 @@
           <a:noFill/>
         </p:spPr>
         <p:txBody>
-          <a:bodyPr wrap="square" anchor="t" lIns="0" rIns="0" tIns="0" bIns="0">
+          <a:bodyPr wrap="square" lIns="0" tIns="0" rIns="0" bIns="0" anchor="t">
             <a:spAutoFit/>
           </a:bodyPr>
           <a:lstStyle/>
@@ -9560,7 +9633,7 @@
           <a:noFill/>
         </p:spPr>
         <p:txBody>
-          <a:bodyPr wrap="square" anchor="t" lIns="0" rIns="0" tIns="0" bIns="0">
+          <a:bodyPr wrap="square" lIns="0" tIns="0" rIns="0" bIns="0" anchor="t">
             <a:spAutoFit/>
           </a:bodyPr>
           <a:lstStyle/>
@@ -9629,6 +9702,7 @@
           <a:lstStyle/>
           <a:p>
             <a:pPr algn="ctr"/>
+            <a:endParaRPr/>
           </a:p>
         </p:txBody>
       </p:sp>
@@ -9649,7 +9723,7 @@
           <a:noFill/>
         </p:spPr>
         <p:txBody>
-          <a:bodyPr wrap="square" anchor="t" lIns="0" rIns="0" tIns="0" bIns="0">
+          <a:bodyPr wrap="square" lIns="0" tIns="0" rIns="0" bIns="0" anchor="t">
             <a:spAutoFit/>
           </a:bodyPr>
           <a:lstStyle/>
@@ -9694,7 +9768,7 @@
           <a:noFill/>
         </p:spPr>
         <p:txBody>
-          <a:bodyPr wrap="square" anchor="t" lIns="0" rIns="0" tIns="0" bIns="0">
+          <a:bodyPr wrap="square" lIns="0" tIns="0" rIns="0" bIns="0" anchor="t">
             <a:spAutoFit/>
           </a:bodyPr>
           <a:lstStyle/>
@@ -9763,6 +9837,7 @@
           <a:lstStyle/>
           <a:p>
             <a:pPr algn="ctr"/>
+            <a:endParaRPr/>
           </a:p>
         </p:txBody>
       </p:sp>
@@ -9783,7 +9858,7 @@
           <a:noFill/>
         </p:spPr>
         <p:txBody>
-          <a:bodyPr wrap="square" anchor="t" lIns="0" rIns="0" tIns="0" bIns="0">
+          <a:bodyPr wrap="square" lIns="0" tIns="0" rIns="0" bIns="0" anchor="t">
             <a:spAutoFit/>
           </a:bodyPr>
           <a:lstStyle/>
@@ -9828,7 +9903,7 @@
           <a:noFill/>
         </p:spPr>
         <p:txBody>
-          <a:bodyPr wrap="square" anchor="t" lIns="0" rIns="0" tIns="0" bIns="0">
+          <a:bodyPr wrap="square" lIns="0" tIns="0" rIns="0" bIns="0" anchor="t">
             <a:spAutoFit/>
           </a:bodyPr>
           <a:lstStyle/>
@@ -9897,6 +9972,7 @@
           <a:lstStyle/>
           <a:p>
             <a:pPr algn="ctr"/>
+            <a:endParaRPr/>
           </a:p>
         </p:txBody>
       </p:sp>
@@ -9917,7 +9993,7 @@
           <a:noFill/>
         </p:spPr>
         <p:txBody>
-          <a:bodyPr wrap="square" anchor="t" lIns="0" rIns="0" tIns="0" bIns="0">
+          <a:bodyPr wrap="square" lIns="0" tIns="0" rIns="0" bIns="0" anchor="t">
             <a:spAutoFit/>
           </a:bodyPr>
           <a:lstStyle/>
@@ -9962,7 +10038,7 @@
           <a:noFill/>
         </p:spPr>
         <p:txBody>
-          <a:bodyPr wrap="square" anchor="t" lIns="0" rIns="0" tIns="0" bIns="0">
+          <a:bodyPr wrap="square" lIns="0" tIns="0" rIns="0" bIns="0" anchor="t">
             <a:spAutoFit/>
           </a:bodyPr>
           <a:lstStyle/>
@@ -10031,6 +10107,7 @@
           <a:lstStyle/>
           <a:p>
             <a:pPr algn="ctr"/>
+            <a:endParaRPr/>
           </a:p>
         </p:txBody>
       </p:sp>
@@ -10051,7 +10128,7 @@
           <a:noFill/>
         </p:spPr>
         <p:txBody>
-          <a:bodyPr wrap="square" anchor="t" lIns="0" rIns="0" tIns="0" bIns="0">
+          <a:bodyPr wrap="square" lIns="0" tIns="0" rIns="0" bIns="0" anchor="t">
             <a:spAutoFit/>
           </a:bodyPr>
           <a:lstStyle/>
@@ -10096,7 +10173,7 @@
           <a:noFill/>
         </p:spPr>
         <p:txBody>
-          <a:bodyPr wrap="square" anchor="t" lIns="0" rIns="0" tIns="0" bIns="0">
+          <a:bodyPr wrap="square" lIns="0" tIns="0" rIns="0" bIns="0" anchor="t">
             <a:spAutoFit/>
           </a:bodyPr>
           <a:lstStyle/>
@@ -10165,6 +10242,7 @@
           <a:lstStyle/>
           <a:p>
             <a:pPr algn="ctr"/>
+            <a:endParaRPr/>
           </a:p>
         </p:txBody>
       </p:sp>
@@ -10185,7 +10263,7 @@
           <a:noFill/>
         </p:spPr>
         <p:txBody>
-          <a:bodyPr wrap="square" anchor="t" lIns="0" rIns="0" tIns="0" bIns="0">
+          <a:bodyPr wrap="square" lIns="0" tIns="0" rIns="0" bIns="0" anchor="t">
             <a:spAutoFit/>
           </a:bodyPr>
           <a:lstStyle/>
@@ -10230,7 +10308,7 @@
           <a:noFill/>
         </p:spPr>
         <p:txBody>
-          <a:bodyPr wrap="square" anchor="t" lIns="0" rIns="0" tIns="0" bIns="0">
+          <a:bodyPr wrap="square" lIns="0" tIns="0" rIns="0" bIns="0" anchor="t">
             <a:spAutoFit/>
           </a:bodyPr>
           <a:lstStyle/>
@@ -10299,6 +10377,7 @@
           <a:lstStyle/>
           <a:p>
             <a:pPr algn="ctr"/>
+            <a:endParaRPr/>
           </a:p>
         </p:txBody>
       </p:sp>
@@ -10319,7 +10398,7 @@
           <a:noFill/>
         </p:spPr>
         <p:txBody>
-          <a:bodyPr wrap="square" anchor="t" lIns="0" rIns="0" tIns="0" bIns="0">
+          <a:bodyPr wrap="square" lIns="0" tIns="0" rIns="0" bIns="0" anchor="t">
             <a:spAutoFit/>
           </a:bodyPr>
           <a:lstStyle/>
@@ -10364,7 +10443,7 @@
           <a:noFill/>
         </p:spPr>
         <p:txBody>
-          <a:bodyPr wrap="square" anchor="t" lIns="0" rIns="0" tIns="0" bIns="0">
+          <a:bodyPr wrap="square" lIns="0" tIns="0" rIns="0" bIns="0" anchor="t">
             <a:spAutoFit/>
           </a:bodyPr>
           <a:lstStyle/>
@@ -10433,6 +10512,7 @@
           <a:lstStyle/>
           <a:p>
             <a:pPr algn="ctr"/>
+            <a:endParaRPr/>
           </a:p>
         </p:txBody>
       </p:sp>
@@ -10453,7 +10533,7 @@
           <a:noFill/>
         </p:spPr>
         <p:txBody>
-          <a:bodyPr wrap="square" anchor="t" lIns="0" rIns="0" tIns="0" bIns="0">
+          <a:bodyPr wrap="square" lIns="0" tIns="0" rIns="0" bIns="0" anchor="t">
             <a:spAutoFit/>
           </a:bodyPr>
           <a:lstStyle/>
@@ -10498,7 +10578,7 @@
           <a:noFill/>
         </p:spPr>
         <p:txBody>
-          <a:bodyPr wrap="square" anchor="t" lIns="0" rIns="0" tIns="0" bIns="0">
+          <a:bodyPr wrap="square" lIns="0" tIns="0" rIns="0" bIns="0" anchor="t">
             <a:spAutoFit/>
           </a:bodyPr>
           <a:lstStyle/>
@@ -10535,7 +10615,7 @@
 </file>
 
 <file path=ppt/slides/slide14.xml><?xml version="1.0" encoding="utf-8"?>
-<p:sld xmlns:a="http://schemas.openxmlformats.org/drawingml/2006/main" xmlns:p="http://schemas.openxmlformats.org/presentationml/2006/main" xmlns:r="http://schemas.openxmlformats.org/officeDocument/2006/relationships">
+<p:sld xmlns:a="http://schemas.openxmlformats.org/drawingml/2006/main" xmlns:r="http://schemas.openxmlformats.org/officeDocument/2006/relationships" xmlns:p="http://schemas.openxmlformats.org/presentationml/2006/main">
   <p:cSld>
     <p:spTree>
       <p:nvGrpSpPr>
@@ -10543,7 +10623,14 @@
         <p:cNvGrpSpPr/>
         <p:nvPr/>
       </p:nvGrpSpPr>
-      <p:grpSpPr/>
+      <p:grpSpPr>
+        <a:xfrm>
+          <a:off x="0" y="0"/>
+          <a:ext cx="0" cy="0"/>
+          <a:chOff x="0" y="0"/>
+          <a:chExt cx="0" cy="0"/>
+        </a:xfrm>
+      </p:grpSpPr>
       <p:sp>
         <p:nvSpPr>
           <p:cNvPr id="2" name="Rectangle 1"/>
@@ -10585,6 +10672,7 @@
           <a:lstStyle/>
           <a:p>
             <a:pPr algn="ctr"/>
+            <a:endParaRPr/>
           </a:p>
         </p:txBody>
       </p:sp>
@@ -10629,6 +10717,7 @@
           <a:lstStyle/>
           <a:p>
             <a:pPr algn="ctr"/>
+            <a:endParaRPr/>
           </a:p>
         </p:txBody>
       </p:sp>
@@ -10649,7 +10738,7 @@
           <a:noFill/>
         </p:spPr>
         <p:txBody>
-          <a:bodyPr wrap="square" anchor="t" lIns="0" rIns="0" tIns="0" bIns="0">
+          <a:bodyPr wrap="square" lIns="0" tIns="0" rIns="0" bIns="0" anchor="t">
             <a:spAutoFit/>
           </a:bodyPr>
           <a:lstStyle/>
@@ -10694,7 +10783,7 @@
           <a:noFill/>
         </p:spPr>
         <p:txBody>
-          <a:bodyPr wrap="square" anchor="t" lIns="0" rIns="0" tIns="0" bIns="0">
+          <a:bodyPr wrap="square" lIns="0" tIns="0" rIns="0" bIns="0" anchor="t">
             <a:spAutoFit/>
           </a:bodyPr>
           <a:lstStyle/>
@@ -10767,6 +10856,7 @@
           <a:lstStyle/>
           <a:p>
             <a:pPr algn="ctr"/>
+            <a:endParaRPr/>
           </a:p>
         </p:txBody>
       </p:sp>
@@ -10811,6 +10901,7 @@
           <a:lstStyle/>
           <a:p>
             <a:pPr algn="ctr"/>
+            <a:endParaRPr/>
           </a:p>
         </p:txBody>
       </p:sp>
@@ -10831,7 +10922,7 @@
           <a:noFill/>
         </p:spPr>
         <p:txBody>
-          <a:bodyPr wrap="square" anchor="t" lIns="0" rIns="0" tIns="0" bIns="0">
+          <a:bodyPr wrap="square" lIns="0" tIns="0" rIns="0" bIns="0" anchor="t">
             <a:spAutoFit/>
           </a:bodyPr>
           <a:lstStyle/>
@@ -10876,7 +10967,7 @@
           <a:noFill/>
         </p:spPr>
         <p:txBody>
-          <a:bodyPr wrap="square" anchor="t" lIns="0" rIns="0" tIns="0" bIns="0">
+          <a:bodyPr wrap="square" lIns="0" tIns="0" rIns="0" bIns="0" anchor="t">
             <a:spAutoFit/>
           </a:bodyPr>
           <a:lstStyle/>
@@ -11068,15 +11159,12 @@
                 <a:spcPts val="400"/>
               </a:spcAft>
             </a:pPr>
-            <a:r>
-              <a:rPr sz="1050" b="0">
-                <a:solidFill>
-                  <a:srgbClr val="475569"/>
-                </a:solidFill>
-                <a:latin typeface="Segoe UI"/>
-              </a:rPr>
-              <a:t/>
-            </a:r>
+            <a:endParaRPr sz="1050" b="0">
+              <a:solidFill>
+                <a:srgbClr val="475569"/>
+              </a:solidFill>
+              <a:latin typeface="Segoe UI"/>
+            </a:endParaRPr>
           </a:p>
           <a:p>
             <a:pPr algn="l">
@@ -11189,6 +11277,7 @@
           <a:lstStyle/>
           <a:p>
             <a:pPr algn="ctr"/>
+            <a:endParaRPr/>
           </a:p>
         </p:txBody>
       </p:sp>
@@ -11209,7 +11298,7 @@
           <a:noFill/>
         </p:spPr>
         <p:txBody>
-          <a:bodyPr wrap="square" anchor="t" lIns="0" rIns="0" tIns="0" bIns="0">
+          <a:bodyPr wrap="square" lIns="0" tIns="0" rIns="0" bIns="0" anchor="t">
             <a:spAutoFit/>
           </a:bodyPr>
           <a:lstStyle/>
@@ -11282,6 +11371,7 @@
           <a:lstStyle/>
           <a:p>
             <a:pPr algn="ctr"/>
+            <a:endParaRPr/>
           </a:p>
         </p:txBody>
       </p:sp>
@@ -11302,7 +11392,7 @@
           <a:noFill/>
         </p:spPr>
         <p:txBody>
-          <a:bodyPr wrap="square" anchor="t" lIns="0" rIns="0" tIns="0" bIns="0">
+          <a:bodyPr wrap="square" lIns="0" tIns="0" rIns="0" bIns="0" anchor="t">
             <a:spAutoFit/>
           </a:bodyPr>
           <a:lstStyle/>
@@ -11523,7 +11613,7 @@
           <a:noFill/>
         </p:spPr>
         <p:txBody>
-          <a:bodyPr wrap="square" anchor="t" lIns="0" rIns="0" tIns="0" bIns="0">
+          <a:bodyPr wrap="square" lIns="0" tIns="0" rIns="0" bIns="0" anchor="t">
             <a:spAutoFit/>
           </a:bodyPr>
           <a:lstStyle/>
@@ -11568,7 +11658,7 @@
           <a:noFill/>
         </p:spPr>
         <p:txBody>
-          <a:bodyPr wrap="square" anchor="t" lIns="0" rIns="0" tIns="0" bIns="0">
+          <a:bodyPr wrap="square" lIns="0" tIns="0" rIns="0" bIns="0" anchor="t">
             <a:spAutoFit/>
           </a:bodyPr>
           <a:lstStyle/>
@@ -11605,7 +11695,7 @@
 </file>
 
 <file path=ppt/slides/slide15.xml><?xml version="1.0" encoding="utf-8"?>
-<p:sld xmlns:a="http://schemas.openxmlformats.org/drawingml/2006/main" xmlns:p="http://schemas.openxmlformats.org/presentationml/2006/main" xmlns:r="http://schemas.openxmlformats.org/officeDocument/2006/relationships">
+<p:sld xmlns:a="http://schemas.openxmlformats.org/drawingml/2006/main" xmlns:r="http://schemas.openxmlformats.org/officeDocument/2006/relationships" xmlns:p="http://schemas.openxmlformats.org/presentationml/2006/main">
   <p:cSld>
     <p:spTree>
       <p:nvGrpSpPr>
@@ -11613,7 +11703,14 @@
         <p:cNvGrpSpPr/>
         <p:nvPr/>
       </p:nvGrpSpPr>
-      <p:grpSpPr/>
+      <p:grpSpPr>
+        <a:xfrm>
+          <a:off x="0" y="0"/>
+          <a:ext cx="0" cy="0"/>
+          <a:chOff x="0" y="0"/>
+          <a:chExt cx="0" cy="0"/>
+        </a:xfrm>
+      </p:grpSpPr>
       <p:sp>
         <p:nvSpPr>
           <p:cNvPr id="2" name="Rectangle 1"/>
@@ -11655,6 +11752,7 @@
           <a:lstStyle/>
           <a:p>
             <a:pPr algn="ctr"/>
+            <a:endParaRPr/>
           </a:p>
         </p:txBody>
       </p:sp>
@@ -11699,6 +11797,7 @@
           <a:lstStyle/>
           <a:p>
             <a:pPr algn="ctr"/>
+            <a:endParaRPr/>
           </a:p>
         </p:txBody>
       </p:sp>
@@ -11719,7 +11818,7 @@
           <a:noFill/>
         </p:spPr>
         <p:txBody>
-          <a:bodyPr wrap="square" anchor="t" lIns="0" rIns="0" tIns="0" bIns="0">
+          <a:bodyPr wrap="square" lIns="0" tIns="0" rIns="0" bIns="0" anchor="t">
             <a:spAutoFit/>
           </a:bodyPr>
           <a:lstStyle/>
@@ -11764,7 +11863,7 @@
           <a:noFill/>
         </p:spPr>
         <p:txBody>
-          <a:bodyPr wrap="square" anchor="t" lIns="0" rIns="0" tIns="0" bIns="0">
+          <a:bodyPr wrap="square" lIns="0" tIns="0" rIns="0" bIns="0" anchor="t">
             <a:spAutoFit/>
           </a:bodyPr>
           <a:lstStyle/>
@@ -11837,6 +11936,7 @@
           <a:lstStyle/>
           <a:p>
             <a:pPr algn="ctr"/>
+            <a:endParaRPr/>
           </a:p>
         </p:txBody>
       </p:sp>
@@ -11881,6 +11981,7 @@
           <a:lstStyle/>
           <a:p>
             <a:pPr algn="ctr"/>
+            <a:endParaRPr/>
           </a:p>
         </p:txBody>
       </p:sp>
@@ -11901,7 +12002,7 @@
           <a:noFill/>
         </p:spPr>
         <p:txBody>
-          <a:bodyPr wrap="square" anchor="t" lIns="0" rIns="0" tIns="0" bIns="0">
+          <a:bodyPr wrap="square" lIns="0" tIns="0" rIns="0" bIns="0" anchor="t">
             <a:spAutoFit/>
           </a:bodyPr>
           <a:lstStyle/>
@@ -11946,7 +12047,7 @@
           <a:noFill/>
         </p:spPr>
         <p:txBody>
-          <a:bodyPr wrap="square" anchor="t" lIns="0" rIns="0" tIns="0" bIns="0">
+          <a:bodyPr wrap="square" lIns="0" tIns="0" rIns="0" bIns="0" anchor="t">
             <a:spAutoFit/>
           </a:bodyPr>
           <a:lstStyle/>
@@ -12107,6 +12208,7 @@
           <a:lstStyle/>
           <a:p>
             <a:pPr algn="ctr"/>
+            <a:endParaRPr/>
           </a:p>
         </p:txBody>
       </p:sp>
@@ -12151,6 +12253,7 @@
           <a:lstStyle/>
           <a:p>
             <a:pPr algn="ctr"/>
+            <a:endParaRPr/>
           </a:p>
         </p:txBody>
       </p:sp>
@@ -12171,7 +12274,7 @@
           <a:noFill/>
         </p:spPr>
         <p:txBody>
-          <a:bodyPr wrap="square" anchor="t" lIns="0" rIns="0" tIns="0" bIns="0">
+          <a:bodyPr wrap="square" lIns="0" tIns="0" rIns="0" bIns="0" anchor="t">
             <a:spAutoFit/>
           </a:bodyPr>
           <a:lstStyle/>
@@ -12216,7 +12319,7 @@
           <a:noFill/>
         </p:spPr>
         <p:txBody>
-          <a:bodyPr wrap="square" anchor="t" lIns="0" rIns="0" tIns="0" bIns="0">
+          <a:bodyPr wrap="square" lIns="0" tIns="0" rIns="0" bIns="0" anchor="t">
             <a:spAutoFit/>
           </a:bodyPr>
           <a:lstStyle/>
@@ -12377,6 +12480,7 @@
           <a:lstStyle/>
           <a:p>
             <a:pPr algn="ctr"/>
+            <a:endParaRPr/>
           </a:p>
         </p:txBody>
       </p:sp>
@@ -12421,6 +12525,7 @@
           <a:lstStyle/>
           <a:p>
             <a:pPr algn="ctr"/>
+            <a:endParaRPr/>
           </a:p>
         </p:txBody>
       </p:sp>
@@ -12441,7 +12546,7 @@
           <a:noFill/>
         </p:spPr>
         <p:txBody>
-          <a:bodyPr wrap="square" anchor="t" lIns="0" rIns="0" tIns="0" bIns="0">
+          <a:bodyPr wrap="square" lIns="0" tIns="0" rIns="0" bIns="0" anchor="t">
             <a:spAutoFit/>
           </a:bodyPr>
           <a:lstStyle/>
@@ -12486,7 +12591,7 @@
           <a:noFill/>
         </p:spPr>
         <p:txBody>
-          <a:bodyPr wrap="square" anchor="t" lIns="0" rIns="0" tIns="0" bIns="0">
+          <a:bodyPr wrap="square" lIns="0" tIns="0" rIns="0" bIns="0" anchor="t">
             <a:spAutoFit/>
           </a:bodyPr>
           <a:lstStyle/>
@@ -12647,6 +12752,7 @@
           <a:lstStyle/>
           <a:p>
             <a:pPr algn="ctr"/>
+            <a:endParaRPr/>
           </a:p>
         </p:txBody>
       </p:sp>
@@ -12667,7 +12773,7 @@
           <a:noFill/>
         </p:spPr>
         <p:txBody>
-          <a:bodyPr wrap="square" anchor="t" lIns="0" rIns="0" tIns="0" bIns="0">
+          <a:bodyPr wrap="square" lIns="0" tIns="0" rIns="0" bIns="0" anchor="t">
             <a:spAutoFit/>
           </a:bodyPr>
           <a:lstStyle/>
@@ -12721,7 +12827,7 @@
           <a:noFill/>
         </p:spPr>
         <p:txBody>
-          <a:bodyPr wrap="square" anchor="t" lIns="0" rIns="0" tIns="0" bIns="0">
+          <a:bodyPr wrap="square" lIns="0" tIns="0" rIns="0" bIns="0" anchor="t">
             <a:spAutoFit/>
           </a:bodyPr>
           <a:lstStyle/>
@@ -12766,7 +12872,7 @@
           <a:noFill/>
         </p:spPr>
         <p:txBody>
-          <a:bodyPr wrap="square" anchor="t" lIns="0" rIns="0" tIns="0" bIns="0">
+          <a:bodyPr wrap="square" lIns="0" tIns="0" rIns="0" bIns="0" anchor="t">
             <a:spAutoFit/>
           </a:bodyPr>
           <a:lstStyle/>
@@ -12803,7 +12909,7 @@
 </file>
 
 <file path=ppt/slides/slide16.xml><?xml version="1.0" encoding="utf-8"?>
-<p:sld xmlns:a="http://schemas.openxmlformats.org/drawingml/2006/main" xmlns:p="http://schemas.openxmlformats.org/presentationml/2006/main" xmlns:r="http://schemas.openxmlformats.org/officeDocument/2006/relationships">
+<p:sld xmlns:a="http://schemas.openxmlformats.org/drawingml/2006/main" xmlns:r="http://schemas.openxmlformats.org/officeDocument/2006/relationships" xmlns:p="http://schemas.openxmlformats.org/presentationml/2006/main">
   <p:cSld>
     <p:spTree>
       <p:nvGrpSpPr>
@@ -12811,7 +12917,14 @@
         <p:cNvGrpSpPr/>
         <p:nvPr/>
       </p:nvGrpSpPr>
-      <p:grpSpPr/>
+      <p:grpSpPr>
+        <a:xfrm>
+          <a:off x="0" y="0"/>
+          <a:ext cx="0" cy="0"/>
+          <a:chOff x="0" y="0"/>
+          <a:chExt cx="0" cy="0"/>
+        </a:xfrm>
+      </p:grpSpPr>
       <p:sp>
         <p:nvSpPr>
           <p:cNvPr id="2" name="Rectangle 1"/>
@@ -12853,6 +12966,7 @@
           <a:lstStyle/>
           <a:p>
             <a:pPr algn="ctr"/>
+            <a:endParaRPr/>
           </a:p>
         </p:txBody>
       </p:sp>
@@ -12865,7 +12979,7 @@
         <p:spPr>
           <a:xfrm>
             <a:off x="0" y="0"/>
-            <a:ext cx="11148085908000" cy="6270955200000"/>
+            <a:ext cx="0" cy="0"/>
           </a:xfrm>
           <a:prstGeom prst="rect">
             <a:avLst/>
@@ -12897,6 +13011,7 @@
           <a:lstStyle/>
           <a:p>
             <a:pPr algn="ctr"/>
+            <a:endParaRPr/>
           </a:p>
         </p:txBody>
       </p:sp>
@@ -12941,6 +13056,7 @@
           <a:lstStyle/>
           <a:p>
             <a:pPr algn="ctr"/>
+            <a:endParaRPr/>
           </a:p>
         </p:txBody>
       </p:sp>
@@ -12987,6 +13103,7 @@
           <a:lstStyle/>
           <a:p>
             <a:pPr algn="ctr"/>
+            <a:endParaRPr/>
           </a:p>
         </p:txBody>
       </p:sp>
@@ -13007,7 +13124,7 @@
           <a:noFill/>
         </p:spPr>
         <p:txBody>
-          <a:bodyPr wrap="square" anchor="ctr" lIns="0" rIns="0" tIns="0" bIns="0">
+          <a:bodyPr wrap="square" lIns="0" tIns="0" rIns="0" bIns="0" anchor="ctr">
             <a:spAutoFit/>
           </a:bodyPr>
           <a:lstStyle/>
@@ -13052,7 +13169,7 @@
           <a:noFill/>
         </p:spPr>
         <p:txBody>
-          <a:bodyPr wrap="square" anchor="t" lIns="0" rIns="0" tIns="0" bIns="0">
+          <a:bodyPr wrap="square" lIns="0" tIns="0" rIns="0" bIns="0" anchor="t">
             <a:spAutoFit/>
           </a:bodyPr>
           <a:lstStyle/>
@@ -13097,7 +13214,7 @@
           <a:noFill/>
         </p:spPr>
         <p:txBody>
-          <a:bodyPr wrap="square" anchor="t" lIns="0" rIns="0" tIns="0" bIns="0">
+          <a:bodyPr wrap="square" lIns="0" tIns="0" rIns="0" bIns="0" anchor="t">
             <a:spAutoFit/>
           </a:bodyPr>
           <a:lstStyle/>
@@ -13134,7 +13251,7 @@
 </file>
 
 <file path=ppt/slides/slide17.xml><?xml version="1.0" encoding="utf-8"?>
-<p:sld xmlns:a="http://schemas.openxmlformats.org/drawingml/2006/main" xmlns:p="http://schemas.openxmlformats.org/presentationml/2006/main" xmlns:r="http://schemas.openxmlformats.org/officeDocument/2006/relationships">
+<p:sld xmlns:a="http://schemas.openxmlformats.org/drawingml/2006/main" xmlns:r="http://schemas.openxmlformats.org/officeDocument/2006/relationships" xmlns:p="http://schemas.openxmlformats.org/presentationml/2006/main">
   <p:cSld>
     <p:spTree>
       <p:nvGrpSpPr>
@@ -13142,7 +13259,14 @@
         <p:cNvGrpSpPr/>
         <p:nvPr/>
       </p:nvGrpSpPr>
-      <p:grpSpPr/>
+      <p:grpSpPr>
+        <a:xfrm>
+          <a:off x="0" y="0"/>
+          <a:ext cx="0" cy="0"/>
+          <a:chOff x="0" y="0"/>
+          <a:chExt cx="0" cy="0"/>
+        </a:xfrm>
+      </p:grpSpPr>
       <p:sp>
         <p:nvSpPr>
           <p:cNvPr id="2" name="Rectangle 1"/>
@@ -13184,6 +13308,7 @@
           <a:lstStyle/>
           <a:p>
             <a:pPr algn="ctr"/>
+            <a:endParaRPr/>
           </a:p>
         </p:txBody>
       </p:sp>
@@ -13228,6 +13353,7 @@
           <a:lstStyle/>
           <a:p>
             <a:pPr algn="ctr"/>
+            <a:endParaRPr/>
           </a:p>
         </p:txBody>
       </p:sp>
@@ -13248,7 +13374,7 @@
           <a:noFill/>
         </p:spPr>
         <p:txBody>
-          <a:bodyPr wrap="square" anchor="t" lIns="0" rIns="0" tIns="0" bIns="0">
+          <a:bodyPr wrap="square" lIns="0" tIns="0" rIns="0" bIns="0" anchor="t">
             <a:spAutoFit/>
           </a:bodyPr>
           <a:lstStyle/>
@@ -13293,7 +13419,7 @@
           <a:noFill/>
         </p:spPr>
         <p:txBody>
-          <a:bodyPr wrap="square" anchor="t" lIns="0" rIns="0" tIns="0" bIns="0">
+          <a:bodyPr wrap="square" lIns="0" tIns="0" rIns="0" bIns="0" anchor="t">
             <a:spAutoFit/>
           </a:bodyPr>
           <a:lstStyle/>
@@ -13362,7 +13488,7 @@
           <a:noFill/>
         </p:spPr>
         <p:txBody>
-          <a:bodyPr wrap="square" anchor="t" lIns="0" rIns="0" tIns="0" bIns="0">
+          <a:bodyPr wrap="square" lIns="0" tIns="0" rIns="0" bIns="0" anchor="t">
             <a:spAutoFit/>
           </a:bodyPr>
           <a:lstStyle/>
@@ -13435,6 +13561,7 @@
           <a:lstStyle/>
           <a:p>
             <a:pPr algn="ctr"/>
+            <a:endParaRPr/>
           </a:p>
         </p:txBody>
       </p:sp>
@@ -13479,6 +13606,7 @@
           <a:lstStyle/>
           <a:p>
             <a:pPr algn="ctr"/>
+            <a:endParaRPr/>
           </a:p>
         </p:txBody>
       </p:sp>
@@ -13499,7 +13627,7 @@
           <a:noFill/>
         </p:spPr>
         <p:txBody>
-          <a:bodyPr wrap="square" anchor="ctr" lIns="0" rIns="0" tIns="0" bIns="0">
+          <a:bodyPr wrap="square" lIns="0" tIns="0" rIns="0" bIns="0" anchor="ctr">
             <a:spAutoFit/>
           </a:bodyPr>
           <a:lstStyle/>
@@ -13572,6 +13700,7 @@
           <a:lstStyle/>
           <a:p>
             <a:pPr algn="ctr"/>
+            <a:endParaRPr/>
           </a:p>
         </p:txBody>
       </p:sp>
@@ -13616,6 +13745,7 @@
           <a:lstStyle/>
           <a:p>
             <a:pPr algn="ctr"/>
+            <a:endParaRPr/>
           </a:p>
         </p:txBody>
       </p:sp>
@@ -13636,7 +13766,7 @@
           <a:noFill/>
         </p:spPr>
         <p:txBody>
-          <a:bodyPr wrap="square" anchor="ctr" lIns="0" rIns="0" tIns="0" bIns="0">
+          <a:bodyPr wrap="square" lIns="0" tIns="0" rIns="0" bIns="0" anchor="ctr">
             <a:spAutoFit/>
           </a:bodyPr>
           <a:lstStyle/>
@@ -13709,6 +13839,7 @@
           <a:lstStyle/>
           <a:p>
             <a:pPr algn="ctr"/>
+            <a:endParaRPr/>
           </a:p>
         </p:txBody>
       </p:sp>
@@ -13753,6 +13884,7 @@
           <a:lstStyle/>
           <a:p>
             <a:pPr algn="ctr"/>
+            <a:endParaRPr/>
           </a:p>
         </p:txBody>
       </p:sp>
@@ -13773,7 +13905,7 @@
           <a:noFill/>
         </p:spPr>
         <p:txBody>
-          <a:bodyPr wrap="square" anchor="ctr" lIns="0" rIns="0" tIns="0" bIns="0">
+          <a:bodyPr wrap="square" lIns="0" tIns="0" rIns="0" bIns="0" anchor="ctr">
             <a:spAutoFit/>
           </a:bodyPr>
           <a:lstStyle/>
@@ -13846,6 +13978,7 @@
           <a:lstStyle/>
           <a:p>
             <a:pPr algn="ctr"/>
+            <a:endParaRPr/>
           </a:p>
         </p:txBody>
       </p:sp>
@@ -13890,6 +14023,7 @@
           <a:lstStyle/>
           <a:p>
             <a:pPr algn="ctr"/>
+            <a:endParaRPr/>
           </a:p>
         </p:txBody>
       </p:sp>
@@ -13910,7 +14044,7 @@
           <a:noFill/>
         </p:spPr>
         <p:txBody>
-          <a:bodyPr wrap="square" anchor="ctr" lIns="0" rIns="0" tIns="0" bIns="0">
+          <a:bodyPr wrap="square" lIns="0" tIns="0" rIns="0" bIns="0" anchor="ctr">
             <a:spAutoFit/>
           </a:bodyPr>
           <a:lstStyle/>
@@ -13983,6 +14117,7 @@
           <a:lstStyle/>
           <a:p>
             <a:pPr algn="ctr"/>
+            <a:endParaRPr/>
           </a:p>
         </p:txBody>
       </p:sp>
@@ -14027,6 +14162,7 @@
           <a:lstStyle/>
           <a:p>
             <a:pPr algn="ctr"/>
+            <a:endParaRPr/>
           </a:p>
         </p:txBody>
       </p:sp>
@@ -14047,7 +14183,7 @@
           <a:noFill/>
         </p:spPr>
         <p:txBody>
-          <a:bodyPr wrap="square" anchor="ctr" lIns="0" rIns="0" tIns="0" bIns="0">
+          <a:bodyPr wrap="square" lIns="0" tIns="0" rIns="0" bIns="0" anchor="ctr">
             <a:spAutoFit/>
           </a:bodyPr>
           <a:lstStyle/>
@@ -14120,6 +14256,7 @@
           <a:lstStyle/>
           <a:p>
             <a:pPr algn="ctr"/>
+            <a:endParaRPr/>
           </a:p>
         </p:txBody>
       </p:sp>
@@ -14164,6 +14301,7 @@
           <a:lstStyle/>
           <a:p>
             <a:pPr algn="ctr"/>
+            <a:endParaRPr/>
           </a:p>
         </p:txBody>
       </p:sp>
@@ -14184,7 +14322,7 @@
           <a:noFill/>
         </p:spPr>
         <p:txBody>
-          <a:bodyPr wrap="square" anchor="ctr" lIns="0" rIns="0" tIns="0" bIns="0">
+          <a:bodyPr wrap="square" lIns="0" tIns="0" rIns="0" bIns="0" anchor="ctr">
             <a:spAutoFit/>
           </a:bodyPr>
           <a:lstStyle/>
@@ -14257,6 +14395,7 @@
           <a:lstStyle/>
           <a:p>
             <a:pPr algn="ctr"/>
+            <a:endParaRPr/>
           </a:p>
         </p:txBody>
       </p:sp>
@@ -14301,6 +14440,7 @@
           <a:lstStyle/>
           <a:p>
             <a:pPr algn="ctr"/>
+            <a:endParaRPr/>
           </a:p>
         </p:txBody>
       </p:sp>
@@ -14321,7 +14461,7 @@
           <a:noFill/>
         </p:spPr>
         <p:txBody>
-          <a:bodyPr wrap="square" anchor="ctr" lIns="0" rIns="0" tIns="0" bIns="0">
+          <a:bodyPr wrap="square" lIns="0" tIns="0" rIns="0" bIns="0" anchor="ctr">
             <a:spAutoFit/>
           </a:bodyPr>
           <a:lstStyle/>
@@ -14394,6 +14534,7 @@
           <a:lstStyle/>
           <a:p>
             <a:pPr algn="ctr"/>
+            <a:endParaRPr/>
           </a:p>
         </p:txBody>
       </p:sp>
@@ -14438,6 +14579,7 @@
           <a:lstStyle/>
           <a:p>
             <a:pPr algn="ctr"/>
+            <a:endParaRPr/>
           </a:p>
         </p:txBody>
       </p:sp>
@@ -14458,7 +14600,7 @@
           <a:noFill/>
         </p:spPr>
         <p:txBody>
-          <a:bodyPr wrap="square" anchor="ctr" lIns="0" rIns="0" tIns="0" bIns="0">
+          <a:bodyPr wrap="square" lIns="0" tIns="0" rIns="0" bIns="0" anchor="ctr">
             <a:spAutoFit/>
           </a:bodyPr>
           <a:lstStyle/>
@@ -14531,6 +14673,7 @@
           <a:lstStyle/>
           <a:p>
             <a:pPr algn="ctr"/>
+            <a:endParaRPr/>
           </a:p>
         </p:txBody>
       </p:sp>
@@ -14575,6 +14718,7 @@
           <a:lstStyle/>
           <a:p>
             <a:pPr algn="ctr"/>
+            <a:endParaRPr/>
           </a:p>
         </p:txBody>
       </p:sp>
@@ -14595,7 +14739,7 @@
           <a:noFill/>
         </p:spPr>
         <p:txBody>
-          <a:bodyPr wrap="square" anchor="ctr" lIns="0" rIns="0" tIns="0" bIns="0">
+          <a:bodyPr wrap="square" lIns="0" tIns="0" rIns="0" bIns="0" anchor="ctr">
             <a:spAutoFit/>
           </a:bodyPr>
           <a:lstStyle/>
@@ -14640,7 +14784,7 @@
           <a:noFill/>
         </p:spPr>
         <p:txBody>
-          <a:bodyPr wrap="square" anchor="t" lIns="0" rIns="0" tIns="0" bIns="0">
+          <a:bodyPr wrap="square" lIns="0" tIns="0" rIns="0" bIns="0" anchor="t">
             <a:spAutoFit/>
           </a:bodyPr>
           <a:lstStyle/>
@@ -14685,7 +14829,7 @@
           <a:noFill/>
         </p:spPr>
         <p:txBody>
-          <a:bodyPr wrap="square" anchor="t" lIns="0" rIns="0" tIns="0" bIns="0">
+          <a:bodyPr wrap="square" lIns="0" tIns="0" rIns="0" bIns="0" anchor="t">
             <a:spAutoFit/>
           </a:bodyPr>
           <a:lstStyle/>
@@ -14722,7 +14866,7 @@
 </file>
 
 <file path=ppt/slides/slide18.xml><?xml version="1.0" encoding="utf-8"?>
-<p:sld xmlns:a="http://schemas.openxmlformats.org/drawingml/2006/main" xmlns:p="http://schemas.openxmlformats.org/presentationml/2006/main" xmlns:r="http://schemas.openxmlformats.org/officeDocument/2006/relationships">
+<p:sld xmlns:a="http://schemas.openxmlformats.org/drawingml/2006/main" xmlns:r="http://schemas.openxmlformats.org/officeDocument/2006/relationships" xmlns:p="http://schemas.openxmlformats.org/presentationml/2006/main">
   <p:cSld>
     <p:spTree>
       <p:nvGrpSpPr>
@@ -14730,7 +14874,14 @@
         <p:cNvGrpSpPr/>
         <p:nvPr/>
       </p:nvGrpSpPr>
-      <p:grpSpPr/>
+      <p:grpSpPr>
+        <a:xfrm>
+          <a:off x="0" y="0"/>
+          <a:ext cx="0" cy="0"/>
+          <a:chOff x="0" y="0"/>
+          <a:chExt cx="0" cy="0"/>
+        </a:xfrm>
+      </p:grpSpPr>
       <p:sp>
         <p:nvSpPr>
           <p:cNvPr id="2" name="Rectangle 1"/>
@@ -14772,6 +14923,7 @@
           <a:lstStyle/>
           <a:p>
             <a:pPr algn="ctr"/>
+            <a:endParaRPr/>
           </a:p>
         </p:txBody>
       </p:sp>
@@ -14816,6 +14968,7 @@
           <a:lstStyle/>
           <a:p>
             <a:pPr algn="ctr"/>
+            <a:endParaRPr/>
           </a:p>
         </p:txBody>
       </p:sp>
@@ -14836,7 +14989,7 @@
           <a:noFill/>
         </p:spPr>
         <p:txBody>
-          <a:bodyPr wrap="square" anchor="t" lIns="0" rIns="0" tIns="0" bIns="0">
+          <a:bodyPr wrap="square" lIns="0" tIns="0" rIns="0" bIns="0" anchor="t">
             <a:spAutoFit/>
           </a:bodyPr>
           <a:lstStyle/>
@@ -14881,7 +15034,7 @@
           <a:noFill/>
         </p:spPr>
         <p:txBody>
-          <a:bodyPr wrap="square" anchor="t" lIns="0" rIns="0" tIns="0" bIns="0">
+          <a:bodyPr wrap="square" lIns="0" tIns="0" rIns="0" bIns="0" anchor="t">
             <a:spAutoFit/>
           </a:bodyPr>
           <a:lstStyle/>
@@ -14954,6 +15107,7 @@
           <a:lstStyle/>
           <a:p>
             <a:pPr algn="ctr"/>
+            <a:endParaRPr/>
           </a:p>
         </p:txBody>
       </p:sp>
@@ -14998,6 +15152,7 @@
           <a:lstStyle/>
           <a:p>
             <a:pPr algn="ctr"/>
+            <a:endParaRPr/>
           </a:p>
         </p:txBody>
       </p:sp>
@@ -15018,7 +15173,7 @@
           <a:noFill/>
         </p:spPr>
         <p:txBody>
-          <a:bodyPr wrap="square" anchor="t" lIns="0" rIns="0" tIns="0" bIns="0">
+          <a:bodyPr wrap="square" lIns="0" tIns="0" rIns="0" bIns="0" anchor="t">
             <a:spAutoFit/>
           </a:bodyPr>
           <a:lstStyle/>
@@ -15063,7 +15218,7 @@
           <a:noFill/>
         </p:spPr>
         <p:txBody>
-          <a:bodyPr wrap="square" anchor="t" lIns="0" rIns="0" tIns="0" bIns="0">
+          <a:bodyPr wrap="square" lIns="0" tIns="0" rIns="0" bIns="0" anchor="t">
             <a:spAutoFit/>
           </a:bodyPr>
           <a:lstStyle/>
@@ -15211,15 +15366,12 @@
                 <a:spcPts val="400"/>
               </a:spcAft>
             </a:pPr>
-            <a:r>
-              <a:rPr sz="1000" b="0">
-                <a:solidFill>
-                  <a:srgbClr val="475569"/>
-                </a:solidFill>
-                <a:latin typeface="Segoe UI"/>
-              </a:rPr>
-              <a:t/>
-            </a:r>
+            <a:endParaRPr sz="1000" b="0">
+              <a:solidFill>
+                <a:srgbClr val="475569"/>
+              </a:solidFill>
+              <a:latin typeface="Segoe UI"/>
+            </a:endParaRPr>
           </a:p>
           <a:p>
             <a:pPr algn="l">
@@ -15334,6 +15486,7 @@
           <a:lstStyle/>
           <a:p>
             <a:pPr algn="ctr"/>
+            <a:endParaRPr/>
           </a:p>
         </p:txBody>
       </p:sp>
@@ -15378,6 +15531,7 @@
           <a:lstStyle/>
           <a:p>
             <a:pPr algn="ctr"/>
+            <a:endParaRPr/>
           </a:p>
         </p:txBody>
       </p:sp>
@@ -15398,7 +15552,7 @@
           <a:noFill/>
         </p:spPr>
         <p:txBody>
-          <a:bodyPr wrap="square" anchor="t" lIns="0" rIns="0" tIns="0" bIns="0">
+          <a:bodyPr wrap="square" lIns="0" tIns="0" rIns="0" bIns="0" anchor="t">
             <a:spAutoFit/>
           </a:bodyPr>
           <a:lstStyle/>
@@ -15443,7 +15597,7 @@
           <a:noFill/>
         </p:spPr>
         <p:txBody>
-          <a:bodyPr wrap="square" anchor="t" lIns="0" rIns="0" tIns="0" bIns="0">
+          <a:bodyPr wrap="square" lIns="0" tIns="0" rIns="0" bIns="0" anchor="t">
             <a:spAutoFit/>
           </a:bodyPr>
           <a:lstStyle/>
@@ -15525,6 +15679,25 @@
                 <a:spcPts val="400"/>
               </a:spcAft>
             </a:pPr>
+            <a:endParaRPr sz="1000" b="0">
+              <a:solidFill>
+                <a:srgbClr val="475569"/>
+              </a:solidFill>
+              <a:latin typeface="Segoe UI"/>
+            </a:endParaRPr>
+          </a:p>
+          <a:p>
+            <a:pPr algn="l">
+              <a:lnSpc>
+                <a:spcPct val="106000"/>
+              </a:lnSpc>
+              <a:spcBef>
+                <a:spcPts val="0"/>
+              </a:spcBef>
+              <a:spcAft>
+                <a:spcPts val="400"/>
+              </a:spcAft>
+            </a:pPr>
             <a:r>
               <a:rPr sz="1000" b="0">
                 <a:solidFill>
@@ -15532,7 +15705,7 @@
                 </a:solidFill>
                 <a:latin typeface="Segoe UI"/>
               </a:rPr>
-              <a:t/>
+              <a:t>Lifecycle: new → churned → vip</a:t>
             </a:r>
           </a:p>
           <a:p>
@@ -15554,7 +15727,7 @@
                 </a:solidFill>
                 <a:latin typeface="Segoe UI"/>
               </a:rPr>
-              <a:t>Lifecycle: new → churned → vip</a:t>
+              <a:t>→ dormant → at_risk → active</a:t>
             </a:r>
           </a:p>
           <a:p>
@@ -15569,37 +15742,12 @@
                 <a:spcPts val="400"/>
               </a:spcAft>
             </a:pPr>
-            <a:r>
-              <a:rPr sz="1000" b="0">
-                <a:solidFill>
-                  <a:srgbClr val="475569"/>
-                </a:solidFill>
-                <a:latin typeface="Segoe UI"/>
-              </a:rPr>
-              <a:t>→ dormant → at_risk → active</a:t>
-            </a:r>
-          </a:p>
-          <a:p>
-            <a:pPr algn="l">
-              <a:lnSpc>
-                <a:spcPct val="106000"/>
-              </a:lnSpc>
-              <a:spcBef>
-                <a:spcPts val="0"/>
-              </a:spcBef>
-              <a:spcAft>
-                <a:spcPts val="400"/>
-              </a:spcAft>
-            </a:pPr>
-            <a:r>
-              <a:rPr sz="1000" b="0">
-                <a:solidFill>
-                  <a:srgbClr val="475569"/>
-                </a:solidFill>
-                <a:latin typeface="Segoe UI"/>
-              </a:rPr>
-              <a:t/>
-            </a:r>
+            <a:endParaRPr sz="1000" b="0">
+              <a:solidFill>
+                <a:srgbClr val="475569"/>
+              </a:solidFill>
+              <a:latin typeface="Segoe UI"/>
+            </a:endParaRPr>
           </a:p>
           <a:p>
             <a:pPr algn="l">
@@ -15714,6 +15862,7 @@
           <a:lstStyle/>
           <a:p>
             <a:pPr algn="ctr"/>
+            <a:endParaRPr/>
           </a:p>
         </p:txBody>
       </p:sp>
@@ -15758,6 +15907,7 @@
           <a:lstStyle/>
           <a:p>
             <a:pPr algn="ctr"/>
+            <a:endParaRPr/>
           </a:p>
         </p:txBody>
       </p:sp>
@@ -15778,7 +15928,7 @@
           <a:noFill/>
         </p:spPr>
         <p:txBody>
-          <a:bodyPr wrap="square" anchor="t" lIns="0" rIns="0" tIns="0" bIns="0">
+          <a:bodyPr wrap="square" lIns="0" tIns="0" rIns="0" bIns="0" anchor="t">
             <a:spAutoFit/>
           </a:bodyPr>
           <a:lstStyle/>
@@ -15823,7 +15973,7 @@
           <a:noFill/>
         </p:spPr>
         <p:txBody>
-          <a:bodyPr wrap="square" anchor="t" lIns="0" rIns="0" tIns="0" bIns="0">
+          <a:bodyPr wrap="square" lIns="0" tIns="0" rIns="0" bIns="0" anchor="t">
             <a:spAutoFit/>
           </a:bodyPr>
           <a:lstStyle/>
@@ -16044,7 +16194,7 @@
           <a:noFill/>
         </p:spPr>
         <p:txBody>
-          <a:bodyPr wrap="square" anchor="t" lIns="0" rIns="0" tIns="0" bIns="0">
+          <a:bodyPr wrap="square" lIns="0" tIns="0" rIns="0" bIns="0" anchor="t">
             <a:spAutoFit/>
           </a:bodyPr>
           <a:lstStyle/>
@@ -16089,7 +16239,7 @@
           <a:noFill/>
         </p:spPr>
         <p:txBody>
-          <a:bodyPr wrap="square" anchor="t" lIns="0" rIns="0" tIns="0" bIns="0">
+          <a:bodyPr wrap="square" lIns="0" tIns="0" rIns="0" bIns="0" anchor="t">
             <a:spAutoFit/>
           </a:bodyPr>
           <a:lstStyle/>
@@ -16126,7 +16276,7 @@
 </file>
 
 <file path=ppt/slides/slide19.xml><?xml version="1.0" encoding="utf-8"?>
-<p:sld xmlns:a="http://schemas.openxmlformats.org/drawingml/2006/main" xmlns:p="http://schemas.openxmlformats.org/presentationml/2006/main" xmlns:r="http://schemas.openxmlformats.org/officeDocument/2006/relationships">
+<p:sld xmlns:a="http://schemas.openxmlformats.org/drawingml/2006/main" xmlns:r="http://schemas.openxmlformats.org/officeDocument/2006/relationships" xmlns:p="http://schemas.openxmlformats.org/presentationml/2006/main">
   <p:cSld>
     <p:spTree>
       <p:nvGrpSpPr>
@@ -16134,7 +16284,14 @@
         <p:cNvGrpSpPr/>
         <p:nvPr/>
       </p:nvGrpSpPr>
-      <p:grpSpPr/>
+      <p:grpSpPr>
+        <a:xfrm>
+          <a:off x="0" y="0"/>
+          <a:ext cx="0" cy="0"/>
+          <a:chOff x="0" y="0"/>
+          <a:chExt cx="0" cy="0"/>
+        </a:xfrm>
+      </p:grpSpPr>
       <p:sp>
         <p:nvSpPr>
           <p:cNvPr id="2" name="Rectangle 1"/>
@@ -16176,6 +16333,7 @@
           <a:lstStyle/>
           <a:p>
             <a:pPr algn="ctr"/>
+            <a:endParaRPr/>
           </a:p>
         </p:txBody>
       </p:sp>
@@ -16220,6 +16378,7 @@
           <a:lstStyle/>
           <a:p>
             <a:pPr algn="ctr"/>
+            <a:endParaRPr/>
           </a:p>
         </p:txBody>
       </p:sp>
@@ -16240,7 +16399,7 @@
           <a:noFill/>
         </p:spPr>
         <p:txBody>
-          <a:bodyPr wrap="square" anchor="t" lIns="0" rIns="0" tIns="0" bIns="0">
+          <a:bodyPr wrap="square" lIns="0" tIns="0" rIns="0" bIns="0" anchor="t">
             <a:spAutoFit/>
           </a:bodyPr>
           <a:lstStyle/>
@@ -16285,7 +16444,7 @@
           <a:noFill/>
         </p:spPr>
         <p:txBody>
-          <a:bodyPr wrap="square" anchor="t" lIns="0" rIns="0" tIns="0" bIns="0">
+          <a:bodyPr wrap="square" lIns="0" tIns="0" rIns="0" bIns="0" anchor="t">
             <a:spAutoFit/>
           </a:bodyPr>
           <a:lstStyle/>
@@ -16358,6 +16517,7 @@
           <a:lstStyle/>
           <a:p>
             <a:pPr algn="ctr"/>
+            <a:endParaRPr/>
           </a:p>
         </p:txBody>
       </p:sp>
@@ -16402,6 +16562,7 @@
           <a:lstStyle/>
           <a:p>
             <a:pPr algn="ctr"/>
+            <a:endParaRPr/>
           </a:p>
         </p:txBody>
       </p:sp>
@@ -16422,7 +16583,7 @@
           <a:noFill/>
         </p:spPr>
         <p:txBody>
-          <a:bodyPr wrap="square" anchor="t" lIns="0" rIns="0" tIns="0" bIns="0">
+          <a:bodyPr wrap="square" lIns="0" tIns="0" rIns="0" bIns="0" anchor="t">
             <a:spAutoFit/>
           </a:bodyPr>
           <a:lstStyle/>
@@ -16467,7 +16628,7 @@
           <a:noFill/>
         </p:spPr>
         <p:txBody>
-          <a:bodyPr wrap="square" anchor="t" lIns="0" rIns="0" tIns="0" bIns="0">
+          <a:bodyPr wrap="square" lIns="0" tIns="0" rIns="0" bIns="0" anchor="t">
             <a:spAutoFit/>
           </a:bodyPr>
           <a:lstStyle/>
@@ -16527,6 +16688,25 @@
                 <a:spcPts val="400"/>
               </a:spcAft>
             </a:pPr>
+            <a:endParaRPr sz="1000" b="0">
+              <a:solidFill>
+                <a:srgbClr val="475569"/>
+              </a:solidFill>
+              <a:latin typeface="Segoe UI"/>
+            </a:endParaRPr>
+          </a:p>
+          <a:p>
+            <a:pPr algn="l">
+              <a:lnSpc>
+                <a:spcPct val="106000"/>
+              </a:lnSpc>
+              <a:spcBef>
+                <a:spcPts val="0"/>
+              </a:spcBef>
+              <a:spcAft>
+                <a:spcPts val="400"/>
+              </a:spcAft>
+            </a:pPr>
             <a:r>
               <a:rPr sz="1000" b="0">
                 <a:solidFill>
@@ -16534,7 +16714,7 @@
                 </a:solidFill>
                 <a:latin typeface="Segoe UI"/>
               </a:rPr>
-              <a:t/>
+              <a:t>Moving-average + linear-trend</a:t>
             </a:r>
           </a:p>
           <a:p>
@@ -16556,7 +16736,7 @@
                 </a:solidFill>
                 <a:latin typeface="Segoe UI"/>
               </a:rPr>
-              <a:t>Moving-average + linear-trend</a:t>
+              <a:t>dự báo N kỳ.</a:t>
             </a:r>
           </a:p>
           <a:p>
@@ -16571,6 +16751,25 @@
                 <a:spcPts val="400"/>
               </a:spcAft>
             </a:pPr>
+            <a:endParaRPr sz="1000" b="0">
+              <a:solidFill>
+                <a:srgbClr val="475569"/>
+              </a:solidFill>
+              <a:latin typeface="Segoe UI"/>
+            </a:endParaRPr>
+          </a:p>
+          <a:p>
+            <a:pPr algn="l">
+              <a:lnSpc>
+                <a:spcPct val="106000"/>
+              </a:lnSpc>
+              <a:spcBef>
+                <a:spcPts val="0"/>
+              </a:spcBef>
+              <a:spcAft>
+                <a:spcPts val="400"/>
+              </a:spcAft>
+            </a:pPr>
             <a:r>
               <a:rPr sz="1000" b="0">
                 <a:solidFill>
@@ -16578,7 +16777,7 @@
                 </a:solidFill>
                 <a:latin typeface="Segoe UI"/>
               </a:rPr>
-              <a:t>dự báo N kỳ.</a:t>
+              <a:t>GET /v1/analytics/forecast</a:t>
             </a:r>
           </a:p>
           <a:p>
@@ -16593,59 +16792,12 @@
                 <a:spcPts val="400"/>
               </a:spcAft>
             </a:pPr>
-            <a:r>
-              <a:rPr sz="1000" b="0">
-                <a:solidFill>
-                  <a:srgbClr val="475569"/>
-                </a:solidFill>
-                <a:latin typeface="Segoe UI"/>
-              </a:rPr>
-              <a:t/>
-            </a:r>
-          </a:p>
-          <a:p>
-            <a:pPr algn="l">
-              <a:lnSpc>
-                <a:spcPct val="106000"/>
-              </a:lnSpc>
-              <a:spcBef>
-                <a:spcPts val="0"/>
-              </a:spcBef>
-              <a:spcAft>
-                <a:spcPts val="400"/>
-              </a:spcAft>
-            </a:pPr>
-            <a:r>
-              <a:rPr sz="1000" b="0">
-                <a:solidFill>
-                  <a:srgbClr val="475569"/>
-                </a:solidFill>
-                <a:latin typeface="Segoe UI"/>
-              </a:rPr>
-              <a:t>GET /v1/analytics/forecast</a:t>
-            </a:r>
-          </a:p>
-          <a:p>
-            <a:pPr algn="l">
-              <a:lnSpc>
-                <a:spcPct val="106000"/>
-              </a:lnSpc>
-              <a:spcBef>
-                <a:spcPts val="0"/>
-              </a:spcBef>
-              <a:spcAft>
-                <a:spcPts val="400"/>
-              </a:spcAft>
-            </a:pPr>
-            <a:r>
-              <a:rPr sz="1000" b="0">
-                <a:solidFill>
-                  <a:srgbClr val="475569"/>
-                </a:solidFill>
-                <a:latin typeface="Segoe UI"/>
-              </a:rPr>
-              <a:t/>
-            </a:r>
+            <a:endParaRPr sz="1000" b="0">
+              <a:solidFill>
+                <a:srgbClr val="475569"/>
+              </a:solidFill>
+              <a:latin typeface="Segoe UI"/>
+            </a:endParaRPr>
           </a:p>
           <a:p>
             <a:pPr algn="l">
@@ -16738,6 +16890,7 @@
           <a:lstStyle/>
           <a:p>
             <a:pPr algn="ctr"/>
+            <a:endParaRPr/>
           </a:p>
         </p:txBody>
       </p:sp>
@@ -16782,6 +16935,7 @@
           <a:lstStyle/>
           <a:p>
             <a:pPr algn="ctr"/>
+            <a:endParaRPr/>
           </a:p>
         </p:txBody>
       </p:sp>
@@ -16802,7 +16956,7 @@
           <a:noFill/>
         </p:spPr>
         <p:txBody>
-          <a:bodyPr wrap="square" anchor="t" lIns="0" rIns="0" tIns="0" bIns="0">
+          <a:bodyPr wrap="square" lIns="0" tIns="0" rIns="0" bIns="0" anchor="t">
             <a:spAutoFit/>
           </a:bodyPr>
           <a:lstStyle/>
@@ -16847,7 +17001,7 @@
           <a:noFill/>
         </p:spPr>
         <p:txBody>
-          <a:bodyPr wrap="square" anchor="t" lIns="0" rIns="0" tIns="0" bIns="0">
+          <a:bodyPr wrap="square" lIns="0" tIns="0" rIns="0" bIns="0" anchor="t">
             <a:spAutoFit/>
           </a:bodyPr>
           <a:lstStyle/>
@@ -16995,15 +17149,12 @@
                 <a:spcPts val="400"/>
               </a:spcAft>
             </a:pPr>
-            <a:r>
-              <a:rPr sz="1000" b="0">
-                <a:solidFill>
-                  <a:srgbClr val="475569"/>
-                </a:solidFill>
-                <a:latin typeface="Segoe UI"/>
-              </a:rPr>
-              <a:t/>
-            </a:r>
+            <a:endParaRPr sz="1000" b="0">
+              <a:solidFill>
+                <a:srgbClr val="475569"/>
+              </a:solidFill>
+              <a:latin typeface="Segoe UI"/>
+            </a:endParaRPr>
           </a:p>
           <a:p>
             <a:pPr algn="l">
@@ -17118,6 +17269,7 @@
           <a:lstStyle/>
           <a:p>
             <a:pPr algn="ctr"/>
+            <a:endParaRPr/>
           </a:p>
         </p:txBody>
       </p:sp>
@@ -17162,6 +17314,7 @@
           <a:lstStyle/>
           <a:p>
             <a:pPr algn="ctr"/>
+            <a:endParaRPr/>
           </a:p>
         </p:txBody>
       </p:sp>
@@ -17182,7 +17335,7 @@
           <a:noFill/>
         </p:spPr>
         <p:txBody>
-          <a:bodyPr wrap="square" anchor="t" lIns="0" rIns="0" tIns="0" bIns="0">
+          <a:bodyPr wrap="square" lIns="0" tIns="0" rIns="0" bIns="0" anchor="t">
             <a:spAutoFit/>
           </a:bodyPr>
           <a:lstStyle/>
@@ -17227,7 +17380,7 @@
           <a:noFill/>
         </p:spPr>
         <p:txBody>
-          <a:bodyPr wrap="square" anchor="t" lIns="0" rIns="0" tIns="0" bIns="0">
+          <a:bodyPr wrap="square" lIns="0" tIns="0" rIns="0" bIns="0" anchor="t">
             <a:spAutoFit/>
           </a:bodyPr>
           <a:lstStyle/>
@@ -17353,15 +17506,12 @@
                 <a:spcPts val="400"/>
               </a:spcAft>
             </a:pPr>
-            <a:r>
-              <a:rPr sz="1000" b="0">
-                <a:solidFill>
-                  <a:srgbClr val="475569"/>
-                </a:solidFill>
-                <a:latin typeface="Segoe UI"/>
-              </a:rPr>
-              <a:t/>
-            </a:r>
+            <a:endParaRPr sz="1000" b="0">
+              <a:solidFill>
+                <a:srgbClr val="475569"/>
+              </a:solidFill>
+              <a:latin typeface="Segoe UI"/>
+            </a:endParaRPr>
           </a:p>
           <a:p>
             <a:pPr algn="l">
@@ -17448,7 +17598,7 @@
           <a:noFill/>
         </p:spPr>
         <p:txBody>
-          <a:bodyPr wrap="square" anchor="t" lIns="0" rIns="0" tIns="0" bIns="0">
+          <a:bodyPr wrap="square" lIns="0" tIns="0" rIns="0" bIns="0" anchor="t">
             <a:spAutoFit/>
           </a:bodyPr>
           <a:lstStyle/>
@@ -17493,7 +17643,7 @@
           <a:noFill/>
         </p:spPr>
         <p:txBody>
-          <a:bodyPr wrap="square" anchor="t" lIns="0" rIns="0" tIns="0" bIns="0">
+          <a:bodyPr wrap="square" lIns="0" tIns="0" rIns="0" bIns="0" anchor="t">
             <a:spAutoFit/>
           </a:bodyPr>
           <a:lstStyle/>
@@ -17530,7 +17680,7 @@
 </file>
 
 <file path=ppt/slides/slide2.xml><?xml version="1.0" encoding="utf-8"?>
-<p:sld xmlns:a="http://schemas.openxmlformats.org/drawingml/2006/main" xmlns:p="http://schemas.openxmlformats.org/presentationml/2006/main" xmlns:r="http://schemas.openxmlformats.org/officeDocument/2006/relationships">
+<p:sld xmlns:a="http://schemas.openxmlformats.org/drawingml/2006/main" xmlns:r="http://schemas.openxmlformats.org/officeDocument/2006/relationships" xmlns:p="http://schemas.openxmlformats.org/presentationml/2006/main">
   <p:cSld>
     <p:spTree>
       <p:nvGrpSpPr>
@@ -17538,7 +17688,14 @@
         <p:cNvGrpSpPr/>
         <p:nvPr/>
       </p:nvGrpSpPr>
-      <p:grpSpPr/>
+      <p:grpSpPr>
+        <a:xfrm>
+          <a:off x="0" y="0"/>
+          <a:ext cx="0" cy="0"/>
+          <a:chOff x="0" y="0"/>
+          <a:chExt cx="0" cy="0"/>
+        </a:xfrm>
+      </p:grpSpPr>
       <p:sp>
         <p:nvSpPr>
           <p:cNvPr id="2" name="Rectangle 1"/>
@@ -17580,6 +17737,7 @@
           <a:lstStyle/>
           <a:p>
             <a:pPr algn="ctr"/>
+            <a:endParaRPr/>
           </a:p>
         </p:txBody>
       </p:sp>
@@ -17624,6 +17782,7 @@
           <a:lstStyle/>
           <a:p>
             <a:pPr algn="ctr"/>
+            <a:endParaRPr/>
           </a:p>
         </p:txBody>
       </p:sp>
@@ -17644,7 +17803,7 @@
           <a:noFill/>
         </p:spPr>
         <p:txBody>
-          <a:bodyPr wrap="square" anchor="t" lIns="0" rIns="0" tIns="0" bIns="0">
+          <a:bodyPr wrap="square" lIns="0" tIns="0" rIns="0" bIns="0" anchor="t">
             <a:spAutoFit/>
           </a:bodyPr>
           <a:lstStyle/>
@@ -17689,7 +17848,7 @@
           <a:noFill/>
         </p:spPr>
         <p:txBody>
-          <a:bodyPr wrap="square" anchor="t" lIns="0" rIns="0" tIns="0" bIns="0">
+          <a:bodyPr wrap="square" lIns="0" tIns="0" rIns="0" bIns="0" anchor="t">
             <a:spAutoFit/>
           </a:bodyPr>
           <a:lstStyle/>
@@ -17762,6 +17921,7 @@
           <a:lstStyle/>
           <a:p>
             <a:pPr algn="ctr"/>
+            <a:endParaRPr/>
           </a:p>
         </p:txBody>
       </p:sp>
@@ -17808,6 +17968,7 @@
           <a:lstStyle/>
           <a:p>
             <a:pPr algn="ctr"/>
+            <a:endParaRPr/>
           </a:p>
         </p:txBody>
       </p:sp>
@@ -17828,7 +17989,7 @@
           <a:noFill/>
         </p:spPr>
         <p:txBody>
-          <a:bodyPr wrap="square" anchor="ctr" lIns="0" rIns="0" tIns="0" bIns="0">
+          <a:bodyPr wrap="square" lIns="0" tIns="0" rIns="0" bIns="0" anchor="ctr">
             <a:spAutoFit/>
           </a:bodyPr>
           <a:lstStyle/>
@@ -17873,7 +18034,7 @@
           <a:noFill/>
         </p:spPr>
         <p:txBody>
-          <a:bodyPr wrap="square" anchor="t" lIns="0" rIns="0" tIns="0" bIns="0">
+          <a:bodyPr wrap="square" lIns="0" tIns="0" rIns="0" bIns="0" anchor="t">
             <a:spAutoFit/>
           </a:bodyPr>
           <a:lstStyle/>
@@ -17918,7 +18079,7 @@
           <a:noFill/>
         </p:spPr>
         <p:txBody>
-          <a:bodyPr wrap="square" anchor="t" lIns="0" rIns="0" tIns="0" bIns="0">
+          <a:bodyPr wrap="square" lIns="0" tIns="0" rIns="0" bIns="0" anchor="t">
             <a:spAutoFit/>
           </a:bodyPr>
           <a:lstStyle/>
@@ -17991,6 +18152,7 @@
           <a:lstStyle/>
           <a:p>
             <a:pPr algn="ctr"/>
+            <a:endParaRPr/>
           </a:p>
         </p:txBody>
       </p:sp>
@@ -18037,6 +18199,7 @@
           <a:lstStyle/>
           <a:p>
             <a:pPr algn="ctr"/>
+            <a:endParaRPr/>
           </a:p>
         </p:txBody>
       </p:sp>
@@ -18057,7 +18220,7 @@
           <a:noFill/>
         </p:spPr>
         <p:txBody>
-          <a:bodyPr wrap="square" anchor="ctr" lIns="0" rIns="0" tIns="0" bIns="0">
+          <a:bodyPr wrap="square" lIns="0" tIns="0" rIns="0" bIns="0" anchor="ctr">
             <a:spAutoFit/>
           </a:bodyPr>
           <a:lstStyle/>
@@ -18102,7 +18265,7 @@
           <a:noFill/>
         </p:spPr>
         <p:txBody>
-          <a:bodyPr wrap="square" anchor="t" lIns="0" rIns="0" tIns="0" bIns="0">
+          <a:bodyPr wrap="square" lIns="0" tIns="0" rIns="0" bIns="0" anchor="t">
             <a:spAutoFit/>
           </a:bodyPr>
           <a:lstStyle/>
@@ -18147,7 +18310,7 @@
           <a:noFill/>
         </p:spPr>
         <p:txBody>
-          <a:bodyPr wrap="square" anchor="t" lIns="0" rIns="0" tIns="0" bIns="0">
+          <a:bodyPr wrap="square" lIns="0" tIns="0" rIns="0" bIns="0" anchor="t">
             <a:spAutoFit/>
           </a:bodyPr>
           <a:lstStyle/>
@@ -18220,6 +18383,7 @@
           <a:lstStyle/>
           <a:p>
             <a:pPr algn="ctr"/>
+            <a:endParaRPr/>
           </a:p>
         </p:txBody>
       </p:sp>
@@ -18266,6 +18430,7 @@
           <a:lstStyle/>
           <a:p>
             <a:pPr algn="ctr"/>
+            <a:endParaRPr/>
           </a:p>
         </p:txBody>
       </p:sp>
@@ -18286,7 +18451,7 @@
           <a:noFill/>
         </p:spPr>
         <p:txBody>
-          <a:bodyPr wrap="square" anchor="ctr" lIns="0" rIns="0" tIns="0" bIns="0">
+          <a:bodyPr wrap="square" lIns="0" tIns="0" rIns="0" bIns="0" anchor="ctr">
             <a:spAutoFit/>
           </a:bodyPr>
           <a:lstStyle/>
@@ -18331,7 +18496,7 @@
           <a:noFill/>
         </p:spPr>
         <p:txBody>
-          <a:bodyPr wrap="square" anchor="t" lIns="0" rIns="0" tIns="0" bIns="0">
+          <a:bodyPr wrap="square" lIns="0" tIns="0" rIns="0" bIns="0" anchor="t">
             <a:spAutoFit/>
           </a:bodyPr>
           <a:lstStyle/>
@@ -18376,7 +18541,7 @@
           <a:noFill/>
         </p:spPr>
         <p:txBody>
-          <a:bodyPr wrap="square" anchor="t" lIns="0" rIns="0" tIns="0" bIns="0">
+          <a:bodyPr wrap="square" lIns="0" tIns="0" rIns="0" bIns="0" anchor="t">
             <a:spAutoFit/>
           </a:bodyPr>
           <a:lstStyle/>
@@ -18449,6 +18614,7 @@
           <a:lstStyle/>
           <a:p>
             <a:pPr algn="ctr"/>
+            <a:endParaRPr/>
           </a:p>
         </p:txBody>
       </p:sp>
@@ -18495,6 +18661,7 @@
           <a:lstStyle/>
           <a:p>
             <a:pPr algn="ctr"/>
+            <a:endParaRPr/>
           </a:p>
         </p:txBody>
       </p:sp>
@@ -18515,7 +18682,7 @@
           <a:noFill/>
         </p:spPr>
         <p:txBody>
-          <a:bodyPr wrap="square" anchor="ctr" lIns="0" rIns="0" tIns="0" bIns="0">
+          <a:bodyPr wrap="square" lIns="0" tIns="0" rIns="0" bIns="0" anchor="ctr">
             <a:spAutoFit/>
           </a:bodyPr>
           <a:lstStyle/>
@@ -18560,7 +18727,7 @@
           <a:noFill/>
         </p:spPr>
         <p:txBody>
-          <a:bodyPr wrap="square" anchor="t" lIns="0" rIns="0" tIns="0" bIns="0">
+          <a:bodyPr wrap="square" lIns="0" tIns="0" rIns="0" bIns="0" anchor="t">
             <a:spAutoFit/>
           </a:bodyPr>
           <a:lstStyle/>
@@ -18605,7 +18772,7 @@
           <a:noFill/>
         </p:spPr>
         <p:txBody>
-          <a:bodyPr wrap="square" anchor="t" lIns="0" rIns="0" tIns="0" bIns="0">
+          <a:bodyPr wrap="square" lIns="0" tIns="0" rIns="0" bIns="0" anchor="t">
             <a:spAutoFit/>
           </a:bodyPr>
           <a:lstStyle/>
@@ -18678,6 +18845,7 @@
           <a:lstStyle/>
           <a:p>
             <a:pPr algn="ctr"/>
+            <a:endParaRPr/>
           </a:p>
         </p:txBody>
       </p:sp>
@@ -18724,6 +18892,7 @@
           <a:lstStyle/>
           <a:p>
             <a:pPr algn="ctr"/>
+            <a:endParaRPr/>
           </a:p>
         </p:txBody>
       </p:sp>
@@ -18744,7 +18913,7 @@
           <a:noFill/>
         </p:spPr>
         <p:txBody>
-          <a:bodyPr wrap="square" anchor="ctr" lIns="0" rIns="0" tIns="0" bIns="0">
+          <a:bodyPr wrap="square" lIns="0" tIns="0" rIns="0" bIns="0" anchor="ctr">
             <a:spAutoFit/>
           </a:bodyPr>
           <a:lstStyle/>
@@ -18789,7 +18958,7 @@
           <a:noFill/>
         </p:spPr>
         <p:txBody>
-          <a:bodyPr wrap="square" anchor="t" lIns="0" rIns="0" tIns="0" bIns="0">
+          <a:bodyPr wrap="square" lIns="0" tIns="0" rIns="0" bIns="0" anchor="t">
             <a:spAutoFit/>
           </a:bodyPr>
           <a:lstStyle/>
@@ -18834,7 +19003,7 @@
           <a:noFill/>
         </p:spPr>
         <p:txBody>
-          <a:bodyPr wrap="square" anchor="t" lIns="0" rIns="0" tIns="0" bIns="0">
+          <a:bodyPr wrap="square" lIns="0" tIns="0" rIns="0" bIns="0" anchor="t">
             <a:spAutoFit/>
           </a:bodyPr>
           <a:lstStyle/>
@@ -18907,6 +19076,7 @@
           <a:lstStyle/>
           <a:p>
             <a:pPr algn="ctr"/>
+            <a:endParaRPr/>
           </a:p>
         </p:txBody>
       </p:sp>
@@ -18953,6 +19123,7 @@
           <a:lstStyle/>
           <a:p>
             <a:pPr algn="ctr"/>
+            <a:endParaRPr/>
           </a:p>
         </p:txBody>
       </p:sp>
@@ -18973,7 +19144,7 @@
           <a:noFill/>
         </p:spPr>
         <p:txBody>
-          <a:bodyPr wrap="square" anchor="ctr" lIns="0" rIns="0" tIns="0" bIns="0">
+          <a:bodyPr wrap="square" lIns="0" tIns="0" rIns="0" bIns="0" anchor="ctr">
             <a:spAutoFit/>
           </a:bodyPr>
           <a:lstStyle/>
@@ -19018,7 +19189,7 @@
           <a:noFill/>
         </p:spPr>
         <p:txBody>
-          <a:bodyPr wrap="square" anchor="t" lIns="0" rIns="0" tIns="0" bIns="0">
+          <a:bodyPr wrap="square" lIns="0" tIns="0" rIns="0" bIns="0" anchor="t">
             <a:spAutoFit/>
           </a:bodyPr>
           <a:lstStyle/>
@@ -19063,7 +19234,7 @@
           <a:noFill/>
         </p:spPr>
         <p:txBody>
-          <a:bodyPr wrap="square" anchor="t" lIns="0" rIns="0" tIns="0" bIns="0">
+          <a:bodyPr wrap="square" lIns="0" tIns="0" rIns="0" bIns="0" anchor="t">
             <a:spAutoFit/>
           </a:bodyPr>
           <a:lstStyle/>
@@ -19108,7 +19279,7 @@
           <a:noFill/>
         </p:spPr>
         <p:txBody>
-          <a:bodyPr wrap="square" anchor="t" lIns="0" rIns="0" tIns="0" bIns="0">
+          <a:bodyPr wrap="square" lIns="0" tIns="0" rIns="0" bIns="0" anchor="t">
             <a:spAutoFit/>
           </a:bodyPr>
           <a:lstStyle/>
@@ -19153,7 +19324,7 @@
           <a:noFill/>
         </p:spPr>
         <p:txBody>
-          <a:bodyPr wrap="square" anchor="t" lIns="0" rIns="0" tIns="0" bIns="0">
+          <a:bodyPr wrap="square" lIns="0" tIns="0" rIns="0" bIns="0" anchor="t">
             <a:spAutoFit/>
           </a:bodyPr>
           <a:lstStyle/>
@@ -19190,7 +19361,7 @@
 </file>
 
 <file path=ppt/slides/slide20.xml><?xml version="1.0" encoding="utf-8"?>
-<p:sld xmlns:a="http://schemas.openxmlformats.org/drawingml/2006/main" xmlns:p="http://schemas.openxmlformats.org/presentationml/2006/main" xmlns:r="http://schemas.openxmlformats.org/officeDocument/2006/relationships">
+<p:sld xmlns:a="http://schemas.openxmlformats.org/drawingml/2006/main" xmlns:r="http://schemas.openxmlformats.org/officeDocument/2006/relationships" xmlns:p="http://schemas.openxmlformats.org/presentationml/2006/main">
   <p:cSld>
     <p:spTree>
       <p:nvGrpSpPr>
@@ -19198,7 +19369,14 @@
         <p:cNvGrpSpPr/>
         <p:nvPr/>
       </p:nvGrpSpPr>
-      <p:grpSpPr/>
+      <p:grpSpPr>
+        <a:xfrm>
+          <a:off x="0" y="0"/>
+          <a:ext cx="0" cy="0"/>
+          <a:chOff x="0" y="0"/>
+          <a:chExt cx="0" cy="0"/>
+        </a:xfrm>
+      </p:grpSpPr>
       <p:sp>
         <p:nvSpPr>
           <p:cNvPr id="2" name="Rectangle 1"/>
@@ -19240,6 +19418,7 @@
           <a:lstStyle/>
           <a:p>
             <a:pPr algn="ctr"/>
+            <a:endParaRPr/>
           </a:p>
         </p:txBody>
       </p:sp>
@@ -19284,6 +19463,7 @@
           <a:lstStyle/>
           <a:p>
             <a:pPr algn="ctr"/>
+            <a:endParaRPr/>
           </a:p>
         </p:txBody>
       </p:sp>
@@ -19304,7 +19484,7 @@
           <a:noFill/>
         </p:spPr>
         <p:txBody>
-          <a:bodyPr wrap="square" anchor="t" lIns="0" rIns="0" tIns="0" bIns="0">
+          <a:bodyPr wrap="square" lIns="0" tIns="0" rIns="0" bIns="0" anchor="t">
             <a:spAutoFit/>
           </a:bodyPr>
           <a:lstStyle/>
@@ -19349,7 +19529,7 @@
           <a:noFill/>
         </p:spPr>
         <p:txBody>
-          <a:bodyPr wrap="square" anchor="t" lIns="0" rIns="0" tIns="0" bIns="0">
+          <a:bodyPr wrap="square" lIns="0" tIns="0" rIns="0" bIns="0" anchor="t">
             <a:spAutoFit/>
           </a:bodyPr>
           <a:lstStyle/>
@@ -19422,6 +19602,7 @@
           <a:lstStyle/>
           <a:p>
             <a:pPr algn="ctr"/>
+            <a:endParaRPr/>
           </a:p>
         </p:txBody>
       </p:sp>
@@ -19466,6 +19647,7 @@
           <a:lstStyle/>
           <a:p>
             <a:pPr algn="ctr"/>
+            <a:endParaRPr/>
           </a:p>
         </p:txBody>
       </p:sp>
@@ -19486,7 +19668,7 @@
           <a:noFill/>
         </p:spPr>
         <p:txBody>
-          <a:bodyPr wrap="square" anchor="t" lIns="0" rIns="0" tIns="0" bIns="0">
+          <a:bodyPr wrap="square" lIns="0" tIns="0" rIns="0" bIns="0" anchor="t">
             <a:spAutoFit/>
           </a:bodyPr>
           <a:lstStyle/>
@@ -19531,7 +19713,7 @@
           <a:noFill/>
         </p:spPr>
         <p:txBody>
-          <a:bodyPr wrap="square" anchor="t" lIns="0" rIns="0" tIns="0" bIns="0">
+          <a:bodyPr wrap="square" lIns="0" tIns="0" rIns="0" bIns="0" anchor="t">
             <a:spAutoFit/>
           </a:bodyPr>
           <a:lstStyle/>
@@ -19670,6 +19852,7 @@
           <a:lstStyle/>
           <a:p>
             <a:pPr algn="ctr"/>
+            <a:endParaRPr/>
           </a:p>
         </p:txBody>
       </p:sp>
@@ -19714,6 +19897,7 @@
           <a:lstStyle/>
           <a:p>
             <a:pPr algn="ctr"/>
+            <a:endParaRPr/>
           </a:p>
         </p:txBody>
       </p:sp>
@@ -19734,7 +19918,7 @@
           <a:noFill/>
         </p:spPr>
         <p:txBody>
-          <a:bodyPr wrap="square" anchor="t" lIns="0" rIns="0" tIns="0" bIns="0">
+          <a:bodyPr wrap="square" lIns="0" tIns="0" rIns="0" bIns="0" anchor="t">
             <a:spAutoFit/>
           </a:bodyPr>
           <a:lstStyle/>
@@ -19779,7 +19963,7 @@
           <a:noFill/>
         </p:spPr>
         <p:txBody>
-          <a:bodyPr wrap="square" anchor="t" lIns="0" rIns="0" tIns="0" bIns="0">
+          <a:bodyPr wrap="square" lIns="0" tIns="0" rIns="0" bIns="0" anchor="t">
             <a:spAutoFit/>
           </a:bodyPr>
           <a:lstStyle/>
@@ -19918,6 +20102,7 @@
           <a:lstStyle/>
           <a:p>
             <a:pPr algn="ctr"/>
+            <a:endParaRPr/>
           </a:p>
         </p:txBody>
       </p:sp>
@@ -19938,7 +20123,7 @@
           <a:noFill/>
         </p:spPr>
         <p:txBody>
-          <a:bodyPr wrap="square" anchor="t" lIns="0" rIns="0" tIns="0" bIns="0">
+          <a:bodyPr wrap="square" lIns="0" tIns="0" rIns="0" bIns="0" anchor="t">
             <a:spAutoFit/>
           </a:bodyPr>
           <a:lstStyle/>
@@ -19983,7 +20168,7 @@
           <a:noFill/>
         </p:spPr>
         <p:txBody>
-          <a:bodyPr wrap="square" anchor="t" lIns="0" rIns="0" tIns="0" bIns="0">
+          <a:bodyPr wrap="square" lIns="0" tIns="0" rIns="0" bIns="0" anchor="t">
             <a:spAutoFit/>
           </a:bodyPr>
           <a:lstStyle/>
@@ -20072,7 +20257,7 @@
           <a:noFill/>
         </p:spPr>
         <p:txBody>
-          <a:bodyPr wrap="square" anchor="t" lIns="0" rIns="0" tIns="0" bIns="0">
+          <a:bodyPr wrap="square" lIns="0" tIns="0" rIns="0" bIns="0" anchor="t">
             <a:spAutoFit/>
           </a:bodyPr>
           <a:lstStyle/>
@@ -20117,7 +20302,7 @@
           <a:noFill/>
         </p:spPr>
         <p:txBody>
-          <a:bodyPr wrap="square" anchor="t" lIns="0" rIns="0" tIns="0" bIns="0">
+          <a:bodyPr wrap="square" lIns="0" tIns="0" rIns="0" bIns="0" anchor="t">
             <a:spAutoFit/>
           </a:bodyPr>
           <a:lstStyle/>
@@ -20154,7 +20339,7 @@
 </file>
 
 <file path=ppt/slides/slide21.xml><?xml version="1.0" encoding="utf-8"?>
-<p:sld xmlns:a="http://schemas.openxmlformats.org/drawingml/2006/main" xmlns:p="http://schemas.openxmlformats.org/presentationml/2006/main" xmlns:r="http://schemas.openxmlformats.org/officeDocument/2006/relationships">
+<p:sld xmlns:a="http://schemas.openxmlformats.org/drawingml/2006/main" xmlns:r="http://schemas.openxmlformats.org/officeDocument/2006/relationships" xmlns:p="http://schemas.openxmlformats.org/presentationml/2006/main">
   <p:cSld>
     <p:spTree>
       <p:nvGrpSpPr>
@@ -20162,7 +20347,14 @@
         <p:cNvGrpSpPr/>
         <p:nvPr/>
       </p:nvGrpSpPr>
-      <p:grpSpPr/>
+      <p:grpSpPr>
+        <a:xfrm>
+          <a:off x="0" y="0"/>
+          <a:ext cx="0" cy="0"/>
+          <a:chOff x="0" y="0"/>
+          <a:chExt cx="0" cy="0"/>
+        </a:xfrm>
+      </p:grpSpPr>
       <p:sp>
         <p:nvSpPr>
           <p:cNvPr id="2" name="Rectangle 1"/>
@@ -20204,6 +20396,7 @@
           <a:lstStyle/>
           <a:p>
             <a:pPr algn="ctr"/>
+            <a:endParaRPr/>
           </a:p>
         </p:txBody>
       </p:sp>
@@ -20248,6 +20441,7 @@
           <a:lstStyle/>
           <a:p>
             <a:pPr algn="ctr"/>
+            <a:endParaRPr/>
           </a:p>
         </p:txBody>
       </p:sp>
@@ -20268,7 +20462,7 @@
           <a:noFill/>
         </p:spPr>
         <p:txBody>
-          <a:bodyPr wrap="square" anchor="t" lIns="0" rIns="0" tIns="0" bIns="0">
+          <a:bodyPr wrap="square" lIns="0" tIns="0" rIns="0" bIns="0" anchor="t">
             <a:spAutoFit/>
           </a:bodyPr>
           <a:lstStyle/>
@@ -20313,7 +20507,7 @@
           <a:noFill/>
         </p:spPr>
         <p:txBody>
-          <a:bodyPr wrap="square" anchor="t" lIns="0" rIns="0" tIns="0" bIns="0">
+          <a:bodyPr wrap="square" lIns="0" tIns="0" rIns="0" bIns="0" anchor="t">
             <a:spAutoFit/>
           </a:bodyPr>
           <a:lstStyle/>
@@ -20386,6 +20580,7 @@
           <a:lstStyle/>
           <a:p>
             <a:pPr algn="ctr"/>
+            <a:endParaRPr/>
           </a:p>
         </p:txBody>
       </p:sp>
@@ -20458,6 +20653,7 @@
           <a:lstStyle/>
           <a:p>
             <a:pPr algn="ctr"/>
+            <a:endParaRPr/>
           </a:p>
         </p:txBody>
       </p:sp>
@@ -20502,7 +20698,7 @@
           <a:noFill/>
         </p:spPr>
         <p:txBody>
-          <a:bodyPr wrap="square" anchor="t" lIns="0" rIns="0" tIns="0" bIns="0">
+          <a:bodyPr wrap="square" lIns="0" tIns="0" rIns="0" bIns="0" anchor="t">
             <a:spAutoFit/>
           </a:bodyPr>
           <a:lstStyle/>
@@ -20587,7 +20783,7 @@
           <a:noFill/>
         </p:spPr>
         <p:txBody>
-          <a:bodyPr wrap="square" anchor="t" lIns="0" rIns="0" tIns="0" bIns="0">
+          <a:bodyPr wrap="square" lIns="0" tIns="0" rIns="0" bIns="0" anchor="t">
             <a:spAutoFit/>
           </a:bodyPr>
           <a:lstStyle/>
@@ -20632,7 +20828,7 @@
           <a:noFill/>
         </p:spPr>
         <p:txBody>
-          <a:bodyPr wrap="square" anchor="t" lIns="0" rIns="0" tIns="0" bIns="0">
+          <a:bodyPr wrap="square" lIns="0" tIns="0" rIns="0" bIns="0" anchor="t">
             <a:spAutoFit/>
           </a:bodyPr>
           <a:lstStyle/>
@@ -20669,7 +20865,7 @@
 </file>
 
 <file path=ppt/slides/slide22.xml><?xml version="1.0" encoding="utf-8"?>
-<p:sld xmlns:a="http://schemas.openxmlformats.org/drawingml/2006/main" xmlns:p="http://schemas.openxmlformats.org/presentationml/2006/main" xmlns:r="http://schemas.openxmlformats.org/officeDocument/2006/relationships">
+<p:sld xmlns:a="http://schemas.openxmlformats.org/drawingml/2006/main" xmlns:r="http://schemas.openxmlformats.org/officeDocument/2006/relationships" xmlns:p="http://schemas.openxmlformats.org/presentationml/2006/main">
   <p:cSld>
     <p:spTree>
       <p:nvGrpSpPr>
@@ -20677,7 +20873,14 @@
         <p:cNvGrpSpPr/>
         <p:nvPr/>
       </p:nvGrpSpPr>
-      <p:grpSpPr/>
+      <p:grpSpPr>
+        <a:xfrm>
+          <a:off x="0" y="0"/>
+          <a:ext cx="0" cy="0"/>
+          <a:chOff x="0" y="0"/>
+          <a:chExt cx="0" cy="0"/>
+        </a:xfrm>
+      </p:grpSpPr>
       <p:sp>
         <p:nvSpPr>
           <p:cNvPr id="2" name="Rectangle 1"/>
@@ -20719,6 +20922,7 @@
           <a:lstStyle/>
           <a:p>
             <a:pPr algn="ctr"/>
+            <a:endParaRPr/>
           </a:p>
         </p:txBody>
       </p:sp>
@@ -20763,6 +20967,7 @@
           <a:lstStyle/>
           <a:p>
             <a:pPr algn="ctr"/>
+            <a:endParaRPr/>
           </a:p>
         </p:txBody>
       </p:sp>
@@ -20783,7 +20988,7 @@
           <a:noFill/>
         </p:spPr>
         <p:txBody>
-          <a:bodyPr wrap="square" anchor="t" lIns="0" rIns="0" tIns="0" bIns="0">
+          <a:bodyPr wrap="square" lIns="0" tIns="0" rIns="0" bIns="0" anchor="t">
             <a:spAutoFit/>
           </a:bodyPr>
           <a:lstStyle/>
@@ -20828,7 +21033,7 @@
           <a:noFill/>
         </p:spPr>
         <p:txBody>
-          <a:bodyPr wrap="square" anchor="t" lIns="0" rIns="0" tIns="0" bIns="0">
+          <a:bodyPr wrap="square" lIns="0" tIns="0" rIns="0" bIns="0" anchor="t">
             <a:spAutoFit/>
           </a:bodyPr>
           <a:lstStyle/>
@@ -20901,6 +21106,7 @@
           <a:lstStyle/>
           <a:p>
             <a:pPr algn="ctr"/>
+            <a:endParaRPr/>
           </a:p>
         </p:txBody>
       </p:sp>
@@ -20945,6 +21151,7 @@
           <a:lstStyle/>
           <a:p>
             <a:pPr algn="ctr"/>
+            <a:endParaRPr/>
           </a:p>
         </p:txBody>
       </p:sp>
@@ -20965,7 +21172,7 @@
           <a:noFill/>
         </p:spPr>
         <p:txBody>
-          <a:bodyPr wrap="square" anchor="t" lIns="0" rIns="0" tIns="0" bIns="0">
+          <a:bodyPr wrap="square" lIns="0" tIns="0" rIns="0" bIns="0" anchor="t">
             <a:spAutoFit/>
           </a:bodyPr>
           <a:lstStyle/>
@@ -21010,7 +21217,7 @@
           <a:noFill/>
         </p:spPr>
         <p:txBody>
-          <a:bodyPr wrap="square" anchor="t" lIns="0" rIns="0" tIns="0" bIns="0">
+          <a:bodyPr wrap="square" lIns="0" tIns="0" rIns="0" bIns="0" anchor="t">
             <a:spAutoFit/>
           </a:bodyPr>
           <a:lstStyle/>
@@ -21055,7 +21262,7 @@
           <a:noFill/>
         </p:spPr>
         <p:txBody>
-          <a:bodyPr wrap="square" anchor="t" lIns="0" rIns="0" tIns="0" bIns="0">
+          <a:bodyPr wrap="square" lIns="0" tIns="0" rIns="0" bIns="0" anchor="t">
             <a:spAutoFit/>
           </a:bodyPr>
           <a:lstStyle/>
@@ -21194,6 +21401,7 @@
           <a:lstStyle/>
           <a:p>
             <a:pPr algn="ctr"/>
+            <a:endParaRPr/>
           </a:p>
         </p:txBody>
       </p:sp>
@@ -21238,6 +21446,7 @@
           <a:lstStyle/>
           <a:p>
             <a:pPr algn="ctr"/>
+            <a:endParaRPr/>
           </a:p>
         </p:txBody>
       </p:sp>
@@ -21258,7 +21467,7 @@
           <a:noFill/>
         </p:spPr>
         <p:txBody>
-          <a:bodyPr wrap="square" anchor="t" lIns="0" rIns="0" tIns="0" bIns="0">
+          <a:bodyPr wrap="square" lIns="0" tIns="0" rIns="0" bIns="0" anchor="t">
             <a:spAutoFit/>
           </a:bodyPr>
           <a:lstStyle/>
@@ -21303,7 +21512,7 @@
           <a:noFill/>
         </p:spPr>
         <p:txBody>
-          <a:bodyPr wrap="square" anchor="t" lIns="0" rIns="0" tIns="0" bIns="0">
+          <a:bodyPr wrap="square" lIns="0" tIns="0" rIns="0" bIns="0" anchor="t">
             <a:spAutoFit/>
           </a:bodyPr>
           <a:lstStyle/>
@@ -21348,7 +21557,7 @@
           <a:noFill/>
         </p:spPr>
         <p:txBody>
-          <a:bodyPr wrap="square" anchor="t" lIns="0" rIns="0" tIns="0" bIns="0">
+          <a:bodyPr wrap="square" lIns="0" tIns="0" rIns="0" bIns="0" anchor="t">
             <a:spAutoFit/>
           </a:bodyPr>
           <a:lstStyle/>
@@ -21487,6 +21696,7 @@
           <a:lstStyle/>
           <a:p>
             <a:pPr algn="ctr"/>
+            <a:endParaRPr/>
           </a:p>
         </p:txBody>
       </p:sp>
@@ -21531,6 +21741,7 @@
           <a:lstStyle/>
           <a:p>
             <a:pPr algn="ctr"/>
+            <a:endParaRPr/>
           </a:p>
         </p:txBody>
       </p:sp>
@@ -21551,7 +21762,7 @@
           <a:noFill/>
         </p:spPr>
         <p:txBody>
-          <a:bodyPr wrap="square" anchor="t" lIns="0" rIns="0" tIns="0" bIns="0">
+          <a:bodyPr wrap="square" lIns="0" tIns="0" rIns="0" bIns="0" anchor="t">
             <a:spAutoFit/>
           </a:bodyPr>
           <a:lstStyle/>
@@ -21596,7 +21807,7 @@
           <a:noFill/>
         </p:spPr>
         <p:txBody>
-          <a:bodyPr wrap="square" anchor="t" lIns="0" rIns="0" tIns="0" bIns="0">
+          <a:bodyPr wrap="square" lIns="0" tIns="0" rIns="0" bIns="0" anchor="t">
             <a:spAutoFit/>
           </a:bodyPr>
           <a:lstStyle/>
@@ -21641,7 +21852,7 @@
           <a:noFill/>
         </p:spPr>
         <p:txBody>
-          <a:bodyPr wrap="square" anchor="t" lIns="0" rIns="0" tIns="0" bIns="0">
+          <a:bodyPr wrap="square" lIns="0" tIns="0" rIns="0" bIns="0" anchor="t">
             <a:spAutoFit/>
           </a:bodyPr>
           <a:lstStyle/>
@@ -21752,7 +21963,7 @@
           <a:noFill/>
         </p:spPr>
         <p:txBody>
-          <a:bodyPr wrap="square" anchor="t" lIns="0" rIns="0" tIns="0" bIns="0">
+          <a:bodyPr wrap="square" lIns="0" tIns="0" rIns="0" bIns="0" anchor="t">
             <a:spAutoFit/>
           </a:bodyPr>
           <a:lstStyle/>
@@ -21797,7 +22008,7 @@
           <a:noFill/>
         </p:spPr>
         <p:txBody>
-          <a:bodyPr wrap="square" anchor="t" lIns="0" rIns="0" tIns="0" bIns="0">
+          <a:bodyPr wrap="square" lIns="0" tIns="0" rIns="0" bIns="0" anchor="t">
             <a:spAutoFit/>
           </a:bodyPr>
           <a:lstStyle/>
@@ -21834,7 +22045,7 @@
 </file>
 
 <file path=ppt/slides/slide23.xml><?xml version="1.0" encoding="utf-8"?>
-<p:sld xmlns:a="http://schemas.openxmlformats.org/drawingml/2006/main" xmlns:p="http://schemas.openxmlformats.org/presentationml/2006/main" xmlns:r="http://schemas.openxmlformats.org/officeDocument/2006/relationships">
+<p:sld xmlns:a="http://schemas.openxmlformats.org/drawingml/2006/main" xmlns:r="http://schemas.openxmlformats.org/officeDocument/2006/relationships" xmlns:p="http://schemas.openxmlformats.org/presentationml/2006/main">
   <p:cSld>
     <p:spTree>
       <p:nvGrpSpPr>
@@ -21842,7 +22053,14 @@
         <p:cNvGrpSpPr/>
         <p:nvPr/>
       </p:nvGrpSpPr>
-      <p:grpSpPr/>
+      <p:grpSpPr>
+        <a:xfrm>
+          <a:off x="0" y="0"/>
+          <a:ext cx="0" cy="0"/>
+          <a:chOff x="0" y="0"/>
+          <a:chExt cx="0" cy="0"/>
+        </a:xfrm>
+      </p:grpSpPr>
       <p:sp>
         <p:nvSpPr>
           <p:cNvPr id="2" name="Rectangle 1"/>
@@ -21884,6 +22102,7 @@
           <a:lstStyle/>
           <a:p>
             <a:pPr algn="ctr"/>
+            <a:endParaRPr/>
           </a:p>
         </p:txBody>
       </p:sp>
@@ -21896,7 +22115,7 @@
         <p:spPr>
           <a:xfrm>
             <a:off x="0" y="0"/>
-            <a:ext cx="11148085908000" cy="6270955200000"/>
+            <a:ext cx="0" cy="0"/>
           </a:xfrm>
           <a:prstGeom prst="rect">
             <a:avLst/>
@@ -21928,6 +22147,7 @@
           <a:lstStyle/>
           <a:p>
             <a:pPr algn="ctr"/>
+            <a:endParaRPr/>
           </a:p>
         </p:txBody>
       </p:sp>
@@ -21972,6 +22192,7 @@
           <a:lstStyle/>
           <a:p>
             <a:pPr algn="ctr"/>
+            <a:endParaRPr/>
           </a:p>
         </p:txBody>
       </p:sp>
@@ -22018,6 +22239,7 @@
           <a:lstStyle/>
           <a:p>
             <a:pPr algn="ctr"/>
+            <a:endParaRPr/>
           </a:p>
         </p:txBody>
       </p:sp>
@@ -22038,7 +22260,7 @@
           <a:noFill/>
         </p:spPr>
         <p:txBody>
-          <a:bodyPr wrap="square" anchor="ctr" lIns="0" rIns="0" tIns="0" bIns="0">
+          <a:bodyPr wrap="square" lIns="0" tIns="0" rIns="0" bIns="0" anchor="ctr">
             <a:spAutoFit/>
           </a:bodyPr>
           <a:lstStyle/>
@@ -22083,7 +22305,7 @@
           <a:noFill/>
         </p:spPr>
         <p:txBody>
-          <a:bodyPr wrap="square" anchor="t" lIns="0" rIns="0" tIns="0" bIns="0">
+          <a:bodyPr wrap="square" lIns="0" tIns="0" rIns="0" bIns="0" anchor="t">
             <a:spAutoFit/>
           </a:bodyPr>
           <a:lstStyle/>
@@ -22128,7 +22350,7 @@
           <a:noFill/>
         </p:spPr>
         <p:txBody>
-          <a:bodyPr wrap="square" anchor="t" lIns="0" rIns="0" tIns="0" bIns="0">
+          <a:bodyPr wrap="square" lIns="0" tIns="0" rIns="0" bIns="0" anchor="t">
             <a:spAutoFit/>
           </a:bodyPr>
           <a:lstStyle/>
@@ -22165,7 +22387,7 @@
 </file>
 
 <file path=ppt/slides/slide24.xml><?xml version="1.0" encoding="utf-8"?>
-<p:sld xmlns:a="http://schemas.openxmlformats.org/drawingml/2006/main" xmlns:p="http://schemas.openxmlformats.org/presentationml/2006/main" xmlns:r="http://schemas.openxmlformats.org/officeDocument/2006/relationships">
+<p:sld xmlns:a="http://schemas.openxmlformats.org/drawingml/2006/main" xmlns:r="http://schemas.openxmlformats.org/officeDocument/2006/relationships" xmlns:p="http://schemas.openxmlformats.org/presentationml/2006/main">
   <p:cSld>
     <p:spTree>
       <p:nvGrpSpPr>
@@ -22173,7 +22395,14 @@
         <p:cNvGrpSpPr/>
         <p:nvPr/>
       </p:nvGrpSpPr>
-      <p:grpSpPr/>
+      <p:grpSpPr>
+        <a:xfrm>
+          <a:off x="0" y="0"/>
+          <a:ext cx="0" cy="0"/>
+          <a:chOff x="0" y="0"/>
+          <a:chExt cx="0" cy="0"/>
+        </a:xfrm>
+      </p:grpSpPr>
       <p:sp>
         <p:nvSpPr>
           <p:cNvPr id="2" name="Rectangle 1"/>
@@ -22215,6 +22444,7 @@
           <a:lstStyle/>
           <a:p>
             <a:pPr algn="ctr"/>
+            <a:endParaRPr/>
           </a:p>
         </p:txBody>
       </p:sp>
@@ -22259,6 +22489,7 @@
           <a:lstStyle/>
           <a:p>
             <a:pPr algn="ctr"/>
+            <a:endParaRPr/>
           </a:p>
         </p:txBody>
       </p:sp>
@@ -22279,7 +22510,7 @@
           <a:noFill/>
         </p:spPr>
         <p:txBody>
-          <a:bodyPr wrap="square" anchor="t" lIns="0" rIns="0" tIns="0" bIns="0">
+          <a:bodyPr wrap="square" lIns="0" tIns="0" rIns="0" bIns="0" anchor="t">
             <a:spAutoFit/>
           </a:bodyPr>
           <a:lstStyle/>
@@ -22324,7 +22555,7 @@
           <a:noFill/>
         </p:spPr>
         <p:txBody>
-          <a:bodyPr wrap="square" anchor="t" lIns="0" rIns="0" tIns="0" bIns="0">
+          <a:bodyPr wrap="square" lIns="0" tIns="0" rIns="0" bIns="0" anchor="t">
             <a:spAutoFit/>
           </a:bodyPr>
           <a:lstStyle/>
@@ -22397,6 +22628,7 @@
           <a:lstStyle/>
           <a:p>
             <a:pPr algn="ctr"/>
+            <a:endParaRPr/>
           </a:p>
         </p:txBody>
       </p:sp>
@@ -22441,6 +22673,7 @@
           <a:lstStyle/>
           <a:p>
             <a:pPr algn="ctr"/>
+            <a:endParaRPr/>
           </a:p>
         </p:txBody>
       </p:sp>
@@ -22461,7 +22694,7 @@
           <a:noFill/>
         </p:spPr>
         <p:txBody>
-          <a:bodyPr wrap="square" anchor="t" lIns="0" rIns="0" tIns="0" bIns="0">
+          <a:bodyPr wrap="square" lIns="0" tIns="0" rIns="0" bIns="0" anchor="t">
             <a:spAutoFit/>
           </a:bodyPr>
           <a:lstStyle/>
@@ -22506,7 +22739,7 @@
           <a:noFill/>
         </p:spPr>
         <p:txBody>
-          <a:bodyPr wrap="square" anchor="t" lIns="0" rIns="0" tIns="0" bIns="0">
+          <a:bodyPr wrap="square" lIns="0" tIns="0" rIns="0" bIns="0" anchor="t">
             <a:spAutoFit/>
           </a:bodyPr>
           <a:lstStyle/>
@@ -22711,6 +22944,7 @@
           <a:lstStyle/>
           <a:p>
             <a:pPr algn="ctr"/>
+            <a:endParaRPr/>
           </a:p>
         </p:txBody>
       </p:sp>
@@ -22755,6 +22989,7 @@
           <a:lstStyle/>
           <a:p>
             <a:pPr algn="ctr"/>
+            <a:endParaRPr/>
           </a:p>
         </p:txBody>
       </p:sp>
@@ -22775,7 +23010,7 @@
           <a:noFill/>
         </p:spPr>
         <p:txBody>
-          <a:bodyPr wrap="square" anchor="t" lIns="0" rIns="0" tIns="0" bIns="0">
+          <a:bodyPr wrap="square" lIns="0" tIns="0" rIns="0" bIns="0" anchor="t">
             <a:spAutoFit/>
           </a:bodyPr>
           <a:lstStyle/>
@@ -22820,7 +23055,7 @@
           <a:noFill/>
         </p:spPr>
         <p:txBody>
-          <a:bodyPr wrap="square" anchor="t" lIns="0" rIns="0" tIns="0" bIns="0">
+          <a:bodyPr wrap="square" lIns="0" tIns="0" rIns="0" bIns="0" anchor="t">
             <a:spAutoFit/>
           </a:bodyPr>
           <a:lstStyle/>
@@ -22997,7 +23232,7 @@
           <a:noFill/>
         </p:spPr>
         <p:txBody>
-          <a:bodyPr wrap="square" anchor="t" lIns="0" rIns="0" tIns="0" bIns="0">
+          <a:bodyPr wrap="square" lIns="0" tIns="0" rIns="0" bIns="0" anchor="t">
             <a:spAutoFit/>
           </a:bodyPr>
           <a:lstStyle/>
@@ -23042,7 +23277,7 @@
           <a:noFill/>
         </p:spPr>
         <p:txBody>
-          <a:bodyPr wrap="square" anchor="t" lIns="0" rIns="0" tIns="0" bIns="0">
+          <a:bodyPr wrap="square" lIns="0" tIns="0" rIns="0" bIns="0" anchor="t">
             <a:spAutoFit/>
           </a:bodyPr>
           <a:lstStyle/>
@@ -23079,7 +23314,7 @@
 </file>
 
 <file path=ppt/slides/slide25.xml><?xml version="1.0" encoding="utf-8"?>
-<p:sld xmlns:a="http://schemas.openxmlformats.org/drawingml/2006/main" xmlns:p="http://schemas.openxmlformats.org/presentationml/2006/main" xmlns:r="http://schemas.openxmlformats.org/officeDocument/2006/relationships">
+<p:sld xmlns:a="http://schemas.openxmlformats.org/drawingml/2006/main" xmlns:r="http://schemas.openxmlformats.org/officeDocument/2006/relationships" xmlns:p="http://schemas.openxmlformats.org/presentationml/2006/main">
   <p:cSld>
     <p:spTree>
       <p:nvGrpSpPr>
@@ -23087,7 +23322,14 @@
         <p:cNvGrpSpPr/>
         <p:nvPr/>
       </p:nvGrpSpPr>
-      <p:grpSpPr/>
+      <p:grpSpPr>
+        <a:xfrm>
+          <a:off x="0" y="0"/>
+          <a:ext cx="0" cy="0"/>
+          <a:chOff x="0" y="0"/>
+          <a:chExt cx="0" cy="0"/>
+        </a:xfrm>
+      </p:grpSpPr>
       <p:sp>
         <p:nvSpPr>
           <p:cNvPr id="2" name="Rectangle 1"/>
@@ -23129,6 +23371,7 @@
           <a:lstStyle/>
           <a:p>
             <a:pPr algn="ctr"/>
+            <a:endParaRPr/>
           </a:p>
         </p:txBody>
       </p:sp>
@@ -23141,7 +23384,7 @@
         <p:spPr>
           <a:xfrm>
             <a:off x="0" y="0"/>
-            <a:ext cx="11148085908000" cy="6270955200000"/>
+            <a:ext cx="0" cy="0"/>
           </a:xfrm>
           <a:prstGeom prst="rect">
             <a:avLst/>
@@ -23173,6 +23416,7 @@
           <a:lstStyle/>
           <a:p>
             <a:pPr algn="ctr"/>
+            <a:endParaRPr/>
           </a:p>
         </p:txBody>
       </p:sp>
@@ -23217,6 +23461,7 @@
           <a:lstStyle/>
           <a:p>
             <a:pPr algn="ctr"/>
+            <a:endParaRPr/>
           </a:p>
         </p:txBody>
       </p:sp>
@@ -23263,6 +23508,7 @@
           <a:lstStyle/>
           <a:p>
             <a:pPr algn="ctr"/>
+            <a:endParaRPr/>
           </a:p>
         </p:txBody>
       </p:sp>
@@ -23283,7 +23529,7 @@
           <a:noFill/>
         </p:spPr>
         <p:txBody>
-          <a:bodyPr wrap="square" anchor="ctr" lIns="0" rIns="0" tIns="0" bIns="0">
+          <a:bodyPr wrap="square" lIns="0" tIns="0" rIns="0" bIns="0" anchor="ctr">
             <a:spAutoFit/>
           </a:bodyPr>
           <a:lstStyle/>
@@ -23328,7 +23574,7 @@
           <a:noFill/>
         </p:spPr>
         <p:txBody>
-          <a:bodyPr wrap="square" anchor="t" lIns="0" rIns="0" tIns="0" bIns="0">
+          <a:bodyPr wrap="square" lIns="0" tIns="0" rIns="0" bIns="0" anchor="t">
             <a:spAutoFit/>
           </a:bodyPr>
           <a:lstStyle/>
@@ -23373,7 +23619,7 @@
           <a:noFill/>
         </p:spPr>
         <p:txBody>
-          <a:bodyPr wrap="square" anchor="t" lIns="0" rIns="0" tIns="0" bIns="0">
+          <a:bodyPr wrap="square" lIns="0" tIns="0" rIns="0" bIns="0" anchor="t">
             <a:spAutoFit/>
           </a:bodyPr>
           <a:lstStyle/>
@@ -23410,7 +23656,7 @@
 </file>
 
 <file path=ppt/slides/slide26.xml><?xml version="1.0" encoding="utf-8"?>
-<p:sld xmlns:a="http://schemas.openxmlformats.org/drawingml/2006/main" xmlns:p="http://schemas.openxmlformats.org/presentationml/2006/main" xmlns:r="http://schemas.openxmlformats.org/officeDocument/2006/relationships">
+<p:sld xmlns:a="http://schemas.openxmlformats.org/drawingml/2006/main" xmlns:r="http://schemas.openxmlformats.org/officeDocument/2006/relationships" xmlns:p="http://schemas.openxmlformats.org/presentationml/2006/main">
   <p:cSld>
     <p:spTree>
       <p:nvGrpSpPr>
@@ -23418,7 +23664,14 @@
         <p:cNvGrpSpPr/>
         <p:nvPr/>
       </p:nvGrpSpPr>
-      <p:grpSpPr/>
+      <p:grpSpPr>
+        <a:xfrm>
+          <a:off x="0" y="0"/>
+          <a:ext cx="0" cy="0"/>
+          <a:chOff x="0" y="0"/>
+          <a:chExt cx="0" cy="0"/>
+        </a:xfrm>
+      </p:grpSpPr>
       <p:sp>
         <p:nvSpPr>
           <p:cNvPr id="2" name="Rectangle 1"/>
@@ -23460,6 +23713,7 @@
           <a:lstStyle/>
           <a:p>
             <a:pPr algn="ctr"/>
+            <a:endParaRPr/>
           </a:p>
         </p:txBody>
       </p:sp>
@@ -23504,6 +23758,7 @@
           <a:lstStyle/>
           <a:p>
             <a:pPr algn="ctr"/>
+            <a:endParaRPr/>
           </a:p>
         </p:txBody>
       </p:sp>
@@ -23524,7 +23779,7 @@
           <a:noFill/>
         </p:spPr>
         <p:txBody>
-          <a:bodyPr wrap="square" anchor="t" lIns="0" rIns="0" tIns="0" bIns="0">
+          <a:bodyPr wrap="square" lIns="0" tIns="0" rIns="0" bIns="0" anchor="t">
             <a:spAutoFit/>
           </a:bodyPr>
           <a:lstStyle/>
@@ -23569,7 +23824,7 @@
           <a:noFill/>
         </p:spPr>
         <p:txBody>
-          <a:bodyPr wrap="square" anchor="t" lIns="0" rIns="0" tIns="0" bIns="0">
+          <a:bodyPr wrap="square" lIns="0" tIns="0" rIns="0" bIns="0" anchor="t">
             <a:spAutoFit/>
           </a:bodyPr>
           <a:lstStyle/>
@@ -23642,6 +23897,7 @@
           <a:lstStyle/>
           <a:p>
             <a:pPr algn="ctr"/>
+            <a:endParaRPr/>
           </a:p>
         </p:txBody>
       </p:sp>
@@ -23686,6 +23942,7 @@
           <a:lstStyle/>
           <a:p>
             <a:pPr algn="ctr"/>
+            <a:endParaRPr/>
           </a:p>
         </p:txBody>
       </p:sp>
@@ -23706,7 +23963,7 @@
           <a:noFill/>
         </p:spPr>
         <p:txBody>
-          <a:bodyPr wrap="square" anchor="t" lIns="0" rIns="0" tIns="0" bIns="0">
+          <a:bodyPr wrap="square" lIns="0" tIns="0" rIns="0" bIns="0" anchor="t">
             <a:spAutoFit/>
           </a:bodyPr>
           <a:lstStyle/>
@@ -23751,7 +24008,7 @@
           <a:noFill/>
         </p:spPr>
         <p:txBody>
-          <a:bodyPr wrap="square" anchor="t" lIns="0" rIns="0" tIns="0" bIns="0">
+          <a:bodyPr wrap="square" lIns="0" tIns="0" rIns="0" bIns="0" anchor="t">
             <a:spAutoFit/>
           </a:bodyPr>
           <a:lstStyle/>
@@ -23824,6 +24081,7 @@
           <a:lstStyle/>
           <a:p>
             <a:pPr algn="ctr"/>
+            <a:endParaRPr/>
           </a:p>
         </p:txBody>
       </p:sp>
@@ -23868,6 +24126,7 @@
           <a:lstStyle/>
           <a:p>
             <a:pPr algn="ctr"/>
+            <a:endParaRPr/>
           </a:p>
         </p:txBody>
       </p:sp>
@@ -23888,7 +24147,7 @@
           <a:noFill/>
         </p:spPr>
         <p:txBody>
-          <a:bodyPr wrap="square" anchor="t" lIns="0" rIns="0" tIns="0" bIns="0">
+          <a:bodyPr wrap="square" lIns="0" tIns="0" rIns="0" bIns="0" anchor="t">
             <a:spAutoFit/>
           </a:bodyPr>
           <a:lstStyle/>
@@ -23933,7 +24192,7 @@
           <a:noFill/>
         </p:spPr>
         <p:txBody>
-          <a:bodyPr wrap="square" anchor="t" lIns="0" rIns="0" tIns="0" bIns="0">
+          <a:bodyPr wrap="square" lIns="0" tIns="0" rIns="0" bIns="0" anchor="t">
             <a:spAutoFit/>
           </a:bodyPr>
           <a:lstStyle/>
@@ -24006,6 +24265,7 @@
           <a:lstStyle/>
           <a:p>
             <a:pPr algn="ctr"/>
+            <a:endParaRPr/>
           </a:p>
         </p:txBody>
       </p:sp>
@@ -24050,6 +24310,7 @@
           <a:lstStyle/>
           <a:p>
             <a:pPr algn="ctr"/>
+            <a:endParaRPr/>
           </a:p>
         </p:txBody>
       </p:sp>
@@ -24070,7 +24331,7 @@
           <a:noFill/>
         </p:spPr>
         <p:txBody>
-          <a:bodyPr wrap="square" anchor="t" lIns="0" rIns="0" tIns="0" bIns="0">
+          <a:bodyPr wrap="square" lIns="0" tIns="0" rIns="0" bIns="0" anchor="t">
             <a:spAutoFit/>
           </a:bodyPr>
           <a:lstStyle/>
@@ -24115,7 +24376,7 @@
           <a:noFill/>
         </p:spPr>
         <p:txBody>
-          <a:bodyPr wrap="square" anchor="t" lIns="0" rIns="0" tIns="0" bIns="0">
+          <a:bodyPr wrap="square" lIns="0" tIns="0" rIns="0" bIns="0" anchor="t">
             <a:spAutoFit/>
           </a:bodyPr>
           <a:lstStyle/>
@@ -24188,6 +24449,7 @@
           <a:lstStyle/>
           <a:p>
             <a:pPr algn="ctr"/>
+            <a:endParaRPr/>
           </a:p>
         </p:txBody>
       </p:sp>
@@ -24232,6 +24494,7 @@
           <a:lstStyle/>
           <a:p>
             <a:pPr algn="ctr"/>
+            <a:endParaRPr/>
           </a:p>
         </p:txBody>
       </p:sp>
@@ -24252,7 +24515,7 @@
           <a:noFill/>
         </p:spPr>
         <p:txBody>
-          <a:bodyPr wrap="square" anchor="t" lIns="0" rIns="0" tIns="0" bIns="0">
+          <a:bodyPr wrap="square" lIns="0" tIns="0" rIns="0" bIns="0" anchor="t">
             <a:spAutoFit/>
           </a:bodyPr>
           <a:lstStyle/>
@@ -24297,7 +24560,7 @@
           <a:noFill/>
         </p:spPr>
         <p:txBody>
-          <a:bodyPr wrap="square" anchor="t" lIns="0" rIns="0" tIns="0" bIns="0">
+          <a:bodyPr wrap="square" lIns="0" tIns="0" rIns="0" bIns="0" anchor="t">
             <a:spAutoFit/>
           </a:bodyPr>
           <a:lstStyle/>
@@ -24370,6 +24633,7 @@
           <a:lstStyle/>
           <a:p>
             <a:pPr algn="ctr"/>
+            <a:endParaRPr/>
           </a:p>
         </p:txBody>
       </p:sp>
@@ -24414,6 +24678,7 @@
           <a:lstStyle/>
           <a:p>
             <a:pPr algn="ctr"/>
+            <a:endParaRPr/>
           </a:p>
         </p:txBody>
       </p:sp>
@@ -24434,7 +24699,7 @@
           <a:noFill/>
         </p:spPr>
         <p:txBody>
-          <a:bodyPr wrap="square" anchor="t" lIns="0" rIns="0" tIns="0" bIns="0">
+          <a:bodyPr wrap="square" lIns="0" tIns="0" rIns="0" bIns="0" anchor="t">
             <a:spAutoFit/>
           </a:bodyPr>
           <a:lstStyle/>
@@ -24479,7 +24744,7 @@
           <a:noFill/>
         </p:spPr>
         <p:txBody>
-          <a:bodyPr wrap="square" anchor="t" lIns="0" rIns="0" tIns="0" bIns="0">
+          <a:bodyPr wrap="square" lIns="0" tIns="0" rIns="0" bIns="0" anchor="t">
             <a:spAutoFit/>
           </a:bodyPr>
           <a:lstStyle/>
@@ -24640,6 +24905,7 @@
           <a:lstStyle/>
           <a:p>
             <a:pPr algn="ctr"/>
+            <a:endParaRPr/>
           </a:p>
         </p:txBody>
       </p:sp>
@@ -24684,6 +24950,7 @@
           <a:lstStyle/>
           <a:p>
             <a:pPr algn="ctr"/>
+            <a:endParaRPr/>
           </a:p>
         </p:txBody>
       </p:sp>
@@ -24704,7 +24971,7 @@
           <a:noFill/>
         </p:spPr>
         <p:txBody>
-          <a:bodyPr wrap="square" anchor="t" lIns="0" rIns="0" tIns="0" bIns="0">
+          <a:bodyPr wrap="square" lIns="0" tIns="0" rIns="0" bIns="0" anchor="t">
             <a:spAutoFit/>
           </a:bodyPr>
           <a:lstStyle/>
@@ -24749,7 +25016,7 @@
           <a:noFill/>
         </p:spPr>
         <p:txBody>
-          <a:bodyPr wrap="square" anchor="t" lIns="0" rIns="0" tIns="0" bIns="0">
+          <a:bodyPr wrap="square" lIns="0" tIns="0" rIns="0" bIns="0" anchor="t">
             <a:spAutoFit/>
           </a:bodyPr>
           <a:lstStyle/>
@@ -24882,7 +25149,7 @@
           <a:noFill/>
         </p:spPr>
         <p:txBody>
-          <a:bodyPr wrap="square" anchor="t" lIns="0" rIns="0" tIns="0" bIns="0">
+          <a:bodyPr wrap="square" lIns="0" tIns="0" rIns="0" bIns="0" anchor="t">
             <a:spAutoFit/>
           </a:bodyPr>
           <a:lstStyle/>
@@ -24927,7 +25194,7 @@
           <a:noFill/>
         </p:spPr>
         <p:txBody>
-          <a:bodyPr wrap="square" anchor="t" lIns="0" rIns="0" tIns="0" bIns="0">
+          <a:bodyPr wrap="square" lIns="0" tIns="0" rIns="0" bIns="0" anchor="t">
             <a:spAutoFit/>
           </a:bodyPr>
           <a:lstStyle/>
@@ -24964,7 +25231,7 @@
 </file>
 
 <file path=ppt/slides/slide27.xml><?xml version="1.0" encoding="utf-8"?>
-<p:sld xmlns:a="http://schemas.openxmlformats.org/drawingml/2006/main" xmlns:p="http://schemas.openxmlformats.org/presentationml/2006/main" xmlns:r="http://schemas.openxmlformats.org/officeDocument/2006/relationships">
+<p:sld xmlns:a="http://schemas.openxmlformats.org/drawingml/2006/main" xmlns:r="http://schemas.openxmlformats.org/officeDocument/2006/relationships" xmlns:p="http://schemas.openxmlformats.org/presentationml/2006/main">
   <p:cSld>
     <p:spTree>
       <p:nvGrpSpPr>
@@ -24972,7 +25239,14 @@
         <p:cNvGrpSpPr/>
         <p:nvPr/>
       </p:nvGrpSpPr>
-      <p:grpSpPr/>
+      <p:grpSpPr>
+        <a:xfrm>
+          <a:off x="0" y="0"/>
+          <a:ext cx="0" cy="0"/>
+          <a:chOff x="0" y="0"/>
+          <a:chExt cx="0" cy="0"/>
+        </a:xfrm>
+      </p:grpSpPr>
       <p:sp>
         <p:nvSpPr>
           <p:cNvPr id="2" name="Rectangle 1"/>
@@ -25014,6 +25288,7 @@
           <a:lstStyle/>
           <a:p>
             <a:pPr algn="ctr"/>
+            <a:endParaRPr/>
           </a:p>
         </p:txBody>
       </p:sp>
@@ -25058,6 +25333,7 @@
           <a:lstStyle/>
           <a:p>
             <a:pPr algn="ctr"/>
+            <a:endParaRPr/>
           </a:p>
         </p:txBody>
       </p:sp>
@@ -25078,7 +25354,7 @@
           <a:noFill/>
         </p:spPr>
         <p:txBody>
-          <a:bodyPr wrap="square" anchor="t" lIns="0" rIns="0" tIns="0" bIns="0">
+          <a:bodyPr wrap="square" lIns="0" tIns="0" rIns="0" bIns="0" anchor="t">
             <a:spAutoFit/>
           </a:bodyPr>
           <a:lstStyle/>
@@ -25123,7 +25399,7 @@
           <a:noFill/>
         </p:spPr>
         <p:txBody>
-          <a:bodyPr wrap="square" anchor="t" lIns="0" rIns="0" tIns="0" bIns="0">
+          <a:bodyPr wrap="square" lIns="0" tIns="0" rIns="0" bIns="0" anchor="t">
             <a:spAutoFit/>
           </a:bodyPr>
           <a:lstStyle/>
@@ -25196,6 +25472,7 @@
           <a:lstStyle/>
           <a:p>
             <a:pPr algn="ctr"/>
+            <a:endParaRPr/>
           </a:p>
         </p:txBody>
       </p:sp>
@@ -25216,7 +25493,7 @@
           <a:noFill/>
         </p:spPr>
         <p:txBody>
-          <a:bodyPr wrap="square" anchor="t" lIns="0" rIns="0" tIns="0" bIns="0">
+          <a:bodyPr wrap="square" lIns="0" tIns="0" rIns="0" bIns="0" anchor="t">
             <a:spAutoFit/>
           </a:bodyPr>
           <a:lstStyle/>
@@ -25261,7 +25538,7 @@
           <a:noFill/>
         </p:spPr>
         <p:txBody>
-          <a:bodyPr wrap="square" anchor="t" lIns="0" rIns="0" tIns="0" bIns="0">
+          <a:bodyPr wrap="square" lIns="0" tIns="0" rIns="0" bIns="0" anchor="t">
             <a:spAutoFit/>
           </a:bodyPr>
           <a:lstStyle/>
@@ -25343,14 +25620,55 @@
                 <a:spcPts val="200"/>
               </a:spcAft>
             </a:pPr>
+            <a:endParaRPr sz="1050" b="0">
+              <a:solidFill>
+                <a:srgbClr val="0F172A"/>
+              </a:solidFill>
+              <a:latin typeface="Consolas"/>
+            </a:endParaRPr>
+          </a:p>
+          <a:p>
+            <a:pPr algn="l">
+              <a:lnSpc>
+                <a:spcPct val="112000"/>
+              </a:lnSpc>
+              <a:spcBef>
+                <a:spcPts val="0"/>
+              </a:spcBef>
+              <a:spcAft>
+                <a:spcPts val="200"/>
+              </a:spcAft>
+            </a:pPr>
             <a:r>
               <a:rPr sz="1050" b="0">
                 <a:solidFill>
+                  <a:srgbClr val="94A3B8"/>
+                </a:solidFill>
+                <a:latin typeface="Consolas"/>
+              </a:rPr>
+              <a:t># 2) Seed DỮ LIỆU DEMO (52 khách, 6 lifecycle)</a:t>
+            </a:r>
+          </a:p>
+          <a:p>
+            <a:pPr algn="l">
+              <a:lnSpc>
+                <a:spcPct val="112000"/>
+              </a:lnSpc>
+              <a:spcBef>
+                <a:spcPts val="0"/>
+              </a:spcBef>
+              <a:spcAft>
+                <a:spcPts val="200"/>
+              </a:spcAft>
+            </a:pPr>
+            <a:r>
+              <a:rPr sz="1050" b="0">
+                <a:solidFill>
                   <a:srgbClr val="0F172A"/>
                 </a:solidFill>
                 <a:latin typeface="Consolas"/>
               </a:rPr>
-              <a:t/>
+              <a:t>pnpm exec tsx scripts/seed-demo.ts</a:t>
             </a:r>
           </a:p>
           <a:p>
@@ -25365,6 +25683,25 @@
                 <a:spcPts val="200"/>
               </a:spcAft>
             </a:pPr>
+            <a:endParaRPr sz="1050" b="0">
+              <a:solidFill>
+                <a:srgbClr val="0F172A"/>
+              </a:solidFill>
+              <a:latin typeface="Consolas"/>
+            </a:endParaRPr>
+          </a:p>
+          <a:p>
+            <a:pPr algn="l">
+              <a:lnSpc>
+                <a:spcPct val="112000"/>
+              </a:lnSpc>
+              <a:spcBef>
+                <a:spcPts val="0"/>
+              </a:spcBef>
+              <a:spcAft>
+                <a:spcPts val="200"/>
+              </a:spcAft>
+            </a:pPr>
             <a:r>
               <a:rPr sz="1050" b="0">
                 <a:solidFill>
@@ -25372,7 +25709,7 @@
                 </a:solidFill>
                 <a:latin typeface="Consolas"/>
               </a:rPr>
-              <a:t># 2) Seed DỮ LIỆU DEMO (52 khách, 6 lifecycle)</a:t>
+              <a:t># 3) core-api (:8071)</a:t>
             </a:r>
           </a:p>
           <a:p>
@@ -25394,7 +25731,7 @@
                 </a:solidFill>
                 <a:latin typeface="Consolas"/>
               </a:rPr>
-              <a:t>pnpm exec tsx scripts/seed-demo.ts</a:t>
+              <a:t>CORE_API_PORT=8071 pnpm exec tsx src/main.ts</a:t>
             </a:r>
           </a:p>
           <a:p>
@@ -25409,81 +25746,12 @@
                 <a:spcPts val="200"/>
               </a:spcAft>
             </a:pPr>
-            <a:r>
-              <a:rPr sz="1050" b="0">
-                <a:solidFill>
-                  <a:srgbClr val="0F172A"/>
-                </a:solidFill>
-                <a:latin typeface="Consolas"/>
-              </a:rPr>
-              <a:t/>
-            </a:r>
-          </a:p>
-          <a:p>
-            <a:pPr algn="l">
-              <a:lnSpc>
-                <a:spcPct val="112000"/>
-              </a:lnSpc>
-              <a:spcBef>
-                <a:spcPts val="0"/>
-              </a:spcBef>
-              <a:spcAft>
-                <a:spcPts val="200"/>
-              </a:spcAft>
-            </a:pPr>
-            <a:r>
-              <a:rPr sz="1050" b="0">
-                <a:solidFill>
-                  <a:srgbClr val="94A3B8"/>
-                </a:solidFill>
-                <a:latin typeface="Consolas"/>
-              </a:rPr>
-              <a:t># 3) core-api (:8071)</a:t>
-            </a:r>
-          </a:p>
-          <a:p>
-            <a:pPr algn="l">
-              <a:lnSpc>
-                <a:spcPct val="112000"/>
-              </a:lnSpc>
-              <a:spcBef>
-                <a:spcPts val="0"/>
-              </a:spcBef>
-              <a:spcAft>
-                <a:spcPts val="200"/>
-              </a:spcAft>
-            </a:pPr>
-            <a:r>
-              <a:rPr sz="1050" b="0">
-                <a:solidFill>
-                  <a:srgbClr val="0F172A"/>
-                </a:solidFill>
-                <a:latin typeface="Consolas"/>
-              </a:rPr>
-              <a:t>CORE_API_PORT=8071 pnpm exec tsx src/main.ts</a:t>
-            </a:r>
-          </a:p>
-          <a:p>
-            <a:pPr algn="l">
-              <a:lnSpc>
-                <a:spcPct val="112000"/>
-              </a:lnSpc>
-              <a:spcBef>
-                <a:spcPts val="0"/>
-              </a:spcBef>
-              <a:spcAft>
-                <a:spcPts val="200"/>
-              </a:spcAft>
-            </a:pPr>
-            <a:r>
-              <a:rPr sz="1050" b="0">
-                <a:solidFill>
-                  <a:srgbClr val="0F172A"/>
-                </a:solidFill>
-                <a:latin typeface="Consolas"/>
-              </a:rPr>
-              <a:t/>
-            </a:r>
+            <a:endParaRPr sz="1050" b="0">
+              <a:solidFill>
+                <a:srgbClr val="0F172A"/>
+              </a:solidFill>
+              <a:latin typeface="Consolas"/>
+            </a:endParaRPr>
           </a:p>
           <a:p>
             <a:pPr algn="l">
@@ -25576,6 +25844,7 @@
           <a:lstStyle/>
           <a:p>
             <a:pPr algn="ctr"/>
+            <a:endParaRPr/>
           </a:p>
         </p:txBody>
       </p:sp>
@@ -25620,6 +25889,7 @@
           <a:lstStyle/>
           <a:p>
             <a:pPr algn="ctr"/>
+            <a:endParaRPr/>
           </a:p>
         </p:txBody>
       </p:sp>
@@ -25640,7 +25910,7 @@
           <a:noFill/>
         </p:spPr>
         <p:txBody>
-          <a:bodyPr wrap="square" anchor="t" lIns="0" rIns="0" tIns="0" bIns="0">
+          <a:bodyPr wrap="square" lIns="0" tIns="0" rIns="0" bIns="0" anchor="t">
             <a:spAutoFit/>
           </a:bodyPr>
           <a:lstStyle/>
@@ -25685,7 +25955,7 @@
           <a:noFill/>
         </p:spPr>
         <p:txBody>
-          <a:bodyPr wrap="square" anchor="t" lIns="0" rIns="0" tIns="0" bIns="0">
+          <a:bodyPr wrap="square" lIns="0" tIns="0" rIns="0" bIns="0" anchor="t">
             <a:spAutoFit/>
           </a:bodyPr>
           <a:lstStyle/>
@@ -25745,6 +26015,25 @@
                 <a:spcPts val="400"/>
               </a:spcAft>
             </a:pPr>
+            <a:endParaRPr sz="1000" b="0">
+              <a:solidFill>
+                <a:srgbClr val="475569"/>
+              </a:solidFill>
+              <a:latin typeface="Segoe UI"/>
+            </a:endParaRPr>
+          </a:p>
+          <a:p>
+            <a:pPr algn="l">
+              <a:lnSpc>
+                <a:spcPct val="106000"/>
+              </a:lnSpc>
+              <a:spcBef>
+                <a:spcPts val="0"/>
+              </a:spcBef>
+              <a:spcAft>
+                <a:spcPts val="400"/>
+              </a:spcAft>
+            </a:pPr>
             <a:r>
               <a:rPr sz="1000" b="0">
                 <a:solidFill>
@@ -25752,7 +26041,7 @@
                 </a:solidFill>
                 <a:latin typeface="Segoe UI"/>
               </a:rPr>
-              <a:t/>
+              <a:t>ANTHROPIC_API_KEY (ENV) cho</a:t>
             </a:r>
           </a:p>
           <a:p>
@@ -25774,7 +26063,7 @@
                 </a:solidFill>
                 <a:latin typeface="Segoe UI"/>
               </a:rPr>
-              <a:t>ANTHROPIC_API_KEY (ENV) cho</a:t>
+              <a:t>tính năng Generative AI</a:t>
             </a:r>
           </a:p>
           <a:p>
@@ -25789,6 +26078,25 @@
                 <a:spcPts val="400"/>
               </a:spcAft>
             </a:pPr>
+            <a:endParaRPr sz="1000" b="0">
+              <a:solidFill>
+                <a:srgbClr val="475569"/>
+              </a:solidFill>
+              <a:latin typeface="Segoe UI"/>
+            </a:endParaRPr>
+          </a:p>
+          <a:p>
+            <a:pPr algn="l">
+              <a:lnSpc>
+                <a:spcPct val="106000"/>
+              </a:lnSpc>
+              <a:spcBef>
+                <a:spcPts val="0"/>
+              </a:spcBef>
+              <a:spcAft>
+                <a:spcPts val="400"/>
+              </a:spcAft>
+            </a:pPr>
             <a:r>
               <a:rPr sz="1000" b="0">
                 <a:solidFill>
@@ -25796,7 +26104,7 @@
                 </a:solidFill>
                 <a:latin typeface="Segoe UI"/>
               </a:rPr>
-              <a:t>tính năng Generative AI</a:t>
+              <a:t>Docker (ClickHouse/Redis/MinIO)</a:t>
             </a:r>
           </a:p>
           <a:p>
@@ -25818,7 +26126,7 @@
                 </a:solidFill>
                 <a:latin typeface="Segoe UI"/>
               </a:rPr>
-              <a:t/>
+              <a:t>tùy chọn — Phase A không bắt buộc</a:t>
             </a:r>
           </a:p>
           <a:p>
@@ -25833,59 +26141,12 @@
                 <a:spcPts val="400"/>
               </a:spcAft>
             </a:pPr>
-            <a:r>
-              <a:rPr sz="1000" b="0">
-                <a:solidFill>
-                  <a:srgbClr val="475569"/>
-                </a:solidFill>
-                <a:latin typeface="Segoe UI"/>
-              </a:rPr>
-              <a:t>Docker (ClickHouse/Redis/MinIO)</a:t>
-            </a:r>
-          </a:p>
-          <a:p>
-            <a:pPr algn="l">
-              <a:lnSpc>
-                <a:spcPct val="106000"/>
-              </a:lnSpc>
-              <a:spcBef>
-                <a:spcPts val="0"/>
-              </a:spcBef>
-              <a:spcAft>
-                <a:spcPts val="400"/>
-              </a:spcAft>
-            </a:pPr>
-            <a:r>
-              <a:rPr sz="1000" b="0">
-                <a:solidFill>
-                  <a:srgbClr val="475569"/>
-                </a:solidFill>
-                <a:latin typeface="Segoe UI"/>
-              </a:rPr>
-              <a:t>tùy chọn — Phase A không bắt buộc</a:t>
-            </a:r>
-          </a:p>
-          <a:p>
-            <a:pPr algn="l">
-              <a:lnSpc>
-                <a:spcPct val="106000"/>
-              </a:lnSpc>
-              <a:spcBef>
-                <a:spcPts val="0"/>
-              </a:spcBef>
-              <a:spcAft>
-                <a:spcPts val="400"/>
-              </a:spcAft>
-            </a:pPr>
-            <a:r>
-              <a:rPr sz="1000" b="0">
-                <a:solidFill>
-                  <a:srgbClr val="475569"/>
-                </a:solidFill>
-                <a:latin typeface="Segoe UI"/>
-              </a:rPr>
-              <a:t/>
-            </a:r>
+            <a:endParaRPr sz="1000" b="0">
+              <a:solidFill>
+                <a:srgbClr val="475569"/>
+              </a:solidFill>
+              <a:latin typeface="Segoe UI"/>
+            </a:endParaRPr>
           </a:p>
           <a:p>
             <a:pPr algn="l">
@@ -25950,7 +26211,7 @@
           <a:noFill/>
         </p:spPr>
         <p:txBody>
-          <a:bodyPr wrap="square" anchor="t" lIns="0" rIns="0" tIns="0" bIns="0">
+          <a:bodyPr wrap="square" lIns="0" tIns="0" rIns="0" bIns="0" anchor="t">
             <a:spAutoFit/>
           </a:bodyPr>
           <a:lstStyle/>
@@ -25995,7 +26256,7 @@
           <a:noFill/>
         </p:spPr>
         <p:txBody>
-          <a:bodyPr wrap="square" anchor="t" lIns="0" rIns="0" tIns="0" bIns="0">
+          <a:bodyPr wrap="square" lIns="0" tIns="0" rIns="0" bIns="0" anchor="t">
             <a:spAutoFit/>
           </a:bodyPr>
           <a:lstStyle/>
@@ -26032,7 +26293,7 @@
 </file>
 
 <file path=ppt/slides/slide28.xml><?xml version="1.0" encoding="utf-8"?>
-<p:sld xmlns:a="http://schemas.openxmlformats.org/drawingml/2006/main" xmlns:p="http://schemas.openxmlformats.org/presentationml/2006/main" xmlns:r="http://schemas.openxmlformats.org/officeDocument/2006/relationships">
+<p:sld xmlns:a="http://schemas.openxmlformats.org/drawingml/2006/main" xmlns:r="http://schemas.openxmlformats.org/officeDocument/2006/relationships" xmlns:p="http://schemas.openxmlformats.org/presentationml/2006/main">
   <p:cSld>
     <p:spTree>
       <p:nvGrpSpPr>
@@ -26040,7 +26301,14 @@
         <p:cNvGrpSpPr/>
         <p:nvPr/>
       </p:nvGrpSpPr>
-      <p:grpSpPr/>
+      <p:grpSpPr>
+        <a:xfrm>
+          <a:off x="0" y="0"/>
+          <a:ext cx="0" cy="0"/>
+          <a:chOff x="0" y="0"/>
+          <a:chExt cx="0" cy="0"/>
+        </a:xfrm>
+      </p:grpSpPr>
       <p:sp>
         <p:nvSpPr>
           <p:cNvPr id="2" name="Rectangle 1"/>
@@ -26082,6 +26350,7 @@
           <a:lstStyle/>
           <a:p>
             <a:pPr algn="ctr"/>
+            <a:endParaRPr/>
           </a:p>
         </p:txBody>
       </p:sp>
@@ -26094,7 +26363,7 @@
         <p:spPr>
           <a:xfrm>
             <a:off x="0" y="0"/>
-            <a:ext cx="11148085908000" cy="6270955200000"/>
+            <a:ext cx="0" cy="0"/>
           </a:xfrm>
           <a:prstGeom prst="rect">
             <a:avLst/>
@@ -26126,6 +26395,7 @@
           <a:lstStyle/>
           <a:p>
             <a:pPr algn="ctr"/>
+            <a:endParaRPr/>
           </a:p>
         </p:txBody>
       </p:sp>
@@ -26170,6 +26440,7 @@
           <a:lstStyle/>
           <a:p>
             <a:pPr algn="ctr"/>
+            <a:endParaRPr/>
           </a:p>
         </p:txBody>
       </p:sp>
@@ -26216,6 +26487,7 @@
           <a:lstStyle/>
           <a:p>
             <a:pPr algn="ctr"/>
+            <a:endParaRPr/>
           </a:p>
         </p:txBody>
       </p:sp>
@@ -26236,7 +26508,7 @@
           <a:noFill/>
         </p:spPr>
         <p:txBody>
-          <a:bodyPr wrap="square" anchor="ctr" lIns="0" rIns="0" tIns="0" bIns="0">
+          <a:bodyPr wrap="square" lIns="0" tIns="0" rIns="0" bIns="0" anchor="ctr">
             <a:spAutoFit/>
           </a:bodyPr>
           <a:lstStyle/>
@@ -26281,7 +26553,7 @@
           <a:noFill/>
         </p:spPr>
         <p:txBody>
-          <a:bodyPr wrap="square" anchor="t" lIns="0" rIns="0" tIns="0" bIns="0">
+          <a:bodyPr wrap="square" lIns="0" tIns="0" rIns="0" bIns="0" anchor="t">
             <a:spAutoFit/>
           </a:bodyPr>
           <a:lstStyle/>
@@ -26326,7 +26598,7 @@
           <a:noFill/>
         </p:spPr>
         <p:txBody>
-          <a:bodyPr wrap="square" anchor="t" lIns="0" rIns="0" tIns="0" bIns="0">
+          <a:bodyPr wrap="square" lIns="0" tIns="0" rIns="0" bIns="0" anchor="t">
             <a:spAutoFit/>
           </a:bodyPr>
           <a:lstStyle/>
@@ -26363,7 +26635,7 @@
 </file>
 
 <file path=ppt/slides/slide29.xml><?xml version="1.0" encoding="utf-8"?>
-<p:sld xmlns:a="http://schemas.openxmlformats.org/drawingml/2006/main" xmlns:p="http://schemas.openxmlformats.org/presentationml/2006/main" xmlns:r="http://schemas.openxmlformats.org/officeDocument/2006/relationships">
+<p:sld xmlns:a="http://schemas.openxmlformats.org/drawingml/2006/main" xmlns:r="http://schemas.openxmlformats.org/officeDocument/2006/relationships" xmlns:p="http://schemas.openxmlformats.org/presentationml/2006/main">
   <p:cSld>
     <p:spTree>
       <p:nvGrpSpPr>
@@ -26371,7 +26643,14 @@
         <p:cNvGrpSpPr/>
         <p:nvPr/>
       </p:nvGrpSpPr>
-      <p:grpSpPr/>
+      <p:grpSpPr>
+        <a:xfrm>
+          <a:off x="0" y="0"/>
+          <a:ext cx="0" cy="0"/>
+          <a:chOff x="0" y="0"/>
+          <a:chExt cx="0" cy="0"/>
+        </a:xfrm>
+      </p:grpSpPr>
       <p:sp>
         <p:nvSpPr>
           <p:cNvPr id="2" name="Rectangle 1"/>
@@ -26413,6 +26692,7 @@
           <a:lstStyle/>
           <a:p>
             <a:pPr algn="ctr"/>
+            <a:endParaRPr/>
           </a:p>
         </p:txBody>
       </p:sp>
@@ -26457,6 +26737,7 @@
           <a:lstStyle/>
           <a:p>
             <a:pPr algn="ctr"/>
+            <a:endParaRPr/>
           </a:p>
         </p:txBody>
       </p:sp>
@@ -26477,7 +26758,7 @@
           <a:noFill/>
         </p:spPr>
         <p:txBody>
-          <a:bodyPr wrap="square" anchor="t" lIns="0" rIns="0" tIns="0" bIns="0">
+          <a:bodyPr wrap="square" lIns="0" tIns="0" rIns="0" bIns="0" anchor="t">
             <a:spAutoFit/>
           </a:bodyPr>
           <a:lstStyle/>
@@ -26522,7 +26803,7 @@
           <a:noFill/>
         </p:spPr>
         <p:txBody>
-          <a:bodyPr wrap="square" anchor="t" lIns="0" rIns="0" tIns="0" bIns="0">
+          <a:bodyPr wrap="square" lIns="0" tIns="0" rIns="0" bIns="0" anchor="t">
             <a:spAutoFit/>
           </a:bodyPr>
           <a:lstStyle/>
@@ -26595,6 +26876,7 @@
           <a:lstStyle/>
           <a:p>
             <a:pPr algn="ctr"/>
+            <a:endParaRPr/>
           </a:p>
         </p:txBody>
       </p:sp>
@@ -26639,7 +26921,7 @@
           <a:noFill/>
         </p:spPr>
         <p:txBody>
-          <a:bodyPr wrap="square" anchor="t" lIns="0" rIns="0" tIns="0" bIns="0">
+          <a:bodyPr wrap="square" lIns="0" tIns="0" rIns="0" bIns="0" anchor="t">
             <a:spAutoFit/>
           </a:bodyPr>
           <a:lstStyle/>
@@ -26684,7 +26966,7 @@
           <a:noFill/>
         </p:spPr>
         <p:txBody>
-          <a:bodyPr wrap="square" anchor="t" lIns="0" rIns="0" tIns="0" bIns="0">
+          <a:bodyPr wrap="square" lIns="0" tIns="0" rIns="0" bIns="0" anchor="t">
             <a:spAutoFit/>
           </a:bodyPr>
           <a:lstStyle/>
@@ -26729,7 +27011,7 @@
           <a:noFill/>
         </p:spPr>
         <p:txBody>
-          <a:bodyPr wrap="square" anchor="t" lIns="0" rIns="0" tIns="0" bIns="0">
+          <a:bodyPr wrap="square" lIns="0" tIns="0" rIns="0" bIns="0" anchor="t">
             <a:spAutoFit/>
           </a:bodyPr>
           <a:lstStyle/>
@@ -26766,7 +27048,7 @@
 </file>
 
 <file path=ppt/slides/slide3.xml><?xml version="1.0" encoding="utf-8"?>
-<p:sld xmlns:a="http://schemas.openxmlformats.org/drawingml/2006/main" xmlns:p="http://schemas.openxmlformats.org/presentationml/2006/main" xmlns:r="http://schemas.openxmlformats.org/officeDocument/2006/relationships">
+<p:sld xmlns:a="http://schemas.openxmlformats.org/drawingml/2006/main" xmlns:r="http://schemas.openxmlformats.org/officeDocument/2006/relationships" xmlns:p="http://schemas.openxmlformats.org/presentationml/2006/main">
   <p:cSld>
     <p:spTree>
       <p:nvGrpSpPr>
@@ -26774,7 +27056,14 @@
         <p:cNvGrpSpPr/>
         <p:nvPr/>
       </p:nvGrpSpPr>
-      <p:grpSpPr/>
+      <p:grpSpPr>
+        <a:xfrm>
+          <a:off x="0" y="0"/>
+          <a:ext cx="0" cy="0"/>
+          <a:chOff x="0" y="0"/>
+          <a:chExt cx="0" cy="0"/>
+        </a:xfrm>
+      </p:grpSpPr>
       <p:sp>
         <p:nvSpPr>
           <p:cNvPr id="2" name="Rectangle 1"/>
@@ -26816,6 +27105,7 @@
           <a:lstStyle/>
           <a:p>
             <a:pPr algn="ctr"/>
+            <a:endParaRPr/>
           </a:p>
         </p:txBody>
       </p:sp>
@@ -26860,6 +27150,7 @@
           <a:lstStyle/>
           <a:p>
             <a:pPr algn="ctr"/>
+            <a:endParaRPr/>
           </a:p>
         </p:txBody>
       </p:sp>
@@ -26880,7 +27171,7 @@
           <a:noFill/>
         </p:spPr>
         <p:txBody>
-          <a:bodyPr wrap="square" anchor="t" lIns="0" rIns="0" tIns="0" bIns="0">
+          <a:bodyPr wrap="square" lIns="0" tIns="0" rIns="0" bIns="0" anchor="t">
             <a:spAutoFit/>
           </a:bodyPr>
           <a:lstStyle/>
@@ -26925,7 +27216,7 @@
           <a:noFill/>
         </p:spPr>
         <p:txBody>
-          <a:bodyPr wrap="square" anchor="t" lIns="0" rIns="0" tIns="0" bIns="0">
+          <a:bodyPr wrap="square" lIns="0" tIns="0" rIns="0" bIns="0" anchor="t">
             <a:spAutoFit/>
           </a:bodyPr>
           <a:lstStyle/>
@@ -26998,6 +27289,7 @@
           <a:lstStyle/>
           <a:p>
             <a:pPr algn="ctr"/>
+            <a:endParaRPr/>
           </a:p>
         </p:txBody>
       </p:sp>
@@ -27042,6 +27334,7 @@
           <a:lstStyle/>
           <a:p>
             <a:pPr algn="ctr"/>
+            <a:endParaRPr/>
           </a:p>
         </p:txBody>
       </p:sp>
@@ -27062,7 +27355,7 @@
           <a:noFill/>
         </p:spPr>
         <p:txBody>
-          <a:bodyPr wrap="square" anchor="t" lIns="0" rIns="0" tIns="0" bIns="0">
+          <a:bodyPr wrap="square" lIns="0" tIns="0" rIns="0" bIns="0" anchor="t">
             <a:spAutoFit/>
           </a:bodyPr>
           <a:lstStyle/>
@@ -27107,7 +27400,7 @@
           <a:noFill/>
         </p:spPr>
         <p:txBody>
-          <a:bodyPr wrap="square" anchor="t" lIns="0" rIns="0" tIns="0" bIns="0">
+          <a:bodyPr wrap="square" lIns="0" tIns="0" rIns="0" bIns="0" anchor="t">
             <a:spAutoFit/>
           </a:bodyPr>
           <a:lstStyle/>
@@ -27246,6 +27539,7 @@
           <a:lstStyle/>
           <a:p>
             <a:pPr algn="ctr"/>
+            <a:endParaRPr/>
           </a:p>
         </p:txBody>
       </p:sp>
@@ -27290,6 +27584,7 @@
           <a:lstStyle/>
           <a:p>
             <a:pPr algn="ctr"/>
+            <a:endParaRPr/>
           </a:p>
         </p:txBody>
       </p:sp>
@@ -27310,7 +27605,7 @@
           <a:noFill/>
         </p:spPr>
         <p:txBody>
-          <a:bodyPr wrap="square" anchor="t" lIns="0" rIns="0" tIns="0" bIns="0">
+          <a:bodyPr wrap="square" lIns="0" tIns="0" rIns="0" bIns="0" anchor="t">
             <a:spAutoFit/>
           </a:bodyPr>
           <a:lstStyle/>
@@ -27355,7 +27650,7 @@
           <a:noFill/>
         </p:spPr>
         <p:txBody>
-          <a:bodyPr wrap="square" anchor="t" lIns="0" rIns="0" tIns="0" bIns="0">
+          <a:bodyPr wrap="square" lIns="0" tIns="0" rIns="0" bIns="0" anchor="t">
             <a:spAutoFit/>
           </a:bodyPr>
           <a:lstStyle/>
@@ -27466,7 +27761,7 @@
           <a:noFill/>
         </p:spPr>
         <p:txBody>
-          <a:bodyPr wrap="square" anchor="t" lIns="0" rIns="0" tIns="0" bIns="0">
+          <a:bodyPr wrap="square" lIns="0" tIns="0" rIns="0" bIns="0" anchor="t">
             <a:spAutoFit/>
           </a:bodyPr>
           <a:lstStyle/>
@@ -27535,6 +27830,7 @@
           <a:lstStyle/>
           <a:p>
             <a:pPr algn="ctr"/>
+            <a:endParaRPr/>
           </a:p>
         </p:txBody>
       </p:sp>
@@ -27555,7 +27851,7 @@
           <a:noFill/>
         </p:spPr>
         <p:txBody>
-          <a:bodyPr wrap="square" anchor="t" lIns="0" rIns="0" tIns="0" bIns="0">
+          <a:bodyPr wrap="square" lIns="0" tIns="0" rIns="0" bIns="0" anchor="t">
             <a:spAutoFit/>
           </a:bodyPr>
           <a:lstStyle/>
@@ -27633,6 +27929,7 @@
           <a:lstStyle/>
           <a:p>
             <a:pPr algn="ctr"/>
+            <a:endParaRPr/>
           </a:p>
         </p:txBody>
       </p:sp>
@@ -27653,7 +27950,7 @@
           <a:noFill/>
         </p:spPr>
         <p:txBody>
-          <a:bodyPr wrap="square" anchor="t" lIns="0" rIns="0" tIns="0" bIns="0">
+          <a:bodyPr wrap="square" lIns="0" tIns="0" rIns="0" bIns="0" anchor="t">
             <a:spAutoFit/>
           </a:bodyPr>
           <a:lstStyle/>
@@ -27731,6 +28028,7 @@
           <a:lstStyle/>
           <a:p>
             <a:pPr algn="ctr"/>
+            <a:endParaRPr/>
           </a:p>
         </p:txBody>
       </p:sp>
@@ -27751,7 +28049,7 @@
           <a:noFill/>
         </p:spPr>
         <p:txBody>
-          <a:bodyPr wrap="square" anchor="t" lIns="0" rIns="0" tIns="0" bIns="0">
+          <a:bodyPr wrap="square" lIns="0" tIns="0" rIns="0" bIns="0" anchor="t">
             <a:spAutoFit/>
           </a:bodyPr>
           <a:lstStyle/>
@@ -27805,7 +28103,7 @@
           <a:noFill/>
         </p:spPr>
         <p:txBody>
-          <a:bodyPr wrap="square" anchor="t" lIns="0" rIns="0" tIns="0" bIns="0">
+          <a:bodyPr wrap="square" lIns="0" tIns="0" rIns="0" bIns="0" anchor="t">
             <a:spAutoFit/>
           </a:bodyPr>
           <a:lstStyle/>
@@ -27850,7 +28148,7 @@
           <a:noFill/>
         </p:spPr>
         <p:txBody>
-          <a:bodyPr wrap="square" anchor="t" lIns="0" rIns="0" tIns="0" bIns="0">
+          <a:bodyPr wrap="square" lIns="0" tIns="0" rIns="0" bIns="0" anchor="t">
             <a:spAutoFit/>
           </a:bodyPr>
           <a:lstStyle/>
@@ -27887,7 +28185,7 @@
 </file>
 
 <file path=ppt/slides/slide30.xml><?xml version="1.0" encoding="utf-8"?>
-<p:sld xmlns:a="http://schemas.openxmlformats.org/drawingml/2006/main" xmlns:p="http://schemas.openxmlformats.org/presentationml/2006/main" xmlns:r="http://schemas.openxmlformats.org/officeDocument/2006/relationships">
+<p:sld xmlns:a="http://schemas.openxmlformats.org/drawingml/2006/main" xmlns:r="http://schemas.openxmlformats.org/officeDocument/2006/relationships" xmlns:p="http://schemas.openxmlformats.org/presentationml/2006/main">
   <p:cSld>
     <p:spTree>
       <p:nvGrpSpPr>
@@ -27895,7 +28193,14 @@
         <p:cNvGrpSpPr/>
         <p:nvPr/>
       </p:nvGrpSpPr>
-      <p:grpSpPr/>
+      <p:grpSpPr>
+        <a:xfrm>
+          <a:off x="0" y="0"/>
+          <a:ext cx="0" cy="0"/>
+          <a:chOff x="0" y="0"/>
+          <a:chExt cx="0" cy="0"/>
+        </a:xfrm>
+      </p:grpSpPr>
       <p:sp>
         <p:nvSpPr>
           <p:cNvPr id="2" name="Rectangle 1"/>
@@ -27937,6 +28242,7 @@
           <a:lstStyle/>
           <a:p>
             <a:pPr algn="ctr"/>
+            <a:endParaRPr/>
           </a:p>
         </p:txBody>
       </p:sp>
@@ -27981,6 +28287,7 @@
           <a:lstStyle/>
           <a:p>
             <a:pPr algn="ctr"/>
+            <a:endParaRPr/>
           </a:p>
         </p:txBody>
       </p:sp>
@@ -28001,7 +28308,7 @@
           <a:noFill/>
         </p:spPr>
         <p:txBody>
-          <a:bodyPr wrap="square" anchor="t" lIns="0" rIns="0" tIns="0" bIns="0">
+          <a:bodyPr wrap="square" lIns="0" tIns="0" rIns="0" bIns="0" anchor="t">
             <a:spAutoFit/>
           </a:bodyPr>
           <a:lstStyle/>
@@ -28046,7 +28353,7 @@
           <a:noFill/>
         </p:spPr>
         <p:txBody>
-          <a:bodyPr wrap="square" anchor="t" lIns="0" rIns="0" tIns="0" bIns="0">
+          <a:bodyPr wrap="square" lIns="0" tIns="0" rIns="0" bIns="0" anchor="t">
             <a:spAutoFit/>
           </a:bodyPr>
           <a:lstStyle/>
@@ -28119,6 +28426,7 @@
           <a:lstStyle/>
           <a:p>
             <a:pPr algn="ctr"/>
+            <a:endParaRPr/>
           </a:p>
         </p:txBody>
       </p:sp>
@@ -28163,7 +28471,7 @@
           <a:noFill/>
         </p:spPr>
         <p:txBody>
-          <a:bodyPr wrap="square" anchor="t" lIns="0" rIns="0" tIns="0" bIns="0">
+          <a:bodyPr wrap="square" lIns="0" tIns="0" rIns="0" bIns="0" anchor="t">
             <a:spAutoFit/>
           </a:bodyPr>
           <a:lstStyle/>
@@ -28208,7 +28516,7 @@
           <a:noFill/>
         </p:spPr>
         <p:txBody>
-          <a:bodyPr wrap="square" anchor="t" lIns="0" rIns="0" tIns="0" bIns="0">
+          <a:bodyPr wrap="square" lIns="0" tIns="0" rIns="0" bIns="0" anchor="t">
             <a:spAutoFit/>
           </a:bodyPr>
           <a:lstStyle/>
@@ -28253,7 +28561,7 @@
           <a:noFill/>
         </p:spPr>
         <p:txBody>
-          <a:bodyPr wrap="square" anchor="t" lIns="0" rIns="0" tIns="0" bIns="0">
+          <a:bodyPr wrap="square" lIns="0" tIns="0" rIns="0" bIns="0" anchor="t">
             <a:spAutoFit/>
           </a:bodyPr>
           <a:lstStyle/>
@@ -28290,7 +28598,7 @@
 </file>
 
 <file path=ppt/slides/slide31.xml><?xml version="1.0" encoding="utf-8"?>
-<p:sld xmlns:a="http://schemas.openxmlformats.org/drawingml/2006/main" xmlns:p="http://schemas.openxmlformats.org/presentationml/2006/main" xmlns:r="http://schemas.openxmlformats.org/officeDocument/2006/relationships">
+<p:sld xmlns:a="http://schemas.openxmlformats.org/drawingml/2006/main" xmlns:r="http://schemas.openxmlformats.org/officeDocument/2006/relationships" xmlns:p="http://schemas.openxmlformats.org/presentationml/2006/main">
   <p:cSld>
     <p:spTree>
       <p:nvGrpSpPr>
@@ -28298,7 +28606,14 @@
         <p:cNvGrpSpPr/>
         <p:nvPr/>
       </p:nvGrpSpPr>
-      <p:grpSpPr/>
+      <p:grpSpPr>
+        <a:xfrm>
+          <a:off x="0" y="0"/>
+          <a:ext cx="0" cy="0"/>
+          <a:chOff x="0" y="0"/>
+          <a:chExt cx="0" cy="0"/>
+        </a:xfrm>
+      </p:grpSpPr>
       <p:sp>
         <p:nvSpPr>
           <p:cNvPr id="2" name="Rectangle 1"/>
@@ -28340,6 +28655,7 @@
           <a:lstStyle/>
           <a:p>
             <a:pPr algn="ctr"/>
+            <a:endParaRPr/>
           </a:p>
         </p:txBody>
       </p:sp>
@@ -28384,6 +28700,7 @@
           <a:lstStyle/>
           <a:p>
             <a:pPr algn="ctr"/>
+            <a:endParaRPr/>
           </a:p>
         </p:txBody>
       </p:sp>
@@ -28404,7 +28721,7 @@
           <a:noFill/>
         </p:spPr>
         <p:txBody>
-          <a:bodyPr wrap="square" anchor="t" lIns="0" rIns="0" tIns="0" bIns="0">
+          <a:bodyPr wrap="square" lIns="0" tIns="0" rIns="0" bIns="0" anchor="t">
             <a:spAutoFit/>
           </a:bodyPr>
           <a:lstStyle/>
@@ -28449,7 +28766,7 @@
           <a:noFill/>
         </p:spPr>
         <p:txBody>
-          <a:bodyPr wrap="square" anchor="t" lIns="0" rIns="0" tIns="0" bIns="0">
+          <a:bodyPr wrap="square" lIns="0" tIns="0" rIns="0" bIns="0" anchor="t">
             <a:spAutoFit/>
           </a:bodyPr>
           <a:lstStyle/>
@@ -28522,6 +28839,7 @@
           <a:lstStyle/>
           <a:p>
             <a:pPr algn="ctr"/>
+            <a:endParaRPr/>
           </a:p>
         </p:txBody>
       </p:sp>
@@ -28566,7 +28884,7 @@
           <a:noFill/>
         </p:spPr>
         <p:txBody>
-          <a:bodyPr wrap="square" anchor="t" lIns="0" rIns="0" tIns="0" bIns="0">
+          <a:bodyPr wrap="square" lIns="0" tIns="0" rIns="0" bIns="0" anchor="t">
             <a:spAutoFit/>
           </a:bodyPr>
           <a:lstStyle/>
@@ -28611,7 +28929,7 @@
           <a:noFill/>
         </p:spPr>
         <p:txBody>
-          <a:bodyPr wrap="square" anchor="t" lIns="0" rIns="0" tIns="0" bIns="0">
+          <a:bodyPr wrap="square" lIns="0" tIns="0" rIns="0" bIns="0" anchor="t">
             <a:spAutoFit/>
           </a:bodyPr>
           <a:lstStyle/>
@@ -28656,7 +28974,7 @@
           <a:noFill/>
         </p:spPr>
         <p:txBody>
-          <a:bodyPr wrap="square" anchor="t" lIns="0" rIns="0" tIns="0" bIns="0">
+          <a:bodyPr wrap="square" lIns="0" tIns="0" rIns="0" bIns="0" anchor="t">
             <a:spAutoFit/>
           </a:bodyPr>
           <a:lstStyle/>
@@ -28693,7 +29011,7 @@
 </file>
 
 <file path=ppt/slides/slide32.xml><?xml version="1.0" encoding="utf-8"?>
-<p:sld xmlns:a="http://schemas.openxmlformats.org/drawingml/2006/main" xmlns:p="http://schemas.openxmlformats.org/presentationml/2006/main" xmlns:r="http://schemas.openxmlformats.org/officeDocument/2006/relationships">
+<p:sld xmlns:a="http://schemas.openxmlformats.org/drawingml/2006/main" xmlns:r="http://schemas.openxmlformats.org/officeDocument/2006/relationships" xmlns:p="http://schemas.openxmlformats.org/presentationml/2006/main">
   <p:cSld>
     <p:spTree>
       <p:nvGrpSpPr>
@@ -28701,7 +29019,14 @@
         <p:cNvGrpSpPr/>
         <p:nvPr/>
       </p:nvGrpSpPr>
-      <p:grpSpPr/>
+      <p:grpSpPr>
+        <a:xfrm>
+          <a:off x="0" y="0"/>
+          <a:ext cx="0" cy="0"/>
+          <a:chOff x="0" y="0"/>
+          <a:chExt cx="0" cy="0"/>
+        </a:xfrm>
+      </p:grpSpPr>
       <p:sp>
         <p:nvSpPr>
           <p:cNvPr id="2" name="Rectangle 1"/>
@@ -28743,6 +29068,7 @@
           <a:lstStyle/>
           <a:p>
             <a:pPr algn="ctr"/>
+            <a:endParaRPr/>
           </a:p>
         </p:txBody>
       </p:sp>
@@ -28787,6 +29113,7 @@
           <a:lstStyle/>
           <a:p>
             <a:pPr algn="ctr"/>
+            <a:endParaRPr/>
           </a:p>
         </p:txBody>
       </p:sp>
@@ -28807,7 +29134,7 @@
           <a:noFill/>
         </p:spPr>
         <p:txBody>
-          <a:bodyPr wrap="square" anchor="t" lIns="0" rIns="0" tIns="0" bIns="0">
+          <a:bodyPr wrap="square" lIns="0" tIns="0" rIns="0" bIns="0" anchor="t">
             <a:spAutoFit/>
           </a:bodyPr>
           <a:lstStyle/>
@@ -28852,7 +29179,7 @@
           <a:noFill/>
         </p:spPr>
         <p:txBody>
-          <a:bodyPr wrap="square" anchor="t" lIns="0" rIns="0" tIns="0" bIns="0">
+          <a:bodyPr wrap="square" lIns="0" tIns="0" rIns="0" bIns="0" anchor="t">
             <a:spAutoFit/>
           </a:bodyPr>
           <a:lstStyle/>
@@ -28925,6 +29252,7 @@
           <a:lstStyle/>
           <a:p>
             <a:pPr algn="ctr"/>
+            <a:endParaRPr/>
           </a:p>
         </p:txBody>
       </p:sp>
@@ -28969,7 +29297,7 @@
           <a:noFill/>
         </p:spPr>
         <p:txBody>
-          <a:bodyPr wrap="square" anchor="t" lIns="0" rIns="0" tIns="0" bIns="0">
+          <a:bodyPr wrap="square" lIns="0" tIns="0" rIns="0" bIns="0" anchor="t">
             <a:spAutoFit/>
           </a:bodyPr>
           <a:lstStyle/>
@@ -29014,7 +29342,7 @@
           <a:noFill/>
         </p:spPr>
         <p:txBody>
-          <a:bodyPr wrap="square" anchor="t" lIns="0" rIns="0" tIns="0" bIns="0">
+          <a:bodyPr wrap="square" lIns="0" tIns="0" rIns="0" bIns="0" anchor="t">
             <a:spAutoFit/>
           </a:bodyPr>
           <a:lstStyle/>
@@ -29059,7 +29387,7 @@
           <a:noFill/>
         </p:spPr>
         <p:txBody>
-          <a:bodyPr wrap="square" anchor="t" lIns="0" rIns="0" tIns="0" bIns="0">
+          <a:bodyPr wrap="square" lIns="0" tIns="0" rIns="0" bIns="0" anchor="t">
             <a:spAutoFit/>
           </a:bodyPr>
           <a:lstStyle/>
@@ -29096,7 +29424,7 @@
 </file>
 
 <file path=ppt/slides/slide33.xml><?xml version="1.0" encoding="utf-8"?>
-<p:sld xmlns:a="http://schemas.openxmlformats.org/drawingml/2006/main" xmlns:p="http://schemas.openxmlformats.org/presentationml/2006/main" xmlns:r="http://schemas.openxmlformats.org/officeDocument/2006/relationships">
+<p:sld xmlns:a="http://schemas.openxmlformats.org/drawingml/2006/main" xmlns:r="http://schemas.openxmlformats.org/officeDocument/2006/relationships" xmlns:p="http://schemas.openxmlformats.org/presentationml/2006/main">
   <p:cSld>
     <p:spTree>
       <p:nvGrpSpPr>
@@ -29104,7 +29432,14 @@
         <p:cNvGrpSpPr/>
         <p:nvPr/>
       </p:nvGrpSpPr>
-      <p:grpSpPr/>
+      <p:grpSpPr>
+        <a:xfrm>
+          <a:off x="0" y="0"/>
+          <a:ext cx="0" cy="0"/>
+          <a:chOff x="0" y="0"/>
+          <a:chExt cx="0" cy="0"/>
+        </a:xfrm>
+      </p:grpSpPr>
       <p:sp>
         <p:nvSpPr>
           <p:cNvPr id="2" name="Rectangle 1"/>
@@ -29146,6 +29481,7 @@
           <a:lstStyle/>
           <a:p>
             <a:pPr algn="ctr"/>
+            <a:endParaRPr/>
           </a:p>
         </p:txBody>
       </p:sp>
@@ -29190,6 +29526,7 @@
           <a:lstStyle/>
           <a:p>
             <a:pPr algn="ctr"/>
+            <a:endParaRPr/>
           </a:p>
         </p:txBody>
       </p:sp>
@@ -29210,7 +29547,7 @@
           <a:noFill/>
         </p:spPr>
         <p:txBody>
-          <a:bodyPr wrap="square" anchor="t" lIns="0" rIns="0" tIns="0" bIns="0">
+          <a:bodyPr wrap="square" lIns="0" tIns="0" rIns="0" bIns="0" anchor="t">
             <a:spAutoFit/>
           </a:bodyPr>
           <a:lstStyle/>
@@ -29255,7 +29592,7 @@
           <a:noFill/>
         </p:spPr>
         <p:txBody>
-          <a:bodyPr wrap="square" anchor="t" lIns="0" rIns="0" tIns="0" bIns="0">
+          <a:bodyPr wrap="square" lIns="0" tIns="0" rIns="0" bIns="0" anchor="t">
             <a:spAutoFit/>
           </a:bodyPr>
           <a:lstStyle/>
@@ -29328,6 +29665,7 @@
           <a:lstStyle/>
           <a:p>
             <a:pPr algn="ctr"/>
+            <a:endParaRPr/>
           </a:p>
         </p:txBody>
       </p:sp>
@@ -29372,7 +29710,7 @@
           <a:noFill/>
         </p:spPr>
         <p:txBody>
-          <a:bodyPr wrap="square" anchor="t" lIns="0" rIns="0" tIns="0" bIns="0">
+          <a:bodyPr wrap="square" lIns="0" tIns="0" rIns="0" bIns="0" anchor="t">
             <a:spAutoFit/>
           </a:bodyPr>
           <a:lstStyle/>
@@ -29445,6 +29783,7 @@
           <a:lstStyle/>
           <a:p>
             <a:pPr algn="ctr"/>
+            <a:endParaRPr/>
           </a:p>
         </p:txBody>
       </p:sp>
@@ -29489,7 +29828,7 @@
           <a:noFill/>
         </p:spPr>
         <p:txBody>
-          <a:bodyPr wrap="square" anchor="t" lIns="0" rIns="0" tIns="0" bIns="0">
+          <a:bodyPr wrap="square" lIns="0" tIns="0" rIns="0" bIns="0" anchor="t">
             <a:spAutoFit/>
           </a:bodyPr>
           <a:lstStyle/>
@@ -29534,7 +29873,7 @@
           <a:noFill/>
         </p:spPr>
         <p:txBody>
-          <a:bodyPr wrap="square" anchor="t" lIns="0" rIns="0" tIns="0" bIns="0">
+          <a:bodyPr wrap="square" lIns="0" tIns="0" rIns="0" bIns="0" anchor="t">
             <a:spAutoFit/>
           </a:bodyPr>
           <a:lstStyle/>
@@ -29579,7 +29918,7 @@
           <a:noFill/>
         </p:spPr>
         <p:txBody>
-          <a:bodyPr wrap="square" anchor="t" lIns="0" rIns="0" tIns="0" bIns="0">
+          <a:bodyPr wrap="square" lIns="0" tIns="0" rIns="0" bIns="0" anchor="t">
             <a:spAutoFit/>
           </a:bodyPr>
           <a:lstStyle/>
@@ -29616,7 +29955,7 @@
 </file>
 
 <file path=ppt/slides/slide34.xml><?xml version="1.0" encoding="utf-8"?>
-<p:sld xmlns:a="http://schemas.openxmlformats.org/drawingml/2006/main" xmlns:p="http://schemas.openxmlformats.org/presentationml/2006/main" xmlns:r="http://schemas.openxmlformats.org/officeDocument/2006/relationships">
+<p:sld xmlns:a="http://schemas.openxmlformats.org/drawingml/2006/main" xmlns:r="http://schemas.openxmlformats.org/officeDocument/2006/relationships" xmlns:p="http://schemas.openxmlformats.org/presentationml/2006/main">
   <p:cSld>
     <p:spTree>
       <p:nvGrpSpPr>
@@ -29624,7 +29963,14 @@
         <p:cNvGrpSpPr/>
         <p:nvPr/>
       </p:nvGrpSpPr>
-      <p:grpSpPr/>
+      <p:grpSpPr>
+        <a:xfrm>
+          <a:off x="0" y="0"/>
+          <a:ext cx="0" cy="0"/>
+          <a:chOff x="0" y="0"/>
+          <a:chExt cx="0" cy="0"/>
+        </a:xfrm>
+      </p:grpSpPr>
       <p:sp>
         <p:nvSpPr>
           <p:cNvPr id="2" name="Rectangle 1"/>
@@ -29666,6 +30012,7 @@
           <a:lstStyle/>
           <a:p>
             <a:pPr algn="ctr"/>
+            <a:endParaRPr/>
           </a:p>
         </p:txBody>
       </p:sp>
@@ -29734,6 +30081,7 @@
           <a:lstStyle/>
           <a:p>
             <a:pPr algn="ctr"/>
+            <a:endParaRPr/>
           </a:p>
         </p:txBody>
       </p:sp>
@@ -29754,7 +30102,7 @@
           <a:noFill/>
         </p:spPr>
         <p:txBody>
-          <a:bodyPr wrap="square" anchor="t" lIns="0" rIns="0" tIns="0" bIns="0">
+          <a:bodyPr wrap="square" lIns="0" tIns="0" rIns="0" bIns="0" anchor="t">
             <a:spAutoFit/>
           </a:bodyPr>
           <a:lstStyle/>
@@ -29799,7 +30147,7 @@
           <a:noFill/>
         </p:spPr>
         <p:txBody>
-          <a:bodyPr wrap="square" anchor="t" lIns="0" rIns="0" tIns="0" bIns="0">
+          <a:bodyPr wrap="square" lIns="0" tIns="0" rIns="0" bIns="0" anchor="t">
             <a:spAutoFit/>
           </a:bodyPr>
           <a:lstStyle/>
@@ -29890,6 +30238,7 @@
           <a:lstStyle/>
           <a:p>
             <a:pPr algn="ctr"/>
+            <a:endParaRPr/>
           </a:p>
         </p:txBody>
       </p:sp>
@@ -29910,7 +30259,7 @@
           <a:noFill/>
         </p:spPr>
         <p:txBody>
-          <a:bodyPr wrap="square" anchor="t" lIns="0" rIns="0" tIns="0" bIns="0">
+          <a:bodyPr wrap="square" lIns="0" tIns="0" rIns="0" bIns="0" anchor="t">
             <a:spAutoFit/>
           </a:bodyPr>
           <a:lstStyle/>
@@ -29988,6 +30337,7 @@
           <a:lstStyle/>
           <a:p>
             <a:pPr algn="ctr"/>
+            <a:endParaRPr/>
           </a:p>
         </p:txBody>
       </p:sp>
@@ -30008,7 +30358,7 @@
           <a:noFill/>
         </p:spPr>
         <p:txBody>
-          <a:bodyPr wrap="square" anchor="t" lIns="0" rIns="0" tIns="0" bIns="0">
+          <a:bodyPr wrap="square" lIns="0" tIns="0" rIns="0" bIns="0" anchor="t">
             <a:spAutoFit/>
           </a:bodyPr>
           <a:lstStyle/>
@@ -30086,6 +30436,7 @@
           <a:lstStyle/>
           <a:p>
             <a:pPr algn="ctr"/>
+            <a:endParaRPr/>
           </a:p>
         </p:txBody>
       </p:sp>
@@ -30106,7 +30457,7 @@
           <a:noFill/>
         </p:spPr>
         <p:txBody>
-          <a:bodyPr wrap="square" anchor="t" lIns="0" rIns="0" tIns="0" bIns="0">
+          <a:bodyPr wrap="square" lIns="0" tIns="0" rIns="0" bIns="0" anchor="t">
             <a:spAutoFit/>
           </a:bodyPr>
           <a:lstStyle/>
@@ -30160,7 +30511,7 @@
           <a:noFill/>
         </p:spPr>
         <p:txBody>
-          <a:bodyPr wrap="square" anchor="t" lIns="0" rIns="0" tIns="0" bIns="0">
+          <a:bodyPr wrap="square" lIns="0" tIns="0" rIns="0" bIns="0" anchor="t">
             <a:spAutoFit/>
           </a:bodyPr>
           <a:lstStyle/>
@@ -30197,7 +30548,7 @@
 </file>
 
 <file path=ppt/slides/slide4.xml><?xml version="1.0" encoding="utf-8"?>
-<p:sld xmlns:a="http://schemas.openxmlformats.org/drawingml/2006/main" xmlns:p="http://schemas.openxmlformats.org/presentationml/2006/main" xmlns:r="http://schemas.openxmlformats.org/officeDocument/2006/relationships">
+<p:sld xmlns:a="http://schemas.openxmlformats.org/drawingml/2006/main" xmlns:r="http://schemas.openxmlformats.org/officeDocument/2006/relationships" xmlns:p="http://schemas.openxmlformats.org/presentationml/2006/main">
   <p:cSld>
     <p:spTree>
       <p:nvGrpSpPr>
@@ -30205,7 +30556,14 @@
         <p:cNvGrpSpPr/>
         <p:nvPr/>
       </p:nvGrpSpPr>
-      <p:grpSpPr/>
+      <p:grpSpPr>
+        <a:xfrm>
+          <a:off x="0" y="0"/>
+          <a:ext cx="0" cy="0"/>
+          <a:chOff x="0" y="0"/>
+          <a:chExt cx="0" cy="0"/>
+        </a:xfrm>
+      </p:grpSpPr>
       <p:sp>
         <p:nvSpPr>
           <p:cNvPr id="2" name="Rectangle 1"/>
@@ -30247,6 +30605,7 @@
           <a:lstStyle/>
           <a:p>
             <a:pPr algn="ctr"/>
+            <a:endParaRPr/>
           </a:p>
         </p:txBody>
       </p:sp>
@@ -30291,6 +30650,7 @@
           <a:lstStyle/>
           <a:p>
             <a:pPr algn="ctr"/>
+            <a:endParaRPr/>
           </a:p>
         </p:txBody>
       </p:sp>
@@ -30311,7 +30671,7 @@
           <a:noFill/>
         </p:spPr>
         <p:txBody>
-          <a:bodyPr wrap="square" anchor="t" lIns="0" rIns="0" tIns="0" bIns="0">
+          <a:bodyPr wrap="square" lIns="0" tIns="0" rIns="0" bIns="0" anchor="t">
             <a:spAutoFit/>
           </a:bodyPr>
           <a:lstStyle/>
@@ -30356,7 +30716,7 @@
           <a:noFill/>
         </p:spPr>
         <p:txBody>
-          <a:bodyPr wrap="square" anchor="t" lIns="0" rIns="0" tIns="0" bIns="0">
+          <a:bodyPr wrap="square" lIns="0" tIns="0" rIns="0" bIns="0" anchor="t">
             <a:spAutoFit/>
           </a:bodyPr>
           <a:lstStyle/>
@@ -30429,6 +30789,7 @@
           <a:lstStyle/>
           <a:p>
             <a:pPr algn="ctr"/>
+            <a:endParaRPr/>
           </a:p>
         </p:txBody>
       </p:sp>
@@ -30473,6 +30834,7 @@
           <a:lstStyle/>
           <a:p>
             <a:pPr algn="ctr"/>
+            <a:endParaRPr/>
           </a:p>
         </p:txBody>
       </p:sp>
@@ -30493,7 +30855,7 @@
           <a:noFill/>
         </p:spPr>
         <p:txBody>
-          <a:bodyPr wrap="square" anchor="t" lIns="0" rIns="0" tIns="0" bIns="0">
+          <a:bodyPr wrap="square" lIns="0" tIns="0" rIns="0" bIns="0" anchor="t">
             <a:spAutoFit/>
           </a:bodyPr>
           <a:lstStyle/>
@@ -30538,7 +30900,7 @@
           <a:noFill/>
         </p:spPr>
         <p:txBody>
-          <a:bodyPr wrap="square" anchor="t" lIns="0" rIns="0" tIns="0" bIns="0">
+          <a:bodyPr wrap="square" lIns="0" tIns="0" rIns="0" bIns="0" anchor="t">
             <a:spAutoFit/>
           </a:bodyPr>
           <a:lstStyle/>
@@ -30655,6 +31017,7 @@
           <a:lstStyle/>
           <a:p>
             <a:pPr algn="ctr"/>
+            <a:endParaRPr/>
           </a:p>
         </p:txBody>
       </p:sp>
@@ -30699,6 +31062,7 @@
           <a:lstStyle/>
           <a:p>
             <a:pPr algn="ctr"/>
+            <a:endParaRPr/>
           </a:p>
         </p:txBody>
       </p:sp>
@@ -30719,7 +31083,7 @@
           <a:noFill/>
         </p:spPr>
         <p:txBody>
-          <a:bodyPr wrap="square" anchor="t" lIns="0" rIns="0" tIns="0" bIns="0">
+          <a:bodyPr wrap="square" lIns="0" tIns="0" rIns="0" bIns="0" anchor="t">
             <a:spAutoFit/>
           </a:bodyPr>
           <a:lstStyle/>
@@ -30764,7 +31128,7 @@
           <a:noFill/>
         </p:spPr>
         <p:txBody>
-          <a:bodyPr wrap="square" anchor="t" lIns="0" rIns="0" tIns="0" bIns="0">
+          <a:bodyPr wrap="square" lIns="0" tIns="0" rIns="0" bIns="0" anchor="t">
             <a:spAutoFit/>
           </a:bodyPr>
           <a:lstStyle/>
@@ -30881,6 +31245,7 @@
           <a:lstStyle/>
           <a:p>
             <a:pPr algn="ctr"/>
+            <a:endParaRPr/>
           </a:p>
         </p:txBody>
       </p:sp>
@@ -30925,6 +31290,7 @@
           <a:lstStyle/>
           <a:p>
             <a:pPr algn="ctr"/>
+            <a:endParaRPr/>
           </a:p>
         </p:txBody>
       </p:sp>
@@ -30945,7 +31311,7 @@
           <a:noFill/>
         </p:spPr>
         <p:txBody>
-          <a:bodyPr wrap="square" anchor="t" lIns="0" rIns="0" tIns="0" bIns="0">
+          <a:bodyPr wrap="square" lIns="0" tIns="0" rIns="0" bIns="0" anchor="t">
             <a:spAutoFit/>
           </a:bodyPr>
           <a:lstStyle/>
@@ -30990,7 +31356,7 @@
           <a:noFill/>
         </p:spPr>
         <p:txBody>
-          <a:bodyPr wrap="square" anchor="t" lIns="0" rIns="0" tIns="0" bIns="0">
+          <a:bodyPr wrap="square" lIns="0" tIns="0" rIns="0" bIns="0" anchor="t">
             <a:spAutoFit/>
           </a:bodyPr>
           <a:lstStyle/>
@@ -31107,6 +31473,7 @@
           <a:lstStyle/>
           <a:p>
             <a:pPr algn="ctr"/>
+            <a:endParaRPr/>
           </a:p>
         </p:txBody>
       </p:sp>
@@ -31151,6 +31518,7 @@
           <a:lstStyle/>
           <a:p>
             <a:pPr algn="ctr"/>
+            <a:endParaRPr/>
           </a:p>
         </p:txBody>
       </p:sp>
@@ -31171,7 +31539,7 @@
           <a:noFill/>
         </p:spPr>
         <p:txBody>
-          <a:bodyPr wrap="square" anchor="t" lIns="0" rIns="0" tIns="0" bIns="0">
+          <a:bodyPr wrap="square" lIns="0" tIns="0" rIns="0" bIns="0" anchor="t">
             <a:spAutoFit/>
           </a:bodyPr>
           <a:lstStyle/>
@@ -31216,7 +31584,7 @@
           <a:noFill/>
         </p:spPr>
         <p:txBody>
-          <a:bodyPr wrap="square" anchor="t" lIns="0" rIns="0" tIns="0" bIns="0">
+          <a:bodyPr wrap="square" lIns="0" tIns="0" rIns="0" bIns="0" anchor="t">
             <a:spAutoFit/>
           </a:bodyPr>
           <a:lstStyle/>
@@ -31333,6 +31701,7 @@
           <a:lstStyle/>
           <a:p>
             <a:pPr algn="ctr"/>
+            <a:endParaRPr/>
           </a:p>
         </p:txBody>
       </p:sp>
@@ -31377,6 +31746,7 @@
           <a:lstStyle/>
           <a:p>
             <a:pPr algn="ctr"/>
+            <a:endParaRPr/>
           </a:p>
         </p:txBody>
       </p:sp>
@@ -31397,7 +31767,7 @@
           <a:noFill/>
         </p:spPr>
         <p:txBody>
-          <a:bodyPr wrap="square" anchor="t" lIns="0" rIns="0" tIns="0" bIns="0">
+          <a:bodyPr wrap="square" lIns="0" tIns="0" rIns="0" bIns="0" anchor="t">
             <a:spAutoFit/>
           </a:bodyPr>
           <a:lstStyle/>
@@ -31442,7 +31812,7 @@
           <a:noFill/>
         </p:spPr>
         <p:txBody>
-          <a:bodyPr wrap="square" anchor="t" lIns="0" rIns="0" tIns="0" bIns="0">
+          <a:bodyPr wrap="square" lIns="0" tIns="0" rIns="0" bIns="0" anchor="t">
             <a:spAutoFit/>
           </a:bodyPr>
           <a:lstStyle/>
@@ -31559,6 +31929,7 @@
           <a:lstStyle/>
           <a:p>
             <a:pPr algn="ctr"/>
+            <a:endParaRPr/>
           </a:p>
         </p:txBody>
       </p:sp>
@@ -31603,6 +31974,7 @@
           <a:lstStyle/>
           <a:p>
             <a:pPr algn="ctr"/>
+            <a:endParaRPr/>
           </a:p>
         </p:txBody>
       </p:sp>
@@ -31623,7 +31995,7 @@
           <a:noFill/>
         </p:spPr>
         <p:txBody>
-          <a:bodyPr wrap="square" anchor="t" lIns="0" rIns="0" tIns="0" bIns="0">
+          <a:bodyPr wrap="square" lIns="0" tIns="0" rIns="0" bIns="0" anchor="t">
             <a:spAutoFit/>
           </a:bodyPr>
           <a:lstStyle/>
@@ -31668,7 +32040,7 @@
           <a:noFill/>
         </p:spPr>
         <p:txBody>
-          <a:bodyPr wrap="square" anchor="t" lIns="0" rIns="0" tIns="0" bIns="0">
+          <a:bodyPr wrap="square" lIns="0" tIns="0" rIns="0" bIns="0" anchor="t">
             <a:spAutoFit/>
           </a:bodyPr>
           <a:lstStyle/>
@@ -31757,7 +32129,7 @@
           <a:noFill/>
         </p:spPr>
         <p:txBody>
-          <a:bodyPr wrap="square" anchor="t" lIns="0" rIns="0" tIns="0" bIns="0">
+          <a:bodyPr wrap="square" lIns="0" tIns="0" rIns="0" bIns="0" anchor="t">
             <a:spAutoFit/>
           </a:bodyPr>
           <a:lstStyle/>
@@ -31802,7 +32174,7 @@
           <a:noFill/>
         </p:spPr>
         <p:txBody>
-          <a:bodyPr wrap="square" anchor="t" lIns="0" rIns="0" tIns="0" bIns="0">
+          <a:bodyPr wrap="square" lIns="0" tIns="0" rIns="0" bIns="0" anchor="t">
             <a:spAutoFit/>
           </a:bodyPr>
           <a:lstStyle/>
@@ -31839,7 +32211,7 @@
 </file>
 
 <file path=ppt/slides/slide5.xml><?xml version="1.0" encoding="utf-8"?>
-<p:sld xmlns:a="http://schemas.openxmlformats.org/drawingml/2006/main" xmlns:p="http://schemas.openxmlformats.org/presentationml/2006/main" xmlns:r="http://schemas.openxmlformats.org/officeDocument/2006/relationships">
+<p:sld xmlns:a="http://schemas.openxmlformats.org/drawingml/2006/main" xmlns:r="http://schemas.openxmlformats.org/officeDocument/2006/relationships" xmlns:p="http://schemas.openxmlformats.org/presentationml/2006/main">
   <p:cSld>
     <p:spTree>
       <p:nvGrpSpPr>
@@ -31847,7 +32219,14 @@
         <p:cNvGrpSpPr/>
         <p:nvPr/>
       </p:nvGrpSpPr>
-      <p:grpSpPr/>
+      <p:grpSpPr>
+        <a:xfrm>
+          <a:off x="0" y="0"/>
+          <a:ext cx="0" cy="0"/>
+          <a:chOff x="0" y="0"/>
+          <a:chExt cx="0" cy="0"/>
+        </a:xfrm>
+      </p:grpSpPr>
       <p:sp>
         <p:nvSpPr>
           <p:cNvPr id="2" name="Rectangle 1"/>
@@ -31889,6 +32268,7 @@
           <a:lstStyle/>
           <a:p>
             <a:pPr algn="ctr"/>
+            <a:endParaRPr/>
           </a:p>
         </p:txBody>
       </p:sp>
@@ -31933,6 +32313,7 @@
           <a:lstStyle/>
           <a:p>
             <a:pPr algn="ctr"/>
+            <a:endParaRPr/>
           </a:p>
         </p:txBody>
       </p:sp>
@@ -31953,7 +32334,7 @@
           <a:noFill/>
         </p:spPr>
         <p:txBody>
-          <a:bodyPr wrap="square" anchor="t" lIns="0" rIns="0" tIns="0" bIns="0">
+          <a:bodyPr wrap="square" lIns="0" tIns="0" rIns="0" bIns="0" anchor="t">
             <a:spAutoFit/>
           </a:bodyPr>
           <a:lstStyle/>
@@ -31998,7 +32379,7 @@
           <a:noFill/>
         </p:spPr>
         <p:txBody>
-          <a:bodyPr wrap="square" anchor="t" lIns="0" rIns="0" tIns="0" bIns="0">
+          <a:bodyPr wrap="square" lIns="0" tIns="0" rIns="0" bIns="0" anchor="t">
             <a:spAutoFit/>
           </a:bodyPr>
           <a:lstStyle/>
@@ -32071,6 +32452,7 @@
           <a:lstStyle/>
           <a:p>
             <a:pPr algn="ctr"/>
+            <a:endParaRPr/>
           </a:p>
         </p:txBody>
       </p:sp>
@@ -32115,6 +32497,7 @@
           <a:lstStyle/>
           <a:p>
             <a:pPr algn="ctr"/>
+            <a:endParaRPr/>
           </a:p>
         </p:txBody>
       </p:sp>
@@ -32135,7 +32518,7 @@
           <a:noFill/>
         </p:spPr>
         <p:txBody>
-          <a:bodyPr wrap="square" anchor="t" lIns="0" rIns="0" tIns="0" bIns="0">
+          <a:bodyPr wrap="square" lIns="0" tIns="0" rIns="0" bIns="0" anchor="t">
             <a:spAutoFit/>
           </a:bodyPr>
           <a:lstStyle/>
@@ -32180,7 +32563,7 @@
           <a:noFill/>
         </p:spPr>
         <p:txBody>
-          <a:bodyPr wrap="square" anchor="t" lIns="0" rIns="0" tIns="0" bIns="0">
+          <a:bodyPr wrap="square" lIns="0" tIns="0" rIns="0" bIns="0" anchor="t">
             <a:spAutoFit/>
           </a:bodyPr>
           <a:lstStyle/>
@@ -32225,7 +32608,7 @@
           <a:noFill/>
         </p:spPr>
         <p:txBody>
-          <a:bodyPr wrap="square" anchor="t" lIns="0" rIns="0" tIns="0" bIns="0">
+          <a:bodyPr wrap="square" lIns="0" tIns="0" rIns="0" bIns="0" anchor="t">
             <a:spAutoFit/>
           </a:bodyPr>
           <a:lstStyle/>
@@ -32298,6 +32681,7 @@
           <a:lstStyle/>
           <a:p>
             <a:pPr algn="ctr"/>
+            <a:endParaRPr/>
           </a:p>
         </p:txBody>
       </p:sp>
@@ -32342,6 +32726,7 @@
           <a:lstStyle/>
           <a:p>
             <a:pPr algn="ctr"/>
+            <a:endParaRPr/>
           </a:p>
         </p:txBody>
       </p:sp>
@@ -32362,7 +32747,7 @@
           <a:noFill/>
         </p:spPr>
         <p:txBody>
-          <a:bodyPr wrap="square" anchor="t" lIns="0" rIns="0" tIns="0" bIns="0">
+          <a:bodyPr wrap="square" lIns="0" tIns="0" rIns="0" bIns="0" anchor="t">
             <a:spAutoFit/>
           </a:bodyPr>
           <a:lstStyle/>
@@ -32407,7 +32792,7 @@
           <a:noFill/>
         </p:spPr>
         <p:txBody>
-          <a:bodyPr wrap="square" anchor="t" lIns="0" rIns="0" tIns="0" bIns="0">
+          <a:bodyPr wrap="square" lIns="0" tIns="0" rIns="0" bIns="0" anchor="t">
             <a:spAutoFit/>
           </a:bodyPr>
           <a:lstStyle/>
@@ -32452,7 +32837,7 @@
           <a:noFill/>
         </p:spPr>
         <p:txBody>
-          <a:bodyPr wrap="square" anchor="t" lIns="0" rIns="0" tIns="0" bIns="0">
+          <a:bodyPr wrap="square" lIns="0" tIns="0" rIns="0" bIns="0" anchor="t">
             <a:spAutoFit/>
           </a:bodyPr>
           <a:lstStyle/>
@@ -32525,6 +32910,7 @@
           <a:lstStyle/>
           <a:p>
             <a:pPr algn="ctr"/>
+            <a:endParaRPr/>
           </a:p>
         </p:txBody>
       </p:sp>
@@ -32569,6 +32955,7 @@
           <a:lstStyle/>
           <a:p>
             <a:pPr algn="ctr"/>
+            <a:endParaRPr/>
           </a:p>
         </p:txBody>
       </p:sp>
@@ -32589,7 +32976,7 @@
           <a:noFill/>
         </p:spPr>
         <p:txBody>
-          <a:bodyPr wrap="square" anchor="t" lIns="0" rIns="0" tIns="0" bIns="0">
+          <a:bodyPr wrap="square" lIns="0" tIns="0" rIns="0" bIns="0" anchor="t">
             <a:spAutoFit/>
           </a:bodyPr>
           <a:lstStyle/>
@@ -32634,7 +33021,7 @@
           <a:noFill/>
         </p:spPr>
         <p:txBody>
-          <a:bodyPr wrap="square" anchor="t" lIns="0" rIns="0" tIns="0" bIns="0">
+          <a:bodyPr wrap="square" lIns="0" tIns="0" rIns="0" bIns="0" anchor="t">
             <a:spAutoFit/>
           </a:bodyPr>
           <a:lstStyle/>
@@ -32679,7 +33066,7 @@
           <a:noFill/>
         </p:spPr>
         <p:txBody>
-          <a:bodyPr wrap="square" anchor="t" lIns="0" rIns="0" tIns="0" bIns="0">
+          <a:bodyPr wrap="square" lIns="0" tIns="0" rIns="0" bIns="0" anchor="t">
             <a:spAutoFit/>
           </a:bodyPr>
           <a:lstStyle/>
@@ -32752,6 +33139,7 @@
           <a:lstStyle/>
           <a:p>
             <a:pPr algn="ctr"/>
+            <a:endParaRPr/>
           </a:p>
         </p:txBody>
       </p:sp>
@@ -32796,6 +33184,7 @@
           <a:lstStyle/>
           <a:p>
             <a:pPr algn="ctr"/>
+            <a:endParaRPr/>
           </a:p>
         </p:txBody>
       </p:sp>
@@ -32816,7 +33205,7 @@
           <a:noFill/>
         </p:spPr>
         <p:txBody>
-          <a:bodyPr wrap="square" anchor="t" lIns="0" rIns="0" tIns="0" bIns="0">
+          <a:bodyPr wrap="square" lIns="0" tIns="0" rIns="0" bIns="0" anchor="t">
             <a:spAutoFit/>
           </a:bodyPr>
           <a:lstStyle/>
@@ -32861,7 +33250,7 @@
           <a:noFill/>
         </p:spPr>
         <p:txBody>
-          <a:bodyPr wrap="square" anchor="t" lIns="0" rIns="0" tIns="0" bIns="0">
+          <a:bodyPr wrap="square" lIns="0" tIns="0" rIns="0" bIns="0" anchor="t">
             <a:spAutoFit/>
           </a:bodyPr>
           <a:lstStyle/>
@@ -32906,7 +33295,7 @@
           <a:noFill/>
         </p:spPr>
         <p:txBody>
-          <a:bodyPr wrap="square" anchor="t" lIns="0" rIns="0" tIns="0" bIns="0">
+          <a:bodyPr wrap="square" lIns="0" tIns="0" rIns="0" bIns="0" anchor="t">
             <a:spAutoFit/>
           </a:bodyPr>
           <a:lstStyle/>
@@ -32979,6 +33368,7 @@
           <a:lstStyle/>
           <a:p>
             <a:pPr algn="ctr"/>
+            <a:endParaRPr/>
           </a:p>
         </p:txBody>
       </p:sp>
@@ -33023,6 +33413,7 @@
           <a:lstStyle/>
           <a:p>
             <a:pPr algn="ctr"/>
+            <a:endParaRPr/>
           </a:p>
         </p:txBody>
       </p:sp>
@@ -33043,7 +33434,7 @@
           <a:noFill/>
         </p:spPr>
         <p:txBody>
-          <a:bodyPr wrap="square" anchor="t" lIns="0" rIns="0" tIns="0" bIns="0">
+          <a:bodyPr wrap="square" lIns="0" tIns="0" rIns="0" bIns="0" anchor="t">
             <a:spAutoFit/>
           </a:bodyPr>
           <a:lstStyle/>
@@ -33088,7 +33479,7 @@
           <a:noFill/>
         </p:spPr>
         <p:txBody>
-          <a:bodyPr wrap="square" anchor="t" lIns="0" rIns="0" tIns="0" bIns="0">
+          <a:bodyPr wrap="square" lIns="0" tIns="0" rIns="0" bIns="0" anchor="t">
             <a:spAutoFit/>
           </a:bodyPr>
           <a:lstStyle/>
@@ -33133,7 +33524,7 @@
           <a:noFill/>
         </p:spPr>
         <p:txBody>
-          <a:bodyPr wrap="square" anchor="t" lIns="0" rIns="0" tIns="0" bIns="0">
+          <a:bodyPr wrap="square" lIns="0" tIns="0" rIns="0" bIns="0" anchor="t">
             <a:spAutoFit/>
           </a:bodyPr>
           <a:lstStyle/>
@@ -33206,6 +33597,7 @@
           <a:lstStyle/>
           <a:p>
             <a:pPr algn="ctr"/>
+            <a:endParaRPr/>
           </a:p>
         </p:txBody>
       </p:sp>
@@ -33250,6 +33642,7 @@
           <a:lstStyle/>
           <a:p>
             <a:pPr algn="ctr"/>
+            <a:endParaRPr/>
           </a:p>
         </p:txBody>
       </p:sp>
@@ -33270,7 +33663,7 @@
           <a:noFill/>
         </p:spPr>
         <p:txBody>
-          <a:bodyPr wrap="square" anchor="t" lIns="0" rIns="0" tIns="0" bIns="0">
+          <a:bodyPr wrap="square" lIns="0" tIns="0" rIns="0" bIns="0" anchor="t">
             <a:spAutoFit/>
           </a:bodyPr>
           <a:lstStyle/>
@@ -33315,7 +33708,7 @@
           <a:noFill/>
         </p:spPr>
         <p:txBody>
-          <a:bodyPr wrap="square" anchor="t" lIns="0" rIns="0" tIns="0" bIns="0">
+          <a:bodyPr wrap="square" lIns="0" tIns="0" rIns="0" bIns="0" anchor="t">
             <a:spAutoFit/>
           </a:bodyPr>
           <a:lstStyle/>
@@ -33360,7 +33753,7 @@
           <a:noFill/>
         </p:spPr>
         <p:txBody>
-          <a:bodyPr wrap="square" anchor="t" lIns="0" rIns="0" tIns="0" bIns="0">
+          <a:bodyPr wrap="square" lIns="0" tIns="0" rIns="0" bIns="0" anchor="t">
             <a:spAutoFit/>
           </a:bodyPr>
           <a:lstStyle/>
@@ -33433,6 +33826,7 @@
           <a:lstStyle/>
           <a:p>
             <a:pPr algn="ctr"/>
+            <a:endParaRPr/>
           </a:p>
         </p:txBody>
       </p:sp>
@@ -33477,6 +33871,7 @@
           <a:lstStyle/>
           <a:p>
             <a:pPr algn="ctr"/>
+            <a:endParaRPr/>
           </a:p>
         </p:txBody>
       </p:sp>
@@ -33497,7 +33892,7 @@
           <a:noFill/>
         </p:spPr>
         <p:txBody>
-          <a:bodyPr wrap="square" anchor="t" lIns="0" rIns="0" tIns="0" bIns="0">
+          <a:bodyPr wrap="square" lIns="0" tIns="0" rIns="0" bIns="0" anchor="t">
             <a:spAutoFit/>
           </a:bodyPr>
           <a:lstStyle/>
@@ -33542,7 +33937,7 @@
           <a:noFill/>
         </p:spPr>
         <p:txBody>
-          <a:bodyPr wrap="square" anchor="t" lIns="0" rIns="0" tIns="0" bIns="0">
+          <a:bodyPr wrap="square" lIns="0" tIns="0" rIns="0" bIns="0" anchor="t">
             <a:spAutoFit/>
           </a:bodyPr>
           <a:lstStyle/>
@@ -33587,7 +33982,7 @@
           <a:noFill/>
         </p:spPr>
         <p:txBody>
-          <a:bodyPr wrap="square" anchor="t" lIns="0" rIns="0" tIns="0" bIns="0">
+          <a:bodyPr wrap="square" lIns="0" tIns="0" rIns="0" bIns="0" anchor="t">
             <a:spAutoFit/>
           </a:bodyPr>
           <a:lstStyle/>
@@ -33660,6 +34055,7 @@
           <a:lstStyle/>
           <a:p>
             <a:pPr algn="ctr"/>
+            <a:endParaRPr/>
           </a:p>
         </p:txBody>
       </p:sp>
@@ -33704,6 +34100,7 @@
           <a:lstStyle/>
           <a:p>
             <a:pPr algn="ctr"/>
+            <a:endParaRPr/>
           </a:p>
         </p:txBody>
       </p:sp>
@@ -33724,7 +34121,7 @@
           <a:noFill/>
         </p:spPr>
         <p:txBody>
-          <a:bodyPr wrap="square" anchor="t" lIns="0" rIns="0" tIns="0" bIns="0">
+          <a:bodyPr wrap="square" lIns="0" tIns="0" rIns="0" bIns="0" anchor="t">
             <a:spAutoFit/>
           </a:bodyPr>
           <a:lstStyle/>
@@ -33769,7 +34166,7 @@
           <a:noFill/>
         </p:spPr>
         <p:txBody>
-          <a:bodyPr wrap="square" anchor="t" lIns="0" rIns="0" tIns="0" bIns="0">
+          <a:bodyPr wrap="square" lIns="0" tIns="0" rIns="0" bIns="0" anchor="t">
             <a:spAutoFit/>
           </a:bodyPr>
           <a:lstStyle/>
@@ -33814,7 +34211,7 @@
           <a:noFill/>
         </p:spPr>
         <p:txBody>
-          <a:bodyPr wrap="square" anchor="t" lIns="0" rIns="0" tIns="0" bIns="0">
+          <a:bodyPr wrap="square" lIns="0" tIns="0" rIns="0" bIns="0" anchor="t">
             <a:spAutoFit/>
           </a:bodyPr>
           <a:lstStyle/>
@@ -33887,6 +34284,7 @@
           <a:lstStyle/>
           <a:p>
             <a:pPr algn="ctr"/>
+            <a:endParaRPr/>
           </a:p>
         </p:txBody>
       </p:sp>
@@ -33931,6 +34329,7 @@
           <a:lstStyle/>
           <a:p>
             <a:pPr algn="ctr"/>
+            <a:endParaRPr/>
           </a:p>
         </p:txBody>
       </p:sp>
@@ -33951,7 +34350,7 @@
           <a:noFill/>
         </p:spPr>
         <p:txBody>
-          <a:bodyPr wrap="square" anchor="t" lIns="0" rIns="0" tIns="0" bIns="0">
+          <a:bodyPr wrap="square" lIns="0" tIns="0" rIns="0" bIns="0" anchor="t">
             <a:spAutoFit/>
           </a:bodyPr>
           <a:lstStyle/>
@@ -33996,7 +34395,7 @@
           <a:noFill/>
         </p:spPr>
         <p:txBody>
-          <a:bodyPr wrap="square" anchor="t" lIns="0" rIns="0" tIns="0" bIns="0">
+          <a:bodyPr wrap="square" lIns="0" tIns="0" rIns="0" bIns="0" anchor="t">
             <a:spAutoFit/>
           </a:bodyPr>
           <a:lstStyle/>
@@ -34041,7 +34440,7 @@
           <a:noFill/>
         </p:spPr>
         <p:txBody>
-          <a:bodyPr wrap="square" anchor="t" lIns="0" rIns="0" tIns="0" bIns="0">
+          <a:bodyPr wrap="square" lIns="0" tIns="0" rIns="0" bIns="0" anchor="t">
             <a:spAutoFit/>
           </a:bodyPr>
           <a:lstStyle/>
@@ -34114,6 +34513,7 @@
           <a:lstStyle/>
           <a:p>
             <a:pPr algn="ctr"/>
+            <a:endParaRPr/>
           </a:p>
         </p:txBody>
       </p:sp>
@@ -34158,6 +34558,7 @@
           <a:lstStyle/>
           <a:p>
             <a:pPr algn="ctr"/>
+            <a:endParaRPr/>
           </a:p>
         </p:txBody>
       </p:sp>
@@ -34178,7 +34579,7 @@
           <a:noFill/>
         </p:spPr>
         <p:txBody>
-          <a:bodyPr wrap="square" anchor="t" lIns="0" rIns="0" tIns="0" bIns="0">
+          <a:bodyPr wrap="square" lIns="0" tIns="0" rIns="0" bIns="0" anchor="t">
             <a:spAutoFit/>
           </a:bodyPr>
           <a:lstStyle/>
@@ -34223,7 +34624,7 @@
           <a:noFill/>
         </p:spPr>
         <p:txBody>
-          <a:bodyPr wrap="square" anchor="t" lIns="0" rIns="0" tIns="0" bIns="0">
+          <a:bodyPr wrap="square" lIns="0" tIns="0" rIns="0" bIns="0" anchor="t">
             <a:spAutoFit/>
           </a:bodyPr>
           <a:lstStyle/>
@@ -34268,7 +34669,7 @@
           <a:noFill/>
         </p:spPr>
         <p:txBody>
-          <a:bodyPr wrap="square" anchor="t" lIns="0" rIns="0" tIns="0" bIns="0">
+          <a:bodyPr wrap="square" lIns="0" tIns="0" rIns="0" bIns="0" anchor="t">
             <a:spAutoFit/>
           </a:bodyPr>
           <a:lstStyle/>
@@ -34341,6 +34742,7 @@
           <a:lstStyle/>
           <a:p>
             <a:pPr algn="ctr"/>
+            <a:endParaRPr/>
           </a:p>
         </p:txBody>
       </p:sp>
@@ -34385,6 +34787,7 @@
           <a:lstStyle/>
           <a:p>
             <a:pPr algn="ctr"/>
+            <a:endParaRPr/>
           </a:p>
         </p:txBody>
       </p:sp>
@@ -34405,7 +34808,7 @@
           <a:noFill/>
         </p:spPr>
         <p:txBody>
-          <a:bodyPr wrap="square" anchor="t" lIns="0" rIns="0" tIns="0" bIns="0">
+          <a:bodyPr wrap="square" lIns="0" tIns="0" rIns="0" bIns="0" anchor="t">
             <a:spAutoFit/>
           </a:bodyPr>
           <a:lstStyle/>
@@ -34450,7 +34853,7 @@
           <a:noFill/>
         </p:spPr>
         <p:txBody>
-          <a:bodyPr wrap="square" anchor="t" lIns="0" rIns="0" tIns="0" bIns="0">
+          <a:bodyPr wrap="square" lIns="0" tIns="0" rIns="0" bIns="0" anchor="t">
             <a:spAutoFit/>
           </a:bodyPr>
           <a:lstStyle/>
@@ -34495,7 +34898,7 @@
           <a:noFill/>
         </p:spPr>
         <p:txBody>
-          <a:bodyPr wrap="square" anchor="t" lIns="0" rIns="0" tIns="0" bIns="0">
+          <a:bodyPr wrap="square" lIns="0" tIns="0" rIns="0" bIns="0" anchor="t">
             <a:spAutoFit/>
           </a:bodyPr>
           <a:lstStyle/>
@@ -34540,7 +34943,7 @@
           <a:noFill/>
         </p:spPr>
         <p:txBody>
-          <a:bodyPr wrap="square" anchor="t" lIns="0" rIns="0" tIns="0" bIns="0">
+          <a:bodyPr wrap="square" lIns="0" tIns="0" rIns="0" bIns="0" anchor="t">
             <a:spAutoFit/>
           </a:bodyPr>
           <a:lstStyle/>
@@ -34585,7 +34988,7 @@
           <a:noFill/>
         </p:spPr>
         <p:txBody>
-          <a:bodyPr wrap="square" anchor="t" lIns="0" rIns="0" tIns="0" bIns="0">
+          <a:bodyPr wrap="square" lIns="0" tIns="0" rIns="0" bIns="0" anchor="t">
             <a:spAutoFit/>
           </a:bodyPr>
           <a:lstStyle/>
@@ -34622,7 +35025,7 @@
 </file>
 
 <file path=ppt/slides/slide6.xml><?xml version="1.0" encoding="utf-8"?>
-<p:sld xmlns:a="http://schemas.openxmlformats.org/drawingml/2006/main" xmlns:p="http://schemas.openxmlformats.org/presentationml/2006/main" xmlns:r="http://schemas.openxmlformats.org/officeDocument/2006/relationships">
+<p:sld xmlns:a="http://schemas.openxmlformats.org/drawingml/2006/main" xmlns:r="http://schemas.openxmlformats.org/officeDocument/2006/relationships" xmlns:p="http://schemas.openxmlformats.org/presentationml/2006/main">
   <p:cSld>
     <p:spTree>
       <p:nvGrpSpPr>
@@ -34630,7 +35033,14 @@
         <p:cNvGrpSpPr/>
         <p:nvPr/>
       </p:nvGrpSpPr>
-      <p:grpSpPr/>
+      <p:grpSpPr>
+        <a:xfrm>
+          <a:off x="0" y="0"/>
+          <a:ext cx="0" cy="0"/>
+          <a:chOff x="0" y="0"/>
+          <a:chExt cx="0" cy="0"/>
+        </a:xfrm>
+      </p:grpSpPr>
       <p:sp>
         <p:nvSpPr>
           <p:cNvPr id="2" name="Rectangle 1"/>
@@ -34672,6 +35082,7 @@
           <a:lstStyle/>
           <a:p>
             <a:pPr algn="ctr"/>
+            <a:endParaRPr/>
           </a:p>
         </p:txBody>
       </p:sp>
@@ -34684,7 +35095,7 @@
         <p:spPr>
           <a:xfrm>
             <a:off x="0" y="0"/>
-            <a:ext cx="11148085908000" cy="6270955200000"/>
+            <a:ext cx="0" cy="0"/>
           </a:xfrm>
           <a:prstGeom prst="rect">
             <a:avLst/>
@@ -34716,6 +35127,7 @@
           <a:lstStyle/>
           <a:p>
             <a:pPr algn="ctr"/>
+            <a:endParaRPr/>
           </a:p>
         </p:txBody>
       </p:sp>
@@ -34760,6 +35172,7 @@
           <a:lstStyle/>
           <a:p>
             <a:pPr algn="ctr"/>
+            <a:endParaRPr/>
           </a:p>
         </p:txBody>
       </p:sp>
@@ -34806,6 +35219,7 @@
           <a:lstStyle/>
           <a:p>
             <a:pPr algn="ctr"/>
+            <a:endParaRPr/>
           </a:p>
         </p:txBody>
       </p:sp>
@@ -34826,7 +35240,7 @@
           <a:noFill/>
         </p:spPr>
         <p:txBody>
-          <a:bodyPr wrap="square" anchor="ctr" lIns="0" rIns="0" tIns="0" bIns="0">
+          <a:bodyPr wrap="square" lIns="0" tIns="0" rIns="0" bIns="0" anchor="ctr">
             <a:spAutoFit/>
           </a:bodyPr>
           <a:lstStyle/>
@@ -34871,7 +35285,7 @@
           <a:noFill/>
         </p:spPr>
         <p:txBody>
-          <a:bodyPr wrap="square" anchor="t" lIns="0" rIns="0" tIns="0" bIns="0">
+          <a:bodyPr wrap="square" lIns="0" tIns="0" rIns="0" bIns="0" anchor="t">
             <a:spAutoFit/>
           </a:bodyPr>
           <a:lstStyle/>
@@ -34916,7 +35330,7 @@
           <a:noFill/>
         </p:spPr>
         <p:txBody>
-          <a:bodyPr wrap="square" anchor="t" lIns="0" rIns="0" tIns="0" bIns="0">
+          <a:bodyPr wrap="square" lIns="0" tIns="0" rIns="0" bIns="0" anchor="t">
             <a:spAutoFit/>
           </a:bodyPr>
           <a:lstStyle/>
@@ -34953,7 +35367,7 @@
 </file>
 
 <file path=ppt/slides/slide7.xml><?xml version="1.0" encoding="utf-8"?>
-<p:sld xmlns:a="http://schemas.openxmlformats.org/drawingml/2006/main" xmlns:p="http://schemas.openxmlformats.org/presentationml/2006/main" xmlns:r="http://schemas.openxmlformats.org/officeDocument/2006/relationships">
+<p:sld xmlns:a="http://schemas.openxmlformats.org/drawingml/2006/main" xmlns:r="http://schemas.openxmlformats.org/officeDocument/2006/relationships" xmlns:p="http://schemas.openxmlformats.org/presentationml/2006/main">
   <p:cSld>
     <p:spTree>
       <p:nvGrpSpPr>
@@ -34961,7 +35375,14 @@
         <p:cNvGrpSpPr/>
         <p:nvPr/>
       </p:nvGrpSpPr>
-      <p:grpSpPr/>
+      <p:grpSpPr>
+        <a:xfrm>
+          <a:off x="0" y="0"/>
+          <a:ext cx="0" cy="0"/>
+          <a:chOff x="0" y="0"/>
+          <a:chExt cx="0" cy="0"/>
+        </a:xfrm>
+      </p:grpSpPr>
       <p:sp>
         <p:nvSpPr>
           <p:cNvPr id="2" name="Rectangle 1"/>
@@ -35003,6 +35424,7 @@
           <a:lstStyle/>
           <a:p>
             <a:pPr algn="ctr"/>
+            <a:endParaRPr/>
           </a:p>
         </p:txBody>
       </p:sp>
@@ -35047,6 +35469,7 @@
           <a:lstStyle/>
           <a:p>
             <a:pPr algn="ctr"/>
+            <a:endParaRPr/>
           </a:p>
         </p:txBody>
       </p:sp>
@@ -35067,7 +35490,7 @@
           <a:noFill/>
         </p:spPr>
         <p:txBody>
-          <a:bodyPr wrap="square" anchor="t" lIns="0" rIns="0" tIns="0" bIns="0">
+          <a:bodyPr wrap="square" lIns="0" tIns="0" rIns="0" bIns="0" anchor="t">
             <a:spAutoFit/>
           </a:bodyPr>
           <a:lstStyle/>
@@ -35112,7 +35535,7 @@
           <a:noFill/>
         </p:spPr>
         <p:txBody>
-          <a:bodyPr wrap="square" anchor="t" lIns="0" rIns="0" tIns="0" bIns="0">
+          <a:bodyPr wrap="square" lIns="0" tIns="0" rIns="0" bIns="0" anchor="t">
             <a:spAutoFit/>
           </a:bodyPr>
           <a:lstStyle/>
@@ -35209,6 +35632,7 @@
           <a:lstStyle/>
           <a:p>
             <a:pPr algn="ctr"/>
+            <a:endParaRPr/>
           </a:p>
         </p:txBody>
       </p:sp>
@@ -35229,7 +35653,7 @@
           <a:noFill/>
         </p:spPr>
         <p:txBody>
-          <a:bodyPr wrap="square" anchor="t" lIns="0" rIns="0" tIns="0" bIns="0">
+          <a:bodyPr wrap="square" lIns="0" tIns="0" rIns="0" bIns="0" anchor="t">
             <a:spAutoFit/>
           </a:bodyPr>
           <a:lstStyle/>
@@ -35274,7 +35698,7 @@
           <a:noFill/>
         </p:spPr>
         <p:txBody>
-          <a:bodyPr wrap="square" anchor="t" lIns="0" rIns="0" tIns="0" bIns="0">
+          <a:bodyPr wrap="square" lIns="0" tIns="0" rIns="0" bIns="0" anchor="t">
             <a:spAutoFit/>
           </a:bodyPr>
           <a:lstStyle/>
@@ -35407,7 +35831,7 @@
           <a:noFill/>
         </p:spPr>
         <p:txBody>
-          <a:bodyPr wrap="square" anchor="t" lIns="0" rIns="0" tIns="0" bIns="0">
+          <a:bodyPr wrap="square" lIns="0" tIns="0" rIns="0" bIns="0" anchor="t">
             <a:spAutoFit/>
           </a:bodyPr>
           <a:lstStyle/>
@@ -35452,7 +35876,7 @@
           <a:noFill/>
         </p:spPr>
         <p:txBody>
-          <a:bodyPr wrap="square" anchor="t" lIns="0" rIns="0" tIns="0" bIns="0">
+          <a:bodyPr wrap="square" lIns="0" tIns="0" rIns="0" bIns="0" anchor="t">
             <a:spAutoFit/>
           </a:bodyPr>
           <a:lstStyle/>
@@ -35489,7 +35913,7 @@
 </file>
 
 <file path=ppt/slides/slide8.xml><?xml version="1.0" encoding="utf-8"?>
-<p:sld xmlns:a="http://schemas.openxmlformats.org/drawingml/2006/main" xmlns:p="http://schemas.openxmlformats.org/presentationml/2006/main" xmlns:r="http://schemas.openxmlformats.org/officeDocument/2006/relationships">
+<p:sld xmlns:a="http://schemas.openxmlformats.org/drawingml/2006/main" xmlns:r="http://schemas.openxmlformats.org/officeDocument/2006/relationships" xmlns:p="http://schemas.openxmlformats.org/presentationml/2006/main">
   <p:cSld>
     <p:spTree>
       <p:nvGrpSpPr>
@@ -35497,7 +35921,14 @@
         <p:cNvGrpSpPr/>
         <p:nvPr/>
       </p:nvGrpSpPr>
-      <p:grpSpPr/>
+      <p:grpSpPr>
+        <a:xfrm>
+          <a:off x="0" y="0"/>
+          <a:ext cx="0" cy="0"/>
+          <a:chOff x="0" y="0"/>
+          <a:chExt cx="0" cy="0"/>
+        </a:xfrm>
+      </p:grpSpPr>
       <p:sp>
         <p:nvSpPr>
           <p:cNvPr id="2" name="Rectangle 1"/>
@@ -35539,6 +35970,7 @@
           <a:lstStyle/>
           <a:p>
             <a:pPr algn="ctr"/>
+            <a:endParaRPr/>
           </a:p>
         </p:txBody>
       </p:sp>
@@ -35583,6 +36015,7 @@
           <a:lstStyle/>
           <a:p>
             <a:pPr algn="ctr"/>
+            <a:endParaRPr/>
           </a:p>
         </p:txBody>
       </p:sp>
@@ -35603,7 +36036,7 @@
           <a:noFill/>
         </p:spPr>
         <p:txBody>
-          <a:bodyPr wrap="square" anchor="t" lIns="0" rIns="0" tIns="0" bIns="0">
+          <a:bodyPr wrap="square" lIns="0" tIns="0" rIns="0" bIns="0" anchor="t">
             <a:spAutoFit/>
           </a:bodyPr>
           <a:lstStyle/>
@@ -35648,7 +36081,7 @@
           <a:noFill/>
         </p:spPr>
         <p:txBody>
-          <a:bodyPr wrap="square" anchor="t" lIns="0" rIns="0" tIns="0" bIns="0">
+          <a:bodyPr wrap="square" lIns="0" tIns="0" rIns="0" bIns="0" anchor="t">
             <a:spAutoFit/>
           </a:bodyPr>
           <a:lstStyle/>
@@ -35721,6 +36154,7 @@
           <a:lstStyle/>
           <a:p>
             <a:pPr algn="ctr"/>
+            <a:endParaRPr/>
           </a:p>
         </p:txBody>
       </p:sp>
@@ -35765,6 +36199,7 @@
           <a:lstStyle/>
           <a:p>
             <a:pPr algn="ctr"/>
+            <a:endParaRPr/>
           </a:p>
         </p:txBody>
       </p:sp>
@@ -35785,7 +36220,7 @@
           <a:noFill/>
         </p:spPr>
         <p:txBody>
-          <a:bodyPr wrap="square" anchor="t" lIns="0" rIns="0" tIns="0" bIns="0">
+          <a:bodyPr wrap="square" lIns="0" tIns="0" rIns="0" bIns="0" anchor="t">
             <a:spAutoFit/>
           </a:bodyPr>
           <a:lstStyle/>
@@ -35830,7 +36265,7 @@
           <a:noFill/>
         </p:spPr>
         <p:txBody>
-          <a:bodyPr wrap="square" anchor="t" lIns="0" rIns="0" tIns="0" bIns="0">
+          <a:bodyPr wrap="square" lIns="0" tIns="0" rIns="0" bIns="0" anchor="t">
             <a:spAutoFit/>
           </a:bodyPr>
           <a:lstStyle/>
@@ -35912,6 +36347,25 @@
                 <a:spcPts val="400"/>
               </a:spcAft>
             </a:pPr>
+            <a:endParaRPr sz="1050" b="0">
+              <a:solidFill>
+                <a:srgbClr val="475569"/>
+              </a:solidFill>
+              <a:latin typeface="Segoe UI"/>
+            </a:endParaRPr>
+          </a:p>
+          <a:p>
+            <a:pPr algn="l">
+              <a:lnSpc>
+                <a:spcPct val="106000"/>
+              </a:lnSpc>
+              <a:spcBef>
+                <a:spcPts val="0"/>
+              </a:spcBef>
+              <a:spcAft>
+                <a:spcPts val="400"/>
+              </a:spcAft>
+            </a:pPr>
             <a:r>
               <a:rPr sz="1050" b="0">
                 <a:solidFill>
@@ -35919,7 +36373,7 @@
                 </a:solidFill>
                 <a:latin typeface="Segoe UI"/>
               </a:rPr>
-              <a:t/>
+              <a:t>Lý do: tại POS phải ĐÚNG TIỀN ·</a:t>
             </a:r>
           </a:p>
           <a:p>
@@ -35941,7 +36395,7 @@
                 </a:solidFill>
                 <a:latin typeface="Segoe UI"/>
               </a:rPr>
-              <a:t>Lý do: tại POS phải ĐÚNG TIỀN ·</a:t>
+              <a:t>ĐÚNG DANH TÍNH — không cho</a:t>
             </a:r>
           </a:p>
           <a:p>
@@ -35963,7 +36417,7 @@
                 </a:solidFill>
                 <a:latin typeface="Segoe UI"/>
               </a:rPr>
-              <a:t>ĐÚNG DANH TÍNH — không cho</a:t>
+              <a:t>trạng thái nửa vời.</a:t>
             </a:r>
           </a:p>
           <a:p>
@@ -35978,37 +36432,12 @@
                 <a:spcPts val="400"/>
               </a:spcAft>
             </a:pPr>
-            <a:r>
-              <a:rPr sz="1050" b="0">
-                <a:solidFill>
-                  <a:srgbClr val="475569"/>
-                </a:solidFill>
-                <a:latin typeface="Segoe UI"/>
-              </a:rPr>
-              <a:t>trạng thái nửa vời.</a:t>
-            </a:r>
-          </a:p>
-          <a:p>
-            <a:pPr algn="l">
-              <a:lnSpc>
-                <a:spcPct val="106000"/>
-              </a:lnSpc>
-              <a:spcBef>
-                <a:spcPts val="0"/>
-              </a:spcBef>
-              <a:spcAft>
-                <a:spcPts val="400"/>
-              </a:spcAft>
-            </a:pPr>
-            <a:r>
-              <a:rPr sz="1050" b="0">
-                <a:solidFill>
-                  <a:srgbClr val="475569"/>
-                </a:solidFill>
-                <a:latin typeface="Segoe UI"/>
-              </a:rPr>
-              <a:t/>
-            </a:r>
+            <a:endParaRPr sz="1050" b="0">
+              <a:solidFill>
+                <a:srgbClr val="475569"/>
+              </a:solidFill>
+              <a:latin typeface="Segoe UI"/>
+            </a:endParaRPr>
           </a:p>
           <a:p>
             <a:pPr algn="l">
@@ -36101,6 +36530,7 @@
           <a:lstStyle/>
           <a:p>
             <a:pPr algn="ctr"/>
+            <a:endParaRPr/>
           </a:p>
         </p:txBody>
       </p:sp>
@@ -36145,6 +36575,7 @@
           <a:lstStyle/>
           <a:p>
             <a:pPr algn="ctr"/>
+            <a:endParaRPr/>
           </a:p>
         </p:txBody>
       </p:sp>
@@ -36165,7 +36596,7 @@
           <a:noFill/>
         </p:spPr>
         <p:txBody>
-          <a:bodyPr wrap="square" anchor="t" lIns="0" rIns="0" tIns="0" bIns="0">
+          <a:bodyPr wrap="square" lIns="0" tIns="0" rIns="0" bIns="0" anchor="t">
             <a:spAutoFit/>
           </a:bodyPr>
           <a:lstStyle/>
@@ -36210,7 +36641,7 @@
           <a:noFill/>
         </p:spPr>
         <p:txBody>
-          <a:bodyPr wrap="square" anchor="t" lIns="0" rIns="0" tIns="0" bIns="0">
+          <a:bodyPr wrap="square" lIns="0" tIns="0" rIns="0" bIns="0" anchor="t">
             <a:spAutoFit/>
           </a:bodyPr>
           <a:lstStyle/>
@@ -36292,6 +36723,25 @@
                 <a:spcPts val="400"/>
               </a:spcAft>
             </a:pPr>
+            <a:endParaRPr sz="1050" b="0">
+              <a:solidFill>
+                <a:srgbClr val="475569"/>
+              </a:solidFill>
+              <a:latin typeface="Segoe UI"/>
+            </a:endParaRPr>
+          </a:p>
+          <a:p>
+            <a:pPr algn="l">
+              <a:lnSpc>
+                <a:spcPct val="106000"/>
+              </a:lnSpc>
+              <a:spcBef>
+                <a:spcPts val="0"/>
+              </a:spcBef>
+              <a:spcAft>
+                <a:spcPts val="400"/>
+              </a:spcAft>
+            </a:pPr>
             <a:r>
               <a:rPr sz="1050" b="0">
                 <a:solidFill>
@@ -36299,7 +36749,7 @@
                 </a:solidFill>
                 <a:latin typeface="Segoe UI"/>
               </a:rPr>
-              <a:t/>
+              <a:t>Warehouse micro-batch — projection</a:t>
             </a:r>
           </a:p>
           <a:p>
@@ -36321,7 +36771,7 @@
                 </a:solidFill>
                 <a:latin typeface="Segoe UI"/>
               </a:rPr>
-              <a:t>Warehouse micro-batch — projection</a:t>
+              <a:t>sang ClickHouse (OLAP) cho phân</a:t>
             </a:r>
           </a:p>
           <a:p>
@@ -36343,7 +36793,7 @@
                 </a:solidFill>
                 <a:latin typeface="Segoe UI"/>
               </a:rPr>
-              <a:t>sang ClickHouse (OLAP) cho phân</a:t>
+              <a:t>tích/feature; đối soát/replay được</a:t>
             </a:r>
           </a:p>
           <a:p>
@@ -36365,7 +36815,7 @@
                 </a:solidFill>
                 <a:latin typeface="Segoe UI"/>
               </a:rPr>
-              <a:t>tích/feature; đối soát/replay được</a:t>
+              <a:t>vì PG là nguồn sự thật.</a:t>
             </a:r>
           </a:p>
           <a:p>
@@ -36380,37 +36830,12 @@
                 <a:spcPts val="400"/>
               </a:spcAft>
             </a:pPr>
-            <a:r>
-              <a:rPr sz="1050" b="0">
-                <a:solidFill>
-                  <a:srgbClr val="475569"/>
-                </a:solidFill>
-                <a:latin typeface="Segoe UI"/>
-              </a:rPr>
-              <a:t>vì PG là nguồn sự thật.</a:t>
-            </a:r>
-          </a:p>
-          <a:p>
-            <a:pPr algn="l">
-              <a:lnSpc>
-                <a:spcPct val="106000"/>
-              </a:lnSpc>
-              <a:spcBef>
-                <a:spcPts val="0"/>
-              </a:spcBef>
-              <a:spcAft>
-                <a:spcPts val="400"/>
-              </a:spcAft>
-            </a:pPr>
-            <a:r>
-              <a:rPr sz="1050" b="0">
-                <a:solidFill>
-                  <a:srgbClr val="475569"/>
-                </a:solidFill>
-                <a:latin typeface="Segoe UI"/>
-              </a:rPr>
-              <a:t/>
-            </a:r>
+            <a:endParaRPr sz="1050" b="0">
+              <a:solidFill>
+                <a:srgbClr val="475569"/>
+              </a:solidFill>
+              <a:latin typeface="Segoe UI"/>
+            </a:endParaRPr>
           </a:p>
           <a:p>
             <a:pPr algn="l">
@@ -36481,6 +36906,7 @@
           <a:lstStyle/>
           <a:p>
             <a:pPr algn="ctr"/>
+            <a:endParaRPr/>
           </a:p>
         </p:txBody>
       </p:sp>
@@ -36525,6 +36951,7 @@
           <a:lstStyle/>
           <a:p>
             <a:pPr algn="ctr"/>
+            <a:endParaRPr/>
           </a:p>
         </p:txBody>
       </p:sp>
@@ -36545,7 +36972,7 @@
           <a:noFill/>
         </p:spPr>
         <p:txBody>
-          <a:bodyPr wrap="square" anchor="t" lIns="0" rIns="0" tIns="0" bIns="0">
+          <a:bodyPr wrap="square" lIns="0" tIns="0" rIns="0" bIns="0" anchor="t">
             <a:spAutoFit/>
           </a:bodyPr>
           <a:lstStyle/>
@@ -36590,7 +37017,7 @@
           <a:noFill/>
         </p:spPr>
         <p:txBody>
-          <a:bodyPr wrap="square" anchor="t" lIns="0" rIns="0" tIns="0" bIns="0">
+          <a:bodyPr wrap="square" lIns="0" tIns="0" rIns="0" bIns="0" anchor="t">
             <a:spAutoFit/>
           </a:bodyPr>
           <a:lstStyle/>
@@ -36650,6 +37077,25 @@
                 <a:spcPts val="400"/>
               </a:spcAft>
             </a:pPr>
+            <a:endParaRPr sz="1050" b="0">
+              <a:solidFill>
+                <a:srgbClr val="475569"/>
+              </a:solidFill>
+              <a:latin typeface="Segoe UI"/>
+            </a:endParaRPr>
+          </a:p>
+          <a:p>
+            <a:pPr algn="l">
+              <a:lnSpc>
+                <a:spcPct val="106000"/>
+              </a:lnSpc>
+              <a:spcBef>
+                <a:spcPts val="0"/>
+              </a:spcBef>
+              <a:spcAft>
+                <a:spcPts val="400"/>
+              </a:spcAft>
+            </a:pPr>
             <a:r>
               <a:rPr sz="1050" b="0">
                 <a:solidFill>
@@ -36657,7 +37103,7 @@
                 </a:solidFill>
                 <a:latin typeface="Segoe UI"/>
               </a:rPr>
-              <a:t/>
+              <a:t>Backfill được (PG = SoR).</a:t>
             </a:r>
           </a:p>
           <a:p>
@@ -36672,6 +37118,25 @@
                 <a:spcPts val="400"/>
               </a:spcAft>
             </a:pPr>
+            <a:endParaRPr sz="1050" b="0">
+              <a:solidFill>
+                <a:srgbClr val="475569"/>
+              </a:solidFill>
+              <a:latin typeface="Segoe UI"/>
+            </a:endParaRPr>
+          </a:p>
+          <a:p>
+            <a:pPr algn="l">
+              <a:lnSpc>
+                <a:spcPct val="106000"/>
+              </a:lnSpc>
+              <a:spcBef>
+                <a:spcPts val="0"/>
+              </a:spcBef>
+              <a:spcAft>
+                <a:spcPts val="400"/>
+              </a:spcAft>
+            </a:pPr>
             <a:r>
               <a:rPr sz="1050" b="0">
                 <a:solidFill>
@@ -36679,7 +37144,7 @@
                 </a:solidFill>
                 <a:latin typeface="Segoe UI"/>
               </a:rPr>
-              <a:t>Backfill được (PG = SoR).</a:t>
+              <a:t>Modular monolith GĐ1 → tách</a:t>
             </a:r>
           </a:p>
           <a:p>
@@ -36701,7 +37166,7 @@
                 </a:solidFill>
                 <a:latin typeface="Segoe UI"/>
               </a:rPr>
-              <a:t/>
+              <a:t>microservice khi cần scale thật.</a:t>
             </a:r>
           </a:p>
           <a:p>
@@ -36716,59 +37181,12 @@
                 <a:spcPts val="400"/>
               </a:spcAft>
             </a:pPr>
-            <a:r>
-              <a:rPr sz="1050" b="0">
-                <a:solidFill>
-                  <a:srgbClr val="475569"/>
-                </a:solidFill>
-                <a:latin typeface="Segoe UI"/>
-              </a:rPr>
-              <a:t>Modular monolith GĐ1 → tách</a:t>
-            </a:r>
-          </a:p>
-          <a:p>
-            <a:pPr algn="l">
-              <a:lnSpc>
-                <a:spcPct val="106000"/>
-              </a:lnSpc>
-              <a:spcBef>
-                <a:spcPts val="0"/>
-              </a:spcBef>
-              <a:spcAft>
-                <a:spcPts val="400"/>
-              </a:spcAft>
-            </a:pPr>
-            <a:r>
-              <a:rPr sz="1050" b="0">
-                <a:solidFill>
-                  <a:srgbClr val="475569"/>
-                </a:solidFill>
-                <a:latin typeface="Segoe UI"/>
-              </a:rPr>
-              <a:t>microservice khi cần scale thật.</a:t>
-            </a:r>
-          </a:p>
-          <a:p>
-            <a:pPr algn="l">
-              <a:lnSpc>
-                <a:spcPct val="106000"/>
-              </a:lnSpc>
-              <a:spcBef>
-                <a:spcPts val="0"/>
-              </a:spcBef>
-              <a:spcAft>
-                <a:spcPts val="400"/>
-              </a:spcAft>
-            </a:pPr>
-            <a:r>
-              <a:rPr sz="1050" b="0">
-                <a:solidFill>
-                  <a:srgbClr val="475569"/>
-                </a:solidFill>
-                <a:latin typeface="Segoe UI"/>
-              </a:rPr>
-              <a:t/>
-            </a:r>
+            <a:endParaRPr sz="1050" b="0">
+              <a:solidFill>
+                <a:srgbClr val="475569"/>
+              </a:solidFill>
+              <a:latin typeface="Segoe UI"/>
+            </a:endParaRPr>
           </a:p>
           <a:p>
             <a:pPr algn="l">
@@ -36833,7 +37251,7 @@
           <a:noFill/>
         </p:spPr>
         <p:txBody>
-          <a:bodyPr wrap="square" anchor="t" lIns="0" rIns="0" tIns="0" bIns="0">
+          <a:bodyPr wrap="square" lIns="0" tIns="0" rIns="0" bIns="0" anchor="t">
             <a:spAutoFit/>
           </a:bodyPr>
           <a:lstStyle/>
@@ -36878,7 +37296,7 @@
           <a:noFill/>
         </p:spPr>
         <p:txBody>
-          <a:bodyPr wrap="square" anchor="t" lIns="0" rIns="0" tIns="0" bIns="0">
+          <a:bodyPr wrap="square" lIns="0" tIns="0" rIns="0" bIns="0" anchor="t">
             <a:spAutoFit/>
           </a:bodyPr>
           <a:lstStyle/>
@@ -36915,7 +37333,7 @@
 </file>
 
 <file path=ppt/slides/slide9.xml><?xml version="1.0" encoding="utf-8"?>
-<p:sld xmlns:a="http://schemas.openxmlformats.org/drawingml/2006/main" xmlns:p="http://schemas.openxmlformats.org/presentationml/2006/main" xmlns:r="http://schemas.openxmlformats.org/officeDocument/2006/relationships">
+<p:sld xmlns:a="http://schemas.openxmlformats.org/drawingml/2006/main" xmlns:r="http://schemas.openxmlformats.org/officeDocument/2006/relationships" xmlns:p="http://schemas.openxmlformats.org/presentationml/2006/main">
   <p:cSld>
     <p:spTree>
       <p:nvGrpSpPr>
@@ -36923,7 +37341,14 @@
         <p:cNvGrpSpPr/>
         <p:nvPr/>
       </p:nvGrpSpPr>
-      <p:grpSpPr/>
+      <p:grpSpPr>
+        <a:xfrm>
+          <a:off x="0" y="0"/>
+          <a:ext cx="0" cy="0"/>
+          <a:chOff x="0" y="0"/>
+          <a:chExt cx="0" cy="0"/>
+        </a:xfrm>
+      </p:grpSpPr>
       <p:sp>
         <p:nvSpPr>
           <p:cNvPr id="2" name="Rectangle 1"/>
@@ -36965,6 +37390,7 @@
           <a:lstStyle/>
           <a:p>
             <a:pPr algn="ctr"/>
+            <a:endParaRPr/>
           </a:p>
         </p:txBody>
       </p:sp>
@@ -37009,6 +37435,7 @@
           <a:lstStyle/>
           <a:p>
             <a:pPr algn="ctr"/>
+            <a:endParaRPr/>
           </a:p>
         </p:txBody>
       </p:sp>
@@ -37029,7 +37456,7 @@
           <a:noFill/>
         </p:spPr>
         <p:txBody>
-          <a:bodyPr wrap="square" anchor="t" lIns="0" rIns="0" tIns="0" bIns="0">
+          <a:bodyPr wrap="square" lIns="0" tIns="0" rIns="0" bIns="0" anchor="t">
             <a:spAutoFit/>
           </a:bodyPr>
           <a:lstStyle/>
@@ -37074,7 +37501,7 @@
           <a:noFill/>
         </p:spPr>
         <p:txBody>
-          <a:bodyPr wrap="square" anchor="t" lIns="0" rIns="0" tIns="0" bIns="0">
+          <a:bodyPr wrap="square" lIns="0" tIns="0" rIns="0" bIns="0" anchor="t">
             <a:spAutoFit/>
           </a:bodyPr>
           <a:lstStyle/>
@@ -37147,6 +37574,7 @@
           <a:lstStyle/>
           <a:p>
             <a:pPr algn="ctr"/>
+            <a:endParaRPr/>
           </a:p>
         </p:txBody>
       </p:sp>
@@ -37191,6 +37619,7 @@
           <a:lstStyle/>
           <a:p>
             <a:pPr algn="ctr"/>
+            <a:endParaRPr/>
           </a:p>
         </p:txBody>
       </p:sp>
@@ -37211,7 +37640,7 @@
           <a:noFill/>
         </p:spPr>
         <p:txBody>
-          <a:bodyPr wrap="square" anchor="t" lIns="0" rIns="0" tIns="0" bIns="0">
+          <a:bodyPr wrap="square" lIns="0" tIns="0" rIns="0" bIns="0" anchor="t">
             <a:spAutoFit/>
           </a:bodyPr>
           <a:lstStyle/>
@@ -37256,7 +37685,7 @@
           <a:noFill/>
         </p:spPr>
         <p:txBody>
-          <a:bodyPr wrap="square" anchor="t" lIns="0" rIns="0" tIns="0" bIns="0">
+          <a:bodyPr wrap="square" lIns="0" tIns="0" rIns="0" bIns="0" anchor="t">
             <a:spAutoFit/>
           </a:bodyPr>
           <a:lstStyle/>
@@ -37301,7 +37730,7 @@
           <a:noFill/>
         </p:spPr>
         <p:txBody>
-          <a:bodyPr wrap="square" anchor="t" lIns="0" rIns="0" tIns="0" bIns="0">
+          <a:bodyPr wrap="square" lIns="0" tIns="0" rIns="0" bIns="0" anchor="t">
             <a:spAutoFit/>
           </a:bodyPr>
           <a:lstStyle/>
@@ -37374,6 +37803,7 @@
           <a:lstStyle/>
           <a:p>
             <a:pPr algn="ctr"/>
+            <a:endParaRPr/>
           </a:p>
         </p:txBody>
       </p:sp>
@@ -37418,6 +37848,7 @@
           <a:lstStyle/>
           <a:p>
             <a:pPr algn="ctr"/>
+            <a:endParaRPr/>
           </a:p>
         </p:txBody>
       </p:sp>
@@ -37438,7 +37869,7 @@
           <a:noFill/>
         </p:spPr>
         <p:txBody>
-          <a:bodyPr wrap="square" anchor="t" lIns="0" rIns="0" tIns="0" bIns="0">
+          <a:bodyPr wrap="square" lIns="0" tIns="0" rIns="0" bIns="0" anchor="t">
             <a:spAutoFit/>
           </a:bodyPr>
           <a:lstStyle/>
@@ -37483,7 +37914,7 @@
           <a:noFill/>
         </p:spPr>
         <p:txBody>
-          <a:bodyPr wrap="square" anchor="t" lIns="0" rIns="0" tIns="0" bIns="0">
+          <a:bodyPr wrap="square" lIns="0" tIns="0" rIns="0" bIns="0" anchor="t">
             <a:spAutoFit/>
           </a:bodyPr>
           <a:lstStyle/>
@@ -37528,7 +37959,7 @@
           <a:noFill/>
         </p:spPr>
         <p:txBody>
-          <a:bodyPr wrap="square" anchor="t" lIns="0" rIns="0" tIns="0" bIns="0">
+          <a:bodyPr wrap="square" lIns="0" tIns="0" rIns="0" bIns="0" anchor="t">
             <a:spAutoFit/>
           </a:bodyPr>
           <a:lstStyle/>
@@ -37601,6 +38032,7 @@
           <a:lstStyle/>
           <a:p>
             <a:pPr algn="ctr"/>
+            <a:endParaRPr/>
           </a:p>
         </p:txBody>
       </p:sp>
@@ -37645,6 +38077,7 @@
           <a:lstStyle/>
           <a:p>
             <a:pPr algn="ctr"/>
+            <a:endParaRPr/>
           </a:p>
         </p:txBody>
       </p:sp>
@@ -37665,7 +38098,7 @@
           <a:noFill/>
         </p:spPr>
         <p:txBody>
-          <a:bodyPr wrap="square" anchor="t" lIns="0" rIns="0" tIns="0" bIns="0">
+          <a:bodyPr wrap="square" lIns="0" tIns="0" rIns="0" bIns="0" anchor="t">
             <a:spAutoFit/>
           </a:bodyPr>
           <a:lstStyle/>
@@ -37710,7 +38143,7 @@
           <a:noFill/>
         </p:spPr>
         <p:txBody>
-          <a:bodyPr wrap="square" anchor="t" lIns="0" rIns="0" tIns="0" bIns="0">
+          <a:bodyPr wrap="square" lIns="0" tIns="0" rIns="0" bIns="0" anchor="t">
             <a:spAutoFit/>
           </a:bodyPr>
           <a:lstStyle/>
@@ -37755,7 +38188,7 @@
           <a:noFill/>
         </p:spPr>
         <p:txBody>
-          <a:bodyPr wrap="square" anchor="t" lIns="0" rIns="0" tIns="0" bIns="0">
+          <a:bodyPr wrap="square" lIns="0" tIns="0" rIns="0" bIns="0" anchor="t">
             <a:spAutoFit/>
           </a:bodyPr>
           <a:lstStyle/>
@@ -37828,6 +38261,7 @@
           <a:lstStyle/>
           <a:p>
             <a:pPr algn="ctr"/>
+            <a:endParaRPr/>
           </a:p>
         </p:txBody>
       </p:sp>
@@ -37872,6 +38306,7 @@
           <a:lstStyle/>
           <a:p>
             <a:pPr algn="ctr"/>
+            <a:endParaRPr/>
           </a:p>
         </p:txBody>
       </p:sp>
@@ -37892,7 +38327,7 @@
           <a:noFill/>
         </p:spPr>
         <p:txBody>
-          <a:bodyPr wrap="square" anchor="t" lIns="0" rIns="0" tIns="0" bIns="0">
+          <a:bodyPr wrap="square" lIns="0" tIns="0" rIns="0" bIns="0" anchor="t">
             <a:spAutoFit/>
           </a:bodyPr>
           <a:lstStyle/>
@@ -37937,7 +38372,7 @@
           <a:noFill/>
         </p:spPr>
         <p:txBody>
-          <a:bodyPr wrap="square" anchor="t" lIns="0" rIns="0" tIns="0" bIns="0">
+          <a:bodyPr wrap="square" lIns="0" tIns="0" rIns="0" bIns="0" anchor="t">
             <a:spAutoFit/>
           </a:bodyPr>
           <a:lstStyle/>
@@ -38010,6 +38445,7 @@
           <a:lstStyle/>
           <a:p>
             <a:pPr algn="ctr"/>
+            <a:endParaRPr/>
           </a:p>
         </p:txBody>
       </p:sp>
@@ -38054,6 +38490,7 @@
           <a:lstStyle/>
           <a:p>
             <a:pPr algn="ctr"/>
+            <a:endParaRPr/>
           </a:p>
         </p:txBody>
       </p:sp>
@@ -38074,7 +38511,7 @@
           <a:noFill/>
         </p:spPr>
         <p:txBody>
-          <a:bodyPr wrap="square" anchor="t" lIns="0" rIns="0" tIns="0" bIns="0">
+          <a:bodyPr wrap="square" lIns="0" tIns="0" rIns="0" bIns="0" anchor="t">
             <a:spAutoFit/>
           </a:bodyPr>
           <a:lstStyle/>
@@ -38119,7 +38556,7 @@
           <a:noFill/>
         </p:spPr>
         <p:txBody>
-          <a:bodyPr wrap="square" anchor="t" lIns="0" rIns="0" tIns="0" bIns="0">
+          <a:bodyPr wrap="square" lIns="0" tIns="0" rIns="0" bIns="0" anchor="t">
             <a:spAutoFit/>
           </a:bodyPr>
           <a:lstStyle/>
@@ -38164,7 +38601,7 @@
           <a:noFill/>
         </p:spPr>
         <p:txBody>
-          <a:bodyPr wrap="square" anchor="t" lIns="0" rIns="0" tIns="0" bIns="0">
+          <a:bodyPr wrap="square" lIns="0" tIns="0" rIns="0" bIns="0" anchor="t">
             <a:spAutoFit/>
           </a:bodyPr>
           <a:lstStyle/>
@@ -38237,6 +38674,7 @@
           <a:lstStyle/>
           <a:p>
             <a:pPr algn="ctr"/>
+            <a:endParaRPr/>
           </a:p>
         </p:txBody>
       </p:sp>
@@ -38281,6 +38719,7 @@
           <a:lstStyle/>
           <a:p>
             <a:pPr algn="ctr"/>
+            <a:endParaRPr/>
           </a:p>
         </p:txBody>
       </p:sp>
@@ -38301,7 +38740,7 @@
           <a:noFill/>
         </p:spPr>
         <p:txBody>
-          <a:bodyPr wrap="square" anchor="t" lIns="0" rIns="0" tIns="0" bIns="0">
+          <a:bodyPr wrap="square" lIns="0" tIns="0" rIns="0" bIns="0" anchor="t">
             <a:spAutoFit/>
           </a:bodyPr>
           <a:lstStyle/>
@@ -38346,7 +38785,7 @@
           <a:noFill/>
         </p:spPr>
         <p:txBody>
-          <a:bodyPr wrap="square" anchor="t" lIns="0" rIns="0" tIns="0" bIns="0">
+          <a:bodyPr wrap="square" lIns="0" tIns="0" rIns="0" bIns="0" anchor="t">
             <a:spAutoFit/>
           </a:bodyPr>
           <a:lstStyle/>
@@ -38391,7 +38830,7 @@
           <a:noFill/>
         </p:spPr>
         <p:txBody>
-          <a:bodyPr wrap="square" anchor="t" lIns="0" rIns="0" tIns="0" bIns="0">
+          <a:bodyPr wrap="square" lIns="0" tIns="0" rIns="0" bIns="0" anchor="t">
             <a:spAutoFit/>
           </a:bodyPr>
           <a:lstStyle/>
@@ -38464,6 +38903,7 @@
           <a:lstStyle/>
           <a:p>
             <a:pPr algn="ctr"/>
+            <a:endParaRPr/>
           </a:p>
         </p:txBody>
       </p:sp>
@@ -38508,6 +38948,7 @@
           <a:lstStyle/>
           <a:p>
             <a:pPr algn="ctr"/>
+            <a:endParaRPr/>
           </a:p>
         </p:txBody>
       </p:sp>
@@ -38528,7 +38969,7 @@
           <a:noFill/>
         </p:spPr>
         <p:txBody>
-          <a:bodyPr wrap="square" anchor="t" lIns="0" rIns="0" tIns="0" bIns="0">
+          <a:bodyPr wrap="square" lIns="0" tIns="0" rIns="0" bIns="0" anchor="t">
             <a:spAutoFit/>
           </a:bodyPr>
           <a:lstStyle/>
@@ -38573,7 +39014,7 @@
           <a:noFill/>
         </p:spPr>
         <p:txBody>
-          <a:bodyPr wrap="square" anchor="t" lIns="0" rIns="0" tIns="0" bIns="0">
+          <a:bodyPr wrap="square" lIns="0" tIns="0" rIns="0" bIns="0" anchor="t">
             <a:spAutoFit/>
           </a:bodyPr>
           <a:lstStyle/>
@@ -38618,7 +39059,7 @@
           <a:noFill/>
         </p:spPr>
         <p:txBody>
-          <a:bodyPr wrap="square" anchor="t" lIns="0" rIns="0" tIns="0" bIns="0">
+          <a:bodyPr wrap="square" lIns="0" tIns="0" rIns="0" bIns="0" anchor="t">
             <a:spAutoFit/>
           </a:bodyPr>
           <a:lstStyle/>
@@ -38663,7 +39104,7 @@
           <a:noFill/>
         </p:spPr>
         <p:txBody>
-          <a:bodyPr wrap="square" anchor="t" lIns="0" rIns="0" tIns="0" bIns="0">
+          <a:bodyPr wrap="square" lIns="0" tIns="0" rIns="0" bIns="0" anchor="t">
             <a:spAutoFit/>
           </a:bodyPr>
           <a:lstStyle/>
@@ -38708,7 +39149,7 @@
           <a:noFill/>
         </p:spPr>
         <p:txBody>
-          <a:bodyPr wrap="square" anchor="t" lIns="0" rIns="0" tIns="0" bIns="0">
+          <a:bodyPr wrap="square" lIns="0" tIns="0" rIns="0" bIns="0" anchor="t">
             <a:spAutoFit/>
           </a:bodyPr>
           <a:lstStyle/>
